--- a/02-Parcial/02-Parcial-Apresentacao.pptx
+++ b/02-Parcial/02-Parcial-Apresentacao.pptx
@@ -6,29 +6,30 @@
     <p:sldMasterId id="2147483702" r:id="rId2"/>
   </p:sldMasterIdLst>
   <p:notesMasterIdLst>
-    <p:notesMasterId r:id="rId23"/>
+    <p:notesMasterId r:id="rId24"/>
   </p:notesMasterIdLst>
   <p:sldIdLst>
     <p:sldId id="256" r:id="rId3"/>
     <p:sldId id="257" r:id="rId4"/>
-    <p:sldId id="276" r:id="rId5"/>
-    <p:sldId id="264" r:id="rId6"/>
-    <p:sldId id="267" r:id="rId7"/>
-    <p:sldId id="270" r:id="rId8"/>
-    <p:sldId id="268" r:id="rId9"/>
-    <p:sldId id="259" r:id="rId10"/>
-    <p:sldId id="271" r:id="rId11"/>
-    <p:sldId id="272" r:id="rId12"/>
-    <p:sldId id="273" r:id="rId13"/>
-    <p:sldId id="265" r:id="rId14"/>
-    <p:sldId id="258" r:id="rId15"/>
-    <p:sldId id="260" r:id="rId16"/>
-    <p:sldId id="262" r:id="rId17"/>
-    <p:sldId id="275" r:id="rId18"/>
-    <p:sldId id="261" r:id="rId19"/>
-    <p:sldId id="263" r:id="rId20"/>
-    <p:sldId id="266" r:id="rId21"/>
-    <p:sldId id="274" r:id="rId22"/>
+    <p:sldId id="264" r:id="rId5"/>
+    <p:sldId id="277" r:id="rId6"/>
+    <p:sldId id="278" r:id="rId7"/>
+    <p:sldId id="273" r:id="rId8"/>
+    <p:sldId id="280" r:id="rId9"/>
+    <p:sldId id="281" r:id="rId10"/>
+    <p:sldId id="282" r:id="rId11"/>
+    <p:sldId id="283" r:id="rId12"/>
+    <p:sldId id="265" r:id="rId13"/>
+    <p:sldId id="276" r:id="rId14"/>
+    <p:sldId id="279" r:id="rId15"/>
+    <p:sldId id="258" r:id="rId16"/>
+    <p:sldId id="260" r:id="rId17"/>
+    <p:sldId id="262" r:id="rId18"/>
+    <p:sldId id="275" r:id="rId19"/>
+    <p:sldId id="261" r:id="rId20"/>
+    <p:sldId id="263" r:id="rId21"/>
+    <p:sldId id="266" r:id="rId22"/>
+    <p:sldId id="274" r:id="rId23"/>
   </p:sldIdLst>
   <p:sldSz cx="12192000" cy="6858000"/>
   <p:notesSz cx="6858000" cy="9144000"/>
@@ -138,7 +139,7 @@
 <file path=ppt/revisionInfo.xml><?xml version="1.0" encoding="utf-8"?>
 <p1510:revInfo xmlns:a="http://schemas.openxmlformats.org/drawingml/2006/main" xmlns:r="http://schemas.openxmlformats.org/officeDocument/2006/relationships" xmlns:p1510="http://schemas.microsoft.com/office/powerpoint/2015/10/main">
   <p1510:revLst>
-    <p1510:client id="{9DA59AF8-04B2-48DB-8084-3B24E39CA914}" v="8" dt="2025-09-30T20:04:37.508"/>
+    <p1510:client id="{9DA59AF8-04B2-48DB-8084-3B24E39CA914}" v="35" dt="2025-10-01T22:15:15.664"/>
   </p1510:revLst>
 </p1510:revInfo>
 </file>
@@ -147,8 +148,8 @@
 <pc:chgInfo xmlns:a="http://schemas.openxmlformats.org/drawingml/2006/main" xmlns:r="http://schemas.openxmlformats.org/officeDocument/2006/relationships" xmlns:ac="http://schemas.microsoft.com/office/drawing/2013/main/command" xmlns:pc="http://schemas.microsoft.com/office/powerpoint/2013/main/command">
   <pc:docChgLst>
     <pc:chgData name="João Luiz Grave Gross" userId="70663aa8-58a3-482c-a5ab-33e75f2c9147" providerId="ADAL" clId="{1642D5D4-6F90-4729-B6C8-CF446D4D64F7}"/>
-    <pc:docChg chg="undo redo custSel addSld delSld modSld">
-      <pc:chgData name="João Luiz Grave Gross" userId="70663aa8-58a3-482c-a5ab-33e75f2c9147" providerId="ADAL" clId="{1642D5D4-6F90-4729-B6C8-CF446D4D64F7}" dt="2025-09-30T20:04:37.573" v="655" actId="27636"/>
+    <pc:docChg chg="undo redo custSel addSld delSld modSld sldOrd">
+      <pc:chgData name="João Luiz Grave Gross" userId="70663aa8-58a3-482c-a5ab-33e75f2c9147" providerId="ADAL" clId="{1642D5D4-6F90-4729-B6C8-CF446D4D64F7}" dt="2025-10-01T22:17:03.381" v="2494" actId="1076"/>
       <pc:docMkLst>
         <pc:docMk/>
       </pc:docMkLst>
@@ -176,13 +177,13 @@
         </pc:spChg>
       </pc:sldChg>
       <pc:sldChg chg="modSp mod">
-        <pc:chgData name="João Luiz Grave Gross" userId="70663aa8-58a3-482c-a5ab-33e75f2c9147" providerId="ADAL" clId="{1642D5D4-6F90-4729-B6C8-CF446D4D64F7}" dt="2025-09-30T19:52:53.736" v="27" actId="27636"/>
+        <pc:chgData name="João Luiz Grave Gross" userId="70663aa8-58a3-482c-a5ab-33e75f2c9147" providerId="ADAL" clId="{1642D5D4-6F90-4729-B6C8-CF446D4D64F7}" dt="2025-10-01T21:56:35.594" v="2307"/>
         <pc:sldMkLst>
           <pc:docMk/>
           <pc:sldMk cId="1631264518" sldId="257"/>
         </pc:sldMkLst>
         <pc:spChg chg="mod">
-          <ac:chgData name="João Luiz Grave Gross" userId="70663aa8-58a3-482c-a5ab-33e75f2c9147" providerId="ADAL" clId="{1642D5D4-6F90-4729-B6C8-CF446D4D64F7}" dt="2025-09-30T19:52:53.736" v="27" actId="27636"/>
+          <ac:chgData name="João Luiz Grave Gross" userId="70663aa8-58a3-482c-a5ab-33e75f2c9147" providerId="ADAL" clId="{1642D5D4-6F90-4729-B6C8-CF446D4D64F7}" dt="2025-10-01T21:56:35.594" v="2307"/>
           <ac:spMkLst>
             <pc:docMk/>
             <pc:sldMk cId="1631264518" sldId="257"/>
@@ -190,14 +191,21 @@
           </ac:spMkLst>
         </pc:spChg>
       </pc:sldChg>
+      <pc:sldChg chg="del">
+        <pc:chgData name="João Luiz Grave Gross" userId="70663aa8-58a3-482c-a5ab-33e75f2c9147" providerId="ADAL" clId="{1642D5D4-6F90-4729-B6C8-CF446D4D64F7}" dt="2025-10-01T21:03:51.277" v="661" actId="47"/>
+        <pc:sldMkLst>
+          <pc:docMk/>
+          <pc:sldMk cId="794135920" sldId="259"/>
+        </pc:sldMkLst>
+      </pc:sldChg>
       <pc:sldChg chg="modSp mod">
-        <pc:chgData name="João Luiz Grave Gross" userId="70663aa8-58a3-482c-a5ab-33e75f2c9147" providerId="ADAL" clId="{1642D5D4-6F90-4729-B6C8-CF446D4D64F7}" dt="2025-09-30T19:55:10.986" v="247" actId="20577"/>
+        <pc:chgData name="João Luiz Grave Gross" userId="70663aa8-58a3-482c-a5ab-33e75f2c9147" providerId="ADAL" clId="{1642D5D4-6F90-4729-B6C8-CF446D4D64F7}" dt="2025-10-01T21:34:30.764" v="1748" actId="20577"/>
         <pc:sldMkLst>
           <pc:docMk/>
           <pc:sldMk cId="143472058" sldId="264"/>
         </pc:sldMkLst>
         <pc:spChg chg="mod">
-          <ac:chgData name="João Luiz Grave Gross" userId="70663aa8-58a3-482c-a5ab-33e75f2c9147" providerId="ADAL" clId="{1642D5D4-6F90-4729-B6C8-CF446D4D64F7}" dt="2025-09-30T19:52:51.099" v="25" actId="20577"/>
+          <ac:chgData name="João Luiz Grave Gross" userId="70663aa8-58a3-482c-a5ab-33e75f2c9147" providerId="ADAL" clId="{1642D5D4-6F90-4729-B6C8-CF446D4D64F7}" dt="2025-10-01T21:34:30.764" v="1748" actId="20577"/>
           <ac:spMkLst>
             <pc:docMk/>
             <pc:sldMk cId="143472058" sldId="264"/>
@@ -205,13 +213,90 @@
           </ac:spMkLst>
         </pc:spChg>
         <pc:spChg chg="mod">
-          <ac:chgData name="João Luiz Grave Gross" userId="70663aa8-58a3-482c-a5ab-33e75f2c9147" providerId="ADAL" clId="{1642D5D4-6F90-4729-B6C8-CF446D4D64F7}" dt="2025-09-30T19:55:10.986" v="247" actId="20577"/>
+          <ac:chgData name="João Luiz Grave Gross" userId="70663aa8-58a3-482c-a5ab-33e75f2c9147" providerId="ADAL" clId="{1642D5D4-6F90-4729-B6C8-CF446D4D64F7}" dt="2025-10-01T21:20:15.620" v="1067" actId="20577"/>
           <ac:spMkLst>
             <pc:docMk/>
             <pc:sldMk cId="143472058" sldId="264"/>
             <ac:spMk id="3" creationId="{94CD2035-EA59-8728-BCDC-6A3D0DF517B3}"/>
           </ac:spMkLst>
         </pc:spChg>
+      </pc:sldChg>
+      <pc:sldChg chg="addSp delSp modSp mod ord">
+        <pc:chgData name="João Luiz Grave Gross" userId="70663aa8-58a3-482c-a5ab-33e75f2c9147" providerId="ADAL" clId="{1642D5D4-6F90-4729-B6C8-CF446D4D64F7}" dt="2025-10-01T22:17:03.381" v="2494" actId="1076"/>
+        <pc:sldMkLst>
+          <pc:docMk/>
+          <pc:sldMk cId="203766769" sldId="265"/>
+        </pc:sldMkLst>
+        <pc:spChg chg="mod">
+          <ac:chgData name="João Luiz Grave Gross" userId="70663aa8-58a3-482c-a5ab-33e75f2c9147" providerId="ADAL" clId="{1642D5D4-6F90-4729-B6C8-CF446D4D64F7}" dt="2025-10-01T21:57:48.687" v="2362" actId="20577"/>
+          <ac:spMkLst>
+            <pc:docMk/>
+            <pc:sldMk cId="203766769" sldId="265"/>
+            <ac:spMk id="2" creationId="{EE9BC3AE-C10A-E0B8-883E-2DDAEFE7CE83}"/>
+          </ac:spMkLst>
+        </pc:spChg>
+        <pc:spChg chg="add mod">
+          <ac:chgData name="João Luiz Grave Gross" userId="70663aa8-58a3-482c-a5ab-33e75f2c9147" providerId="ADAL" clId="{1642D5D4-6F90-4729-B6C8-CF446D4D64F7}" dt="2025-10-01T22:15:06.181" v="2487" actId="20577"/>
+          <ac:spMkLst>
+            <pc:docMk/>
+            <pc:sldMk cId="203766769" sldId="265"/>
+            <ac:spMk id="3" creationId="{7937894A-A613-F031-1DE3-835300EFC7E3}"/>
+          </ac:spMkLst>
+        </pc:spChg>
+        <pc:spChg chg="add del mod">
+          <ac:chgData name="João Luiz Grave Gross" userId="70663aa8-58a3-482c-a5ab-33e75f2c9147" providerId="ADAL" clId="{1642D5D4-6F90-4729-B6C8-CF446D4D64F7}" dt="2025-10-01T22:15:16.072" v="2490"/>
+          <ac:spMkLst>
+            <pc:docMk/>
+            <pc:sldMk cId="203766769" sldId="265"/>
+            <ac:spMk id="4" creationId="{12BEECD1-B310-3FF6-CCCA-6043CA348B85}"/>
+          </ac:spMkLst>
+        </pc:spChg>
+        <pc:spChg chg="add mod">
+          <ac:chgData name="João Luiz Grave Gross" userId="70663aa8-58a3-482c-a5ab-33e75f2c9147" providerId="ADAL" clId="{1642D5D4-6F90-4729-B6C8-CF446D4D64F7}" dt="2025-10-01T22:17:03.381" v="2494" actId="1076"/>
+          <ac:spMkLst>
+            <pc:docMk/>
+            <pc:sldMk cId="203766769" sldId="265"/>
+            <ac:spMk id="6" creationId="{7F1B9887-A9C3-D1BA-2628-CE4BD007EC0D}"/>
+          </ac:spMkLst>
+        </pc:spChg>
+        <pc:picChg chg="del">
+          <ac:chgData name="João Luiz Grave Gross" userId="70663aa8-58a3-482c-a5ab-33e75f2c9147" providerId="ADAL" clId="{1642D5D4-6F90-4729-B6C8-CF446D4D64F7}" dt="2025-10-01T21:57:53.506" v="2363" actId="478"/>
+          <ac:picMkLst>
+            <pc:docMk/>
+            <pc:sldMk cId="203766769" sldId="265"/>
+            <ac:picMk id="7" creationId="{C30E864B-98BB-0F21-4E57-76A5238D9621}"/>
+          </ac:picMkLst>
+        </pc:picChg>
+        <pc:picChg chg="del">
+          <ac:chgData name="João Luiz Grave Gross" userId="70663aa8-58a3-482c-a5ab-33e75f2c9147" providerId="ADAL" clId="{1642D5D4-6F90-4729-B6C8-CF446D4D64F7}" dt="2025-10-01T21:57:54.346" v="2364" actId="478"/>
+          <ac:picMkLst>
+            <pc:docMk/>
+            <pc:sldMk cId="203766769" sldId="265"/>
+            <ac:picMk id="9" creationId="{ADE567B4-8179-4021-1522-16FACE2CA73A}"/>
+          </ac:picMkLst>
+        </pc:picChg>
+        <pc:picChg chg="mod">
+          <ac:chgData name="João Luiz Grave Gross" userId="70663aa8-58a3-482c-a5ab-33e75f2c9147" providerId="ADAL" clId="{1642D5D4-6F90-4729-B6C8-CF446D4D64F7}" dt="2025-10-01T22:15:22.973" v="2492" actId="14100"/>
+          <ac:picMkLst>
+            <pc:docMk/>
+            <pc:sldMk cId="203766769" sldId="265"/>
+            <ac:picMk id="11" creationId="{C0FC9812-F6D1-CF35-E1AC-4717A4441B8E}"/>
+          </ac:picMkLst>
+        </pc:picChg>
+      </pc:sldChg>
+      <pc:sldChg chg="del">
+        <pc:chgData name="João Luiz Grave Gross" userId="70663aa8-58a3-482c-a5ab-33e75f2c9147" providerId="ADAL" clId="{1642D5D4-6F90-4729-B6C8-CF446D4D64F7}" dt="2025-10-01T21:03:47.029" v="658" actId="47"/>
+        <pc:sldMkLst>
+          <pc:docMk/>
+          <pc:sldMk cId="2502414847" sldId="267"/>
+        </pc:sldMkLst>
+      </pc:sldChg>
+      <pc:sldChg chg="del">
+        <pc:chgData name="João Luiz Grave Gross" userId="70663aa8-58a3-482c-a5ab-33e75f2c9147" providerId="ADAL" clId="{1642D5D4-6F90-4729-B6C8-CF446D4D64F7}" dt="2025-10-01T21:03:49.473" v="660" actId="47"/>
+        <pc:sldMkLst>
+          <pc:docMk/>
+          <pc:sldMk cId="1312181359" sldId="268"/>
+        </pc:sldMkLst>
       </pc:sldChg>
       <pc:sldChg chg="del">
         <pc:chgData name="João Luiz Grave Gross" userId="70663aa8-58a3-482c-a5ab-33e75f2c9147" providerId="ADAL" clId="{1642D5D4-6F90-4729-B6C8-CF446D4D64F7}" dt="2025-09-30T20:02:33.607" v="623" actId="47"/>
@@ -220,14 +305,66 @@
           <pc:sldMk cId="904690256" sldId="269"/>
         </pc:sldMkLst>
       </pc:sldChg>
-      <pc:sldChg chg="addSp modSp new mod">
-        <pc:chgData name="João Luiz Grave Gross" userId="70663aa8-58a3-482c-a5ab-33e75f2c9147" providerId="ADAL" clId="{1642D5D4-6F90-4729-B6C8-CF446D4D64F7}" dt="2025-09-30T20:04:37.573" v="655" actId="27636"/>
+      <pc:sldChg chg="del">
+        <pc:chgData name="João Luiz Grave Gross" userId="70663aa8-58a3-482c-a5ab-33e75f2c9147" providerId="ADAL" clId="{1642D5D4-6F90-4729-B6C8-CF446D4D64F7}" dt="2025-10-01T21:03:48.335" v="659" actId="47"/>
+        <pc:sldMkLst>
+          <pc:docMk/>
+          <pc:sldMk cId="2251275311" sldId="270"/>
+        </pc:sldMkLst>
+      </pc:sldChg>
+      <pc:sldChg chg="del">
+        <pc:chgData name="João Luiz Grave Gross" userId="70663aa8-58a3-482c-a5ab-33e75f2c9147" providerId="ADAL" clId="{1642D5D4-6F90-4729-B6C8-CF446D4D64F7}" dt="2025-10-01T21:03:51.918" v="662" actId="47"/>
+        <pc:sldMkLst>
+          <pc:docMk/>
+          <pc:sldMk cId="266257524" sldId="271"/>
+        </pc:sldMkLst>
+      </pc:sldChg>
+      <pc:sldChg chg="del">
+        <pc:chgData name="João Luiz Grave Gross" userId="70663aa8-58a3-482c-a5ab-33e75f2c9147" providerId="ADAL" clId="{1642D5D4-6F90-4729-B6C8-CF446D4D64F7}" dt="2025-10-01T21:03:52.698" v="663" actId="47"/>
+        <pc:sldMkLst>
+          <pc:docMk/>
+          <pc:sldMk cId="3551033221" sldId="272"/>
+        </pc:sldMkLst>
+      </pc:sldChg>
+      <pc:sldChg chg="addSp modSp mod">
+        <pc:chgData name="João Luiz Grave Gross" userId="70663aa8-58a3-482c-a5ab-33e75f2c9147" providerId="ADAL" clId="{1642D5D4-6F90-4729-B6C8-CF446D4D64F7}" dt="2025-10-01T21:42:30.156" v="2127" actId="1076"/>
+        <pc:sldMkLst>
+          <pc:docMk/>
+          <pc:sldMk cId="3312667182" sldId="273"/>
+        </pc:sldMkLst>
+        <pc:spChg chg="mod">
+          <ac:chgData name="João Luiz Grave Gross" userId="70663aa8-58a3-482c-a5ab-33e75f2c9147" providerId="ADAL" clId="{1642D5D4-6F90-4729-B6C8-CF446D4D64F7}" dt="2025-10-01T21:37:55.725" v="1918" actId="20577"/>
+          <ac:spMkLst>
+            <pc:docMk/>
+            <pc:sldMk cId="3312667182" sldId="273"/>
+            <ac:spMk id="2" creationId="{BF1D348F-FD48-0AC0-4FBF-AA8ADD337017}"/>
+          </ac:spMkLst>
+        </pc:spChg>
+        <pc:spChg chg="mod">
+          <ac:chgData name="João Luiz Grave Gross" userId="70663aa8-58a3-482c-a5ab-33e75f2c9147" providerId="ADAL" clId="{1642D5D4-6F90-4729-B6C8-CF446D4D64F7}" dt="2025-10-01T21:41:30.824" v="2123" actId="20577"/>
+          <ac:spMkLst>
+            <pc:docMk/>
+            <pc:sldMk cId="3312667182" sldId="273"/>
+            <ac:spMk id="3" creationId="{D85D38CC-A29D-8498-000F-84B79FC6F11C}"/>
+          </ac:spMkLst>
+        </pc:spChg>
+        <pc:picChg chg="add mod">
+          <ac:chgData name="João Luiz Grave Gross" userId="70663aa8-58a3-482c-a5ab-33e75f2c9147" providerId="ADAL" clId="{1642D5D4-6F90-4729-B6C8-CF446D4D64F7}" dt="2025-10-01T21:42:30.156" v="2127" actId="1076"/>
+          <ac:picMkLst>
+            <pc:docMk/>
+            <pc:sldMk cId="3312667182" sldId="273"/>
+            <ac:picMk id="6" creationId="{1D436A86-3CB4-E809-CC4D-546D3CACE632}"/>
+          </ac:picMkLst>
+        </pc:picChg>
+      </pc:sldChg>
+      <pc:sldChg chg="addSp modSp new mod ord">
+        <pc:chgData name="João Luiz Grave Gross" userId="70663aa8-58a3-482c-a5ab-33e75f2c9147" providerId="ADAL" clId="{1642D5D4-6F90-4729-B6C8-CF446D4D64F7}" dt="2025-10-01T21:43:05.509" v="2136"/>
         <pc:sldMkLst>
           <pc:docMk/>
           <pc:sldMk cId="2496614450" sldId="276"/>
         </pc:sldMkLst>
         <pc:spChg chg="mod">
-          <ac:chgData name="João Luiz Grave Gross" userId="70663aa8-58a3-482c-a5ab-33e75f2c9147" providerId="ADAL" clId="{1642D5D4-6F90-4729-B6C8-CF446D4D64F7}" dt="2025-09-30T19:55:38.769" v="282" actId="20577"/>
+          <ac:chgData name="João Luiz Grave Gross" userId="70663aa8-58a3-482c-a5ab-33e75f2c9147" providerId="ADAL" clId="{1642D5D4-6F90-4729-B6C8-CF446D4D64F7}" dt="2025-10-01T21:19:12.753" v="995" actId="20577"/>
           <ac:spMkLst>
             <pc:docMk/>
             <pc:sldMk cId="2496614450" sldId="276"/>
@@ -250,6 +387,343 @@
             <ac:spMk id="5" creationId="{FCDEFEAD-0AC6-D612-0B4E-48D96741128E}"/>
           </ac:spMkLst>
         </pc:spChg>
+      </pc:sldChg>
+      <pc:sldChg chg="modSp add mod">
+        <pc:chgData name="João Luiz Grave Gross" userId="70663aa8-58a3-482c-a5ab-33e75f2c9147" providerId="ADAL" clId="{1642D5D4-6F90-4729-B6C8-CF446D4D64F7}" dt="2025-10-01T21:35:40.402" v="1794" actId="20577"/>
+        <pc:sldMkLst>
+          <pc:docMk/>
+          <pc:sldMk cId="1992294698" sldId="277"/>
+        </pc:sldMkLst>
+        <pc:spChg chg="mod">
+          <ac:chgData name="João Luiz Grave Gross" userId="70663aa8-58a3-482c-a5ab-33e75f2c9147" providerId="ADAL" clId="{1642D5D4-6F90-4729-B6C8-CF446D4D64F7}" dt="2025-10-01T21:35:40.402" v="1794" actId="20577"/>
+          <ac:spMkLst>
+            <pc:docMk/>
+            <pc:sldMk cId="1992294698" sldId="277"/>
+            <ac:spMk id="2" creationId="{90A85877-0054-139B-5854-100209B1A08D}"/>
+          </ac:spMkLst>
+        </pc:spChg>
+        <pc:spChg chg="mod">
+          <ac:chgData name="João Luiz Grave Gross" userId="70663aa8-58a3-482c-a5ab-33e75f2c9147" providerId="ADAL" clId="{1642D5D4-6F90-4729-B6C8-CF446D4D64F7}" dt="2025-10-01T21:26:51.216" v="1509" actId="20577"/>
+          <ac:spMkLst>
+            <pc:docMk/>
+            <pc:sldMk cId="1992294698" sldId="277"/>
+            <ac:spMk id="3" creationId="{C2C21D28-18E4-BA90-A91C-E7D1D11DD3CE}"/>
+          </ac:spMkLst>
+        </pc:spChg>
+      </pc:sldChg>
+      <pc:sldChg chg="modSp add mod">
+        <pc:chgData name="João Luiz Grave Gross" userId="70663aa8-58a3-482c-a5ab-33e75f2c9147" providerId="ADAL" clId="{1642D5D4-6F90-4729-B6C8-CF446D4D64F7}" dt="2025-10-01T21:37:27.620" v="1868" actId="5793"/>
+        <pc:sldMkLst>
+          <pc:docMk/>
+          <pc:sldMk cId="3585272815" sldId="278"/>
+        </pc:sldMkLst>
+        <pc:spChg chg="mod">
+          <ac:chgData name="João Luiz Grave Gross" userId="70663aa8-58a3-482c-a5ab-33e75f2c9147" providerId="ADAL" clId="{1642D5D4-6F90-4729-B6C8-CF446D4D64F7}" dt="2025-10-01T21:36:48.833" v="1801"/>
+          <ac:spMkLst>
+            <pc:docMk/>
+            <pc:sldMk cId="3585272815" sldId="278"/>
+            <ac:spMk id="2" creationId="{EF6B2D67-D628-5875-86AB-6F4080B7B6BF}"/>
+          </ac:spMkLst>
+        </pc:spChg>
+        <pc:spChg chg="mod">
+          <ac:chgData name="João Luiz Grave Gross" userId="70663aa8-58a3-482c-a5ab-33e75f2c9147" providerId="ADAL" clId="{1642D5D4-6F90-4729-B6C8-CF446D4D64F7}" dt="2025-10-01T21:37:27.620" v="1868" actId="5793"/>
+          <ac:spMkLst>
+            <pc:docMk/>
+            <pc:sldMk cId="3585272815" sldId="278"/>
+            <ac:spMk id="3" creationId="{D1DF7931-1A4F-E468-D8DD-BDA28519EFEB}"/>
+          </ac:spMkLst>
+        </pc:spChg>
+      </pc:sldChg>
+      <pc:sldChg chg="addSp delSp modSp add mod">
+        <pc:chgData name="João Luiz Grave Gross" userId="70663aa8-58a3-482c-a5ab-33e75f2c9147" providerId="ADAL" clId="{1642D5D4-6F90-4729-B6C8-CF446D4D64F7}" dt="2025-10-01T21:42:52.392" v="2134" actId="1076"/>
+        <pc:sldMkLst>
+          <pc:docMk/>
+          <pc:sldMk cId="3072866178" sldId="279"/>
+        </pc:sldMkLst>
+        <pc:spChg chg="add del">
+          <ac:chgData name="João Luiz Grave Gross" userId="70663aa8-58a3-482c-a5ab-33e75f2c9147" providerId="ADAL" clId="{1642D5D4-6F90-4729-B6C8-CF446D4D64F7}" dt="2025-10-01T21:42:44.583" v="2131" actId="22"/>
+          <ac:spMkLst>
+            <pc:docMk/>
+            <pc:sldMk cId="3072866178" sldId="279"/>
+            <ac:spMk id="7" creationId="{6E9094F3-7A2C-1D2E-76AD-4803146E4E1E}"/>
+          </ac:spMkLst>
+        </pc:spChg>
+        <pc:spChg chg="add mod">
+          <ac:chgData name="João Luiz Grave Gross" userId="70663aa8-58a3-482c-a5ab-33e75f2c9147" providerId="ADAL" clId="{1642D5D4-6F90-4729-B6C8-CF446D4D64F7}" dt="2025-10-01T21:42:52.392" v="2134" actId="1076"/>
+          <ac:spMkLst>
+            <pc:docMk/>
+            <pc:sldMk cId="3072866178" sldId="279"/>
+            <ac:spMk id="9" creationId="{0DA22ACA-E9F2-8A62-4773-51A865F3B5F0}"/>
+          </ac:spMkLst>
+        </pc:spChg>
+        <pc:picChg chg="mod">
+          <ac:chgData name="João Luiz Grave Gross" userId="70663aa8-58a3-482c-a5ab-33e75f2c9147" providerId="ADAL" clId="{1642D5D4-6F90-4729-B6C8-CF446D4D64F7}" dt="2025-10-01T21:42:40.386" v="2129" actId="14100"/>
+          <ac:picMkLst>
+            <pc:docMk/>
+            <pc:sldMk cId="3072866178" sldId="279"/>
+            <ac:picMk id="6" creationId="{BA3D6B9A-3600-017A-0732-7A7B6ACB3555}"/>
+          </ac:picMkLst>
+        </pc:picChg>
+      </pc:sldChg>
+      <pc:sldChg chg="addSp delSp modSp add mod">
+        <pc:chgData name="João Luiz Grave Gross" userId="70663aa8-58a3-482c-a5ab-33e75f2c9147" providerId="ADAL" clId="{1642D5D4-6F90-4729-B6C8-CF446D4D64F7}" dt="2025-10-01T21:51:29.836" v="2229" actId="14100"/>
+        <pc:sldMkLst>
+          <pc:docMk/>
+          <pc:sldMk cId="2656067867" sldId="280"/>
+        </pc:sldMkLst>
+        <pc:spChg chg="del">
+          <ac:chgData name="João Luiz Grave Gross" userId="70663aa8-58a3-482c-a5ab-33e75f2c9147" providerId="ADAL" clId="{1642D5D4-6F90-4729-B6C8-CF446D4D64F7}" dt="2025-10-01T21:43:18.783" v="2141" actId="478"/>
+          <ac:spMkLst>
+            <pc:docMk/>
+            <pc:sldMk cId="2656067867" sldId="280"/>
+            <ac:spMk id="2" creationId="{0424D309-68B1-B510-9FAC-844D9E142E4E}"/>
+          </ac:spMkLst>
+        </pc:spChg>
+        <pc:spChg chg="del">
+          <ac:chgData name="João Luiz Grave Gross" userId="70663aa8-58a3-482c-a5ab-33e75f2c9147" providerId="ADAL" clId="{1642D5D4-6F90-4729-B6C8-CF446D4D64F7}" dt="2025-10-01T21:43:12.996" v="2138" actId="478"/>
+          <ac:spMkLst>
+            <pc:docMk/>
+            <pc:sldMk cId="2656067867" sldId="280"/>
+            <ac:spMk id="3" creationId="{12797093-FE3B-9CC7-5720-25EC520CB668}"/>
+          </ac:spMkLst>
+        </pc:spChg>
+        <pc:spChg chg="add del mod">
+          <ac:chgData name="João Luiz Grave Gross" userId="70663aa8-58a3-482c-a5ab-33e75f2c9147" providerId="ADAL" clId="{1642D5D4-6F90-4729-B6C8-CF446D4D64F7}" dt="2025-10-01T21:43:16.523" v="2139" actId="478"/>
+          <ac:spMkLst>
+            <pc:docMk/>
+            <pc:sldMk cId="2656067867" sldId="280"/>
+            <ac:spMk id="7" creationId="{95C0FBD1-8243-0522-7764-20E3796264D8}"/>
+          </ac:spMkLst>
+        </pc:spChg>
+        <pc:spChg chg="add del mod">
+          <ac:chgData name="João Luiz Grave Gross" userId="70663aa8-58a3-482c-a5ab-33e75f2c9147" providerId="ADAL" clId="{1642D5D4-6F90-4729-B6C8-CF446D4D64F7}" dt="2025-10-01T21:45:04.947" v="2142" actId="478"/>
+          <ac:spMkLst>
+            <pc:docMk/>
+            <pc:sldMk cId="2656067867" sldId="280"/>
+            <ac:spMk id="9" creationId="{E076F879-B03E-5C1A-2F8C-D2DB09B8A8D3}"/>
+          </ac:spMkLst>
+        </pc:spChg>
+        <pc:spChg chg="add mod">
+          <ac:chgData name="João Luiz Grave Gross" userId="70663aa8-58a3-482c-a5ab-33e75f2c9147" providerId="ADAL" clId="{1642D5D4-6F90-4729-B6C8-CF446D4D64F7}" dt="2025-10-01T21:48:16.884" v="2192" actId="1076"/>
+          <ac:spMkLst>
+            <pc:docMk/>
+            <pc:sldMk cId="2656067867" sldId="280"/>
+            <ac:spMk id="14" creationId="{28FF7AEC-CD68-2544-0285-998C3BA17C74}"/>
+          </ac:spMkLst>
+        </pc:spChg>
+        <pc:picChg chg="del">
+          <ac:chgData name="João Luiz Grave Gross" userId="70663aa8-58a3-482c-a5ab-33e75f2c9147" providerId="ADAL" clId="{1642D5D4-6F90-4729-B6C8-CF446D4D64F7}" dt="2025-10-01T21:43:17.228" v="2140" actId="478"/>
+          <ac:picMkLst>
+            <pc:docMk/>
+            <pc:sldMk cId="2656067867" sldId="280"/>
+            <ac:picMk id="6" creationId="{3D194B99-282D-CA37-7039-1C55523B1538}"/>
+          </ac:picMkLst>
+        </pc:picChg>
+        <pc:picChg chg="add del mod modCrop">
+          <ac:chgData name="João Luiz Grave Gross" userId="70663aa8-58a3-482c-a5ab-33e75f2c9147" providerId="ADAL" clId="{1642D5D4-6F90-4729-B6C8-CF446D4D64F7}" dt="2025-10-01T21:51:26.770" v="2228" actId="14100"/>
+          <ac:picMkLst>
+            <pc:docMk/>
+            <pc:sldMk cId="2656067867" sldId="280"/>
+            <ac:picMk id="11" creationId="{37F7EA34-498B-D96B-6538-628B20EAE112}"/>
+          </ac:picMkLst>
+        </pc:picChg>
+        <pc:picChg chg="add mod modCrop">
+          <ac:chgData name="João Luiz Grave Gross" userId="70663aa8-58a3-482c-a5ab-33e75f2c9147" providerId="ADAL" clId="{1642D5D4-6F90-4729-B6C8-CF446D4D64F7}" dt="2025-10-01T21:51:29.836" v="2229" actId="14100"/>
+          <ac:picMkLst>
+            <pc:docMk/>
+            <pc:sldMk cId="2656067867" sldId="280"/>
+            <ac:picMk id="13" creationId="{12121A29-F1A1-D9E1-73F3-2CF698EB1B7C}"/>
+          </ac:picMkLst>
+        </pc:picChg>
+        <pc:picChg chg="add mod">
+          <ac:chgData name="João Luiz Grave Gross" userId="70663aa8-58a3-482c-a5ab-33e75f2c9147" providerId="ADAL" clId="{1642D5D4-6F90-4729-B6C8-CF446D4D64F7}" dt="2025-10-01T21:51:00.544" v="2218" actId="1076"/>
+          <ac:picMkLst>
+            <pc:docMk/>
+            <pc:sldMk cId="2656067867" sldId="280"/>
+            <ac:picMk id="15" creationId="{71D5BC68-7119-4AF4-35D3-8F3CD027AD65}"/>
+          </ac:picMkLst>
+        </pc:picChg>
+      </pc:sldChg>
+      <pc:sldChg chg="addSp delSp modSp add mod">
+        <pc:chgData name="João Luiz Grave Gross" userId="70663aa8-58a3-482c-a5ab-33e75f2c9147" providerId="ADAL" clId="{1642D5D4-6F90-4729-B6C8-CF446D4D64F7}" dt="2025-10-01T21:51:41.060" v="2240" actId="1036"/>
+        <pc:sldMkLst>
+          <pc:docMk/>
+          <pc:sldMk cId="3775376469" sldId="281"/>
+        </pc:sldMkLst>
+        <pc:spChg chg="mod">
+          <ac:chgData name="João Luiz Grave Gross" userId="70663aa8-58a3-482c-a5ab-33e75f2c9147" providerId="ADAL" clId="{1642D5D4-6F90-4729-B6C8-CF446D4D64F7}" dt="2025-10-01T21:48:34.909" v="2196" actId="20577"/>
+          <ac:spMkLst>
+            <pc:docMk/>
+            <pc:sldMk cId="3775376469" sldId="281"/>
+            <ac:spMk id="14" creationId="{A718B5EB-2838-0E15-607B-72C57F009126}"/>
+          </ac:spMkLst>
+        </pc:spChg>
+        <pc:picChg chg="add mod modCrop">
+          <ac:chgData name="João Luiz Grave Gross" userId="70663aa8-58a3-482c-a5ab-33e75f2c9147" providerId="ADAL" clId="{1642D5D4-6F90-4729-B6C8-CF446D4D64F7}" dt="2025-10-01T21:51:41.060" v="2240" actId="1036"/>
+          <ac:picMkLst>
+            <pc:docMk/>
+            <pc:sldMk cId="3775376469" sldId="281"/>
+            <ac:picMk id="3" creationId="{1F623138-567A-34E6-E896-ACB143CF417A}"/>
+          </ac:picMkLst>
+        </pc:picChg>
+        <pc:picChg chg="add mod modCrop">
+          <ac:chgData name="João Luiz Grave Gross" userId="70663aa8-58a3-482c-a5ab-33e75f2c9147" providerId="ADAL" clId="{1642D5D4-6F90-4729-B6C8-CF446D4D64F7}" dt="2025-10-01T21:51:23.171" v="2227" actId="14100"/>
+          <ac:picMkLst>
+            <pc:docMk/>
+            <pc:sldMk cId="3775376469" sldId="281"/>
+            <ac:picMk id="6" creationId="{1AEC4657-C34A-6314-B086-377EE9CFE144}"/>
+          </ac:picMkLst>
+        </pc:picChg>
+        <pc:picChg chg="add del mod">
+          <ac:chgData name="João Luiz Grave Gross" userId="70663aa8-58a3-482c-a5ab-33e75f2c9147" providerId="ADAL" clId="{1642D5D4-6F90-4729-B6C8-CF446D4D64F7}" dt="2025-10-01T21:51:15.314" v="2224" actId="478"/>
+          <ac:picMkLst>
+            <pc:docMk/>
+            <pc:sldMk cId="3775376469" sldId="281"/>
+            <ac:picMk id="7" creationId="{D206821F-0A51-13BB-56A6-FDEAAB6E7CCE}"/>
+          </ac:picMkLst>
+        </pc:picChg>
+        <pc:picChg chg="add mod">
+          <ac:chgData name="João Luiz Grave Gross" userId="70663aa8-58a3-482c-a5ab-33e75f2c9147" providerId="ADAL" clId="{1642D5D4-6F90-4729-B6C8-CF446D4D64F7}" dt="2025-10-01T21:51:18.407" v="2225"/>
+          <ac:picMkLst>
+            <pc:docMk/>
+            <pc:sldMk cId="3775376469" sldId="281"/>
+            <ac:picMk id="8" creationId="{36CD340B-61E4-68A8-95F7-82283A5177D7}"/>
+          </ac:picMkLst>
+        </pc:picChg>
+        <pc:picChg chg="del">
+          <ac:chgData name="João Luiz Grave Gross" userId="70663aa8-58a3-482c-a5ab-33e75f2c9147" providerId="ADAL" clId="{1642D5D4-6F90-4729-B6C8-CF446D4D64F7}" dt="2025-10-01T21:49:40.837" v="2199" actId="478"/>
+          <ac:picMkLst>
+            <pc:docMk/>
+            <pc:sldMk cId="3775376469" sldId="281"/>
+            <ac:picMk id="11" creationId="{0F6592FF-0EFC-1C18-704A-77B324698F5F}"/>
+          </ac:picMkLst>
+        </pc:picChg>
+        <pc:picChg chg="del">
+          <ac:chgData name="João Luiz Grave Gross" userId="70663aa8-58a3-482c-a5ab-33e75f2c9147" providerId="ADAL" clId="{1642D5D4-6F90-4729-B6C8-CF446D4D64F7}" dt="2025-10-01T21:49:42.546" v="2200" actId="478"/>
+          <ac:picMkLst>
+            <pc:docMk/>
+            <pc:sldMk cId="3775376469" sldId="281"/>
+            <ac:picMk id="13" creationId="{FAF5C1B1-8792-E810-D489-04D7575B0EA1}"/>
+          </ac:picMkLst>
+        </pc:picChg>
+      </pc:sldChg>
+      <pc:sldChg chg="addSp delSp modSp add mod">
+        <pc:chgData name="João Luiz Grave Gross" userId="70663aa8-58a3-482c-a5ab-33e75f2c9147" providerId="ADAL" clId="{1642D5D4-6F90-4729-B6C8-CF446D4D64F7}" dt="2025-10-01T21:56:29.931" v="2305" actId="20577"/>
+        <pc:sldMkLst>
+          <pc:docMk/>
+          <pc:sldMk cId="1170554390" sldId="282"/>
+        </pc:sldMkLst>
+        <pc:spChg chg="mod">
+          <ac:chgData name="João Luiz Grave Gross" userId="70663aa8-58a3-482c-a5ab-33e75f2c9147" providerId="ADAL" clId="{1642D5D4-6F90-4729-B6C8-CF446D4D64F7}" dt="2025-10-01T21:56:29.931" v="2305" actId="20577"/>
+          <ac:spMkLst>
+            <pc:docMk/>
+            <pc:sldMk cId="1170554390" sldId="282"/>
+            <ac:spMk id="2" creationId="{39713913-BE32-BC8E-EACD-25E0EE829A37}"/>
+          </ac:spMkLst>
+        </pc:spChg>
+        <pc:spChg chg="mod">
+          <ac:chgData name="João Luiz Grave Gross" userId="70663aa8-58a3-482c-a5ab-33e75f2c9147" providerId="ADAL" clId="{1642D5D4-6F90-4729-B6C8-CF446D4D64F7}" dt="2025-10-01T21:52:16.117" v="2262" actId="6549"/>
+          <ac:spMkLst>
+            <pc:docMk/>
+            <pc:sldMk cId="1170554390" sldId="282"/>
+            <ac:spMk id="3" creationId="{B588263A-584E-F8D5-A4AE-51D290B5ACD3}"/>
+          </ac:spMkLst>
+        </pc:spChg>
+        <pc:spChg chg="add mod">
+          <ac:chgData name="João Luiz Grave Gross" userId="70663aa8-58a3-482c-a5ab-33e75f2c9147" providerId="ADAL" clId="{1642D5D4-6F90-4729-B6C8-CF446D4D64F7}" dt="2025-10-01T21:55:41.250" v="2278" actId="14100"/>
+          <ac:spMkLst>
+            <pc:docMk/>
+            <pc:sldMk cId="1170554390" sldId="282"/>
+            <ac:spMk id="10" creationId="{3828B902-EC4D-FF07-D4C4-B5E26DECA2BF}"/>
+          </ac:spMkLst>
+        </pc:spChg>
+        <pc:spChg chg="add del mod">
+          <ac:chgData name="João Luiz Grave Gross" userId="70663aa8-58a3-482c-a5ab-33e75f2c9147" providerId="ADAL" clId="{1642D5D4-6F90-4729-B6C8-CF446D4D64F7}" dt="2025-10-01T21:55:59.095" v="2284" actId="478"/>
+          <ac:spMkLst>
+            <pc:docMk/>
+            <pc:sldMk cId="1170554390" sldId="282"/>
+            <ac:spMk id="11" creationId="{9AFEF129-1CC5-45A8-5C28-91AC3BD667C8}"/>
+          </ac:spMkLst>
+        </pc:spChg>
+        <pc:spChg chg="add mod">
+          <ac:chgData name="João Luiz Grave Gross" userId="70663aa8-58a3-482c-a5ab-33e75f2c9147" providerId="ADAL" clId="{1642D5D4-6F90-4729-B6C8-CF446D4D64F7}" dt="2025-10-01T21:56:15.640" v="2287" actId="208"/>
+          <ac:spMkLst>
+            <pc:docMk/>
+            <pc:sldMk cId="1170554390" sldId="282"/>
+            <ac:spMk id="12" creationId="{CC32D044-4DFB-D040-589C-CCAF0BE53C69}"/>
+          </ac:spMkLst>
+        </pc:spChg>
+        <pc:picChg chg="del">
+          <ac:chgData name="João Luiz Grave Gross" userId="70663aa8-58a3-482c-a5ab-33e75f2c9147" providerId="ADAL" clId="{1642D5D4-6F90-4729-B6C8-CF446D4D64F7}" dt="2025-10-01T21:52:17.600" v="2263" actId="478"/>
+          <ac:picMkLst>
+            <pc:docMk/>
+            <pc:sldMk cId="1170554390" sldId="282"/>
+            <ac:picMk id="6" creationId="{C062B90C-8D8D-E59B-DDDA-FC60843D20F2}"/>
+          </ac:picMkLst>
+        </pc:picChg>
+        <pc:picChg chg="add mod">
+          <ac:chgData name="João Luiz Grave Gross" userId="70663aa8-58a3-482c-a5ab-33e75f2c9147" providerId="ADAL" clId="{1642D5D4-6F90-4729-B6C8-CF446D4D64F7}" dt="2025-10-01T21:55:00.784" v="2273" actId="1076"/>
+          <ac:picMkLst>
+            <pc:docMk/>
+            <pc:sldMk cId="1170554390" sldId="282"/>
+            <ac:picMk id="7" creationId="{CDF7E3F5-66E2-6B4A-DD5E-DE49576082E3}"/>
+          </ac:picMkLst>
+        </pc:picChg>
+        <pc:picChg chg="add mod">
+          <ac:chgData name="João Luiz Grave Gross" userId="70663aa8-58a3-482c-a5ab-33e75f2c9147" providerId="ADAL" clId="{1642D5D4-6F90-4729-B6C8-CF446D4D64F7}" dt="2025-10-01T21:55:16.047" v="2274" actId="1076"/>
+          <ac:picMkLst>
+            <pc:docMk/>
+            <pc:sldMk cId="1170554390" sldId="282"/>
+            <ac:picMk id="9" creationId="{40FE9EC6-7D0F-0715-46B1-C1A1DC0F2D32}"/>
+          </ac:picMkLst>
+        </pc:picChg>
+      </pc:sldChg>
+      <pc:sldChg chg="addSp delSp modSp add mod">
+        <pc:chgData name="João Luiz Grave Gross" userId="70663aa8-58a3-482c-a5ab-33e75f2c9147" providerId="ADAL" clId="{1642D5D4-6F90-4729-B6C8-CF446D4D64F7}" dt="2025-10-01T21:57:20.994" v="2338" actId="1076"/>
+        <pc:sldMkLst>
+          <pc:docMk/>
+          <pc:sldMk cId="1433434" sldId="283"/>
+        </pc:sldMkLst>
+        <pc:spChg chg="add mod">
+          <ac:chgData name="João Luiz Grave Gross" userId="70663aa8-58a3-482c-a5ab-33e75f2c9147" providerId="ADAL" clId="{1642D5D4-6F90-4729-B6C8-CF446D4D64F7}" dt="2025-10-01T21:57:20.994" v="2338" actId="1076"/>
+          <ac:spMkLst>
+            <pc:docMk/>
+            <pc:sldMk cId="1433434" sldId="283"/>
+            <ac:spMk id="5" creationId="{633743FD-C574-F54E-D0E2-EAF730CB3E3C}"/>
+          </ac:spMkLst>
+        </pc:spChg>
+        <pc:spChg chg="del">
+          <ac:chgData name="João Luiz Grave Gross" userId="70663aa8-58a3-482c-a5ab-33e75f2c9147" providerId="ADAL" clId="{1642D5D4-6F90-4729-B6C8-CF446D4D64F7}" dt="2025-10-01T21:56:49.798" v="2312" actId="478"/>
+          <ac:spMkLst>
+            <pc:docMk/>
+            <pc:sldMk cId="1433434" sldId="283"/>
+            <ac:spMk id="10" creationId="{60B40AC9-9F37-18EE-9782-80C75BC264DB}"/>
+          </ac:spMkLst>
+        </pc:spChg>
+        <pc:spChg chg="del">
+          <ac:chgData name="João Luiz Grave Gross" userId="70663aa8-58a3-482c-a5ab-33e75f2c9147" providerId="ADAL" clId="{1642D5D4-6F90-4729-B6C8-CF446D4D64F7}" dt="2025-10-01T21:56:49.039" v="2311" actId="478"/>
+          <ac:spMkLst>
+            <pc:docMk/>
+            <pc:sldMk cId="1433434" sldId="283"/>
+            <ac:spMk id="12" creationId="{951FE40C-57FC-82F9-DA6F-32274FA1B44D}"/>
+          </ac:spMkLst>
+        </pc:spChg>
+        <pc:picChg chg="del">
+          <ac:chgData name="João Luiz Grave Gross" userId="70663aa8-58a3-482c-a5ab-33e75f2c9147" providerId="ADAL" clId="{1642D5D4-6F90-4729-B6C8-CF446D4D64F7}" dt="2025-10-01T21:56:48.311" v="2310" actId="478"/>
+          <ac:picMkLst>
+            <pc:docMk/>
+            <pc:sldMk cId="1433434" sldId="283"/>
+            <ac:picMk id="7" creationId="{EE229B69-2CF7-E432-A429-E937665E9B7F}"/>
+          </ac:picMkLst>
+        </pc:picChg>
+        <pc:picChg chg="del">
+          <ac:chgData name="João Luiz Grave Gross" userId="70663aa8-58a3-482c-a5ab-33e75f2c9147" providerId="ADAL" clId="{1642D5D4-6F90-4729-B6C8-CF446D4D64F7}" dt="2025-10-01T21:56:47.271" v="2309" actId="478"/>
+          <ac:picMkLst>
+            <pc:docMk/>
+            <pc:sldMk cId="1433434" sldId="283"/>
+            <ac:picMk id="9" creationId="{C34EFB18-25E0-3A26-44D7-F902240A162C}"/>
+          </ac:picMkLst>
+        </pc:picChg>
       </pc:sldChg>
     </pc:docChg>
   </pc:docChgLst>
@@ -508,7 +982,7 @@
           <a:p>
             <a:fld id="{B7E37165-AD05-40CF-837F-87AAE2E9CB3C}" type="datetimeFigureOut">
               <a:rPr lang="pt-BR" smtClean="0"/>
-              <a:t>30/09/2025</a:t>
+              <a:t>01/10/2025</a:t>
             </a:fld>
             <a:endParaRPr lang="pt-BR"/>
           </a:p>
@@ -1066,7 +1540,7 @@
           <a:p>
             <a:fld id="{5A5CB361-D3A0-4F07-9956-A4088440887D}" type="datetime1">
               <a:rPr lang="en-US" smtClean="0"/>
-              <a:t>9/30/2025</a:t>
+              <a:t>10/1/2025</a:t>
             </a:fld>
             <a:endParaRPr lang="en-US"/>
           </a:p>
@@ -1344,7 +1818,7 @@
           <a:p>
             <a:fld id="{26DBD6ED-30C1-434C-9E13-883544CD1709}" type="datetime1">
               <a:rPr lang="en-US" smtClean="0"/>
-              <a:t>9/30/2025</a:t>
+              <a:t>10/1/2025</a:t>
             </a:fld>
             <a:endParaRPr lang="en-US"/>
           </a:p>
@@ -1737,7 +2211,7 @@
           <a:p>
             <a:fld id="{408DA9F0-F28D-4CBB-B6B2-41B75FEA0475}" type="datetime1">
               <a:rPr lang="en-US" smtClean="0"/>
-              <a:t>9/30/2025</a:t>
+              <a:t>10/1/2025</a:t>
             </a:fld>
             <a:endParaRPr lang="en-US"/>
           </a:p>
@@ -1977,7 +2451,7 @@
           <a:p>
             <a:fld id="{000B8031-D506-4594-9A76-9D37B195C745}" type="datetime1">
               <a:rPr lang="en-US" smtClean="0"/>
-              <a:t>9/30/2025</a:t>
+              <a:t>10/1/2025</a:t>
             </a:fld>
             <a:endParaRPr lang="en-US"/>
           </a:p>
@@ -2212,7 +2686,7 @@
           <a:p>
             <a:fld id="{D926BC3F-B712-47C4-8854-E94AD7571356}" type="datetime1">
               <a:rPr lang="en-US" smtClean="0"/>
-              <a:t>9/30/2025</a:t>
+              <a:t>10/1/2025</a:t>
             </a:fld>
             <a:endParaRPr lang="en-US"/>
           </a:p>
@@ -2447,7 +2921,7 @@
           <a:p>
             <a:fld id="{8600CF2C-F450-4EC5-86D2-EB2C14EEBFFF}" type="datetime1">
               <a:rPr lang="en-US" smtClean="0"/>
-              <a:t>9/30/2025</a:t>
+              <a:t>10/1/2025</a:t>
             </a:fld>
             <a:endParaRPr lang="en-US"/>
           </a:p>
@@ -2682,7 +3156,7 @@
           <a:p>
             <a:fld id="{E13D3A79-491D-47A2-937F-CA21998A7535}" type="datetime1">
               <a:rPr lang="en-US" smtClean="0"/>
-              <a:t>9/30/2025</a:t>
+              <a:t>10/1/2025</a:t>
             </a:fld>
             <a:endParaRPr lang="en-US"/>
           </a:p>
@@ -2900,7 +3374,7 @@
           <a:p>
             <a:fld id="{4783ECC0-AEA6-445E-8230-8330ABD10170}" type="datetime1">
               <a:rPr lang="en-US" smtClean="0"/>
-              <a:t>9/30/2025</a:t>
+              <a:t>10/1/2025</a:t>
             </a:fld>
             <a:endParaRPr lang="en-US"/>
           </a:p>
@@ -3263,7 +3737,7 @@
           <a:p>
             <a:fld id="{C62910BB-B356-4E1E-9EF6-AA69F18758E6}" type="datetime1">
               <a:rPr lang="en-US" smtClean="0"/>
-              <a:t>9/30/2025</a:t>
+              <a:t>10/1/2025</a:t>
             </a:fld>
             <a:endParaRPr lang="en-US"/>
           </a:p>
@@ -3474,7 +3948,7 @@
           <a:p>
             <a:fld id="{CC0B0B20-A004-471C-A09C-39CE2996BC18}" type="datetime1">
               <a:rPr lang="en-US" smtClean="0"/>
-              <a:t>9/30/2025</a:t>
+              <a:t>10/1/2025</a:t>
             </a:fld>
             <a:endParaRPr lang="en-US"/>
           </a:p>
@@ -3998,7 +4472,7 @@
           <a:p>
             <a:fld id="{3FA03E86-CE53-4CE4-AF06-E870A663030F}" type="datetime1">
               <a:rPr lang="en-US" smtClean="0"/>
-              <a:t>9/30/2025</a:t>
+              <a:t>10/1/2025</a:t>
             </a:fld>
             <a:endParaRPr lang="en-US"/>
           </a:p>
@@ -4199,7 +4673,7 @@
           <a:p>
             <a:fld id="{9F242DC5-C96C-4C2E-B22D-93D764C3B6F2}" type="datetime1">
               <a:rPr lang="en-US" smtClean="0"/>
-              <a:t>9/30/2025</a:t>
+              <a:t>10/1/2025</a:t>
             </a:fld>
             <a:endParaRPr lang="en-US"/>
           </a:p>
@@ -4410,7 +4884,7 @@
           <a:p>
             <a:fld id="{E5BC3ADE-C383-4FAD-B241-EE91D3116F3B}" type="datetime1">
               <a:rPr lang="en-US" smtClean="0"/>
-              <a:t>9/30/2025</a:t>
+              <a:t>10/1/2025</a:t>
             </a:fld>
             <a:endParaRPr lang="en-US"/>
           </a:p>
@@ -4934,7 +5408,7 @@
           <a:p>
             <a:fld id="{2E5ACAA0-61D8-40E6-A863-3A95CCE0CAA6}" type="datetime1">
               <a:rPr lang="en-US" smtClean="0"/>
-              <a:t>9/30/2025</a:t>
+              <a:t>10/1/2025</a:t>
             </a:fld>
             <a:endParaRPr lang="en-US"/>
           </a:p>
@@ -5145,7 +5619,7 @@
           <a:p>
             <a:fld id="{AECDDE93-A6B1-401A-BEF2-E973E6F61C42}" type="datetime1">
               <a:rPr lang="en-US" smtClean="0"/>
-              <a:t>9/30/2025</a:t>
+              <a:t>10/1/2025</a:t>
             </a:fld>
             <a:endParaRPr lang="en-US"/>
           </a:p>
@@ -5669,7 +6143,7 @@
           <a:p>
             <a:fld id="{4E2D1C80-3E13-4421-AB94-FA5DC61EC52B}" type="datetime1">
               <a:rPr lang="en-US" smtClean="0"/>
-              <a:t>9/30/2025</a:t>
+              <a:t>10/1/2025</a:t>
             </a:fld>
             <a:endParaRPr lang="en-US"/>
           </a:p>
@@ -5880,7 +6354,7 @@
           <a:p>
             <a:fld id="{16BD149D-AAAF-49C7-8A9D-E6F2449D184C}" type="datetime1">
               <a:rPr lang="en-US" smtClean="0"/>
-              <a:t>9/30/2025</a:t>
+              <a:t>10/1/2025</a:t>
             </a:fld>
             <a:endParaRPr lang="en-US"/>
           </a:p>
@@ -6422,7 +6896,7 @@
           <a:p>
             <a:fld id="{781E9FAD-CB1C-45FF-A8BC-28EBDB0E7C90}" type="datetime1">
               <a:rPr lang="en-US" smtClean="0"/>
-              <a:t>9/30/2025</a:t>
+              <a:t>10/1/2025</a:t>
             </a:fld>
             <a:endParaRPr lang="en-US"/>
           </a:p>
@@ -6803,7 +7277,7 @@
           <a:p>
             <a:fld id="{C510CFBE-C968-4591-8E57-F31E41AFB964}" type="datetime1">
               <a:rPr lang="en-US" smtClean="0"/>
-              <a:t>9/30/2025</a:t>
+              <a:t>10/1/2025</a:t>
             </a:fld>
             <a:endParaRPr lang="en-US"/>
           </a:p>
@@ -7189,7 +7663,7 @@
           <a:p>
             <a:fld id="{3BBAA7D9-0A22-4F46-8031-4852CC0D5860}" type="datetime1">
               <a:rPr lang="en-US" smtClean="0"/>
-              <a:t>9/30/2025</a:t>
+              <a:t>10/1/2025</a:t>
             </a:fld>
             <a:endParaRPr lang="en-US"/>
           </a:p>
@@ -7487,7 +7961,7 @@
           <a:p>
             <a:fld id="{1CAB6D8A-C267-445F-A5F2-83ABED06E8BD}" type="datetime1">
               <a:rPr lang="en-US" smtClean="0"/>
-              <a:t>9/30/2025</a:t>
+              <a:t>10/1/2025</a:t>
             </a:fld>
             <a:endParaRPr lang="en-US"/>
           </a:p>
@@ -7875,7 +8349,7 @@
           <a:p>
             <a:fld id="{8B73BB16-461A-42F3-8ED5-1C1B26A7B645}" type="datetime1">
               <a:rPr lang="en-US" smtClean="0"/>
-              <a:t>9/30/2025</a:t>
+              <a:t>10/1/2025</a:t>
             </a:fld>
             <a:endParaRPr lang="en-US"/>
           </a:p>
@@ -8327,7 +8801,7 @@
           <a:p>
             <a:fld id="{E221F185-75C3-4B3C-AA1F-553DC8149EBC}" type="datetime1">
               <a:rPr lang="en-US" smtClean="0"/>
-              <a:t>9/30/2025</a:t>
+              <a:t>10/1/2025</a:t>
             </a:fld>
             <a:endParaRPr lang="en-US"/>
           </a:p>
@@ -8646,7 +9120,7 @@
           <a:p>
             <a:fld id="{ACC73482-79A8-4554-A143-C40EA112FFDB}" type="datetime1">
               <a:rPr lang="en-US" smtClean="0"/>
-              <a:t>9/30/2025</a:t>
+              <a:t>10/1/2025</a:t>
             </a:fld>
             <a:endParaRPr lang="en-US"/>
           </a:p>
@@ -9100,7 +9574,7 @@
           <a:p>
             <a:fld id="{B17E97F6-40B1-4130-9CC0-49072FDE2D22}" type="datetime1">
               <a:rPr lang="en-US" smtClean="0"/>
-              <a:t>9/30/2025</a:t>
+              <a:t>10/1/2025</a:t>
             </a:fld>
             <a:endParaRPr lang="en-US"/>
           </a:p>
@@ -9470,7 +9944,7 @@
           <a:p>
             <a:fld id="{55E7A8F7-C80F-41DF-B88F-58AAA8CFE67C}" type="datetime1">
               <a:rPr lang="en-US" smtClean="0"/>
-              <a:t>9/30/2025</a:t>
+              <a:t>10/1/2025</a:t>
             </a:fld>
             <a:endParaRPr lang="en-US"/>
           </a:p>
@@ -9830,7 +10304,7 @@
           <a:p>
             <a:fld id="{70046AC6-D67A-4524-970E-84C464485184}" type="datetime1">
               <a:rPr lang="en-US" smtClean="0"/>
-              <a:t>9/30/2025</a:t>
+              <a:t>10/1/2025</a:t>
             </a:fld>
             <a:endParaRPr lang="en-US"/>
           </a:p>
@@ -9995,7 +10469,7 @@
           <a:p>
             <a:fld id="{2A3D1F8B-1E4F-40A6-B302-1DA3A1F26854}" type="datetime1">
               <a:rPr lang="en-US" smtClean="0"/>
-              <a:t>9/30/2025</a:t>
+              <a:t>10/1/2025</a:t>
             </a:fld>
             <a:endParaRPr lang="en-US"/>
           </a:p>
@@ -10210,7 +10684,7 @@
           <a:p>
             <a:fld id="{ABD8140A-0B1E-4DEB-97D5-C47D738675EC}" type="datetime1">
               <a:rPr lang="en-US" smtClean="0"/>
-              <a:t>9/30/2025</a:t>
+              <a:t>10/1/2025</a:t>
             </a:fld>
             <a:endParaRPr lang="en-US"/>
           </a:p>
@@ -10421,7 +10895,7 @@
           <a:p>
             <a:fld id="{894DDB46-35CC-4332-96BF-2EE0A5BA77BB}" type="datetime1">
               <a:rPr lang="en-US" smtClean="0"/>
-              <a:t>9/30/2025</a:t>
+              <a:t>10/1/2025</a:t>
             </a:fld>
             <a:endParaRPr lang="en-US"/>
           </a:p>
@@ -10624,7 +11098,7 @@
           <a:p>
             <a:fld id="{0E3BD9E6-4B36-4623-BA39-E790911F0839}" type="datetime1">
               <a:rPr lang="en-US" smtClean="0"/>
-              <a:t>9/30/2025</a:t>
+              <a:t>10/1/2025</a:t>
             </a:fld>
             <a:endParaRPr lang="en-US"/>
           </a:p>
@@ -10873,7 +11347,7 @@
           <a:p>
             <a:fld id="{252CCF03-959D-4A8D-A11F-ED3751D9DDA1}" type="datetime1">
               <a:rPr lang="en-US" smtClean="0"/>
-              <a:t>9/30/2025</a:t>
+              <a:t>10/1/2025</a:t>
             </a:fld>
             <a:endParaRPr lang="en-US"/>
           </a:p>
@@ -11122,7 +11596,7 @@
           <a:p>
             <a:fld id="{326CCF64-DFA6-4283-BFF4-DF429D795EA9}" type="datetime1">
               <a:rPr lang="en-US" smtClean="0"/>
-              <a:t>9/30/2025</a:t>
+              <a:t>10/1/2025</a:t>
             </a:fld>
             <a:endParaRPr lang="en-US"/>
           </a:p>
@@ -11441,7 +11915,7 @@
           <a:p>
             <a:fld id="{2D7726DA-198B-4787-9EBC-75A0992C3644}" type="datetime1">
               <a:rPr lang="en-US" smtClean="0"/>
-              <a:t>9/30/2025</a:t>
+              <a:t>10/1/2025</a:t>
             </a:fld>
             <a:endParaRPr lang="en-US"/>
           </a:p>
@@ -11813,7 +12287,7 @@
           <a:p>
             <a:fld id="{D2C89B7A-2960-479C-B727-901A9D45CBAF}" type="datetime1">
               <a:rPr lang="en-US" smtClean="0"/>
-              <a:t>9/30/2025</a:t>
+              <a:t>10/1/2025</a:t>
             </a:fld>
             <a:endParaRPr lang="en-US"/>
           </a:p>
@@ -12106,7 +12580,7 @@
           <a:p>
             <a:fld id="{6F1A3736-487E-4F2A-80CA-49CCD14A560C}" type="datetime1">
               <a:rPr lang="en-US" smtClean="0"/>
-              <a:t>9/30/2025</a:t>
+              <a:t>10/1/2025</a:t>
             </a:fld>
             <a:endParaRPr lang="en-US"/>
           </a:p>
@@ -12321,7 +12795,7 @@
           <a:p>
             <a:fld id="{9BA1CBF1-D179-4F64-AB89-5245ADC3AF7B}" type="datetime1">
               <a:rPr lang="en-US" smtClean="0"/>
-              <a:t>9/30/2025</a:t>
+              <a:t>10/1/2025</a:t>
             </a:fld>
             <a:endParaRPr lang="en-US"/>
           </a:p>
@@ -12536,7 +13010,7 @@
           <a:p>
             <a:fld id="{435652A1-036F-4B93-8E58-D1056284BEE1}" type="datetime1">
               <a:rPr lang="en-US" smtClean="0"/>
-              <a:t>9/30/2025</a:t>
+              <a:t>10/1/2025</a:t>
             </a:fld>
             <a:endParaRPr lang="en-US"/>
           </a:p>
@@ -12809,7 +13283,7 @@
           <a:p>
             <a:fld id="{BF47BDFE-3386-489C-B159-31CC2F6CACF7}" type="datetime1">
               <a:rPr lang="en-US" smtClean="0"/>
-              <a:t>9/30/2025</a:t>
+              <a:t>10/1/2025</a:t>
             </a:fld>
             <a:endParaRPr lang="en-US"/>
           </a:p>
@@ -13234,7 +13708,7 @@
           <a:p>
             <a:fld id="{30E94FF3-36C1-41E9-92E4-A092518FF1A7}" type="datetime1">
               <a:rPr lang="en-US" smtClean="0"/>
-              <a:t>9/30/2025</a:t>
+              <a:t>10/1/2025</a:t>
             </a:fld>
             <a:endParaRPr lang="en-US"/>
           </a:p>
@@ -13378,7 +13852,7 @@
           <a:p>
             <a:fld id="{AE7DBB62-5A8F-4216-BC01-04FD3E06477C}" type="datetime1">
               <a:rPr lang="en-US" smtClean="0"/>
-              <a:t>9/30/2025</a:t>
+              <a:t>10/1/2025</a:t>
             </a:fld>
             <a:endParaRPr lang="en-US"/>
           </a:p>
@@ -13494,7 +13968,7 @@
           <a:p>
             <a:fld id="{9B045D10-D845-4EB1-925A-CA957D9BBB50}" type="datetime1">
               <a:rPr lang="en-US" smtClean="0"/>
-              <a:t>9/30/2025</a:t>
+              <a:t>10/1/2025</a:t>
             </a:fld>
             <a:endParaRPr lang="en-US"/>
           </a:p>
@@ -13802,7 +14276,7 @@
           <a:p>
             <a:fld id="{23814DDD-C878-448A-BAE3-9D5C8FDC8846}" type="datetime1">
               <a:rPr lang="en-US" smtClean="0"/>
-              <a:t>9/30/2025</a:t>
+              <a:t>10/1/2025</a:t>
             </a:fld>
             <a:endParaRPr lang="en-US"/>
           </a:p>
@@ -14203,7 +14677,7 @@
           <a:p>
             <a:fld id="{A83D6000-F2DF-436B-984A-9AC9C9331F57}" type="datetime1">
               <a:rPr lang="en-US" smtClean="0"/>
-              <a:t>9/30/2025</a:t>
+              <a:t>10/1/2025</a:t>
             </a:fld>
             <a:endParaRPr lang="en-US"/>
           </a:p>
@@ -14565,7 +15039,7 @@
           <a:p>
             <a:fld id="{D45A536A-73D3-4014-B6E9-451150722166}" type="datetime1">
               <a:rPr lang="en-US" smtClean="0"/>
-              <a:t>9/30/2025</a:t>
+              <a:t>10/1/2025</a:t>
             </a:fld>
             <a:endParaRPr lang="en-US"/>
           </a:p>
@@ -14821,7 +15295,7 @@
           <a:p>
             <a:fld id="{CC2CD543-CCDB-4FFB-ADF5-19D832983AAB}" type="datetime1">
               <a:rPr lang="en-US" smtClean="0"/>
-              <a:t>9/30/2025</a:t>
+              <a:t>10/1/2025</a:t>
             </a:fld>
             <a:endParaRPr lang="en-US"/>
           </a:p>
@@ -15066,7 +15540,7 @@
           <a:p>
             <a:fld id="{1277EF9F-30E0-4643-A418-2CA208888ACD}" type="datetime1">
               <a:rPr lang="en-US" smtClean="0"/>
-              <a:t>9/30/2025</a:t>
+              <a:t>10/1/2025</a:t>
             </a:fld>
             <a:endParaRPr lang="en-US"/>
           </a:p>
@@ -15289,7 +15763,7 @@
           <a:p>
             <a:fld id="{301E127A-91CA-46FF-BC59-FF98D01A476D}" type="datetime1">
               <a:rPr lang="en-US" smtClean="0"/>
-              <a:t>9/30/2025</a:t>
+              <a:t>10/1/2025</a:t>
             </a:fld>
             <a:endParaRPr lang="en-US"/>
           </a:p>
@@ -15490,7 +15964,7 @@
           <a:p>
             <a:fld id="{6F8F9046-2AA6-409B-9E4D-B723DCC88FDA}" type="datetime1">
               <a:rPr lang="en-US" smtClean="0"/>
-              <a:t>9/30/2025</a:t>
+              <a:t>10/1/2025</a:t>
             </a:fld>
             <a:endParaRPr lang="en-US"/>
           </a:p>
@@ -15768,7 +16242,7 @@
           <a:p>
             <a:fld id="{FF9FA8A8-3C42-405C-A845-EDA74342D7D6}" type="datetime1">
               <a:rPr lang="en-US" smtClean="0"/>
-              <a:t>9/30/2025</a:t>
+              <a:t>10/1/2025</a:t>
             </a:fld>
             <a:endParaRPr lang="en-US"/>
           </a:p>
@@ -16036,7 +16510,7 @@
           <a:p>
             <a:fld id="{D8F726DA-E852-4173-994B-325EDB7D946D}" type="datetime1">
               <a:rPr lang="en-US" smtClean="0"/>
-              <a:t>9/30/2025</a:t>
+              <a:t>10/1/2025</a:t>
             </a:fld>
             <a:endParaRPr lang="en-US"/>
           </a:p>
@@ -16451,7 +16925,7 @@
           <a:p>
             <a:fld id="{96A415C4-6826-4CC5-AB57-0B4EF147A936}" type="datetime1">
               <a:rPr lang="en-US" smtClean="0"/>
-              <a:t>9/30/2025</a:t>
+              <a:t>10/1/2025</a:t>
             </a:fld>
             <a:endParaRPr lang="en-US"/>
           </a:p>
@@ -16595,7 +17069,7 @@
           <a:p>
             <a:fld id="{FC71E2AD-32CF-44A6-BC61-B01A29B43C16}" type="datetime1">
               <a:rPr lang="en-US" smtClean="0"/>
-              <a:t>9/30/2025</a:t>
+              <a:t>10/1/2025</a:t>
             </a:fld>
             <a:endParaRPr lang="en-US"/>
           </a:p>
@@ -16711,7 +17185,7 @@
           <a:p>
             <a:fld id="{448F4039-F262-4913-BAEA-20C96B2EB2D8}" type="datetime1">
               <a:rPr lang="en-US" smtClean="0"/>
-              <a:t>9/30/2025</a:t>
+              <a:t>10/1/2025</a:t>
             </a:fld>
             <a:endParaRPr lang="en-US"/>
           </a:p>
@@ -17025,7 +17499,7 @@
           <a:p>
             <a:fld id="{9DA2500A-7F73-4593-BADA-6EF82DBD0456}" type="datetime1">
               <a:rPr lang="en-US" smtClean="0"/>
-              <a:t>9/30/2025</a:t>
+              <a:t>10/1/2025</a:t>
             </a:fld>
             <a:endParaRPr lang="en-US"/>
           </a:p>
@@ -17243,7 +17717,7 @@
           <a:p>
             <a:fld id="{1C483498-199A-4D1B-8519-AB33EB483840}" type="datetime1">
               <a:rPr lang="en-US" smtClean="0"/>
-              <a:t>9/30/2025</a:t>
+              <a:t>10/1/2025</a:t>
             </a:fld>
             <a:endParaRPr lang="en-US"/>
           </a:p>
@@ -17550,7 +18024,7 @@
           <a:p>
             <a:fld id="{332E274C-9940-4C58-9588-AEBBD50B52D0}" type="datetime1">
               <a:rPr lang="en-US" smtClean="0"/>
-              <a:t>9/30/2025</a:t>
+              <a:t>10/1/2025</a:t>
             </a:fld>
             <a:endParaRPr lang="en-US"/>
           </a:p>
@@ -17751,7 +18225,7 @@
           <a:p>
             <a:fld id="{2B5C771A-C952-410E-B1F6-C29C797294A1}" type="datetime1">
               <a:rPr lang="en-US" smtClean="0"/>
-              <a:t>9/30/2025</a:t>
+              <a:t>10/1/2025</a:t>
             </a:fld>
             <a:endParaRPr lang="en-US"/>
           </a:p>
@@ -17962,7 +18436,7 @@
           <a:p>
             <a:fld id="{7F309C4D-F421-4343-875C-A686A2B3F758}" type="datetime1">
               <a:rPr lang="en-US" smtClean="0"/>
-              <a:t>9/30/2025</a:t>
+              <a:t>10/1/2025</a:t>
             </a:fld>
             <a:endParaRPr lang="en-US"/>
           </a:p>
@@ -18210,7 +18684,7 @@
           <a:p>
             <a:fld id="{828A20DD-4DDE-40E8-A9B0-06CB2FF6486B}" type="datetime1">
               <a:rPr lang="en-US" smtClean="0"/>
-              <a:t>9/30/2025</a:t>
+              <a:t>10/1/2025</a:t>
             </a:fld>
             <a:endParaRPr lang="en-US"/>
           </a:p>
@@ -18444,7 +18918,7 @@
           <a:p>
             <a:fld id="{A92C6F27-A153-4762-98CC-FD765AF336E3}" type="datetime1">
               <a:rPr lang="en-US" smtClean="0"/>
-              <a:t>9/30/2025</a:t>
+              <a:t>10/1/2025</a:t>
             </a:fld>
             <a:endParaRPr lang="en-US"/>
           </a:p>
@@ -18687,7 +19161,7 @@
           <a:p>
             <a:fld id="{8654BDFB-221D-439B-9FE1-56A9848B7E3C}" type="datetime1">
               <a:rPr lang="en-US" smtClean="0"/>
-              <a:t>9/30/2025</a:t>
+              <a:t>10/1/2025</a:t>
             </a:fld>
             <a:endParaRPr lang="en-US"/>
           </a:p>
@@ -18946,7 +19420,7 @@
           <a:p>
             <a:fld id="{CF1E374B-038E-49DF-93C9-EBE7D5930F04}" type="datetime1">
               <a:rPr lang="en-US" smtClean="0"/>
-              <a:t>9/30/2025</a:t>
+              <a:t>10/1/2025</a:t>
             </a:fld>
             <a:endParaRPr lang="en-US"/>
           </a:p>
@@ -19554,7 +20028,7 @@
           <a:p>
             <a:fld id="{A3C4F98B-79FF-4D6E-A7F1-90977450B57D}" type="datetime1">
               <a:rPr lang="en-US" smtClean="0"/>
-              <a:t>9/30/2025</a:t>
+              <a:t>10/1/2025</a:t>
             </a:fld>
             <a:endParaRPr lang="en-US"/>
           </a:p>
@@ -20071,14 +20545,14 @@
 </file>
 
 <file path=ppt/slides/slide10.xml><?xml version="1.0" encoding="utf-8"?>
-<p:sld xmlns:a="http://schemas.openxmlformats.org/drawingml/2006/main" xmlns:r="http://schemas.openxmlformats.org/officeDocument/2006/relationships" xmlns:p="http://schemas.openxmlformats.org/presentationml/2006/main" show="0">
+<p:sld xmlns:a="http://schemas.openxmlformats.org/drawingml/2006/main" xmlns:r="http://schemas.openxmlformats.org/officeDocument/2006/relationships" xmlns:p="http://schemas.openxmlformats.org/presentationml/2006/main">
   <p:cSld>
     <p:spTree>
       <p:nvGrpSpPr>
         <p:cNvPr id="1" name="">
           <a:extLst>
             <a:ext uri="{FF2B5EF4-FFF2-40B4-BE49-F238E27FC236}">
-              <a16:creationId xmlns:a16="http://schemas.microsoft.com/office/drawing/2014/main" id="{06599F23-D775-CC16-9ADD-B3BD7E02CB2F}"/>
+              <a16:creationId xmlns:a16="http://schemas.microsoft.com/office/drawing/2014/main" id="{2D5E8B4D-A32B-19F3-42C6-910A1E9C6B37}"/>
             </a:ext>
           </a:extLst>
         </p:cNvPr>
@@ -20098,7 +20572,7 @@
           <p:cNvPr id="2" name="Título 1">
             <a:extLst>
               <a:ext uri="{FF2B5EF4-FFF2-40B4-BE49-F238E27FC236}">
-                <a16:creationId xmlns:a16="http://schemas.microsoft.com/office/drawing/2014/main" id="{90421FBC-BE3A-6132-FE4A-CF17887D1D8B}"/>
+                <a16:creationId xmlns:a16="http://schemas.microsoft.com/office/drawing/2014/main" id="{871A5BE6-CB0D-4FE7-EEB7-971CF2550DDA}"/>
               </a:ext>
             </a:extLst>
           </p:cNvPr>
@@ -20115,20 +20589,16 @@
           <a:lstStyle/>
           <a:p>
             <a:r>
+              <a:rPr lang="en-US" dirty="0"/>
+              <a:t>Teste de </a:t>
+            </a:r>
+            <a:r>
               <a:rPr lang="en-US" dirty="0" err="1"/>
-              <a:t>Objeto</a:t>
-            </a:r>
-            <a:r>
-              <a:rPr lang="en-US" dirty="0"/>
-              <a:t> </a:t>
-            </a:r>
-            <a:r>
-              <a:rPr lang="en-US" dirty="0" err="1"/>
-              <a:t>computacional</a:t>
-            </a:r>
-            <a:r>
-              <a:rPr lang="en-US" dirty="0"/>
-              <a:t>: Carga 2</a:t>
+              <a:t>Frequência</a:t>
+            </a:r>
+            <a:r>
+              <a:rPr lang="en-US" dirty="0"/>
+              <a:t> de CPU</a:t>
             </a:r>
             <a:endParaRPr lang="pt-BR" dirty="0"/>
           </a:p>
@@ -20139,7 +20609,7 @@
           <p:cNvPr id="3" name="Espaço Reservado para Conteúdo 2">
             <a:extLst>
               <a:ext uri="{FF2B5EF4-FFF2-40B4-BE49-F238E27FC236}">
-                <a16:creationId xmlns:a16="http://schemas.microsoft.com/office/drawing/2014/main" id="{696FD38E-D2F2-10B1-9435-22696A342D0A}"/>
+                <a16:creationId xmlns:a16="http://schemas.microsoft.com/office/drawing/2014/main" id="{DE3C6BC9-A28C-4CC4-6697-2007763C3F26}"/>
               </a:ext>
             </a:extLst>
           </p:cNvPr>
@@ -20153,132 +20623,14 @@
         <p:spPr/>
         <p:txBody>
           <a:bodyPr>
-            <a:normAutofit lnSpcReduction="10000"/>
+            <a:normAutofit/>
           </a:bodyPr>
           <a:lstStyle/>
           <a:p>
-            <a:r>
-              <a:rPr lang="pt-BR" dirty="0"/>
-              <a:t>Algoritmo: </a:t>
-            </a:r>
-            <a:r>
-              <a:rPr lang="pt-BR" dirty="0" err="1"/>
-              <a:t>Timsort</a:t>
-            </a:r>
-            <a:endParaRPr lang="pt-BR" dirty="0"/>
-          </a:p>
-          <a:p>
-            <a:pPr lvl="1"/>
-            <a:r>
-              <a:rPr lang="pt-BR" dirty="0"/>
-              <a:t>Utilizado internamente pelo algoritmo de ordenação da biblioteca Pandas e pelo </a:t>
-            </a:r>
-            <a:r>
-              <a:rPr lang="pt-BR" dirty="0" err="1"/>
-              <a:t>built</a:t>
-            </a:r>
-            <a:r>
-              <a:rPr lang="pt-BR" dirty="0"/>
-              <a:t>-in </a:t>
-            </a:r>
-            <a:r>
-              <a:rPr lang="pt-BR" b="1" dirty="0" err="1"/>
-              <a:t>sorted</a:t>
-            </a:r>
-            <a:r>
-              <a:rPr lang="pt-BR" b="1" dirty="0"/>
-              <a:t>()</a:t>
-            </a:r>
-            <a:r>
-              <a:rPr lang="pt-BR" dirty="0"/>
-              <a:t> do Python</a:t>
-            </a:r>
-          </a:p>
-          <a:p>
-            <a:endParaRPr lang="pt-BR" dirty="0"/>
-          </a:p>
-          <a:p>
-            <a:r>
-              <a:rPr lang="pt-BR" dirty="0"/>
-              <a:t>Características</a:t>
-            </a:r>
-          </a:p>
-          <a:p>
-            <a:pPr lvl="1"/>
-            <a:r>
-              <a:rPr lang="pt-BR" dirty="0"/>
-              <a:t>Pandas e Python por padrão executam em thread única</a:t>
-            </a:r>
-          </a:p>
-          <a:p>
-            <a:pPr lvl="1"/>
-            <a:r>
-              <a:rPr lang="pt-BR" dirty="0"/>
-              <a:t>Utilização de </a:t>
-            </a:r>
-            <a:r>
-              <a:rPr lang="pt-BR" b="1" dirty="0" err="1"/>
-              <a:t>Dask</a:t>
-            </a:r>
-            <a:r>
-              <a:rPr lang="pt-BR" dirty="0"/>
-              <a:t> para orquestração paralela</a:t>
-            </a:r>
-          </a:p>
-          <a:p>
-            <a:pPr lvl="2"/>
-            <a:r>
-              <a:rPr lang="pt-BR" dirty="0"/>
-              <a:t>Quebra o </a:t>
-            </a:r>
-            <a:r>
-              <a:rPr lang="pt-BR" dirty="0" err="1"/>
-              <a:t>dataset</a:t>
-            </a:r>
-            <a:r>
-              <a:rPr lang="pt-BR" dirty="0"/>
-              <a:t> em partições e distribui em paralelo para </a:t>
-            </a:r>
-            <a:r>
-              <a:rPr lang="pt-BR" dirty="0" err="1"/>
-              <a:t>multi</a:t>
-            </a:r>
-            <a:r>
-              <a:rPr lang="pt-BR" dirty="0"/>
-              <a:t> processos/threads</a:t>
-            </a:r>
-          </a:p>
-          <a:p>
-            <a:pPr lvl="2"/>
-            <a:endParaRPr lang="pt-BR" dirty="0"/>
-          </a:p>
-          <a:p>
-            <a:r>
-              <a:rPr lang="pt-BR" dirty="0"/>
-              <a:t>Implementação: biblioteca Pandas</a:t>
-            </a:r>
-          </a:p>
-          <a:p>
-            <a:pPr lvl="1"/>
-            <a:r>
-              <a:rPr lang="pt-BR" dirty="0"/>
-              <a:t>Uso: </a:t>
-            </a:r>
-            <a:r>
-              <a:rPr lang="pt-BR" dirty="0" err="1"/>
-              <a:t>df.sort_values</a:t>
-            </a:r>
-            <a:r>
-              <a:rPr lang="pt-BR" dirty="0"/>
-              <a:t>(...)</a:t>
-            </a:r>
-          </a:p>
-          <a:p>
-            <a:endParaRPr lang="pt-BR" dirty="0"/>
-          </a:p>
-          <a:p>
-            <a:pPr lvl="2"/>
-            <a:endParaRPr lang="pt-BR" dirty="0"/>
+            <a:endParaRPr lang="en-US" b="1" dirty="0"/>
+          </a:p>
+          <a:p>
+            <a:endParaRPr lang="pt-BR" b="1" dirty="0"/>
           </a:p>
         </p:txBody>
       </p:sp>
@@ -20287,7 +20639,7 @@
           <p:cNvPr id="4" name="Espaço Reservado para Número de Slide 3">
             <a:extLst>
               <a:ext uri="{FF2B5EF4-FFF2-40B4-BE49-F238E27FC236}">
-                <a16:creationId xmlns:a16="http://schemas.microsoft.com/office/drawing/2014/main" id="{AC73EEC2-DBBA-9CD5-97B6-FD0DF2EA99DA}"/>
+                <a16:creationId xmlns:a16="http://schemas.microsoft.com/office/drawing/2014/main" id="{01433720-5513-DFCF-4119-A18F00200C43}"/>
               </a:ext>
             </a:extLst>
           </p:cNvPr>
@@ -20311,10 +20663,46 @@
           </a:p>
         </p:txBody>
       </p:sp>
+      <p:sp>
+        <p:nvSpPr>
+          <p:cNvPr id="5" name="CaixaDeTexto 4">
+            <a:extLst>
+              <a:ext uri="{FF2B5EF4-FFF2-40B4-BE49-F238E27FC236}">
+                <a16:creationId xmlns:a16="http://schemas.microsoft.com/office/drawing/2014/main" id="{633743FD-C574-F54E-D0E2-EAF730CB3E3C}"/>
+              </a:ext>
+            </a:extLst>
+          </p:cNvPr>
+          <p:cNvSpPr txBox="1"/>
+          <p:nvPr/>
+        </p:nvSpPr>
+        <p:spPr>
+          <a:xfrm>
+            <a:off x="838200" y="2094271"/>
+            <a:ext cx="2811988" cy="369332"/>
+          </a:xfrm>
+          <a:prstGeom prst="rect">
+            <a:avLst/>
+          </a:prstGeom>
+          <a:noFill/>
+        </p:spPr>
+        <p:txBody>
+          <a:bodyPr wrap="none" rtlCol="0">
+            <a:spAutoFit/>
+          </a:bodyPr>
+          <a:lstStyle/>
+          <a:p>
+            <a:r>
+              <a:rPr lang="en-US" dirty="0"/>
+              <a:t>Teste com Turbo Boost ON</a:t>
+            </a:r>
+            <a:endParaRPr lang="pt-BR" dirty="0"/>
+          </a:p>
+        </p:txBody>
+      </p:sp>
     </p:spTree>
     <p:extLst>
       <p:ext uri="{BB962C8B-B14F-4D97-AF65-F5344CB8AC3E}">
-        <p14:creationId xmlns:p14="http://schemas.microsoft.com/office/powerpoint/2010/main" val="3551033221"/>
+        <p14:creationId xmlns:p14="http://schemas.microsoft.com/office/powerpoint/2010/main" val="1433434"/>
       </p:ext>
     </p:extLst>
   </p:cSld>
@@ -20329,13 +20717,7 @@
   <p:cSld>
     <p:spTree>
       <p:nvGrpSpPr>
-        <p:cNvPr id="1" name="">
-          <a:extLst>
-            <a:ext uri="{FF2B5EF4-FFF2-40B4-BE49-F238E27FC236}">
-              <a16:creationId xmlns:a16="http://schemas.microsoft.com/office/drawing/2014/main" id="{9C3ABBEA-9D86-3C15-14E2-D2E2912A676F}"/>
-            </a:ext>
-          </a:extLst>
-        </p:cNvPr>
+        <p:cNvPr id="1" name=""/>
         <p:cNvGrpSpPr/>
         <p:nvPr/>
       </p:nvGrpSpPr>
@@ -20352,7 +20734,7 @@
           <p:cNvPr id="2" name="Título 1">
             <a:extLst>
               <a:ext uri="{FF2B5EF4-FFF2-40B4-BE49-F238E27FC236}">
-                <a16:creationId xmlns:a16="http://schemas.microsoft.com/office/drawing/2014/main" id="{BF1D348F-FD48-0AC0-4FBF-AA8ADD337017}"/>
+                <a16:creationId xmlns:a16="http://schemas.microsoft.com/office/drawing/2014/main" id="{EE9BC3AE-C10A-E0B8-883E-2DDAEFE7CE83}"/>
               </a:ext>
             </a:extLst>
           </p:cNvPr>
@@ -20369,175 +20751,54 @@
           <a:lstStyle/>
           <a:p>
             <a:r>
+              <a:rPr lang="en-US" dirty="0"/>
+              <a:t>Hardware: </a:t>
+            </a:r>
+            <a:r>
               <a:rPr lang="en-US" dirty="0" err="1"/>
-              <a:t>Objeto</a:t>
-            </a:r>
-            <a:r>
-              <a:rPr lang="en-US" dirty="0"/>
-              <a:t> </a:t>
-            </a:r>
-            <a:r>
-              <a:rPr lang="en-US" dirty="0" err="1"/>
-              <a:t>computacional</a:t>
-            </a:r>
-            <a:r>
-              <a:rPr lang="en-US" dirty="0"/>
-              <a:t>: Carga 2</a:t>
+              <a:t>Limitações</a:t>
             </a:r>
             <a:endParaRPr lang="pt-BR" dirty="0"/>
           </a:p>
         </p:txBody>
       </p:sp>
-      <p:sp>
-        <p:nvSpPr>
-          <p:cNvPr id="3" name="Espaço Reservado para Conteúdo 2">
-            <a:extLst>
-              <a:ext uri="{FF2B5EF4-FFF2-40B4-BE49-F238E27FC236}">
-                <a16:creationId xmlns:a16="http://schemas.microsoft.com/office/drawing/2014/main" id="{D85D38CC-A29D-8498-000F-84B79FC6F11C}"/>
-              </a:ext>
-            </a:extLst>
-          </p:cNvPr>
-          <p:cNvSpPr>
-            <a:spLocks noGrp="1"/>
-          </p:cNvSpPr>
-          <p:nvPr>
-            <p:ph idx="1"/>
-          </p:nvPr>
-        </p:nvSpPr>
-        <p:spPr/>
-        <p:txBody>
-          <a:bodyPr>
-            <a:normAutofit/>
-          </a:bodyPr>
-          <a:lstStyle/>
-          <a:p>
-            <a:r>
-              <a:rPr lang="pt-BR" dirty="0"/>
-              <a:t>Algoritmo: Multiplicação de Matrizes</a:t>
-            </a:r>
-            <a:r>
-              <a:rPr lang="pt-BR" baseline="30000" dirty="0"/>
-              <a:t>7</a:t>
-            </a:r>
-          </a:p>
-          <a:p>
-            <a:endParaRPr lang="pt-BR" dirty="0"/>
-          </a:p>
-          <a:p>
-            <a:r>
-              <a:rPr lang="pt-BR" dirty="0"/>
-              <a:t>Características</a:t>
-            </a:r>
-          </a:p>
-          <a:p>
-            <a:pPr lvl="1"/>
-            <a:r>
-              <a:rPr lang="pt-BR" dirty="0"/>
-              <a:t>Python por padrão executa em thread única</a:t>
-            </a:r>
-          </a:p>
-          <a:p>
-            <a:pPr lvl="1"/>
-            <a:r>
-              <a:rPr lang="pt-BR" dirty="0"/>
-              <a:t>Utilização de </a:t>
-            </a:r>
-            <a:r>
-              <a:rPr lang="pt-BR" b="1" dirty="0"/>
-              <a:t>Dask</a:t>
-            </a:r>
-            <a:r>
-              <a:rPr lang="pt-BR" baseline="30000" dirty="0"/>
-              <a:t>8</a:t>
-            </a:r>
-            <a:r>
-              <a:rPr lang="pt-BR" dirty="0"/>
-              <a:t> para orquestração paralela</a:t>
-            </a:r>
-          </a:p>
-          <a:p>
-            <a:pPr lvl="2"/>
-            <a:r>
-              <a:rPr lang="pt-BR" dirty="0"/>
-              <a:t>Quebra matriz em blocos (</a:t>
-            </a:r>
-            <a:r>
-              <a:rPr lang="pt-BR" dirty="0" err="1"/>
-              <a:t>chunks</a:t>
-            </a:r>
-            <a:r>
-              <a:rPr lang="pt-BR" dirty="0"/>
-              <a:t>) e cada bloco é executado por uma thread</a:t>
-            </a:r>
-          </a:p>
-          <a:p>
-            <a:pPr lvl="2"/>
-            <a:endParaRPr lang="pt-BR" dirty="0"/>
-          </a:p>
-          <a:p>
-            <a:r>
-              <a:rPr lang="pt-BR" dirty="0"/>
-              <a:t>Implementação</a:t>
-            </a:r>
-          </a:p>
-          <a:p>
-            <a:pPr lvl="1"/>
-            <a:r>
-              <a:rPr lang="pt-BR" dirty="0"/>
-              <a:t>Multiplicação realizada a biblioteca </a:t>
-            </a:r>
-            <a:r>
-              <a:rPr lang="pt-BR" dirty="0" err="1"/>
-              <a:t>Numpy</a:t>
-            </a:r>
-            <a:r>
-              <a:rPr lang="pt-BR" dirty="0"/>
-              <a:t>, que invoca </a:t>
-            </a:r>
-            <a:r>
-              <a:rPr lang="pt-BR" b="1" dirty="0"/>
-              <a:t>BLAS</a:t>
-            </a:r>
-            <a:r>
-              <a:rPr lang="pt-BR" baseline="30000" dirty="0"/>
-              <a:t>9</a:t>
-            </a:r>
-            <a:r>
-              <a:rPr lang="pt-BR" dirty="0"/>
-              <a:t> (Basic Linear </a:t>
-            </a:r>
-            <a:r>
-              <a:rPr lang="pt-BR" dirty="0" err="1"/>
-              <a:t>Algebra</a:t>
-            </a:r>
-            <a:r>
-              <a:rPr lang="pt-BR" dirty="0"/>
-              <a:t> </a:t>
-            </a:r>
-            <a:r>
-              <a:rPr lang="pt-BR" dirty="0" err="1"/>
-              <a:t>Subprograms</a:t>
-            </a:r>
-            <a:r>
-              <a:rPr lang="pt-BR" dirty="0"/>
-              <a:t>)</a:t>
-            </a:r>
-          </a:p>
-          <a:p>
-            <a:endParaRPr lang="pt-BR" dirty="0"/>
-          </a:p>
-          <a:p>
-            <a:pPr lvl="2"/>
-            <a:endParaRPr lang="pt-BR" dirty="0"/>
-          </a:p>
-        </p:txBody>
-      </p:sp>
-      <p:sp>
-        <p:nvSpPr>
-          <p:cNvPr id="4" name="Espaço Reservado para Número de Slide 3">
-            <a:extLst>
-              <a:ext uri="{FF2B5EF4-FFF2-40B4-BE49-F238E27FC236}">
-                <a16:creationId xmlns:a16="http://schemas.microsoft.com/office/drawing/2014/main" id="{0A91A1F6-8A6C-0932-9A8B-203A98921979}"/>
+      <p:pic>
+        <p:nvPicPr>
+          <p:cNvPr id="11" name="Imagem 10">
+            <a:extLst>
+              <a:ext uri="{FF2B5EF4-FFF2-40B4-BE49-F238E27FC236}">
+                <a16:creationId xmlns:a16="http://schemas.microsoft.com/office/drawing/2014/main" id="{C0FC9812-F6D1-CF35-E1AC-4717A4441B8E}"/>
+              </a:ext>
+            </a:extLst>
+          </p:cNvPr>
+          <p:cNvPicPr>
+            <a:picLocks noChangeAspect="1"/>
+          </p:cNvPicPr>
+          <p:nvPr/>
+        </p:nvPicPr>
+        <p:blipFill>
+          <a:blip r:embed="rId2"/>
+          <a:srcRect b="11488"/>
+          <a:stretch>
+            <a:fillRect/>
+          </a:stretch>
+        </p:blipFill>
+        <p:spPr>
+          <a:xfrm>
+            <a:off x="597770" y="1530267"/>
+            <a:ext cx="4755157" cy="3699459"/>
+          </a:xfrm>
+          <a:prstGeom prst="rect">
+            <a:avLst/>
+          </a:prstGeom>
+        </p:spPr>
+      </p:pic>
+      <p:sp>
+        <p:nvSpPr>
+          <p:cNvPr id="12" name="Espaço Reservado para Número de Slide 11">
+            <a:extLst>
+              <a:ext uri="{FF2B5EF4-FFF2-40B4-BE49-F238E27FC236}">
+                <a16:creationId xmlns:a16="http://schemas.microsoft.com/office/drawing/2014/main" id="{DFFC5F0F-206E-664D-33EB-242CA8106F60}"/>
               </a:ext>
             </a:extLst>
           </p:cNvPr>
@@ -20561,10 +20822,174 @@
           </a:p>
         </p:txBody>
       </p:sp>
+      <p:sp>
+        <p:nvSpPr>
+          <p:cNvPr id="3" name="CaixaDeTexto 2">
+            <a:extLst>
+              <a:ext uri="{FF2B5EF4-FFF2-40B4-BE49-F238E27FC236}">
+                <a16:creationId xmlns:a16="http://schemas.microsoft.com/office/drawing/2014/main" id="{7937894A-A613-F031-1DE3-835300EFC7E3}"/>
+              </a:ext>
+            </a:extLst>
+          </p:cNvPr>
+          <p:cNvSpPr txBox="1"/>
+          <p:nvPr/>
+        </p:nvSpPr>
+        <p:spPr>
+          <a:xfrm>
+            <a:off x="7631830" y="1960979"/>
+            <a:ext cx="3962400" cy="4524315"/>
+          </a:xfrm>
+          <a:prstGeom prst="rect">
+            <a:avLst/>
+          </a:prstGeom>
+          <a:noFill/>
+        </p:spPr>
+        <p:txBody>
+          <a:bodyPr wrap="square" rtlCol="0">
+            <a:spAutoFit/>
+          </a:bodyPr>
+          <a:lstStyle/>
+          <a:p>
+            <a:r>
+              <a:rPr lang="pt-BR" b="1" dirty="0"/>
+              <a:t>Intel® Turbo </a:t>
+            </a:r>
+            <a:r>
+              <a:rPr lang="pt-BR" b="1" dirty="0" err="1"/>
+              <a:t>Boost</a:t>
+            </a:r>
+            <a:r>
+              <a:rPr lang="pt-BR" b="1" dirty="0"/>
+              <a:t> 2.0: </a:t>
+            </a:r>
+            <a:r>
+              <a:rPr lang="en-US" dirty="0"/>
+              <a:t>Boosts all-core frequency </a:t>
+            </a:r>
+            <a:r>
+              <a:rPr lang="en-US" b="1" dirty="0"/>
+              <a:t>above base clock speed</a:t>
+            </a:r>
+            <a:r>
+              <a:rPr lang="en-US" dirty="0"/>
+              <a:t> up to specified maximum frequency during more intensive workloads; available if the CPU’s running under its power, current, and temperature limits.</a:t>
+            </a:r>
+          </a:p>
+          <a:p>
+            <a:endParaRPr lang="en-US" dirty="0"/>
+          </a:p>
+          <a:p>
+            <a:r>
+              <a:rPr lang="en-US" dirty="0"/>
+              <a:t>Logo, se Turbo Boost </a:t>
+            </a:r>
+            <a:r>
+              <a:rPr lang="en-US" dirty="0" err="1"/>
+              <a:t>está</a:t>
+            </a:r>
+            <a:r>
+              <a:rPr lang="en-US" dirty="0"/>
+              <a:t> </a:t>
+            </a:r>
+            <a:r>
+              <a:rPr lang="en-US" dirty="0" err="1"/>
+              <a:t>desabilitado</a:t>
+            </a:r>
+            <a:r>
+              <a:rPr lang="en-US" dirty="0"/>
+              <a:t>, </a:t>
+            </a:r>
+            <a:r>
+              <a:rPr lang="en-US" dirty="0" err="1"/>
+              <a:t>não</a:t>
+            </a:r>
+            <a:r>
+              <a:rPr lang="en-US" dirty="0"/>
+              <a:t> </a:t>
+            </a:r>
+            <a:r>
+              <a:rPr lang="en-US" dirty="0" err="1"/>
+              <a:t>passa</a:t>
+            </a:r>
+            <a:r>
+              <a:rPr lang="en-US" dirty="0"/>
+              <a:t> a </a:t>
+            </a:r>
+            <a:r>
+              <a:rPr lang="en-US" dirty="0" err="1"/>
+              <a:t>frequência</a:t>
+            </a:r>
+            <a:r>
+              <a:rPr lang="en-US" dirty="0"/>
+              <a:t> base. (É o que se </a:t>
+            </a:r>
+            <a:r>
+              <a:rPr lang="en-US" dirty="0" err="1"/>
+              <a:t>conclui</a:t>
+            </a:r>
+            <a:r>
+              <a:rPr lang="en-US" dirty="0"/>
+              <a:t> do </a:t>
+            </a:r>
+            <a:r>
+              <a:rPr lang="en-US" dirty="0" err="1"/>
+              <a:t>texto</a:t>
+            </a:r>
+            <a:r>
+              <a:rPr lang="en-US" dirty="0"/>
+              <a:t>)</a:t>
+            </a:r>
+          </a:p>
+          <a:p>
+            <a:endParaRPr lang="en-US" dirty="0"/>
+          </a:p>
+          <a:p>
+            <a:r>
+              <a:rPr lang="pt-BR" dirty="0"/>
+              <a:t>https://www.intel.com/content/www/us/en/gaming/resources/how-intel-technologies-boost-cpu-performance.html</a:t>
+            </a:r>
+          </a:p>
+        </p:txBody>
+      </p:sp>
+      <p:sp>
+        <p:nvSpPr>
+          <p:cNvPr id="6" name="CaixaDeTexto 5">
+            <a:extLst>
+              <a:ext uri="{FF2B5EF4-FFF2-40B4-BE49-F238E27FC236}">
+                <a16:creationId xmlns:a16="http://schemas.microsoft.com/office/drawing/2014/main" id="{7F1B9887-A9C3-D1BA-2628-CE4BD007EC0D}"/>
+              </a:ext>
+            </a:extLst>
+          </p:cNvPr>
+          <p:cNvSpPr txBox="1"/>
+          <p:nvPr/>
+        </p:nvSpPr>
+        <p:spPr>
+          <a:xfrm>
+            <a:off x="1046445" y="5883079"/>
+            <a:ext cx="6096000" cy="646331"/>
+          </a:xfrm>
+          <a:prstGeom prst="rect">
+            <a:avLst/>
+          </a:prstGeom>
+          <a:noFill/>
+        </p:spPr>
+        <p:txBody>
+          <a:bodyPr wrap="square">
+            <a:spAutoFit/>
+          </a:bodyPr>
+          <a:lstStyle/>
+          <a:p>
+            <a:r>
+              <a:rPr lang="pt-BR" dirty="0"/>
+              <a:t>https://chatgpt.com/share/68dda84e-a414-8001-a47a-7a82cbb285c7</a:t>
+            </a:r>
+          </a:p>
+        </p:txBody>
+      </p:sp>
     </p:spTree>
     <p:extLst>
       <p:ext uri="{BB962C8B-B14F-4D97-AF65-F5344CB8AC3E}">
-        <p14:creationId xmlns:p14="http://schemas.microsoft.com/office/powerpoint/2010/main" val="3312667182"/>
+        <p14:creationId xmlns:p14="http://schemas.microsoft.com/office/powerpoint/2010/main" val="203766769"/>
       </p:ext>
     </p:extLst>
   </p:cSld>
@@ -20596,7 +21021,7 @@
           <p:cNvPr id="2" name="Título 1">
             <a:extLst>
               <a:ext uri="{FF2B5EF4-FFF2-40B4-BE49-F238E27FC236}">
-                <a16:creationId xmlns:a16="http://schemas.microsoft.com/office/drawing/2014/main" id="{EE9BC3AE-C10A-E0B8-883E-2DDAEFE7CE83}"/>
+                <a16:creationId xmlns:a16="http://schemas.microsoft.com/office/drawing/2014/main" id="{164A5A54-B22E-BAE2-EBD5-CA8BDF60173A}"/>
               </a:ext>
             </a:extLst>
           </p:cNvPr>
@@ -20614,109 +21039,438 @@
           <a:p>
             <a:r>
               <a:rPr lang="en-US" dirty="0" err="1"/>
-              <a:t>Ambiente</a:t>
+              <a:t>Introdução</a:t>
             </a:r>
             <a:endParaRPr lang="pt-BR" dirty="0"/>
           </a:p>
         </p:txBody>
       </p:sp>
-      <p:pic>
-        <p:nvPicPr>
-          <p:cNvPr id="7" name="Imagem 6">
-            <a:extLst>
-              <a:ext uri="{FF2B5EF4-FFF2-40B4-BE49-F238E27FC236}">
-                <a16:creationId xmlns:a16="http://schemas.microsoft.com/office/drawing/2014/main" id="{C30E864B-98BB-0F21-4E57-76A5238D9621}"/>
-              </a:ext>
-            </a:extLst>
-          </p:cNvPr>
-          <p:cNvPicPr>
-            <a:picLocks noChangeAspect="1"/>
-          </p:cNvPicPr>
-          <p:nvPr/>
-        </p:nvPicPr>
-        <p:blipFill>
-          <a:blip r:embed="rId2"/>
-          <a:stretch>
-            <a:fillRect/>
-          </a:stretch>
-        </p:blipFill>
-        <p:spPr>
-          <a:xfrm>
-            <a:off x="7639626" y="1349378"/>
-            <a:ext cx="4096322" cy="2448267"/>
-          </a:xfrm>
-          <a:prstGeom prst="rect">
-            <a:avLst/>
-          </a:prstGeom>
-        </p:spPr>
-      </p:pic>
-      <p:pic>
-        <p:nvPicPr>
-          <p:cNvPr id="11" name="Imagem 10">
-            <a:extLst>
-              <a:ext uri="{FF2B5EF4-FFF2-40B4-BE49-F238E27FC236}">
-                <a16:creationId xmlns:a16="http://schemas.microsoft.com/office/drawing/2014/main" id="{C0FC9812-F6D1-CF35-E1AC-4717A4441B8E}"/>
-              </a:ext>
-            </a:extLst>
-          </p:cNvPr>
-          <p:cNvPicPr>
-            <a:picLocks noChangeAspect="1"/>
-          </p:cNvPicPr>
-          <p:nvPr/>
-        </p:nvPicPr>
-        <p:blipFill>
-          <a:blip r:embed="rId3"/>
-          <a:srcRect b="11488"/>
-          <a:stretch>
-            <a:fillRect/>
-          </a:stretch>
-        </p:blipFill>
-        <p:spPr>
-          <a:xfrm>
-            <a:off x="253640" y="1349378"/>
-            <a:ext cx="6611273" cy="5143497"/>
-          </a:xfrm>
-          <a:prstGeom prst="rect">
-            <a:avLst/>
-          </a:prstGeom>
-        </p:spPr>
-      </p:pic>
-      <p:pic>
-        <p:nvPicPr>
-          <p:cNvPr id="9" name="Imagem 8">
-            <a:extLst>
-              <a:ext uri="{FF2B5EF4-FFF2-40B4-BE49-F238E27FC236}">
-                <a16:creationId xmlns:a16="http://schemas.microsoft.com/office/drawing/2014/main" id="{ADE567B4-8179-4021-1522-16FACE2CA73A}"/>
-              </a:ext>
-            </a:extLst>
-          </p:cNvPr>
-          <p:cNvPicPr>
-            <a:picLocks noChangeAspect="1"/>
-          </p:cNvPicPr>
-          <p:nvPr/>
-        </p:nvPicPr>
-        <p:blipFill>
-          <a:blip r:embed="rId4"/>
-          <a:stretch>
-            <a:fillRect/>
-          </a:stretch>
-        </p:blipFill>
-        <p:spPr>
-          <a:xfrm>
-            <a:off x="6296414" y="3968387"/>
-            <a:ext cx="5439534" cy="2600688"/>
-          </a:xfrm>
-          <a:prstGeom prst="rect">
-            <a:avLst/>
-          </a:prstGeom>
-        </p:spPr>
-      </p:pic>
-      <p:sp>
-        <p:nvSpPr>
-          <p:cNvPr id="12" name="Espaço Reservado para Número de Slide 11">
-            <a:extLst>
-              <a:ext uri="{FF2B5EF4-FFF2-40B4-BE49-F238E27FC236}">
-                <a16:creationId xmlns:a16="http://schemas.microsoft.com/office/drawing/2014/main" id="{DFFC5F0F-206E-664D-33EB-242CA8106F60}"/>
+      <p:sp>
+        <p:nvSpPr>
+          <p:cNvPr id="3" name="Espaço Reservado para Conteúdo 2">
+            <a:extLst>
+              <a:ext uri="{FF2B5EF4-FFF2-40B4-BE49-F238E27FC236}">
+                <a16:creationId xmlns:a16="http://schemas.microsoft.com/office/drawing/2014/main" id="{E3CB3356-A408-78BD-432D-C9EAFEA17778}"/>
+              </a:ext>
+            </a:extLst>
+          </p:cNvPr>
+          <p:cNvSpPr>
+            <a:spLocks noGrp="1"/>
+          </p:cNvSpPr>
+          <p:nvPr>
+            <p:ph idx="1"/>
+          </p:nvPr>
+        </p:nvSpPr>
+        <p:spPr/>
+        <p:txBody>
+          <a:bodyPr>
+            <a:normAutofit fontScale="32500" lnSpcReduction="20000"/>
+          </a:bodyPr>
+          <a:lstStyle/>
+          <a:p>
+            <a:r>
+              <a:rPr lang="pt-BR" dirty="0"/>
+              <a:t>Processador utilizado Intel i7-14700T</a:t>
+            </a:r>
+          </a:p>
+          <a:p>
+            <a:pPr lvl="1"/>
+            <a:r>
+              <a:rPr lang="pt-BR" b="1" dirty="0"/>
+              <a:t>Característica</a:t>
+            </a:r>
+            <a:r>
+              <a:rPr lang="pt-BR" dirty="0"/>
+              <a:t>: A série T é uma </a:t>
+            </a:r>
+            <a:r>
+              <a:rPr lang="en-US" dirty="0" err="1"/>
+              <a:t>variação</a:t>
+            </a:r>
+            <a:r>
+              <a:rPr lang="en-US" dirty="0"/>
+              <a:t> de </a:t>
+            </a:r>
+            <a:r>
+              <a:rPr lang="en-US" dirty="0" err="1"/>
+              <a:t>baixa</a:t>
+            </a:r>
+            <a:r>
+              <a:rPr lang="en-US" dirty="0"/>
+              <a:t> </a:t>
+            </a:r>
+            <a:r>
+              <a:rPr lang="en-US" dirty="0" err="1"/>
+              <a:t>potência</a:t>
+            </a:r>
+            <a:r>
+              <a:rPr lang="en-US" dirty="0"/>
+              <a:t>, </a:t>
+            </a:r>
+            <a:r>
+              <a:rPr lang="en-US" dirty="0" err="1"/>
+              <a:t>otimizada</a:t>
+            </a:r>
+            <a:r>
+              <a:rPr lang="en-US" dirty="0"/>
+              <a:t> para </a:t>
+            </a:r>
+            <a:r>
+              <a:rPr lang="en-US" dirty="0" err="1"/>
+              <a:t>eficiência</a:t>
+            </a:r>
+            <a:r>
+              <a:rPr lang="en-US" dirty="0"/>
+              <a:t> </a:t>
+            </a:r>
+            <a:r>
+              <a:rPr lang="en-US" dirty="0" err="1"/>
+              <a:t>energética</a:t>
+            </a:r>
+            <a:r>
+              <a:rPr lang="en-US" dirty="0"/>
+              <a:t>.</a:t>
+            </a:r>
+          </a:p>
+          <a:p>
+            <a:pPr lvl="1"/>
+            <a:r>
+              <a:rPr lang="en-US" b="1" dirty="0" err="1"/>
+              <a:t>Problema</a:t>
+            </a:r>
+            <a:r>
+              <a:rPr lang="en-US" dirty="0"/>
+              <a:t>: </a:t>
+            </a:r>
+            <a:r>
+              <a:rPr lang="en-US" dirty="0">
+                <a:highlight>
+                  <a:srgbClr val="FFFF00"/>
+                </a:highlight>
+              </a:rPr>
+              <a:t>When Turbo Boost is disabled, and the CPU is in a low-power mode (like “idle” or certain drivers), the Linux kernel may report the base frequency of the E-cores only, not the P-cores.</a:t>
+            </a:r>
+            <a:endParaRPr lang="pt-BR" dirty="0">
+              <a:highlight>
+                <a:srgbClr val="FFFF00"/>
+              </a:highlight>
+            </a:endParaRPr>
+          </a:p>
+          <a:p>
+            <a:r>
+              <a:rPr lang="pt-BR" strike="sngStrike" dirty="0">
+                <a:solidFill>
+                  <a:srgbClr val="FF0000"/>
+                </a:solidFill>
+              </a:rPr>
+              <a:t>Turbo </a:t>
+            </a:r>
+            <a:r>
+              <a:rPr lang="pt-BR" strike="sngStrike" dirty="0" err="1">
+                <a:solidFill>
+                  <a:srgbClr val="FF0000"/>
+                </a:solidFill>
+              </a:rPr>
+              <a:t>Boost</a:t>
+            </a:r>
+            <a:r>
+              <a:rPr lang="pt-BR" dirty="0"/>
+              <a:t> : Infelizmente, com Turbo </a:t>
+            </a:r>
+            <a:r>
+              <a:rPr lang="pt-BR" dirty="0" err="1"/>
+              <a:t>Boost</a:t>
+            </a:r>
+            <a:r>
+              <a:rPr lang="pt-BR" dirty="0"/>
+              <a:t> desativado, </a:t>
+            </a:r>
+          </a:p>
+          <a:p>
+            <a:endParaRPr lang="pt-BR" dirty="0"/>
+          </a:p>
+          <a:p>
+            <a:r>
+              <a:rPr lang="en-US" b="1" dirty="0"/>
+              <a:t>🔹 2. Why </a:t>
+            </a:r>
+            <a:r>
+              <a:rPr lang="en-US" b="1" dirty="0" err="1"/>
+              <a:t>scaling_max_freq</a:t>
+            </a:r>
+            <a:r>
+              <a:rPr lang="en-US" b="1" dirty="0"/>
+              <a:t> = 1.3 GHz</a:t>
+            </a:r>
+          </a:p>
+          <a:p>
+            <a:r>
+              <a:rPr lang="en-US" dirty="0"/>
+              <a:t>Several reasons:</a:t>
+            </a:r>
+          </a:p>
+          <a:p>
+            <a:r>
+              <a:rPr lang="en-US" b="1" dirty="0"/>
+              <a:t>Driver interaction (</a:t>
+            </a:r>
+            <a:r>
+              <a:rPr lang="en-US" b="1" dirty="0" err="1"/>
+              <a:t>intel_pstate</a:t>
+            </a:r>
+            <a:r>
+              <a:rPr lang="en-US" b="1" dirty="0"/>
+              <a:t>)</a:t>
+            </a:r>
+            <a:endParaRPr lang="en-US" dirty="0"/>
+          </a:p>
+          <a:p>
+            <a:pPr lvl="1"/>
+            <a:r>
+              <a:rPr lang="en-US" dirty="0"/>
+              <a:t>On hybrid CPUs, Linux sometimes exposes </a:t>
+            </a:r>
+            <a:r>
+              <a:rPr lang="en-US" b="1" dirty="0"/>
+              <a:t>only the E-core cluster frequencies</a:t>
+            </a:r>
+            <a:r>
+              <a:rPr lang="en-US" dirty="0"/>
+              <a:t> via /sys/devices/system/</a:t>
+            </a:r>
+            <a:r>
+              <a:rPr lang="en-US" dirty="0" err="1"/>
+              <a:t>cpu</a:t>
+            </a:r>
+            <a:r>
+              <a:rPr lang="en-US" dirty="0"/>
+              <a:t>/</a:t>
+            </a:r>
+            <a:r>
+              <a:rPr lang="en-US" dirty="0" err="1"/>
+              <a:t>cpu</a:t>
+            </a:r>
+            <a:r>
+              <a:rPr lang="en-US" dirty="0"/>
+              <a:t>*/</a:t>
+            </a:r>
+            <a:r>
+              <a:rPr lang="en-US" dirty="0" err="1"/>
+              <a:t>cpufreq</a:t>
+            </a:r>
+            <a:r>
+              <a:rPr lang="en-US" dirty="0"/>
+              <a:t>/</a:t>
+            </a:r>
+            <a:r>
+              <a:rPr lang="en-US" dirty="0" err="1"/>
+              <a:t>scaling_max_freq</a:t>
+            </a:r>
+            <a:r>
+              <a:rPr lang="en-US" dirty="0"/>
+              <a:t>.</a:t>
+            </a:r>
+          </a:p>
+          <a:p>
+            <a:pPr lvl="1"/>
+            <a:r>
+              <a:rPr lang="en-US" dirty="0"/>
+              <a:t>The P-cores may be handled differently and not appear in </a:t>
+            </a:r>
+            <a:r>
+              <a:rPr lang="en-US" dirty="0" err="1"/>
+              <a:t>cpufreq</a:t>
+            </a:r>
+            <a:r>
+              <a:rPr lang="en-US" dirty="0"/>
+              <a:t> the same way, especially if Turbo is disabled.</a:t>
+            </a:r>
+          </a:p>
+          <a:p>
+            <a:r>
+              <a:rPr lang="en-US" b="1" dirty="0"/>
+              <a:t>Low-power T-series CPU</a:t>
+            </a:r>
+            <a:endParaRPr lang="en-US" dirty="0"/>
+          </a:p>
+          <a:p>
+            <a:pPr lvl="1"/>
+            <a:r>
+              <a:rPr lang="en-US" dirty="0"/>
+              <a:t>i7-14700T base clocks are ~1.3 GHz (E-cores) and ~3.2 GHz (P-cores).</a:t>
+            </a:r>
+          </a:p>
+          <a:p>
+            <a:pPr lvl="1"/>
+            <a:r>
+              <a:rPr lang="en-US" dirty="0"/>
+              <a:t>Because Turbo is off and the performance governor is applied, </a:t>
+            </a:r>
+            <a:r>
+              <a:rPr lang="en-US" dirty="0" err="1"/>
+              <a:t>intel_pstate</a:t>
+            </a:r>
+            <a:r>
+              <a:rPr lang="en-US" dirty="0"/>
+              <a:t> might </a:t>
+            </a:r>
+            <a:r>
+              <a:rPr lang="en-US" b="1" dirty="0"/>
+              <a:t>limit visible frequency to E-cores</a:t>
+            </a:r>
+            <a:r>
+              <a:rPr lang="en-US" dirty="0"/>
+              <a:t> to respect power limits.</a:t>
+            </a:r>
+          </a:p>
+          <a:p>
+            <a:r>
+              <a:rPr lang="en-US" b="1" dirty="0" err="1"/>
+              <a:t>base_frequency</a:t>
+            </a:r>
+            <a:r>
+              <a:rPr lang="en-US" b="1" dirty="0"/>
+              <a:t> reflects the guaranteed minimum</a:t>
+            </a:r>
+            <a:endParaRPr lang="en-US" dirty="0"/>
+          </a:p>
+          <a:p>
+            <a:pPr lvl="1"/>
+            <a:r>
+              <a:rPr lang="en-US" dirty="0"/>
+              <a:t>Intel’s “base frequency” in </a:t>
+            </a:r>
+            <a:r>
+              <a:rPr lang="en-US" dirty="0" err="1"/>
+              <a:t>sysfs</a:t>
+            </a:r>
+            <a:r>
+              <a:rPr lang="en-US" dirty="0"/>
+              <a:t> often corresponds to </a:t>
+            </a:r>
+            <a:r>
+              <a:rPr lang="en-US" b="1" dirty="0"/>
+              <a:t>the lowest cluster frequency that can be reliably reported</a:t>
+            </a:r>
+            <a:r>
+              <a:rPr lang="en-US" dirty="0"/>
+              <a:t>.</a:t>
+            </a:r>
+          </a:p>
+          <a:p>
+            <a:br>
+              <a:rPr lang="en-US" dirty="0"/>
+            </a:br>
+            <a:endParaRPr lang="en-US" dirty="0"/>
+          </a:p>
+          <a:p>
+            <a:r>
+              <a:rPr lang="en-US" b="1" dirty="0"/>
+              <a:t>🔹 3. What really happens under load</a:t>
+            </a:r>
+          </a:p>
+          <a:p>
+            <a:r>
+              <a:rPr lang="en-US" dirty="0"/>
+              <a:t>Even if </a:t>
+            </a:r>
+            <a:r>
+              <a:rPr lang="en-US" dirty="0" err="1"/>
+              <a:t>scaling_max_freq</a:t>
+            </a:r>
+            <a:r>
+              <a:rPr lang="en-US" dirty="0"/>
+              <a:t> = 1.3 GHz shows in </a:t>
+            </a:r>
+            <a:r>
+              <a:rPr lang="en-US" dirty="0" err="1"/>
+              <a:t>sysfs</a:t>
+            </a:r>
+            <a:r>
+              <a:rPr lang="en-US" dirty="0"/>
+              <a:t>:</a:t>
+            </a:r>
+          </a:p>
+          <a:p>
+            <a:r>
+              <a:rPr lang="en-US" dirty="0"/>
+              <a:t>P-cores may </a:t>
+            </a:r>
+            <a:r>
+              <a:rPr lang="en-US" b="1" dirty="0"/>
+              <a:t>still boost up</a:t>
+            </a:r>
+            <a:r>
+              <a:rPr lang="en-US" dirty="0"/>
+              <a:t> internally if Turbo were enabled.</a:t>
+            </a:r>
+          </a:p>
+          <a:p>
+            <a:r>
+              <a:rPr lang="en-US" dirty="0"/>
+              <a:t>With Turbo disabled, your CPU </a:t>
+            </a:r>
+            <a:r>
+              <a:rPr lang="en-US" b="1" dirty="0"/>
+              <a:t>is effectively capped</a:t>
+            </a:r>
+            <a:r>
+              <a:rPr lang="en-US" dirty="0"/>
+              <a:t>.</a:t>
+            </a:r>
+          </a:p>
+          <a:p>
+            <a:r>
+              <a:rPr lang="en-US" dirty="0"/>
+              <a:t>Linux’s </a:t>
+            </a:r>
+            <a:r>
+              <a:rPr lang="en-US" dirty="0" err="1"/>
+              <a:t>cpupower</a:t>
+            </a:r>
+            <a:r>
+              <a:rPr lang="en-US" dirty="0"/>
+              <a:t> or </a:t>
+            </a:r>
+            <a:r>
+              <a:rPr lang="en-US" dirty="0" err="1"/>
+              <a:t>lscpu</a:t>
+            </a:r>
+            <a:r>
+              <a:rPr lang="en-US" dirty="0"/>
+              <a:t> may report higher “max MHz” (like 3.2 GHz for P-cores) because it reads the CPU’s </a:t>
+            </a:r>
+            <a:r>
+              <a:rPr lang="en-US" b="1" dirty="0"/>
+              <a:t>raw hardware registers</a:t>
+            </a:r>
+            <a:r>
+              <a:rPr lang="en-US" dirty="0"/>
+              <a:t>, not the driver-exposed </a:t>
+            </a:r>
+            <a:r>
+              <a:rPr lang="en-US" dirty="0" err="1"/>
+              <a:t>cpufreq</a:t>
+            </a:r>
+            <a:r>
+              <a:rPr lang="en-US" dirty="0"/>
+              <a:t> limits.</a:t>
+            </a:r>
+          </a:p>
+          <a:p>
+            <a:endParaRPr lang="pt-BR" dirty="0"/>
+          </a:p>
+          <a:p>
+            <a:endParaRPr lang="pt-BR" dirty="0"/>
+          </a:p>
+        </p:txBody>
+      </p:sp>
+      <p:sp>
+        <p:nvSpPr>
+          <p:cNvPr id="4" name="Espaço Reservado para Número de Slide 3">
+            <a:extLst>
+              <a:ext uri="{FF2B5EF4-FFF2-40B4-BE49-F238E27FC236}">
+                <a16:creationId xmlns:a16="http://schemas.microsoft.com/office/drawing/2014/main" id="{40BFDCD6-A8E7-0731-F6F3-1BF7E277C084}"/>
               </a:ext>
             </a:extLst>
           </p:cNvPr>
@@ -20743,7 +21497,7 @@
     </p:spTree>
     <p:extLst>
       <p:ext uri="{BB962C8B-B14F-4D97-AF65-F5344CB8AC3E}">
-        <p14:creationId xmlns:p14="http://schemas.microsoft.com/office/powerpoint/2010/main" val="203766769"/>
+        <p14:creationId xmlns:p14="http://schemas.microsoft.com/office/powerpoint/2010/main" val="2496614450"/>
       </p:ext>
     </p:extLst>
   </p:cSld>
@@ -20758,7 +21512,13 @@
   <p:cSld>
     <p:spTree>
       <p:nvGrpSpPr>
-        <p:cNvPr id="1" name=""/>
+        <p:cNvPr id="1" name="">
+          <a:extLst>
+            <a:ext uri="{FF2B5EF4-FFF2-40B4-BE49-F238E27FC236}">
+              <a16:creationId xmlns:a16="http://schemas.microsoft.com/office/drawing/2014/main" id="{DB11668E-0075-013A-16DE-8AC4320CA69E}"/>
+            </a:ext>
+          </a:extLst>
+        </p:cNvPr>
         <p:cNvGrpSpPr/>
         <p:nvPr/>
       </p:nvGrpSpPr>
@@ -20775,7 +21535,7 @@
           <p:cNvPr id="2" name="Título 1">
             <a:extLst>
               <a:ext uri="{FF2B5EF4-FFF2-40B4-BE49-F238E27FC236}">
-                <a16:creationId xmlns:a16="http://schemas.microsoft.com/office/drawing/2014/main" id="{5C9FA4FB-089C-FD1B-6CC8-5E0BE55FD535}"/>
+                <a16:creationId xmlns:a16="http://schemas.microsoft.com/office/drawing/2014/main" id="{67550447-B55F-B687-0291-F4DAA1DB708E}"/>
               </a:ext>
             </a:extLst>
           </p:cNvPr>
@@ -20792,124 +21552,114 @@
           <a:lstStyle/>
           <a:p>
             <a:r>
+              <a:rPr lang="en-US" dirty="0"/>
+              <a:t>Turbo Boost</a:t>
+            </a:r>
+            <a:endParaRPr lang="pt-BR" dirty="0"/>
+          </a:p>
+        </p:txBody>
+      </p:sp>
+      <p:sp>
+        <p:nvSpPr>
+          <p:cNvPr id="3" name="Espaço Reservado para Conteúdo 2">
+            <a:extLst>
+              <a:ext uri="{FF2B5EF4-FFF2-40B4-BE49-F238E27FC236}">
+                <a16:creationId xmlns:a16="http://schemas.microsoft.com/office/drawing/2014/main" id="{4AAF4232-2E11-F2F3-791D-DA4834D46694}"/>
+              </a:ext>
+            </a:extLst>
+          </p:cNvPr>
+          <p:cNvSpPr>
+            <a:spLocks noGrp="1"/>
+          </p:cNvSpPr>
+          <p:nvPr>
+            <p:ph idx="1"/>
+          </p:nvPr>
+        </p:nvSpPr>
+        <p:spPr/>
+        <p:txBody>
+          <a:bodyPr>
+            <a:normAutofit/>
+          </a:bodyPr>
+          <a:lstStyle/>
+          <a:p>
+            <a:r>
               <a:rPr lang="en-US" dirty="0" err="1"/>
-              <a:t>Ferramental</a:t>
-            </a:r>
-            <a:endParaRPr lang="pt-BR" dirty="0"/>
-          </a:p>
-        </p:txBody>
-      </p:sp>
-      <p:sp>
-        <p:nvSpPr>
-          <p:cNvPr id="3" name="Espaço Reservado para Conteúdo 2">
-            <a:extLst>
-              <a:ext uri="{FF2B5EF4-FFF2-40B4-BE49-F238E27FC236}">
-                <a16:creationId xmlns:a16="http://schemas.microsoft.com/office/drawing/2014/main" id="{E9F06CCF-58A9-BED0-4929-ABCD164D3126}"/>
-              </a:ext>
-            </a:extLst>
-          </p:cNvPr>
-          <p:cNvSpPr>
-            <a:spLocks noGrp="1"/>
-          </p:cNvSpPr>
-          <p:nvPr>
-            <p:ph idx="1"/>
-          </p:nvPr>
-        </p:nvSpPr>
-        <p:spPr/>
-        <p:txBody>
-          <a:bodyPr>
-            <a:normAutofit fontScale="92500" lnSpcReduction="20000"/>
-          </a:bodyPr>
-          <a:lstStyle/>
-          <a:p>
-            <a:r>
-              <a:rPr lang="en-US" dirty="0"/>
-              <a:t>GIT</a:t>
-            </a:r>
-          </a:p>
-          <a:p>
-            <a:r>
-              <a:rPr lang="en-US" dirty="0"/>
-              <a:t>Python 3.13.7</a:t>
-            </a:r>
-          </a:p>
-          <a:p>
-            <a:pPr lvl="1"/>
-            <a:r>
-              <a:rPr lang="en-US" dirty="0"/>
-              <a:t>https://www.python.org/downloads/</a:t>
-            </a:r>
-          </a:p>
-          <a:p>
+              <a:t>Observou</a:t>
+            </a:r>
+            <a:r>
+              <a:rPr lang="en-US" dirty="0"/>
+              <a:t>-se que com Turbo Boost </a:t>
+            </a:r>
+            <a:r>
+              <a:rPr lang="en-US" b="1" dirty="0" err="1"/>
+              <a:t>desabilitado</a:t>
+            </a:r>
+            <a:r>
+              <a:rPr lang="en-US" dirty="0"/>
+              <a:t> a </a:t>
+            </a:r>
             <a:r>
               <a:rPr lang="en-US" dirty="0" err="1"/>
-              <a:t>Jupyter</a:t>
-            </a:r>
-            <a:r>
-              <a:rPr lang="en-US" dirty="0"/>
-              <a:t> Lab</a:t>
-            </a:r>
-          </a:p>
-          <a:p>
-            <a:pPr lvl="1"/>
-            <a:r>
-              <a:rPr lang="pt-BR" dirty="0">
-                <a:hlinkClick r:id="rId2"/>
-              </a:rPr>
-              <a:t>https://jupyter.org/install</a:t>
-            </a:r>
-            <a:endParaRPr lang="pt-BR" dirty="0"/>
-          </a:p>
-          <a:p>
-            <a:r>
-              <a:rPr lang="pt-BR" dirty="0"/>
-              <a:t>Bibliotecas Python</a:t>
-            </a:r>
-          </a:p>
-          <a:p>
-            <a:pPr lvl="1"/>
-            <a:r>
-              <a:rPr lang="pt-BR" dirty="0" err="1"/>
-              <a:t>Dask</a:t>
-            </a:r>
-            <a:endParaRPr lang="pt-BR" dirty="0"/>
-          </a:p>
-          <a:p>
-            <a:pPr lvl="1"/>
-            <a:r>
-              <a:rPr lang="pt-BR" dirty="0" err="1"/>
-              <a:t>Numpy</a:t>
-            </a:r>
-            <a:endParaRPr lang="pt-BR" dirty="0"/>
-          </a:p>
-          <a:p>
-            <a:pPr lvl="1"/>
-            <a:r>
-              <a:rPr lang="pt-BR" dirty="0" err="1"/>
-              <a:t>PyCryptodome</a:t>
-            </a:r>
-            <a:endParaRPr lang="pt-BR" dirty="0"/>
-          </a:p>
-          <a:p>
-            <a:pPr lvl="1"/>
-            <a:r>
-              <a:rPr lang="pt-BR" dirty="0" err="1"/>
-              <a:t>Statistics</a:t>
-            </a:r>
-            <a:endParaRPr lang="pt-BR" dirty="0"/>
-          </a:p>
-          <a:p>
-            <a:r>
-              <a:rPr lang="pt-BR" dirty="0"/>
-              <a:t>Outros (possíveis / em análise)</a:t>
-            </a:r>
-          </a:p>
-          <a:p>
-            <a:pPr lvl="1"/>
-            <a:r>
-              <a:rPr lang="pt-BR" dirty="0"/>
-              <a:t>Docker</a:t>
-            </a:r>
+              <a:t>frequência</a:t>
+            </a:r>
+            <a:r>
+              <a:rPr lang="en-US" dirty="0"/>
+              <a:t> </a:t>
+            </a:r>
+            <a:r>
+              <a:rPr lang="en-US" dirty="0" err="1"/>
+              <a:t>máxima</a:t>
+            </a:r>
+            <a:r>
+              <a:rPr lang="en-US" dirty="0"/>
+              <a:t> de </a:t>
+            </a:r>
+            <a:r>
+              <a:rPr lang="en-US" dirty="0" err="1"/>
+              <a:t>operação</a:t>
+            </a:r>
+            <a:r>
+              <a:rPr lang="en-US" dirty="0"/>
+              <a:t> de </a:t>
+            </a:r>
+            <a:r>
+              <a:rPr lang="en-US" dirty="0" err="1"/>
+              <a:t>núcleos</a:t>
+            </a:r>
+            <a:r>
+              <a:rPr lang="en-US" dirty="0"/>
+              <a:t> p-cores e e-cores </a:t>
+            </a:r>
+            <a:r>
+              <a:rPr lang="en-US" dirty="0" err="1"/>
+              <a:t>fica</a:t>
+            </a:r>
+            <a:r>
+              <a:rPr lang="en-US" dirty="0"/>
+              <a:t> </a:t>
+            </a:r>
+            <a:r>
+              <a:rPr lang="en-US" dirty="0" err="1"/>
+              <a:t>limitada</a:t>
+            </a:r>
+            <a:r>
+              <a:rPr lang="en-US" dirty="0"/>
+              <a:t> à </a:t>
+            </a:r>
+            <a:r>
+              <a:rPr lang="en-US" b="1" dirty="0" err="1"/>
+              <a:t>frequência</a:t>
+            </a:r>
+            <a:r>
+              <a:rPr lang="en-US" b="1" dirty="0"/>
+              <a:t> base</a:t>
+            </a:r>
+          </a:p>
+          <a:p>
+            <a:endParaRPr lang="en-US" b="1" dirty="0"/>
+          </a:p>
+          <a:p>
+            <a:endParaRPr lang="pt-BR" b="1" dirty="0"/>
           </a:p>
         </p:txBody>
       </p:sp>
@@ -20918,7 +21668,7 @@
           <p:cNvPr id="4" name="Espaço Reservado para Número de Slide 3">
             <a:extLst>
               <a:ext uri="{FF2B5EF4-FFF2-40B4-BE49-F238E27FC236}">
-                <a16:creationId xmlns:a16="http://schemas.microsoft.com/office/drawing/2014/main" id="{194175EB-C15A-C39D-9A1F-F1B14E3517F6}"/>
+                <a16:creationId xmlns:a16="http://schemas.microsoft.com/office/drawing/2014/main" id="{6B413FFD-B1A9-257B-7C4D-C8ACC2B23E6C}"/>
               </a:ext>
             </a:extLst>
           </p:cNvPr>
@@ -20942,10 +21692,75 @@
           </a:p>
         </p:txBody>
       </p:sp>
+      <p:pic>
+        <p:nvPicPr>
+          <p:cNvPr id="6" name="Imagem 5">
+            <a:extLst>
+              <a:ext uri="{FF2B5EF4-FFF2-40B4-BE49-F238E27FC236}">
+                <a16:creationId xmlns:a16="http://schemas.microsoft.com/office/drawing/2014/main" id="{BA3D6B9A-3600-017A-0732-7A7B6ACB3555}"/>
+              </a:ext>
+            </a:extLst>
+          </p:cNvPr>
+          <p:cNvPicPr>
+            <a:picLocks noChangeAspect="1"/>
+          </p:cNvPicPr>
+          <p:nvPr/>
+        </p:nvPicPr>
+        <p:blipFill>
+          <a:blip r:embed="rId2"/>
+          <a:stretch>
+            <a:fillRect/>
+          </a:stretch>
+        </p:blipFill>
+        <p:spPr>
+          <a:xfrm>
+            <a:off x="838201" y="3429001"/>
+            <a:ext cx="5835316" cy="2295652"/>
+          </a:xfrm>
+          <a:prstGeom prst="rect">
+            <a:avLst/>
+          </a:prstGeom>
+        </p:spPr>
+      </p:pic>
+      <p:sp>
+        <p:nvSpPr>
+          <p:cNvPr id="9" name="CaixaDeTexto 8">
+            <a:extLst>
+              <a:ext uri="{FF2B5EF4-FFF2-40B4-BE49-F238E27FC236}">
+                <a16:creationId xmlns:a16="http://schemas.microsoft.com/office/drawing/2014/main" id="{0DA22ACA-E9F2-8A62-4773-51A865F3B5F0}"/>
+              </a:ext>
+            </a:extLst>
+          </p:cNvPr>
+          <p:cNvSpPr txBox="1"/>
+          <p:nvPr/>
+        </p:nvSpPr>
+        <p:spPr>
+          <a:xfrm>
+            <a:off x="838199" y="5904040"/>
+            <a:ext cx="9930063" cy="646331"/>
+          </a:xfrm>
+          <a:prstGeom prst="rect">
+            <a:avLst/>
+          </a:prstGeom>
+          <a:noFill/>
+        </p:spPr>
+        <p:txBody>
+          <a:bodyPr wrap="square">
+            <a:spAutoFit/>
+          </a:bodyPr>
+          <a:lstStyle/>
+          <a:p>
+            <a:r>
+              <a:rPr lang="pt-BR" dirty="0"/>
+              <a:t>https://www.intel.com.br/content/www/br/pt/products/sku/236794/intel-core-i7-processor-14700t-33m-cache-up-to-5-20-ghz/specifications.html</a:t>
+            </a:r>
+          </a:p>
+        </p:txBody>
+      </p:sp>
     </p:spTree>
     <p:extLst>
       <p:ext uri="{BB962C8B-B14F-4D97-AF65-F5344CB8AC3E}">
-        <p14:creationId xmlns:p14="http://schemas.microsoft.com/office/powerpoint/2010/main" val="374058148"/>
+        <p14:creationId xmlns:p14="http://schemas.microsoft.com/office/powerpoint/2010/main" val="3072866178"/>
       </p:ext>
     </p:extLst>
   </p:cSld>
@@ -20977,7 +21792,7 @@
           <p:cNvPr id="2" name="Título 1">
             <a:extLst>
               <a:ext uri="{FF2B5EF4-FFF2-40B4-BE49-F238E27FC236}">
-                <a16:creationId xmlns:a16="http://schemas.microsoft.com/office/drawing/2014/main" id="{49D571F9-6704-88BA-44FC-145B09B5EEFD}"/>
+                <a16:creationId xmlns:a16="http://schemas.microsoft.com/office/drawing/2014/main" id="{5C9FA4FB-089C-FD1B-6CC8-5E0BE55FD535}"/>
               </a:ext>
             </a:extLst>
           </p:cNvPr>
@@ -20995,108 +21810,123 @@
           <a:p>
             <a:r>
               <a:rPr lang="en-US" dirty="0" err="1"/>
-              <a:t>Método</a:t>
-            </a:r>
-            <a:r>
-              <a:rPr lang="en-US" dirty="0"/>
-              <a:t> de </a:t>
-            </a:r>
+              <a:t>Ferramental</a:t>
+            </a:r>
+            <a:endParaRPr lang="pt-BR" dirty="0"/>
+          </a:p>
+        </p:txBody>
+      </p:sp>
+      <p:sp>
+        <p:nvSpPr>
+          <p:cNvPr id="3" name="Espaço Reservado para Conteúdo 2">
+            <a:extLst>
+              <a:ext uri="{FF2B5EF4-FFF2-40B4-BE49-F238E27FC236}">
+                <a16:creationId xmlns:a16="http://schemas.microsoft.com/office/drawing/2014/main" id="{E9F06CCF-58A9-BED0-4929-ABCD164D3126}"/>
+              </a:ext>
+            </a:extLst>
+          </p:cNvPr>
+          <p:cNvSpPr>
+            <a:spLocks noGrp="1"/>
+          </p:cNvSpPr>
+          <p:nvPr>
+            <p:ph idx="1"/>
+          </p:nvPr>
+        </p:nvSpPr>
+        <p:spPr/>
+        <p:txBody>
+          <a:bodyPr>
+            <a:normAutofit fontScale="92500" lnSpcReduction="20000"/>
+          </a:bodyPr>
+          <a:lstStyle/>
+          <a:p>
+            <a:r>
+              <a:rPr lang="en-US" dirty="0"/>
+              <a:t>GIT</a:t>
+            </a:r>
+          </a:p>
+          <a:p>
+            <a:r>
+              <a:rPr lang="en-US" dirty="0"/>
+              <a:t>Python 3.13.7</a:t>
+            </a:r>
+          </a:p>
+          <a:p>
+            <a:pPr lvl="1"/>
+            <a:r>
+              <a:rPr lang="en-US" dirty="0"/>
+              <a:t>https://www.python.org/downloads/</a:t>
+            </a:r>
+          </a:p>
+          <a:p>
             <a:r>
               <a:rPr lang="en-US" dirty="0" err="1"/>
-              <a:t>análise</a:t>
+              <a:t>Jupyter</a:t>
+            </a:r>
+            <a:r>
+              <a:rPr lang="en-US" dirty="0"/>
+              <a:t> Lab</a:t>
+            </a:r>
+          </a:p>
+          <a:p>
+            <a:pPr lvl="1"/>
+            <a:r>
+              <a:rPr lang="pt-BR" dirty="0">
+                <a:hlinkClick r:id="rId2"/>
+              </a:rPr>
+              <a:t>https://jupyter.org/install</a:t>
             </a:r>
             <a:endParaRPr lang="pt-BR" dirty="0"/>
           </a:p>
-        </p:txBody>
-      </p:sp>
-      <p:sp>
-        <p:nvSpPr>
-          <p:cNvPr id="3" name="Espaço Reservado para Conteúdo 2">
-            <a:extLst>
-              <a:ext uri="{FF2B5EF4-FFF2-40B4-BE49-F238E27FC236}">
-                <a16:creationId xmlns:a16="http://schemas.microsoft.com/office/drawing/2014/main" id="{50BF2030-B9AC-2259-71B3-AD3153350D86}"/>
-              </a:ext>
-            </a:extLst>
-          </p:cNvPr>
-          <p:cNvSpPr>
-            <a:spLocks noGrp="1"/>
-          </p:cNvSpPr>
-          <p:nvPr>
-            <p:ph idx="1"/>
-          </p:nvPr>
-        </p:nvSpPr>
-        <p:spPr/>
-        <p:txBody>
-          <a:bodyPr>
-            <a:normAutofit/>
-          </a:bodyPr>
-          <a:lstStyle/>
           <a:p>
             <a:r>
               <a:rPr lang="pt-BR" dirty="0"/>
-              <a:t>Método de </a:t>
-            </a:r>
-            <a:r>
-              <a:rPr lang="pt-BR" b="1" dirty="0"/>
-              <a:t>medição</a:t>
-            </a:r>
+              <a:t>Bibliotecas Python</a:t>
+            </a:r>
+          </a:p>
+          <a:p>
+            <a:pPr lvl="1"/>
+            <a:r>
+              <a:rPr lang="pt-BR" dirty="0" err="1"/>
+              <a:t>Dask</a:t>
+            </a:r>
+            <a:endParaRPr lang="pt-BR" dirty="0"/>
+          </a:p>
+          <a:p>
+            <a:pPr lvl="1"/>
+            <a:r>
+              <a:rPr lang="pt-BR" dirty="0" err="1"/>
+              <a:t>Numpy</a:t>
+            </a:r>
+            <a:endParaRPr lang="pt-BR" dirty="0"/>
+          </a:p>
+          <a:p>
+            <a:pPr lvl="1"/>
+            <a:r>
+              <a:rPr lang="pt-BR" dirty="0" err="1"/>
+              <a:t>PyCryptodome</a:t>
+            </a:r>
+            <a:endParaRPr lang="pt-BR" dirty="0"/>
+          </a:p>
+          <a:p>
+            <a:pPr lvl="1"/>
+            <a:r>
+              <a:rPr lang="pt-BR" dirty="0" err="1"/>
+              <a:t>Statistics</a:t>
+            </a:r>
+            <a:endParaRPr lang="pt-BR" dirty="0"/>
           </a:p>
           <a:p>
             <a:r>
               <a:rPr lang="pt-BR" dirty="0"/>
-              <a:t>Medição de tempo de execução da </a:t>
-            </a:r>
-            <a:r>
-              <a:rPr lang="pt-BR" b="1" dirty="0"/>
-              <a:t>rotina de computação</a:t>
-            </a:r>
-          </a:p>
-          <a:p>
+              <a:t>Outros (possíveis / em análise)</a:t>
+            </a:r>
+          </a:p>
+          <a:p>
+            <a:pPr lvl="1"/>
             <a:r>
               <a:rPr lang="pt-BR" dirty="0"/>
-              <a:t>Exclusões de medição de tempo</a:t>
-            </a:r>
-          </a:p>
-          <a:p>
-            <a:pPr lvl="1"/>
-            <a:r>
-              <a:rPr lang="pt-BR" dirty="0"/>
-              <a:t>Criação do </a:t>
-            </a:r>
-            <a:r>
-              <a:rPr lang="pt-BR" dirty="0" err="1"/>
-              <a:t>dataset</a:t>
-            </a:r>
-            <a:endParaRPr lang="pt-BR" dirty="0"/>
-          </a:p>
-          <a:p>
-            <a:pPr lvl="1"/>
-            <a:r>
-              <a:rPr lang="pt-BR" dirty="0"/>
-              <a:t>Leitura e carregamento do </a:t>
-            </a:r>
-            <a:r>
-              <a:rPr lang="pt-BR" dirty="0" err="1"/>
-              <a:t>dataset</a:t>
-            </a:r>
-            <a:endParaRPr lang="pt-BR" dirty="0"/>
-          </a:p>
-          <a:p>
-            <a:pPr lvl="1"/>
-            <a:r>
-              <a:rPr lang="pt-BR" dirty="0"/>
-              <a:t>Impressão do resultado e estatísticas</a:t>
-            </a:r>
-          </a:p>
-          <a:p>
-            <a:pPr lvl="1"/>
-            <a:r>
-              <a:rPr lang="pt-BR" dirty="0"/>
-              <a:t>Gravação dos resultados em arquivo</a:t>
-            </a:r>
-          </a:p>
-          <a:p>
-            <a:endParaRPr lang="pt-BR" dirty="0"/>
+              <a:t>Docker</a:t>
+            </a:r>
           </a:p>
         </p:txBody>
       </p:sp>
@@ -21105,7 +21935,7 @@
           <p:cNvPr id="4" name="Espaço Reservado para Número de Slide 3">
             <a:extLst>
               <a:ext uri="{FF2B5EF4-FFF2-40B4-BE49-F238E27FC236}">
-                <a16:creationId xmlns:a16="http://schemas.microsoft.com/office/drawing/2014/main" id="{170C9E90-043B-5B7C-76D7-344E8404D9F8}"/>
+                <a16:creationId xmlns:a16="http://schemas.microsoft.com/office/drawing/2014/main" id="{194175EB-C15A-C39D-9A1F-F1B14E3517F6}"/>
               </a:ext>
             </a:extLst>
           </p:cNvPr>
@@ -21132,7 +21962,7 @@
     </p:spTree>
     <p:extLst>
       <p:ext uri="{BB962C8B-B14F-4D97-AF65-F5344CB8AC3E}">
-        <p14:creationId xmlns:p14="http://schemas.microsoft.com/office/powerpoint/2010/main" val="288332579"/>
+        <p14:creationId xmlns:p14="http://schemas.microsoft.com/office/powerpoint/2010/main" val="374058148"/>
       </p:ext>
     </p:extLst>
   </p:cSld>
@@ -21164,7 +21994,7 @@
           <p:cNvPr id="2" name="Título 1">
             <a:extLst>
               <a:ext uri="{FF2B5EF4-FFF2-40B4-BE49-F238E27FC236}">
-                <a16:creationId xmlns:a16="http://schemas.microsoft.com/office/drawing/2014/main" id="{9C60400C-CDC4-82DD-D700-ECB48A0EF539}"/>
+                <a16:creationId xmlns:a16="http://schemas.microsoft.com/office/drawing/2014/main" id="{49D571F9-6704-88BA-44FC-145B09B5EEFD}"/>
               </a:ext>
             </a:extLst>
           </p:cNvPr>
@@ -21182,15 +22012,15 @@
           <a:p>
             <a:r>
               <a:rPr lang="en-US" dirty="0" err="1"/>
-              <a:t>Definição</a:t>
-            </a:r>
-            <a:r>
-              <a:rPr lang="en-US" dirty="0"/>
-              <a:t> das </a:t>
+              <a:t>Método</a:t>
+            </a:r>
+            <a:r>
+              <a:rPr lang="en-US" dirty="0"/>
+              <a:t> de </a:t>
             </a:r>
             <a:r>
               <a:rPr lang="en-US" dirty="0" err="1"/>
-              <a:t>métricas</a:t>
+              <a:t>análise</a:t>
             </a:r>
             <a:endParaRPr lang="pt-BR" dirty="0"/>
           </a:p>
@@ -21201,7 +22031,7 @@
           <p:cNvPr id="3" name="Espaço Reservado para Conteúdo 2">
             <a:extLst>
               <a:ext uri="{FF2B5EF4-FFF2-40B4-BE49-F238E27FC236}">
-                <a16:creationId xmlns:a16="http://schemas.microsoft.com/office/drawing/2014/main" id="{32B7976D-7A0B-673B-D81E-4C22B489FD31}"/>
+                <a16:creationId xmlns:a16="http://schemas.microsoft.com/office/drawing/2014/main" id="{50BF2030-B9AC-2259-71B3-AD3153350D86}"/>
               </a:ext>
             </a:extLst>
           </p:cNvPr>
@@ -21214,40 +22044,72 @@
         </p:nvSpPr>
         <p:spPr/>
         <p:txBody>
-          <a:bodyPr/>
+          <a:bodyPr>
+            <a:normAutofit/>
+          </a:bodyPr>
           <a:lstStyle/>
           <a:p>
             <a:r>
               <a:rPr lang="pt-BR" dirty="0"/>
-              <a:t>Métricas (derivadas do tempo de execução)</a:t>
+              <a:t>Método de </a:t>
+            </a:r>
+            <a:r>
+              <a:rPr lang="pt-BR" b="1" dirty="0"/>
+              <a:t>medição</a:t>
+            </a:r>
+          </a:p>
+          <a:p>
+            <a:r>
+              <a:rPr lang="pt-BR" dirty="0"/>
+              <a:t>Medição de tempo de execução da </a:t>
+            </a:r>
+            <a:r>
+              <a:rPr lang="pt-BR" b="1" dirty="0"/>
+              <a:t>rotina de computação</a:t>
+            </a:r>
+          </a:p>
+          <a:p>
+            <a:r>
+              <a:rPr lang="pt-BR" dirty="0"/>
+              <a:t>Exclusões de medição de tempo</a:t>
             </a:r>
           </a:p>
           <a:p>
             <a:pPr lvl="1"/>
             <a:r>
               <a:rPr lang="pt-BR" dirty="0"/>
-              <a:t>Média, Mediana</a:t>
-            </a:r>
+              <a:t>Criação do </a:t>
+            </a:r>
+            <a:r>
+              <a:rPr lang="pt-BR" dirty="0" err="1"/>
+              <a:t>dataset</a:t>
+            </a:r>
+            <a:endParaRPr lang="pt-BR" dirty="0"/>
           </a:p>
           <a:p>
             <a:pPr lvl="1"/>
             <a:r>
               <a:rPr lang="pt-BR" dirty="0"/>
-              <a:t>Desvio Padrão e Variância</a:t>
-            </a:r>
+              <a:t>Leitura e carregamento do </a:t>
+            </a:r>
+            <a:r>
+              <a:rPr lang="pt-BR" dirty="0" err="1"/>
+              <a:t>dataset</a:t>
+            </a:r>
+            <a:endParaRPr lang="pt-BR" dirty="0"/>
           </a:p>
           <a:p>
             <a:pPr lvl="1"/>
             <a:r>
               <a:rPr lang="pt-BR" dirty="0"/>
-              <a:t>Mínimo e Máximo</a:t>
+              <a:t>Impressão do resultado e estatísticas</a:t>
             </a:r>
           </a:p>
           <a:p>
             <a:pPr lvl="1"/>
             <a:r>
               <a:rPr lang="pt-BR" dirty="0"/>
-              <a:t>Outras? (Em análise)</a:t>
+              <a:t>Gravação dos resultados em arquivo</a:t>
             </a:r>
           </a:p>
           <a:p>
@@ -21260,7 +22122,7 @@
           <p:cNvPr id="4" name="Espaço Reservado para Número de Slide 3">
             <a:extLst>
               <a:ext uri="{FF2B5EF4-FFF2-40B4-BE49-F238E27FC236}">
-                <a16:creationId xmlns:a16="http://schemas.microsoft.com/office/drawing/2014/main" id="{38488746-F000-6773-12EF-4106DD2C4B64}"/>
+                <a16:creationId xmlns:a16="http://schemas.microsoft.com/office/drawing/2014/main" id="{170C9E90-043B-5B7C-76D7-344E8404D9F8}"/>
               </a:ext>
             </a:extLst>
           </p:cNvPr>
@@ -21287,7 +22149,7 @@
     </p:spTree>
     <p:extLst>
       <p:ext uri="{BB962C8B-B14F-4D97-AF65-F5344CB8AC3E}">
-        <p14:creationId xmlns:p14="http://schemas.microsoft.com/office/powerpoint/2010/main" val="1293801074"/>
+        <p14:creationId xmlns:p14="http://schemas.microsoft.com/office/powerpoint/2010/main" val="288332579"/>
       </p:ext>
     </p:extLst>
   </p:cSld>
@@ -21319,7 +22181,7 @@
           <p:cNvPr id="2" name="Título 1">
             <a:extLst>
               <a:ext uri="{FF2B5EF4-FFF2-40B4-BE49-F238E27FC236}">
-                <a16:creationId xmlns:a16="http://schemas.microsoft.com/office/drawing/2014/main" id="{087C22EE-688D-EE67-702B-BEDCFB759202}"/>
+                <a16:creationId xmlns:a16="http://schemas.microsoft.com/office/drawing/2014/main" id="{9C60400C-CDC4-82DD-D700-ECB48A0EF539}"/>
               </a:ext>
             </a:extLst>
           </p:cNvPr>
@@ -21337,11 +22199,15 @@
           <a:p>
             <a:r>
               <a:rPr lang="en-US" dirty="0" err="1"/>
-              <a:t>Cenários</a:t>
-            </a:r>
-            <a:r>
-              <a:rPr lang="en-US" dirty="0"/>
-              <a:t> de teste</a:t>
+              <a:t>Definição</a:t>
+            </a:r>
+            <a:r>
+              <a:rPr lang="en-US" dirty="0"/>
+              <a:t> das </a:t>
+            </a:r>
+            <a:r>
+              <a:rPr lang="en-US" dirty="0" err="1"/>
+              <a:t>métricas</a:t>
             </a:r>
             <a:endParaRPr lang="pt-BR" dirty="0"/>
           </a:p>
@@ -21352,7 +22218,7 @@
           <p:cNvPr id="3" name="Espaço Reservado para Conteúdo 2">
             <a:extLst>
               <a:ext uri="{FF2B5EF4-FFF2-40B4-BE49-F238E27FC236}">
-                <a16:creationId xmlns:a16="http://schemas.microsoft.com/office/drawing/2014/main" id="{D3AEABCF-1372-179C-2C9E-978C3050CBBE}"/>
+                <a16:creationId xmlns:a16="http://schemas.microsoft.com/office/drawing/2014/main" id="{32B7976D-7A0B-673B-D81E-4C22B489FD31}"/>
               </a:ext>
             </a:extLst>
           </p:cNvPr>
@@ -21365,162 +22231,41 @@
         </p:nvSpPr>
         <p:spPr/>
         <p:txBody>
-          <a:bodyPr>
-            <a:normAutofit fontScale="92500" lnSpcReduction="10000"/>
-          </a:bodyPr>
-          <a:lstStyle/>
-          <a:p>
-            <a:r>
-              <a:rPr lang="en-US" dirty="0"/>
-              <a:t>Cenário 1</a:t>
+          <a:bodyPr/>
+          <a:lstStyle/>
+          <a:p>
+            <a:r>
+              <a:rPr lang="pt-BR" dirty="0"/>
+              <a:t>Métricas (derivadas do tempo de execução)</a:t>
             </a:r>
           </a:p>
           <a:p>
             <a:pPr lvl="1"/>
             <a:r>
-              <a:rPr lang="en-US" dirty="0"/>
-              <a:t>P-cores </a:t>
-            </a:r>
-            <a:r>
-              <a:rPr lang="en-US" dirty="0" err="1"/>
-              <a:t>ativos</a:t>
-            </a:r>
-            <a:endParaRPr lang="en-US" dirty="0"/>
+              <a:rPr lang="pt-BR" dirty="0"/>
+              <a:t>Média, Mediana</a:t>
+            </a:r>
           </a:p>
           <a:p>
             <a:pPr lvl="1"/>
             <a:r>
-              <a:rPr lang="en-US" dirty="0"/>
-              <a:t>E-cores </a:t>
-            </a:r>
-            <a:r>
-              <a:rPr lang="en-US" dirty="0" err="1"/>
-              <a:t>ativos</a:t>
-            </a:r>
-            <a:endParaRPr lang="en-US" dirty="0"/>
+              <a:rPr lang="pt-BR" dirty="0"/>
+              <a:t>Desvio Padrão e Variância</a:t>
+            </a:r>
           </a:p>
           <a:p>
             <a:pPr lvl="1"/>
             <a:r>
-              <a:rPr lang="en-US" dirty="0"/>
-              <a:t>Hyper-Threading </a:t>
-            </a:r>
-            <a:r>
-              <a:rPr lang="en-US" dirty="0" err="1"/>
-              <a:t>ativo</a:t>
-            </a:r>
-            <a:endParaRPr lang="en-US" dirty="0"/>
-          </a:p>
-          <a:p>
-            <a:r>
-              <a:rPr lang="en-US" dirty="0"/>
-              <a:t>Cenário 2</a:t>
+              <a:rPr lang="pt-BR" dirty="0"/>
+              <a:t>Mínimo e Máximo</a:t>
             </a:r>
           </a:p>
           <a:p>
             <a:pPr lvl="1"/>
             <a:r>
-              <a:rPr lang="en-US" dirty="0"/>
-              <a:t>P-cores </a:t>
-            </a:r>
-            <a:r>
-              <a:rPr lang="en-US" dirty="0" err="1"/>
-              <a:t>ativos</a:t>
-            </a:r>
-            <a:endParaRPr lang="en-US" dirty="0"/>
-          </a:p>
-          <a:p>
-            <a:pPr lvl="1"/>
-            <a:r>
-              <a:rPr lang="en-US" dirty="0"/>
-              <a:t>E-cores </a:t>
-            </a:r>
-            <a:r>
-              <a:rPr lang="en-US" dirty="0" err="1">
-                <a:highlight>
-                  <a:srgbClr val="FF0000"/>
-                </a:highlight>
-              </a:rPr>
-              <a:t>inativos</a:t>
-            </a:r>
-            <a:endParaRPr lang="en-US" dirty="0">
-              <a:highlight>
-                <a:srgbClr val="FF0000"/>
-              </a:highlight>
-            </a:endParaRPr>
-          </a:p>
-          <a:p>
-            <a:pPr lvl="1"/>
-            <a:r>
-              <a:rPr lang="en-US" dirty="0"/>
-              <a:t>Hyper-Threading </a:t>
-            </a:r>
-            <a:r>
-              <a:rPr lang="en-US" dirty="0" err="1"/>
-              <a:t>ativo</a:t>
-            </a:r>
-            <a:endParaRPr lang="en-US" dirty="0"/>
-          </a:p>
-          <a:p>
-            <a:r>
-              <a:rPr lang="en-US" dirty="0"/>
-              <a:t>Cenário 3</a:t>
-            </a:r>
-          </a:p>
-          <a:p>
-            <a:pPr lvl="1"/>
-            <a:r>
-              <a:rPr lang="en-US" dirty="0"/>
-              <a:t>P-cores </a:t>
-            </a:r>
-            <a:r>
-              <a:rPr lang="en-US" dirty="0" err="1"/>
-              <a:t>ativos</a:t>
-            </a:r>
-            <a:endParaRPr lang="en-US" dirty="0"/>
-          </a:p>
-          <a:p>
-            <a:pPr lvl="1"/>
-            <a:r>
-              <a:rPr lang="en-US" dirty="0"/>
-              <a:t>E-cores </a:t>
-            </a:r>
-            <a:r>
-              <a:rPr lang="en-US" dirty="0" err="1">
-                <a:highlight>
-                  <a:srgbClr val="FF0000"/>
-                </a:highlight>
-              </a:rPr>
-              <a:t>inativos</a:t>
-            </a:r>
-            <a:endParaRPr lang="en-US" dirty="0">
-              <a:highlight>
-                <a:srgbClr val="FF0000"/>
-              </a:highlight>
-            </a:endParaRPr>
-          </a:p>
-          <a:p>
-            <a:pPr lvl="1"/>
-            <a:r>
-              <a:rPr lang="en-US" dirty="0"/>
-              <a:t>Hyper-Threading </a:t>
-            </a:r>
-            <a:r>
-              <a:rPr lang="en-US" dirty="0" err="1">
-                <a:highlight>
-                  <a:srgbClr val="FF0000"/>
-                </a:highlight>
-              </a:rPr>
-              <a:t>inativo</a:t>
-            </a:r>
-            <a:endParaRPr lang="en-US" dirty="0">
-              <a:highlight>
-                <a:srgbClr val="FF0000"/>
-              </a:highlight>
-            </a:endParaRPr>
-          </a:p>
-          <a:p>
-            <a:endParaRPr lang="en-US" dirty="0"/>
+              <a:rPr lang="pt-BR" dirty="0"/>
+              <a:t>Outras? (Em análise)</a:t>
+            </a:r>
           </a:p>
           <a:p>
             <a:endParaRPr lang="pt-BR" dirty="0"/>
@@ -21532,7 +22277,7 @@
           <p:cNvPr id="4" name="Espaço Reservado para Número de Slide 3">
             <a:extLst>
               <a:ext uri="{FF2B5EF4-FFF2-40B4-BE49-F238E27FC236}">
-                <a16:creationId xmlns:a16="http://schemas.microsoft.com/office/drawing/2014/main" id="{F0246EAD-246E-37B1-4782-6241F6DC1251}"/>
+                <a16:creationId xmlns:a16="http://schemas.microsoft.com/office/drawing/2014/main" id="{38488746-F000-6773-12EF-4106DD2C4B64}"/>
               </a:ext>
             </a:extLst>
           </p:cNvPr>
@@ -21559,7 +22304,7 @@
     </p:spTree>
     <p:extLst>
       <p:ext uri="{BB962C8B-B14F-4D97-AF65-F5344CB8AC3E}">
-        <p14:creationId xmlns:p14="http://schemas.microsoft.com/office/powerpoint/2010/main" val="3944873945"/>
+        <p14:creationId xmlns:p14="http://schemas.microsoft.com/office/powerpoint/2010/main" val="1293801074"/>
       </p:ext>
     </p:extLst>
   </p:cSld>
@@ -21591,7 +22336,7 @@
           <p:cNvPr id="2" name="Título 1">
             <a:extLst>
               <a:ext uri="{FF2B5EF4-FFF2-40B4-BE49-F238E27FC236}">
-                <a16:creationId xmlns:a16="http://schemas.microsoft.com/office/drawing/2014/main" id="{D638E47E-4525-5948-9638-224C05F4D96E}"/>
+                <a16:creationId xmlns:a16="http://schemas.microsoft.com/office/drawing/2014/main" id="{087C22EE-688D-EE67-702B-BEDCFB759202}"/>
               </a:ext>
             </a:extLst>
           </p:cNvPr>
@@ -21609,80 +22354,202 @@
           <a:p>
             <a:r>
               <a:rPr lang="en-US" dirty="0" err="1"/>
-              <a:t>Justificativa</a:t>
-            </a:r>
-            <a:r>
-              <a:rPr lang="en-US" dirty="0"/>
-              <a:t> das </a:t>
+              <a:t>Cenários</a:t>
+            </a:r>
+            <a:r>
+              <a:rPr lang="en-US" dirty="0"/>
+              <a:t> de teste</a:t>
+            </a:r>
+            <a:endParaRPr lang="pt-BR" dirty="0"/>
+          </a:p>
+        </p:txBody>
+      </p:sp>
+      <p:sp>
+        <p:nvSpPr>
+          <p:cNvPr id="3" name="Espaço Reservado para Conteúdo 2">
+            <a:extLst>
+              <a:ext uri="{FF2B5EF4-FFF2-40B4-BE49-F238E27FC236}">
+                <a16:creationId xmlns:a16="http://schemas.microsoft.com/office/drawing/2014/main" id="{D3AEABCF-1372-179C-2C9E-978C3050CBBE}"/>
+              </a:ext>
+            </a:extLst>
+          </p:cNvPr>
+          <p:cNvSpPr>
+            <a:spLocks noGrp="1"/>
+          </p:cNvSpPr>
+          <p:nvPr>
+            <p:ph idx="1"/>
+          </p:nvPr>
+        </p:nvSpPr>
+        <p:spPr/>
+        <p:txBody>
+          <a:bodyPr>
+            <a:normAutofit fontScale="92500" lnSpcReduction="10000"/>
+          </a:bodyPr>
+          <a:lstStyle/>
+          <a:p>
+            <a:r>
+              <a:rPr lang="en-US" dirty="0"/>
+              <a:t>Cenário 1</a:t>
+            </a:r>
+          </a:p>
+          <a:p>
+            <a:pPr lvl="1"/>
+            <a:r>
+              <a:rPr lang="en-US" dirty="0"/>
+              <a:t>P-cores </a:t>
             </a:r>
             <a:r>
               <a:rPr lang="en-US" dirty="0" err="1"/>
-              <a:t>escolhas</a:t>
-            </a:r>
+              <a:t>ativos</a:t>
+            </a:r>
+            <a:endParaRPr lang="en-US" dirty="0"/>
+          </a:p>
+          <a:p>
+            <a:pPr lvl="1"/>
+            <a:r>
+              <a:rPr lang="en-US" dirty="0"/>
+              <a:t>E-cores </a:t>
+            </a:r>
+            <a:r>
+              <a:rPr lang="en-US" dirty="0" err="1"/>
+              <a:t>ativos</a:t>
+            </a:r>
+            <a:endParaRPr lang="en-US" dirty="0"/>
+          </a:p>
+          <a:p>
+            <a:pPr lvl="1"/>
+            <a:r>
+              <a:rPr lang="en-US" dirty="0"/>
+              <a:t>Hyper-Threading </a:t>
+            </a:r>
+            <a:r>
+              <a:rPr lang="en-US" dirty="0" err="1"/>
+              <a:t>ativo</a:t>
+            </a:r>
+            <a:endParaRPr lang="en-US" dirty="0"/>
+          </a:p>
+          <a:p>
+            <a:r>
+              <a:rPr lang="en-US" dirty="0"/>
+              <a:t>Cenário 2</a:t>
+            </a:r>
+          </a:p>
+          <a:p>
+            <a:pPr lvl="1"/>
+            <a:r>
+              <a:rPr lang="en-US" dirty="0"/>
+              <a:t>P-cores </a:t>
+            </a:r>
+            <a:r>
+              <a:rPr lang="en-US" dirty="0" err="1"/>
+              <a:t>ativos</a:t>
+            </a:r>
+            <a:endParaRPr lang="en-US" dirty="0"/>
+          </a:p>
+          <a:p>
+            <a:pPr lvl="1"/>
+            <a:r>
+              <a:rPr lang="en-US" dirty="0"/>
+              <a:t>E-cores </a:t>
+            </a:r>
+            <a:r>
+              <a:rPr lang="en-US" dirty="0" err="1">
+                <a:highlight>
+                  <a:srgbClr val="FF0000"/>
+                </a:highlight>
+              </a:rPr>
+              <a:t>inativos</a:t>
+            </a:r>
+            <a:endParaRPr lang="en-US" dirty="0">
+              <a:highlight>
+                <a:srgbClr val="FF0000"/>
+              </a:highlight>
+            </a:endParaRPr>
+          </a:p>
+          <a:p>
+            <a:pPr lvl="1"/>
+            <a:r>
+              <a:rPr lang="en-US" dirty="0"/>
+              <a:t>Hyper-Threading </a:t>
+            </a:r>
+            <a:r>
+              <a:rPr lang="en-US" dirty="0" err="1"/>
+              <a:t>ativo</a:t>
+            </a:r>
+            <a:endParaRPr lang="en-US" dirty="0"/>
+          </a:p>
+          <a:p>
+            <a:r>
+              <a:rPr lang="en-US" dirty="0"/>
+              <a:t>Cenário 3</a:t>
+            </a:r>
+          </a:p>
+          <a:p>
+            <a:pPr lvl="1"/>
+            <a:r>
+              <a:rPr lang="en-US" dirty="0"/>
+              <a:t>P-cores </a:t>
+            </a:r>
+            <a:r>
+              <a:rPr lang="en-US" dirty="0" err="1"/>
+              <a:t>ativos</a:t>
+            </a:r>
+            <a:endParaRPr lang="en-US" dirty="0"/>
+          </a:p>
+          <a:p>
+            <a:pPr lvl="1"/>
+            <a:r>
+              <a:rPr lang="en-US" dirty="0"/>
+              <a:t>E-cores </a:t>
+            </a:r>
+            <a:r>
+              <a:rPr lang="en-US" dirty="0" err="1">
+                <a:highlight>
+                  <a:srgbClr val="FF0000"/>
+                </a:highlight>
+              </a:rPr>
+              <a:t>inativos</a:t>
+            </a:r>
+            <a:endParaRPr lang="en-US" dirty="0">
+              <a:highlight>
+                <a:srgbClr val="FF0000"/>
+              </a:highlight>
+            </a:endParaRPr>
+          </a:p>
+          <a:p>
+            <a:pPr lvl="1"/>
+            <a:r>
+              <a:rPr lang="en-US" dirty="0"/>
+              <a:t>Hyper-Threading </a:t>
+            </a:r>
+            <a:r>
+              <a:rPr lang="en-US" dirty="0" err="1">
+                <a:highlight>
+                  <a:srgbClr val="FF0000"/>
+                </a:highlight>
+              </a:rPr>
+              <a:t>inativo</a:t>
+            </a:r>
+            <a:endParaRPr lang="en-US" dirty="0">
+              <a:highlight>
+                <a:srgbClr val="FF0000"/>
+              </a:highlight>
+            </a:endParaRPr>
+          </a:p>
+          <a:p>
+            <a:endParaRPr lang="en-US" dirty="0"/>
+          </a:p>
+          <a:p>
             <a:endParaRPr lang="pt-BR" dirty="0"/>
           </a:p>
         </p:txBody>
       </p:sp>
       <p:sp>
         <p:nvSpPr>
-          <p:cNvPr id="3" name="Espaço Reservado para Conteúdo 2">
-            <a:extLst>
-              <a:ext uri="{FF2B5EF4-FFF2-40B4-BE49-F238E27FC236}">
-                <a16:creationId xmlns:a16="http://schemas.microsoft.com/office/drawing/2014/main" id="{8FC21D6B-2336-E263-BDBC-703F4DCAC887}"/>
-              </a:ext>
-            </a:extLst>
-          </p:cNvPr>
-          <p:cNvSpPr>
-            <a:spLocks noGrp="1"/>
-          </p:cNvSpPr>
-          <p:nvPr>
-            <p:ph idx="1"/>
-          </p:nvPr>
-        </p:nvSpPr>
-        <p:spPr/>
-        <p:txBody>
-          <a:bodyPr/>
-          <a:lstStyle/>
-          <a:p>
-            <a:r>
-              <a:rPr lang="pt-BR" dirty="0"/>
-              <a:t>Objeto computacional</a:t>
-            </a:r>
-          </a:p>
-          <a:p>
-            <a:pPr lvl="1"/>
-            <a:r>
-              <a:rPr lang="pt-BR" dirty="0"/>
-              <a:t>A escolha das duas cargas computacionais ocorreu, pois possuem implementações paralelas que permitirão sua análise em ambiente de multiprocessamento.</a:t>
-            </a:r>
-          </a:p>
-          <a:p>
-            <a:endParaRPr lang="pt-BR" dirty="0"/>
-          </a:p>
-          <a:p>
-            <a:r>
-              <a:rPr lang="pt-BR" dirty="0"/>
-              <a:t>Método</a:t>
-            </a:r>
-          </a:p>
-          <a:p>
-            <a:pPr lvl="1"/>
-            <a:r>
-              <a:rPr lang="pt-BR" dirty="0"/>
-              <a:t>Escolha do método de medição, visto que há acesso a um hardware que permita a execução de scripts para análise.</a:t>
-            </a:r>
-          </a:p>
-          <a:p>
-            <a:endParaRPr lang="pt-BR" dirty="0"/>
-          </a:p>
-        </p:txBody>
-      </p:sp>
-      <p:sp>
-        <p:nvSpPr>
           <p:cNvPr id="4" name="Espaço Reservado para Número de Slide 3">
             <a:extLst>
               <a:ext uri="{FF2B5EF4-FFF2-40B4-BE49-F238E27FC236}">
-                <a16:creationId xmlns:a16="http://schemas.microsoft.com/office/drawing/2014/main" id="{890B1DEA-6926-6415-EAB6-7D74B8855D39}"/>
+                <a16:creationId xmlns:a16="http://schemas.microsoft.com/office/drawing/2014/main" id="{F0246EAD-246E-37B1-4782-6241F6DC1251}"/>
               </a:ext>
             </a:extLst>
           </p:cNvPr>
@@ -21709,7 +22576,7 @@
     </p:spTree>
     <p:extLst>
       <p:ext uri="{BB962C8B-B14F-4D97-AF65-F5344CB8AC3E}">
-        <p14:creationId xmlns:p14="http://schemas.microsoft.com/office/powerpoint/2010/main" val="939074047"/>
+        <p14:creationId xmlns:p14="http://schemas.microsoft.com/office/powerpoint/2010/main" val="3944873945"/>
       </p:ext>
     </p:extLst>
   </p:cSld>
@@ -21741,7 +22608,7 @@
           <p:cNvPr id="2" name="Título 1">
             <a:extLst>
               <a:ext uri="{FF2B5EF4-FFF2-40B4-BE49-F238E27FC236}">
-                <a16:creationId xmlns:a16="http://schemas.microsoft.com/office/drawing/2014/main" id="{A66112D4-7AEF-8961-9586-ABE3196D77CD}"/>
+                <a16:creationId xmlns:a16="http://schemas.microsoft.com/office/drawing/2014/main" id="{D638E47E-4525-5948-9638-224C05F4D96E}"/>
               </a:ext>
             </a:extLst>
           </p:cNvPr>
@@ -21759,56 +22626,80 @@
           <a:p>
             <a:r>
               <a:rPr lang="en-US" dirty="0" err="1"/>
-              <a:t>Cronograma</a:t>
-            </a:r>
-            <a:r>
-              <a:rPr lang="en-US" dirty="0"/>
-              <a:t> </a:t>
+              <a:t>Justificativa</a:t>
+            </a:r>
+            <a:r>
+              <a:rPr lang="en-US" dirty="0"/>
+              <a:t> das </a:t>
             </a:r>
             <a:r>
               <a:rPr lang="en-US" dirty="0" err="1"/>
-              <a:t>preliminar</a:t>
+              <a:t>escolhas</a:t>
             </a:r>
             <a:endParaRPr lang="pt-BR" dirty="0"/>
           </a:p>
         </p:txBody>
       </p:sp>
-      <p:pic>
-        <p:nvPicPr>
-          <p:cNvPr id="9" name="Imagem 8">
-            <a:extLst>
-              <a:ext uri="{FF2B5EF4-FFF2-40B4-BE49-F238E27FC236}">
-                <a16:creationId xmlns:a16="http://schemas.microsoft.com/office/drawing/2014/main" id="{6EFCAF29-4DCD-E7C0-2352-0522D143317F}"/>
-              </a:ext>
-            </a:extLst>
-          </p:cNvPr>
-          <p:cNvPicPr>
-            <a:picLocks noChangeAspect="1"/>
-          </p:cNvPicPr>
-          <p:nvPr/>
-        </p:nvPicPr>
-        <p:blipFill>
-          <a:blip r:embed="rId2"/>
-          <a:stretch>
-            <a:fillRect/>
-          </a:stretch>
-        </p:blipFill>
-        <p:spPr>
-          <a:xfrm>
-            <a:off x="406175" y="1863408"/>
-            <a:ext cx="11379650" cy="4263072"/>
-          </a:xfrm>
-          <a:prstGeom prst="rect">
-            <a:avLst/>
-          </a:prstGeom>
-        </p:spPr>
-      </p:pic>
-      <p:sp>
-        <p:nvSpPr>
-          <p:cNvPr id="10" name="Espaço Reservado para Número de Slide 9">
-            <a:extLst>
-              <a:ext uri="{FF2B5EF4-FFF2-40B4-BE49-F238E27FC236}">
-                <a16:creationId xmlns:a16="http://schemas.microsoft.com/office/drawing/2014/main" id="{B80C17B3-F507-5C11-B4B7-9D827CD9B26D}"/>
+      <p:sp>
+        <p:nvSpPr>
+          <p:cNvPr id="3" name="Espaço Reservado para Conteúdo 2">
+            <a:extLst>
+              <a:ext uri="{FF2B5EF4-FFF2-40B4-BE49-F238E27FC236}">
+                <a16:creationId xmlns:a16="http://schemas.microsoft.com/office/drawing/2014/main" id="{8FC21D6B-2336-E263-BDBC-703F4DCAC887}"/>
+              </a:ext>
+            </a:extLst>
+          </p:cNvPr>
+          <p:cNvSpPr>
+            <a:spLocks noGrp="1"/>
+          </p:cNvSpPr>
+          <p:nvPr>
+            <p:ph idx="1"/>
+          </p:nvPr>
+        </p:nvSpPr>
+        <p:spPr/>
+        <p:txBody>
+          <a:bodyPr/>
+          <a:lstStyle/>
+          <a:p>
+            <a:r>
+              <a:rPr lang="pt-BR" dirty="0"/>
+              <a:t>Objeto computacional</a:t>
+            </a:r>
+          </a:p>
+          <a:p>
+            <a:pPr lvl="1"/>
+            <a:r>
+              <a:rPr lang="pt-BR" dirty="0"/>
+              <a:t>A escolha das duas cargas computacionais ocorreu, pois possuem implementações paralelas que permitirão sua análise em ambiente de multiprocessamento.</a:t>
+            </a:r>
+          </a:p>
+          <a:p>
+            <a:endParaRPr lang="pt-BR" dirty="0"/>
+          </a:p>
+          <a:p>
+            <a:r>
+              <a:rPr lang="pt-BR" dirty="0"/>
+              <a:t>Método</a:t>
+            </a:r>
+          </a:p>
+          <a:p>
+            <a:pPr lvl="1"/>
+            <a:r>
+              <a:rPr lang="pt-BR" dirty="0"/>
+              <a:t>Escolha do método de medição, visto que há acesso a um hardware que permita a execução de scripts para análise.</a:t>
+            </a:r>
+          </a:p>
+          <a:p>
+            <a:endParaRPr lang="pt-BR" dirty="0"/>
+          </a:p>
+        </p:txBody>
+      </p:sp>
+      <p:sp>
+        <p:nvSpPr>
+          <p:cNvPr id="4" name="Espaço Reservado para Número de Slide 3">
+            <a:extLst>
+              <a:ext uri="{FF2B5EF4-FFF2-40B4-BE49-F238E27FC236}">
+                <a16:creationId xmlns:a16="http://schemas.microsoft.com/office/drawing/2014/main" id="{890B1DEA-6926-6415-EAB6-7D74B8855D39}"/>
               </a:ext>
             </a:extLst>
           </p:cNvPr>
@@ -21835,7 +22726,7 @@
     </p:spTree>
     <p:extLst>
       <p:ext uri="{BB962C8B-B14F-4D97-AF65-F5344CB8AC3E}">
-        <p14:creationId xmlns:p14="http://schemas.microsoft.com/office/powerpoint/2010/main" val="1117785298"/>
+        <p14:creationId xmlns:p14="http://schemas.microsoft.com/office/powerpoint/2010/main" val="939074047"/>
       </p:ext>
     </p:extLst>
   </p:cSld>
@@ -21867,7 +22758,7 @@
           <p:cNvPr id="2" name="Título 1">
             <a:extLst>
               <a:ext uri="{FF2B5EF4-FFF2-40B4-BE49-F238E27FC236}">
-                <a16:creationId xmlns:a16="http://schemas.microsoft.com/office/drawing/2014/main" id="{D4077F69-9DD3-B8A0-3252-7B6141DB285B}"/>
+                <a16:creationId xmlns:a16="http://schemas.microsoft.com/office/drawing/2014/main" id="{A66112D4-7AEF-8961-9586-ABE3196D77CD}"/>
               </a:ext>
             </a:extLst>
           </p:cNvPr>
@@ -21885,195 +22776,56 @@
           <a:p>
             <a:r>
               <a:rPr lang="en-US" dirty="0" err="1"/>
-              <a:t>Referências</a:t>
+              <a:t>Cronograma</a:t>
+            </a:r>
+            <a:r>
+              <a:rPr lang="en-US" dirty="0"/>
+              <a:t> </a:t>
+            </a:r>
+            <a:r>
+              <a:rPr lang="en-US" dirty="0" err="1"/>
+              <a:t>preliminar</a:t>
             </a:r>
             <a:endParaRPr lang="pt-BR" dirty="0"/>
           </a:p>
         </p:txBody>
       </p:sp>
-      <p:sp>
-        <p:nvSpPr>
-          <p:cNvPr id="3" name="Espaço Reservado para Conteúdo 2">
-            <a:extLst>
-              <a:ext uri="{FF2B5EF4-FFF2-40B4-BE49-F238E27FC236}">
-                <a16:creationId xmlns:a16="http://schemas.microsoft.com/office/drawing/2014/main" id="{06E409B8-D47B-AAF7-986E-43C23519D4D4}"/>
-              </a:ext>
-            </a:extLst>
-          </p:cNvPr>
-          <p:cNvSpPr>
-            <a:spLocks noGrp="1"/>
-          </p:cNvSpPr>
-          <p:nvPr>
-            <p:ph idx="1"/>
-          </p:nvPr>
-        </p:nvSpPr>
-        <p:spPr/>
-        <p:txBody>
-          <a:bodyPr>
-            <a:normAutofit/>
-          </a:bodyPr>
-          <a:lstStyle/>
-          <a:p>
-            <a:pPr marL="342900" indent="-342900">
-              <a:buAutoNum type="arabicPeriod"/>
-            </a:pPr>
-            <a:r>
-              <a:rPr lang="pt-BR" sz="1800" dirty="0"/>
-              <a:t>Como os Processadores Intel® Core™ Funcionam. </a:t>
-            </a:r>
-            <a:r>
-              <a:rPr lang="en-US" sz="1800" dirty="0"/>
-              <a:t> </a:t>
-            </a:r>
-            <a:r>
-              <a:rPr lang="en-US" sz="1800" dirty="0">
-                <a:hlinkClick r:id="rId2"/>
-              </a:rPr>
-              <a:t>https://www.intel.com.br/content/www/br/pt/gaming/resources/how-hybrid-design-works.html</a:t>
-            </a:r>
-            <a:endParaRPr lang="en-US" sz="1800" dirty="0"/>
-          </a:p>
-          <a:p>
-            <a:pPr marL="342900" indent="-342900">
-              <a:buAutoNum type="arabicPeriod"/>
-            </a:pPr>
-            <a:r>
-              <a:rPr lang="pt-BR" sz="1800" dirty="0"/>
-              <a:t>Produtos com denominação anterior Raptor Lake. </a:t>
-            </a:r>
-            <a:r>
-              <a:rPr lang="en-US" sz="1800" dirty="0">
-                <a:hlinkClick r:id="rId3"/>
-              </a:rPr>
-              <a:t>https://www.intel.com.br/content/www/br/pt/ark/products/codename/215599/products-formerly-raptor-lake.html#@Desktop</a:t>
-            </a:r>
-            <a:endParaRPr lang="en-US" sz="1800" dirty="0"/>
-          </a:p>
-          <a:p>
-            <a:pPr marL="342900" indent="-342900">
-              <a:buFont typeface="Arial" panose="020B0604020202020204" pitchFamily="34" charset="0"/>
-              <a:buAutoNum type="arabicPeriod"/>
-            </a:pPr>
-            <a:r>
-              <a:rPr lang="en-US" sz="1800" dirty="0"/>
-              <a:t>What Is Hyper-Threading? </a:t>
-            </a:r>
-            <a:r>
-              <a:rPr lang="en-US" sz="1800" dirty="0">
-                <a:hlinkClick r:id="rId4"/>
-              </a:rPr>
-              <a:t>https://www.intel.com/content/www/us/en/gaming/resources/hyper-threading.html</a:t>
-            </a:r>
-            <a:endParaRPr lang="en-US" sz="1800" dirty="0"/>
-          </a:p>
-          <a:p>
-            <a:pPr marL="342900" indent="-342900">
-              <a:buAutoNum type="arabicPeriod"/>
-            </a:pPr>
-            <a:r>
-              <a:rPr lang="pt-BR" sz="1800" dirty="0"/>
-              <a:t>O que é e como funciona o Thread </a:t>
-            </a:r>
-            <a:r>
-              <a:rPr lang="pt-BR" sz="1800" dirty="0" err="1"/>
-              <a:t>Director</a:t>
-            </a:r>
-            <a:r>
-              <a:rPr lang="pt-BR" sz="1800" dirty="0"/>
-              <a:t> da Intel? </a:t>
-            </a:r>
-            <a:r>
-              <a:rPr lang="en-US" sz="1800" dirty="0">
-                <a:hlinkClick r:id="rId5"/>
-              </a:rPr>
-              <a:t>https://canaltech.com.br/hardware/o-que-e-e-como-funciona-o-thread-director-da-intel/</a:t>
-            </a:r>
-            <a:endParaRPr lang="en-US" sz="1800" dirty="0"/>
-          </a:p>
-          <a:p>
-            <a:pPr marL="342900" indent="-342900">
-              <a:buAutoNum type="arabicPeriod"/>
-            </a:pPr>
-            <a:r>
-              <a:rPr lang="pt-BR" sz="1800" dirty="0"/>
-              <a:t>Compreendendo os modos de criptografia AES: AES-GCM, AES-CBC, AES-CTR. </a:t>
-            </a:r>
-            <a:r>
-              <a:rPr lang="en-US" sz="1800" dirty="0">
-                <a:hlinkClick r:id="rId6"/>
-              </a:rPr>
-              <a:t>https://www.haikel-fazzani.eu.org/blog/post/aes-encryption-modes-gcm-cbc-ctr</a:t>
-            </a:r>
-            <a:endParaRPr lang="en-US" sz="1800" dirty="0"/>
-          </a:p>
-          <a:p>
-            <a:pPr marL="342900" indent="-342900">
-              <a:buAutoNum type="arabicPeriod"/>
-            </a:pPr>
-            <a:r>
-              <a:rPr lang="en-US" sz="1800" dirty="0" err="1"/>
-              <a:t>PyCryptodome’s</a:t>
-            </a:r>
-            <a:r>
-              <a:rPr lang="en-US" sz="1800" dirty="0"/>
-              <a:t> documentation. </a:t>
-            </a:r>
-            <a:r>
-              <a:rPr lang="en-US" sz="1800" dirty="0">
-                <a:hlinkClick r:id="rId7"/>
-              </a:rPr>
-              <a:t>https://www.pycryptodome.org/</a:t>
-            </a:r>
-            <a:endParaRPr lang="en-US" sz="1800" dirty="0"/>
-          </a:p>
-          <a:p>
-            <a:pPr marL="342900" indent="-342900">
-              <a:buAutoNum type="arabicPeriod"/>
-            </a:pPr>
-            <a:r>
-              <a:rPr lang="pt-BR" sz="1800" dirty="0"/>
-              <a:t>Algoritmo de multiplicação de matrizes. </a:t>
-            </a:r>
-            <a:r>
-              <a:rPr lang="en-US" sz="1800" dirty="0">
-                <a:hlinkClick r:id="rId8"/>
-              </a:rPr>
-              <a:t>https://en.wikipedia.org/wiki/Matrix_multiplication_algorithm</a:t>
-            </a:r>
-            <a:endParaRPr lang="en-US" sz="1800" dirty="0"/>
-          </a:p>
-          <a:p>
-            <a:pPr marL="342900" indent="-342900">
-              <a:buAutoNum type="arabicPeriod"/>
-            </a:pPr>
-            <a:endParaRPr lang="en-US" sz="1800" dirty="0"/>
-          </a:p>
-          <a:p>
-            <a:pPr marL="342900" indent="-342900">
-              <a:buAutoNum type="arabicPeriod"/>
-            </a:pPr>
-            <a:endParaRPr lang="en-US" sz="1800" dirty="0"/>
-          </a:p>
-          <a:p>
-            <a:pPr marL="342900" indent="-342900">
-              <a:buAutoNum type="arabicPeriod"/>
-            </a:pPr>
-            <a:endParaRPr lang="en-US" sz="1800" dirty="0"/>
-          </a:p>
-          <a:p>
-            <a:pPr marL="342900" indent="-342900">
-              <a:buAutoNum type="arabicPeriod"/>
-            </a:pPr>
-            <a:endParaRPr lang="pt-BR" sz="1800" dirty="0"/>
-          </a:p>
-        </p:txBody>
-      </p:sp>
-      <p:sp>
-        <p:nvSpPr>
-          <p:cNvPr id="4" name="Espaço Reservado para Número de Slide 3">
-            <a:extLst>
-              <a:ext uri="{FF2B5EF4-FFF2-40B4-BE49-F238E27FC236}">
-                <a16:creationId xmlns:a16="http://schemas.microsoft.com/office/drawing/2014/main" id="{B6363A04-88A9-FC99-A07C-58A6BA917481}"/>
+      <p:pic>
+        <p:nvPicPr>
+          <p:cNvPr id="9" name="Imagem 8">
+            <a:extLst>
+              <a:ext uri="{FF2B5EF4-FFF2-40B4-BE49-F238E27FC236}">
+                <a16:creationId xmlns:a16="http://schemas.microsoft.com/office/drawing/2014/main" id="{6EFCAF29-4DCD-E7C0-2352-0522D143317F}"/>
+              </a:ext>
+            </a:extLst>
+          </p:cNvPr>
+          <p:cNvPicPr>
+            <a:picLocks noChangeAspect="1"/>
+          </p:cNvPicPr>
+          <p:nvPr/>
+        </p:nvPicPr>
+        <p:blipFill>
+          <a:blip r:embed="rId2"/>
+          <a:stretch>
+            <a:fillRect/>
+          </a:stretch>
+        </p:blipFill>
+        <p:spPr>
+          <a:xfrm>
+            <a:off x="406175" y="1863408"/>
+            <a:ext cx="11379650" cy="4263072"/>
+          </a:xfrm>
+          <a:prstGeom prst="rect">
+            <a:avLst/>
+          </a:prstGeom>
+        </p:spPr>
+      </p:pic>
+      <p:sp>
+        <p:nvSpPr>
+          <p:cNvPr id="10" name="Espaço Reservado para Número de Slide 9">
+            <a:extLst>
+              <a:ext uri="{FF2B5EF4-FFF2-40B4-BE49-F238E27FC236}">
+                <a16:creationId xmlns:a16="http://schemas.microsoft.com/office/drawing/2014/main" id="{B80C17B3-F507-5C11-B4B7-9D827CD9B26D}"/>
               </a:ext>
             </a:extLst>
           </p:cNvPr>
@@ -22100,7 +22852,7 @@
     </p:spTree>
     <p:extLst>
       <p:ext uri="{BB962C8B-B14F-4D97-AF65-F5344CB8AC3E}">
-        <p14:creationId xmlns:p14="http://schemas.microsoft.com/office/powerpoint/2010/main" val="676808302"/>
+        <p14:creationId xmlns:p14="http://schemas.microsoft.com/office/powerpoint/2010/main" val="1117785298"/>
       </p:ext>
     </p:extLst>
   </p:cSld>
@@ -22175,78 +22927,57 @@
         <p:spPr/>
         <p:txBody>
           <a:bodyPr>
-            <a:normAutofit fontScale="92500" lnSpcReduction="20000"/>
+            <a:normAutofit/>
           </a:bodyPr>
           <a:lstStyle/>
           <a:p>
             <a:r>
               <a:rPr lang="en-US" dirty="0" err="1"/>
-              <a:t>Objetivo</a:t>
+              <a:t>Recapitulação</a:t>
             </a:r>
             <a:endParaRPr lang="en-US" dirty="0"/>
           </a:p>
           <a:p>
             <a:r>
+              <a:rPr lang="en-US" dirty="0"/>
+              <a:t>Novas </a:t>
+            </a:r>
+            <a:r>
               <a:rPr lang="en-US" dirty="0" err="1"/>
-              <a:t>Objeto</a:t>
-            </a:r>
-            <a:r>
-              <a:rPr lang="en-US" dirty="0"/>
-              <a:t> </a:t>
+              <a:t>Decisões</a:t>
+            </a:r>
+            <a:r>
+              <a:rPr lang="en-US" dirty="0"/>
+              <a:t> de </a:t>
             </a:r>
             <a:r>
               <a:rPr lang="en-US" dirty="0" err="1"/>
-              <a:t>computacional</a:t>
+              <a:t>Projeto</a:t>
             </a:r>
             <a:endParaRPr lang="en-US" dirty="0"/>
           </a:p>
           <a:p>
             <a:r>
-              <a:rPr lang="pt-BR" dirty="0"/>
-              <a:t>Ambiente</a:t>
-            </a:r>
-          </a:p>
-          <a:p>
-            <a:r>
-              <a:rPr lang="pt-BR" dirty="0"/>
-              <a:t>Ferramental</a:t>
-            </a:r>
-          </a:p>
-          <a:p>
-            <a:r>
-              <a:rPr lang="pt-BR" dirty="0"/>
-              <a:t>Método de análise</a:t>
-            </a:r>
-          </a:p>
-          <a:p>
-            <a:r>
-              <a:rPr lang="pt-BR" dirty="0"/>
-              <a:t>Definição das métricas </a:t>
-            </a:r>
-          </a:p>
-          <a:p>
-            <a:r>
-              <a:rPr lang="pt-BR" dirty="0"/>
-              <a:t>Cenários de teste</a:t>
-            </a:r>
-          </a:p>
-          <a:p>
-            <a:r>
-              <a:rPr lang="pt-BR" dirty="0"/>
-              <a:t>Justificativa das escolhas</a:t>
-            </a:r>
-          </a:p>
-          <a:p>
-            <a:r>
-              <a:rPr lang="pt-BR" dirty="0"/>
-              <a:t>Cronograma Preliminar</a:t>
-            </a:r>
-          </a:p>
-          <a:p>
-            <a:r>
-              <a:rPr lang="pt-BR" dirty="0"/>
-              <a:t>Referências</a:t>
-            </a:r>
+              <a:rPr lang="en-US" dirty="0"/>
+              <a:t>Turbo Boost</a:t>
+            </a:r>
+          </a:p>
+          <a:p>
+            <a:r>
+              <a:rPr lang="en-US" dirty="0"/>
+              <a:t>Teste de </a:t>
+            </a:r>
+            <a:r>
+              <a:rPr lang="en-US" dirty="0" err="1"/>
+              <a:t>Frequência</a:t>
+            </a:r>
+            <a:r>
+              <a:rPr lang="en-US" dirty="0"/>
+              <a:t> de CPU</a:t>
+            </a:r>
+          </a:p>
+          <a:p>
+            <a:endParaRPr lang="pt-BR" dirty="0"/>
           </a:p>
         </p:txBody>
       </p:sp>
@@ -22293,6 +23024,271 @@
 </file>
 
 <file path=ppt/slides/slide20.xml><?xml version="1.0" encoding="utf-8"?>
+<p:sld xmlns:a="http://schemas.openxmlformats.org/drawingml/2006/main" xmlns:r="http://schemas.openxmlformats.org/officeDocument/2006/relationships" xmlns:p="http://schemas.openxmlformats.org/presentationml/2006/main">
+  <p:cSld>
+    <p:spTree>
+      <p:nvGrpSpPr>
+        <p:cNvPr id="1" name=""/>
+        <p:cNvGrpSpPr/>
+        <p:nvPr/>
+      </p:nvGrpSpPr>
+      <p:grpSpPr>
+        <a:xfrm>
+          <a:off x="0" y="0"/>
+          <a:ext cx="0" cy="0"/>
+          <a:chOff x="0" y="0"/>
+          <a:chExt cx="0" cy="0"/>
+        </a:xfrm>
+      </p:grpSpPr>
+      <p:sp>
+        <p:nvSpPr>
+          <p:cNvPr id="2" name="Título 1">
+            <a:extLst>
+              <a:ext uri="{FF2B5EF4-FFF2-40B4-BE49-F238E27FC236}">
+                <a16:creationId xmlns:a16="http://schemas.microsoft.com/office/drawing/2014/main" id="{D4077F69-9DD3-B8A0-3252-7B6141DB285B}"/>
+              </a:ext>
+            </a:extLst>
+          </p:cNvPr>
+          <p:cNvSpPr>
+            <a:spLocks noGrp="1"/>
+          </p:cNvSpPr>
+          <p:nvPr>
+            <p:ph type="title"/>
+          </p:nvPr>
+        </p:nvSpPr>
+        <p:spPr/>
+        <p:txBody>
+          <a:bodyPr/>
+          <a:lstStyle/>
+          <a:p>
+            <a:r>
+              <a:rPr lang="en-US" dirty="0" err="1"/>
+              <a:t>Referências</a:t>
+            </a:r>
+            <a:endParaRPr lang="pt-BR" dirty="0"/>
+          </a:p>
+        </p:txBody>
+      </p:sp>
+      <p:sp>
+        <p:nvSpPr>
+          <p:cNvPr id="3" name="Espaço Reservado para Conteúdo 2">
+            <a:extLst>
+              <a:ext uri="{FF2B5EF4-FFF2-40B4-BE49-F238E27FC236}">
+                <a16:creationId xmlns:a16="http://schemas.microsoft.com/office/drawing/2014/main" id="{06E409B8-D47B-AAF7-986E-43C23519D4D4}"/>
+              </a:ext>
+            </a:extLst>
+          </p:cNvPr>
+          <p:cNvSpPr>
+            <a:spLocks noGrp="1"/>
+          </p:cNvSpPr>
+          <p:nvPr>
+            <p:ph idx="1"/>
+          </p:nvPr>
+        </p:nvSpPr>
+        <p:spPr/>
+        <p:txBody>
+          <a:bodyPr>
+            <a:normAutofit/>
+          </a:bodyPr>
+          <a:lstStyle/>
+          <a:p>
+            <a:pPr marL="342900" indent="-342900">
+              <a:buAutoNum type="arabicPeriod"/>
+            </a:pPr>
+            <a:r>
+              <a:rPr lang="pt-BR" sz="1800" dirty="0"/>
+              <a:t>Como os Processadores Intel® Core™ Funcionam. </a:t>
+            </a:r>
+            <a:r>
+              <a:rPr lang="en-US" sz="1800" dirty="0"/>
+              <a:t> </a:t>
+            </a:r>
+            <a:r>
+              <a:rPr lang="en-US" sz="1800" dirty="0">
+                <a:hlinkClick r:id="rId2"/>
+              </a:rPr>
+              <a:t>https://www.intel.com.br/content/www/br/pt/gaming/resources/how-hybrid-design-works.html</a:t>
+            </a:r>
+            <a:endParaRPr lang="en-US" sz="1800" dirty="0"/>
+          </a:p>
+          <a:p>
+            <a:pPr marL="342900" indent="-342900">
+              <a:buAutoNum type="arabicPeriod"/>
+            </a:pPr>
+            <a:r>
+              <a:rPr lang="pt-BR" sz="1800" dirty="0"/>
+              <a:t>Produtos com denominação anterior Raptor Lake. </a:t>
+            </a:r>
+            <a:r>
+              <a:rPr lang="en-US" sz="1800" dirty="0">
+                <a:hlinkClick r:id="rId3"/>
+              </a:rPr>
+              <a:t>https://www.intel.com.br/content/www/br/pt/ark/products/codename/215599/products-formerly-raptor-lake.html#@Desktop</a:t>
+            </a:r>
+            <a:endParaRPr lang="en-US" sz="1800" dirty="0"/>
+          </a:p>
+          <a:p>
+            <a:pPr marL="342900" indent="-342900">
+              <a:buFont typeface="Arial" panose="020B0604020202020204" pitchFamily="34" charset="0"/>
+              <a:buAutoNum type="arabicPeriod"/>
+            </a:pPr>
+            <a:r>
+              <a:rPr lang="en-US" sz="1800" dirty="0"/>
+              <a:t>What Is Hyper-Threading? </a:t>
+            </a:r>
+            <a:r>
+              <a:rPr lang="en-US" sz="1800" dirty="0">
+                <a:hlinkClick r:id="rId4"/>
+              </a:rPr>
+              <a:t>https://www.intel.com/content/www/us/en/gaming/resources/hyper-threading.html</a:t>
+            </a:r>
+            <a:endParaRPr lang="en-US" sz="1800" dirty="0"/>
+          </a:p>
+          <a:p>
+            <a:pPr marL="342900" indent="-342900">
+              <a:buAutoNum type="arabicPeriod"/>
+            </a:pPr>
+            <a:r>
+              <a:rPr lang="pt-BR" sz="1800" dirty="0"/>
+              <a:t>O que é e como funciona o Thread </a:t>
+            </a:r>
+            <a:r>
+              <a:rPr lang="pt-BR" sz="1800" dirty="0" err="1"/>
+              <a:t>Director</a:t>
+            </a:r>
+            <a:r>
+              <a:rPr lang="pt-BR" sz="1800" dirty="0"/>
+              <a:t> da Intel? </a:t>
+            </a:r>
+            <a:r>
+              <a:rPr lang="en-US" sz="1800" dirty="0">
+                <a:hlinkClick r:id="rId5"/>
+              </a:rPr>
+              <a:t>https://canaltech.com.br/hardware/o-que-e-e-como-funciona-o-thread-director-da-intel/</a:t>
+            </a:r>
+            <a:endParaRPr lang="en-US" sz="1800" dirty="0"/>
+          </a:p>
+          <a:p>
+            <a:pPr marL="342900" indent="-342900">
+              <a:buAutoNum type="arabicPeriod"/>
+            </a:pPr>
+            <a:r>
+              <a:rPr lang="pt-BR" sz="1800" dirty="0"/>
+              <a:t>Compreendendo os modos de criptografia AES: AES-GCM, AES-CBC, AES-CTR. </a:t>
+            </a:r>
+            <a:r>
+              <a:rPr lang="en-US" sz="1800" dirty="0">
+                <a:hlinkClick r:id="rId6"/>
+              </a:rPr>
+              <a:t>https://www.haikel-fazzani.eu.org/blog/post/aes-encryption-modes-gcm-cbc-ctr</a:t>
+            </a:r>
+            <a:endParaRPr lang="en-US" sz="1800" dirty="0"/>
+          </a:p>
+          <a:p>
+            <a:pPr marL="342900" indent="-342900">
+              <a:buAutoNum type="arabicPeriod"/>
+            </a:pPr>
+            <a:r>
+              <a:rPr lang="en-US" sz="1800" dirty="0" err="1"/>
+              <a:t>PyCryptodome’s</a:t>
+            </a:r>
+            <a:r>
+              <a:rPr lang="en-US" sz="1800" dirty="0"/>
+              <a:t> documentation. </a:t>
+            </a:r>
+            <a:r>
+              <a:rPr lang="en-US" sz="1800" dirty="0">
+                <a:hlinkClick r:id="rId7"/>
+              </a:rPr>
+              <a:t>https://www.pycryptodome.org/</a:t>
+            </a:r>
+            <a:endParaRPr lang="en-US" sz="1800" dirty="0"/>
+          </a:p>
+          <a:p>
+            <a:pPr marL="342900" indent="-342900">
+              <a:buAutoNum type="arabicPeriod"/>
+            </a:pPr>
+            <a:r>
+              <a:rPr lang="pt-BR" sz="1800" dirty="0"/>
+              <a:t>Algoritmo de multiplicação de matrizes. </a:t>
+            </a:r>
+            <a:r>
+              <a:rPr lang="en-US" sz="1800" dirty="0">
+                <a:hlinkClick r:id="rId8"/>
+              </a:rPr>
+              <a:t>https://en.wikipedia.org/wiki/Matrix_multiplication_algorithm</a:t>
+            </a:r>
+            <a:endParaRPr lang="en-US" sz="1800" dirty="0"/>
+          </a:p>
+          <a:p>
+            <a:pPr marL="342900" indent="-342900">
+              <a:buAutoNum type="arabicPeriod"/>
+            </a:pPr>
+            <a:endParaRPr lang="en-US" sz="1800" dirty="0"/>
+          </a:p>
+          <a:p>
+            <a:pPr marL="342900" indent="-342900">
+              <a:buAutoNum type="arabicPeriod"/>
+            </a:pPr>
+            <a:endParaRPr lang="en-US" sz="1800" dirty="0"/>
+          </a:p>
+          <a:p>
+            <a:pPr marL="342900" indent="-342900">
+              <a:buAutoNum type="arabicPeriod"/>
+            </a:pPr>
+            <a:endParaRPr lang="en-US" sz="1800" dirty="0"/>
+          </a:p>
+          <a:p>
+            <a:pPr marL="342900" indent="-342900">
+              <a:buAutoNum type="arabicPeriod"/>
+            </a:pPr>
+            <a:endParaRPr lang="pt-BR" sz="1800" dirty="0"/>
+          </a:p>
+        </p:txBody>
+      </p:sp>
+      <p:sp>
+        <p:nvSpPr>
+          <p:cNvPr id="4" name="Espaço Reservado para Número de Slide 3">
+            <a:extLst>
+              <a:ext uri="{FF2B5EF4-FFF2-40B4-BE49-F238E27FC236}">
+                <a16:creationId xmlns:a16="http://schemas.microsoft.com/office/drawing/2014/main" id="{B6363A04-88A9-FC99-A07C-58A6BA917481}"/>
+              </a:ext>
+            </a:extLst>
+          </p:cNvPr>
+          <p:cNvSpPr>
+            <a:spLocks noGrp="1"/>
+          </p:cNvSpPr>
+          <p:nvPr>
+            <p:ph type="sldNum" sz="quarter" idx="12"/>
+          </p:nvPr>
+        </p:nvSpPr>
+        <p:spPr/>
+        <p:txBody>
+          <a:bodyPr/>
+          <a:lstStyle/>
+          <a:p>
+            <a:fld id="{8E274F5D-21DC-40EF-8DBA-AB9BB119E939}" type="slidenum">
+              <a:rPr lang="en-US" smtClean="0"/>
+              <a:t>20</a:t>
+            </a:fld>
+            <a:endParaRPr lang="en-US"/>
+          </a:p>
+        </p:txBody>
+      </p:sp>
+    </p:spTree>
+    <p:extLst>
+      <p:ext uri="{BB962C8B-B14F-4D97-AF65-F5344CB8AC3E}">
+        <p14:creationId xmlns:p14="http://schemas.microsoft.com/office/powerpoint/2010/main" val="676808302"/>
+      </p:ext>
+    </p:extLst>
+  </p:cSld>
+  <p:clrMapOvr>
+    <a:masterClrMapping/>
+  </p:clrMapOvr>
+</p:sld>
+</file>
+
+<file path=ppt/slides/slide21.xml><?xml version="1.0" encoding="utf-8"?>
 <p:sld xmlns:a="http://schemas.openxmlformats.org/drawingml/2006/main" xmlns:r="http://schemas.openxmlformats.org/officeDocument/2006/relationships" xmlns:p="http://schemas.openxmlformats.org/presentationml/2006/main">
   <p:cSld>
     <p:spTree>
@@ -22541,7 +23537,7 @@
           <a:p>
             <a:fld id="{8E274F5D-21DC-40EF-8DBA-AB9BB119E939}" type="slidenum">
               <a:rPr lang="en-US" smtClean="0"/>
-              <a:t>20</a:t>
+              <a:t>21</a:t>
             </a:fld>
             <a:endParaRPr lang="en-US"/>
           </a:p>
@@ -22582,7 +23578,7 @@
           <p:cNvPr id="2" name="Título 1">
             <a:extLst>
               <a:ext uri="{FF2B5EF4-FFF2-40B4-BE49-F238E27FC236}">
-                <a16:creationId xmlns:a16="http://schemas.microsoft.com/office/drawing/2014/main" id="{164A5A54-B22E-BAE2-EBD5-CA8BDF60173A}"/>
+                <a16:creationId xmlns:a16="http://schemas.microsoft.com/office/drawing/2014/main" id="{EAB147D4-D0BE-2D35-FD47-72CA9BDD33B9}"/>
               </a:ext>
             </a:extLst>
           </p:cNvPr>
@@ -22600,7 +23596,7 @@
           <a:p>
             <a:r>
               <a:rPr lang="en-US" dirty="0" err="1"/>
-              <a:t>Introdução</a:t>
+              <a:t>Recapitulação</a:t>
             </a:r>
             <a:endParaRPr lang="pt-BR" dirty="0"/>
           </a:p>
@@ -22611,7 +23607,7 @@
           <p:cNvPr id="3" name="Espaço Reservado para Conteúdo 2">
             <a:extLst>
               <a:ext uri="{FF2B5EF4-FFF2-40B4-BE49-F238E27FC236}">
-                <a16:creationId xmlns:a16="http://schemas.microsoft.com/office/drawing/2014/main" id="{E3CB3356-A408-78BD-432D-C9EAFEA17778}"/>
+                <a16:creationId xmlns:a16="http://schemas.microsoft.com/office/drawing/2014/main" id="{94CD2035-EA59-8728-BCDC-6A3D0DF517B3}"/>
               </a:ext>
             </a:extLst>
           </p:cNvPr>
@@ -22625,404 +23621,93 @@
         <p:spPr/>
         <p:txBody>
           <a:bodyPr>
-            <a:normAutofit fontScale="32500" lnSpcReduction="20000"/>
+            <a:normAutofit/>
           </a:bodyPr>
           <a:lstStyle/>
           <a:p>
             <a:r>
+              <a:rPr lang="en-US" dirty="0"/>
+              <a:t>Análise de Desempenho de </a:t>
+            </a:r>
+            <a:r>
+              <a:rPr lang="en-US" dirty="0" err="1"/>
+              <a:t>uma</a:t>
+            </a:r>
+            <a:r>
+              <a:rPr lang="en-US" dirty="0"/>
+              <a:t> </a:t>
+            </a:r>
+            <a:r>
+              <a:rPr lang="en-US" dirty="0" err="1"/>
+              <a:t>aplicação</a:t>
+            </a:r>
+            <a:r>
+              <a:rPr lang="en-US" dirty="0"/>
+              <a:t> de </a:t>
+            </a:r>
+            <a:r>
+              <a:rPr lang="en-US" dirty="0" err="1"/>
+              <a:t>multiplicação</a:t>
+            </a:r>
+            <a:r>
+              <a:rPr lang="en-US" dirty="0"/>
+              <a:t> de </a:t>
+            </a:r>
+            <a:r>
+              <a:rPr lang="en-US" dirty="0" err="1"/>
+              <a:t>matrizes</a:t>
+            </a:r>
+            <a:r>
+              <a:rPr lang="en-US" dirty="0"/>
+              <a:t> em </a:t>
+            </a:r>
+            <a:r>
+              <a:rPr lang="en-US" dirty="0" err="1"/>
+              <a:t>uma</a:t>
+            </a:r>
+            <a:r>
+              <a:rPr lang="en-US" dirty="0"/>
+              <a:t> </a:t>
+            </a:r>
+            <a:r>
+              <a:rPr lang="en-US" dirty="0" err="1"/>
+              <a:t>arquitetura</a:t>
+            </a:r>
+            <a:r>
+              <a:rPr lang="en-US" dirty="0"/>
+              <a:t> </a:t>
+            </a:r>
+            <a:r>
               <a:rPr lang="pt-BR" dirty="0"/>
-              <a:t>Processador utilizado Intel i7-14700T</a:t>
-            </a:r>
-          </a:p>
-          <a:p>
-            <a:pPr lvl="1"/>
+              <a:t>com CPU de 14ª geração</a:t>
+            </a:r>
+          </a:p>
+          <a:p>
+            <a:r>
+              <a:rPr lang="pt-BR" dirty="0"/>
+              <a:t>Investigação do impacto em performance com </a:t>
+            </a:r>
             <a:r>
               <a:rPr lang="pt-BR" b="1" dirty="0"/>
-              <a:t>Característica</a:t>
+              <a:t>p-cores,</a:t>
             </a:r>
             <a:r>
               <a:rPr lang="pt-BR" dirty="0"/>
-              <a:t>: A série T é uma </a:t>
-            </a:r>
-            <a:r>
-              <a:rPr lang="en-US" dirty="0" err="1"/>
-              <a:t>variação</a:t>
-            </a:r>
-            <a:r>
-              <a:rPr lang="en-US" dirty="0"/>
-              <a:t> de </a:t>
-            </a:r>
-            <a:r>
-              <a:rPr lang="en-US" dirty="0" err="1"/>
-              <a:t>baixa</a:t>
-            </a:r>
-            <a:r>
-              <a:rPr lang="en-US" dirty="0"/>
               <a:t> </a:t>
             </a:r>
             <a:r>
-              <a:rPr lang="en-US" dirty="0" err="1"/>
-              <a:t>potência</a:t>
-            </a:r>
-            <a:r>
-              <a:rPr lang="en-US" dirty="0"/>
-              <a:t>, </a:t>
-            </a:r>
-            <a:r>
-              <a:rPr lang="en-US" dirty="0" err="1"/>
-              <a:t>otimizada</a:t>
-            </a:r>
-            <a:r>
-              <a:rPr lang="en-US" dirty="0"/>
-              <a:t> para </a:t>
-            </a:r>
-            <a:r>
-              <a:rPr lang="en-US" dirty="0" err="1"/>
-              <a:t>eficiência</a:t>
-            </a:r>
-            <a:r>
-              <a:rPr lang="en-US" dirty="0"/>
-              <a:t> </a:t>
-            </a:r>
-            <a:r>
-              <a:rPr lang="en-US" dirty="0" err="1"/>
-              <a:t>energética</a:t>
-            </a:r>
-            <a:r>
-              <a:rPr lang="en-US" dirty="0"/>
-              <a:t>.</a:t>
-            </a:r>
-          </a:p>
-          <a:p>
-            <a:pPr lvl="1"/>
-            <a:r>
-              <a:rPr lang="en-US" b="1" dirty="0" err="1"/>
-              <a:t>Problema</a:t>
-            </a:r>
-            <a:r>
-              <a:rPr lang="en-US" dirty="0"/>
-              <a:t>: </a:t>
-            </a:r>
-            <a:r>
-              <a:rPr lang="en-US" dirty="0">
-                <a:highlight>
-                  <a:srgbClr val="FFFF00"/>
-                </a:highlight>
-              </a:rPr>
-              <a:t>When Turbo Boost is disabled, and the CPU is in a low-power mode (like “idle” or certain drivers), the Linux kernel may report the base frequency of the E-cores only, not the P-cores.</a:t>
-            </a:r>
-            <a:endParaRPr lang="pt-BR" dirty="0">
-              <a:highlight>
-                <a:srgbClr val="FFFF00"/>
-              </a:highlight>
-            </a:endParaRPr>
-          </a:p>
-          <a:p>
-            <a:r>
-              <a:rPr lang="pt-BR" strike="sngStrike" dirty="0">
-                <a:solidFill>
-                  <a:srgbClr val="FF0000"/>
-                </a:solidFill>
-              </a:rPr>
-              <a:t>Turbo </a:t>
-            </a:r>
-            <a:r>
-              <a:rPr lang="pt-BR" strike="sngStrike" dirty="0" err="1">
-                <a:solidFill>
-                  <a:srgbClr val="FF0000"/>
-                </a:solidFill>
-              </a:rPr>
-              <a:t>Boost</a:t>
-            </a:r>
-            <a:r>
-              <a:rPr lang="pt-BR" dirty="0"/>
-              <a:t> : Infelizmente, com Turbo </a:t>
-            </a:r>
-            <a:r>
-              <a:rPr lang="pt-BR" dirty="0" err="1"/>
-              <a:t>Boost</a:t>
-            </a:r>
-            <a:r>
-              <a:rPr lang="pt-BR" dirty="0"/>
-              <a:t> desativado, </a:t>
-            </a:r>
-          </a:p>
-          <a:p>
-            <a:endParaRPr lang="pt-BR" dirty="0"/>
-          </a:p>
-          <a:p>
-            <a:r>
-              <a:rPr lang="en-US" b="1" dirty="0"/>
-              <a:t>🔹 2. Why </a:t>
-            </a:r>
-            <a:r>
-              <a:rPr lang="en-US" b="1" dirty="0" err="1"/>
-              <a:t>scaling_max_freq</a:t>
-            </a:r>
-            <a:r>
-              <a:rPr lang="en-US" b="1" dirty="0"/>
-              <a:t> = 1.3 GHz</a:t>
-            </a:r>
-          </a:p>
-          <a:p>
-            <a:r>
-              <a:rPr lang="en-US" dirty="0"/>
-              <a:t>Several reasons:</a:t>
-            </a:r>
-          </a:p>
-          <a:p>
-            <a:r>
-              <a:rPr lang="en-US" b="1" dirty="0"/>
-              <a:t>Driver interaction (</a:t>
-            </a:r>
-            <a:r>
-              <a:rPr lang="en-US" b="1" dirty="0" err="1"/>
-              <a:t>intel_pstate</a:t>
-            </a:r>
-            <a:r>
-              <a:rPr lang="en-US" b="1" dirty="0"/>
-              <a:t>)</a:t>
-            </a:r>
-            <a:endParaRPr lang="en-US" dirty="0"/>
-          </a:p>
-          <a:p>
-            <a:pPr lvl="1"/>
-            <a:r>
-              <a:rPr lang="en-US" dirty="0"/>
-              <a:t>On hybrid CPUs, Linux sometimes exposes </a:t>
-            </a:r>
-            <a:r>
-              <a:rPr lang="en-US" b="1" dirty="0"/>
-              <a:t>only the E-core cluster frequencies</a:t>
-            </a:r>
-            <a:r>
-              <a:rPr lang="en-US" dirty="0"/>
-              <a:t> via /sys/devices/system/</a:t>
-            </a:r>
-            <a:r>
-              <a:rPr lang="en-US" dirty="0" err="1"/>
-              <a:t>cpu</a:t>
-            </a:r>
-            <a:r>
-              <a:rPr lang="en-US" dirty="0"/>
-              <a:t>/</a:t>
-            </a:r>
-            <a:r>
-              <a:rPr lang="en-US" dirty="0" err="1"/>
-              <a:t>cpu</a:t>
-            </a:r>
-            <a:r>
-              <a:rPr lang="en-US" dirty="0"/>
-              <a:t>*/</a:t>
-            </a:r>
-            <a:r>
-              <a:rPr lang="en-US" dirty="0" err="1"/>
-              <a:t>cpufreq</a:t>
-            </a:r>
-            <a:r>
-              <a:rPr lang="en-US" dirty="0"/>
-              <a:t>/</a:t>
-            </a:r>
-            <a:r>
-              <a:rPr lang="en-US" dirty="0" err="1"/>
-              <a:t>scaling_max_freq</a:t>
-            </a:r>
-            <a:r>
-              <a:rPr lang="en-US" dirty="0"/>
-              <a:t>.</a:t>
-            </a:r>
-          </a:p>
-          <a:p>
-            <a:pPr lvl="1"/>
-            <a:r>
-              <a:rPr lang="en-US" dirty="0"/>
-              <a:t>The P-cores may be handled differently and not appear in </a:t>
-            </a:r>
-            <a:r>
-              <a:rPr lang="en-US" dirty="0" err="1"/>
-              <a:t>cpufreq</a:t>
-            </a:r>
-            <a:r>
-              <a:rPr lang="en-US" dirty="0"/>
-              <a:t> the same way, especially if Turbo is disabled.</a:t>
-            </a:r>
-          </a:p>
-          <a:p>
-            <a:r>
-              <a:rPr lang="en-US" b="1" dirty="0"/>
-              <a:t>Low-power T-series CPU</a:t>
-            </a:r>
-            <a:endParaRPr lang="en-US" dirty="0"/>
-          </a:p>
-          <a:p>
-            <a:pPr lvl="1"/>
-            <a:r>
-              <a:rPr lang="en-US" dirty="0"/>
-              <a:t>i7-14700T base clocks are ~1.3 GHz (E-cores) and ~3.2 GHz (P-cores).</a:t>
-            </a:r>
-          </a:p>
-          <a:p>
-            <a:pPr lvl="1"/>
-            <a:r>
-              <a:rPr lang="en-US" dirty="0"/>
-              <a:t>Because Turbo is off and the performance governor is applied, </a:t>
-            </a:r>
-            <a:r>
-              <a:rPr lang="en-US" dirty="0" err="1"/>
-              <a:t>intel_pstate</a:t>
-            </a:r>
-            <a:r>
-              <a:rPr lang="en-US" dirty="0"/>
-              <a:t> might </a:t>
-            </a:r>
-            <a:r>
-              <a:rPr lang="en-US" b="1" dirty="0"/>
-              <a:t>limit visible frequency to E-cores</a:t>
-            </a:r>
-            <a:r>
-              <a:rPr lang="en-US" dirty="0"/>
-              <a:t> to respect power limits.</a:t>
-            </a:r>
-          </a:p>
-          <a:p>
-            <a:r>
-              <a:rPr lang="en-US" b="1" dirty="0" err="1"/>
-              <a:t>base_frequency</a:t>
-            </a:r>
-            <a:r>
-              <a:rPr lang="en-US" b="1" dirty="0"/>
-              <a:t> reflects the guaranteed minimum</a:t>
-            </a:r>
-            <a:endParaRPr lang="en-US" dirty="0"/>
-          </a:p>
-          <a:p>
-            <a:pPr lvl="1"/>
-            <a:r>
-              <a:rPr lang="en-US" dirty="0"/>
-              <a:t>Intel’s “base frequency” in </a:t>
-            </a:r>
-            <a:r>
-              <a:rPr lang="en-US" dirty="0" err="1"/>
-              <a:t>sysfs</a:t>
-            </a:r>
-            <a:r>
-              <a:rPr lang="en-US" dirty="0"/>
-              <a:t> often corresponds to </a:t>
-            </a:r>
-            <a:r>
-              <a:rPr lang="en-US" b="1" dirty="0"/>
-              <a:t>the lowest cluster frequency that can be reliably reported</a:t>
-            </a:r>
-            <a:r>
-              <a:rPr lang="en-US" dirty="0"/>
-              <a:t>.</a:t>
-            </a:r>
-          </a:p>
-          <a:p>
-            <a:br>
-              <a:rPr lang="en-US" dirty="0"/>
-            </a:br>
-            <a:endParaRPr lang="en-US" dirty="0"/>
-          </a:p>
-          <a:p>
-            <a:r>
-              <a:rPr lang="en-US" b="1" dirty="0"/>
-              <a:t>🔹 3. What really happens under load</a:t>
-            </a:r>
-          </a:p>
-          <a:p>
-            <a:r>
-              <a:rPr lang="en-US" dirty="0"/>
-              <a:t>Even if </a:t>
-            </a:r>
-            <a:r>
-              <a:rPr lang="en-US" dirty="0" err="1"/>
-              <a:t>scaling_max_freq</a:t>
-            </a:r>
-            <a:r>
-              <a:rPr lang="en-US" dirty="0"/>
-              <a:t> = 1.3 GHz shows in </a:t>
-            </a:r>
-            <a:r>
-              <a:rPr lang="en-US" dirty="0" err="1"/>
-              <a:t>sysfs</a:t>
-            </a:r>
-            <a:r>
-              <a:rPr lang="en-US" dirty="0"/>
-              <a:t>:</a:t>
-            </a:r>
-          </a:p>
-          <a:p>
-            <a:r>
-              <a:rPr lang="en-US" dirty="0"/>
-              <a:t>P-cores may </a:t>
-            </a:r>
-            <a:r>
-              <a:rPr lang="en-US" b="1" dirty="0"/>
-              <a:t>still boost up</a:t>
-            </a:r>
-            <a:r>
-              <a:rPr lang="en-US" dirty="0"/>
-              <a:t> internally if Turbo were enabled.</a:t>
-            </a:r>
-          </a:p>
-          <a:p>
-            <a:r>
-              <a:rPr lang="en-US" dirty="0"/>
-              <a:t>With Turbo disabled, your CPU </a:t>
-            </a:r>
-            <a:r>
-              <a:rPr lang="en-US" b="1" dirty="0"/>
-              <a:t>is effectively capped</a:t>
-            </a:r>
-            <a:r>
-              <a:rPr lang="en-US" dirty="0"/>
-              <a:t>.</a:t>
-            </a:r>
-          </a:p>
-          <a:p>
-            <a:r>
-              <a:rPr lang="en-US" dirty="0"/>
-              <a:t>Linux’s </a:t>
-            </a:r>
-            <a:r>
-              <a:rPr lang="en-US" dirty="0" err="1"/>
-              <a:t>cpupower</a:t>
-            </a:r>
-            <a:r>
-              <a:rPr lang="en-US" dirty="0"/>
-              <a:t> or </a:t>
-            </a:r>
-            <a:r>
-              <a:rPr lang="en-US" dirty="0" err="1"/>
-              <a:t>lscpu</a:t>
-            </a:r>
-            <a:r>
-              <a:rPr lang="en-US" dirty="0"/>
-              <a:t> may report higher “max MHz” (like 3.2 GHz for P-cores) because it reads the CPU’s </a:t>
-            </a:r>
-            <a:r>
-              <a:rPr lang="en-US" b="1" dirty="0"/>
-              <a:t>raw hardware registers</a:t>
-            </a:r>
-            <a:r>
-              <a:rPr lang="en-US" dirty="0"/>
-              <a:t>, not the driver-exposed </a:t>
-            </a:r>
-            <a:r>
-              <a:rPr lang="en-US" dirty="0" err="1"/>
-              <a:t>cpufreq</a:t>
-            </a:r>
-            <a:r>
-              <a:rPr lang="en-US" dirty="0"/>
-              <a:t> limits.</a:t>
-            </a:r>
-          </a:p>
-          <a:p>
-            <a:endParaRPr lang="pt-BR" dirty="0"/>
-          </a:p>
-          <a:p>
-            <a:endParaRPr lang="pt-BR" dirty="0"/>
+              <a:rPr lang="pt-BR" b="1" dirty="0" err="1"/>
+              <a:t>e-cores</a:t>
+            </a:r>
+            <a:r>
+              <a:rPr lang="pt-BR" b="1" dirty="0"/>
+              <a:t>, e </a:t>
+            </a:r>
+            <a:r>
+              <a:rPr lang="pt-BR" b="1" dirty="0" err="1"/>
+              <a:t>hyper-threading</a:t>
+            </a:r>
+            <a:endParaRPr lang="pt-BR" baseline="30000" dirty="0"/>
           </a:p>
         </p:txBody>
       </p:sp>
@@ -23031,7 +23716,7 @@
           <p:cNvPr id="4" name="Espaço Reservado para Número de Slide 3">
             <a:extLst>
               <a:ext uri="{FF2B5EF4-FFF2-40B4-BE49-F238E27FC236}">
-                <a16:creationId xmlns:a16="http://schemas.microsoft.com/office/drawing/2014/main" id="{40BFDCD6-A8E7-0731-F6F3-1BF7E277C084}"/>
+                <a16:creationId xmlns:a16="http://schemas.microsoft.com/office/drawing/2014/main" id="{B7394880-8F95-8EDB-B888-F8979ADF63CE}"/>
               </a:ext>
             </a:extLst>
           </p:cNvPr>
@@ -23058,7 +23743,7 @@
     </p:spTree>
     <p:extLst>
       <p:ext uri="{BB962C8B-B14F-4D97-AF65-F5344CB8AC3E}">
-        <p14:creationId xmlns:p14="http://schemas.microsoft.com/office/powerpoint/2010/main" val="2496614450"/>
+        <p14:creationId xmlns:p14="http://schemas.microsoft.com/office/powerpoint/2010/main" val="143472058"/>
       </p:ext>
     </p:extLst>
   </p:cSld>
@@ -23073,7 +23758,13 @@
   <p:cSld>
     <p:spTree>
       <p:nvGrpSpPr>
-        <p:cNvPr id="1" name=""/>
+        <p:cNvPr id="1" name="">
+          <a:extLst>
+            <a:ext uri="{FF2B5EF4-FFF2-40B4-BE49-F238E27FC236}">
+              <a16:creationId xmlns:a16="http://schemas.microsoft.com/office/drawing/2014/main" id="{71100B1B-524B-CBF2-6B2A-BB438659FB00}"/>
+            </a:ext>
+          </a:extLst>
+        </p:cNvPr>
         <p:cNvGrpSpPr/>
         <p:nvPr/>
       </p:nvGrpSpPr>
@@ -23090,7 +23781,7 @@
           <p:cNvPr id="2" name="Título 1">
             <a:extLst>
               <a:ext uri="{FF2B5EF4-FFF2-40B4-BE49-F238E27FC236}">
-                <a16:creationId xmlns:a16="http://schemas.microsoft.com/office/drawing/2014/main" id="{EAB147D4-D0BE-2D35-FD47-72CA9BDD33B9}"/>
+                <a16:creationId xmlns:a16="http://schemas.microsoft.com/office/drawing/2014/main" id="{90A85877-0054-139B-5854-100209B1A08D}"/>
               </a:ext>
             </a:extLst>
           </p:cNvPr>
@@ -23107,8 +23798,20 @@
           <a:lstStyle/>
           <a:p>
             <a:r>
+              <a:rPr lang="en-US" dirty="0"/>
+              <a:t>Novas </a:t>
+            </a:r>
+            <a:r>
               <a:rPr lang="en-US" dirty="0" err="1"/>
-              <a:t>Objetivo</a:t>
+              <a:t>Decisões</a:t>
+            </a:r>
+            <a:r>
+              <a:rPr lang="en-US" dirty="0"/>
+              <a:t> de </a:t>
+            </a:r>
+            <a:r>
+              <a:rPr lang="en-US" dirty="0" err="1"/>
+              <a:t>Projeto</a:t>
             </a:r>
             <a:endParaRPr lang="pt-BR" dirty="0"/>
           </a:p>
@@ -23119,7 +23822,7 @@
           <p:cNvPr id="3" name="Espaço Reservado para Conteúdo 2">
             <a:extLst>
               <a:ext uri="{FF2B5EF4-FFF2-40B4-BE49-F238E27FC236}">
-                <a16:creationId xmlns:a16="http://schemas.microsoft.com/office/drawing/2014/main" id="{94CD2035-EA59-8728-BCDC-6A3D0DF517B3}"/>
+                <a16:creationId xmlns:a16="http://schemas.microsoft.com/office/drawing/2014/main" id="{C2C21D28-18E4-BA90-A91C-E7D1D11DD3CE}"/>
               </a:ext>
             </a:extLst>
           </p:cNvPr>
@@ -23138,16 +23841,28 @@
           <a:lstStyle/>
           <a:p>
             <a:r>
-              <a:rPr lang="en-US" dirty="0"/>
-              <a:t>Análise de Desempenho de </a:t>
+              <a:rPr lang="en-US" b="1" dirty="0" err="1"/>
+              <a:t>Objeto</a:t>
+            </a:r>
+            <a:r>
+              <a:rPr lang="en-US" b="1" dirty="0"/>
+              <a:t> </a:t>
+            </a:r>
+            <a:r>
+              <a:rPr lang="en-US" b="1" dirty="0" err="1"/>
+              <a:t>Computacional</a:t>
+            </a:r>
+            <a:r>
+              <a:rPr lang="en-US" dirty="0"/>
+              <a:t>: Agora </a:t>
             </a:r>
             <a:r>
               <a:rPr lang="en-US" dirty="0" err="1"/>
-              <a:t>uma</a:t>
-            </a:r>
-            <a:r>
-              <a:rPr lang="en-US" dirty="0"/>
-              <a:t> </a:t>
+              <a:t>restrito</a:t>
+            </a:r>
+            <a:r>
+              <a:rPr lang="en-US" dirty="0"/>
+              <a:t> à </a:t>
             </a:r>
             <a:r>
               <a:rPr lang="en-US" dirty="0" err="1"/>
@@ -23159,7 +23874,7 @@
             </a:r>
             <a:r>
               <a:rPr lang="en-US" dirty="0" err="1"/>
-              <a:t>multiplicação</a:t>
+              <a:t>Multiplicação</a:t>
             </a:r>
             <a:r>
               <a:rPr lang="en-US" dirty="0"/>
@@ -23167,64 +23882,113 @@
             </a:r>
             <a:r>
               <a:rPr lang="en-US" dirty="0" err="1"/>
-              <a:t>matrizes</a:t>
-            </a:r>
-            <a:r>
-              <a:rPr lang="en-US" dirty="0"/>
-              <a:t> em </a:t>
-            </a:r>
-            <a:r>
-              <a:rPr lang="en-US" dirty="0" err="1"/>
-              <a:t>uma</a:t>
-            </a:r>
-            <a:r>
-              <a:rPr lang="en-US" dirty="0"/>
-              <a:t> </a:t>
-            </a:r>
-            <a:r>
-              <a:rPr lang="en-US" dirty="0" err="1"/>
-              <a:t>arquitetura</a:t>
-            </a:r>
-            <a:r>
-              <a:rPr lang="en-US" dirty="0"/>
-              <a:t> </a:t>
+              <a:t>Matrizes</a:t>
+            </a:r>
+            <a:endParaRPr lang="en-US" dirty="0"/>
+          </a:p>
+          <a:p>
+            <a:pPr lvl="1"/>
+            <a:r>
+              <a:rPr lang="pt-BR" b="1" dirty="0"/>
+              <a:t>Motivo</a:t>
             </a:r>
             <a:r>
               <a:rPr lang="pt-BR" dirty="0"/>
-              <a:t>com CPU de 14ª geração, investigando o impacto de </a:t>
-            </a:r>
+              <a:t>: Foi possível deixar </a:t>
+            </a:r>
+            <a:r>
+              <a:rPr lang="pt-BR" b="1" dirty="0">
+                <a:highlight>
+                  <a:srgbClr val="FFFF00"/>
+                </a:highlight>
+              </a:rPr>
+              <a:t>n</a:t>
+            </a:r>
+            <a:r>
+              <a:rPr lang="pt-BR" dirty="0">
+                <a:highlight>
+                  <a:srgbClr val="FFFF00"/>
+                </a:highlight>
+              </a:rPr>
+              <a:t> núcleos de CPU em 100% </a:t>
+            </a:r>
+            <a:r>
+              <a:rPr lang="pt-BR" dirty="0"/>
+              <a:t>de uso</a:t>
+            </a:r>
+          </a:p>
+          <a:p>
+            <a:pPr lvl="1"/>
             <a:r>
               <a:rPr lang="pt-BR" b="1" dirty="0"/>
-              <a:t>p-cores,</a:t>
+              <a:t>Aplicação de Criptografia: </a:t>
             </a:r>
             <a:r>
               <a:rPr lang="pt-BR" dirty="0"/>
-              <a:t> </a:t>
+              <a:t>100% de uso em apenas </a:t>
+            </a:r>
+            <a:r>
+              <a:rPr lang="pt-BR" b="1" dirty="0"/>
+              <a:t>uma thread </a:t>
+            </a:r>
+            <a:r>
+              <a:rPr lang="pt-BR" dirty="0"/>
+              <a:t>na etapa de agregação de blocos de criptografia</a:t>
+            </a:r>
+            <a:endParaRPr lang="pt-BR" b="1" dirty="0"/>
+          </a:p>
+          <a:p>
+            <a:endParaRPr lang="pt-BR" dirty="0"/>
+          </a:p>
+          <a:p>
+            <a:r>
+              <a:rPr lang="pt-BR" b="1" dirty="0"/>
+              <a:t>Método de </a:t>
             </a:r>
             <a:r>
               <a:rPr lang="pt-BR" b="1" dirty="0" err="1"/>
-              <a:t>e-cores</a:t>
-            </a:r>
-            <a:r>
-              <a:rPr lang="pt-BR" b="1" dirty="0"/>
-              <a:t>, e </a:t>
-            </a:r>
+              <a:t>Multiprocessing</a:t>
+            </a:r>
+            <a:r>
+              <a:rPr lang="pt-BR" dirty="0"/>
+              <a:t>: Sai módulo </a:t>
+            </a:r>
+            <a:r>
+              <a:rPr lang="pt-BR" dirty="0" err="1"/>
+              <a:t>Dask</a:t>
+            </a:r>
+            <a:r>
+              <a:rPr lang="pt-BR" dirty="0"/>
+              <a:t>, entra módulo </a:t>
+            </a:r>
+            <a:r>
+              <a:rPr lang="pt-BR" dirty="0" err="1"/>
+              <a:t>multiprocessing</a:t>
+            </a:r>
+            <a:endParaRPr lang="pt-BR" dirty="0"/>
+          </a:p>
+          <a:p>
+            <a:pPr lvl="1"/>
             <a:r>
               <a:rPr lang="pt-BR" b="1" dirty="0" err="1"/>
-              <a:t>hyper-threading</a:t>
+              <a:t>multiprocessing</a:t>
             </a:r>
             <a:r>
               <a:rPr lang="pt-BR" dirty="0"/>
-              <a:t> no desempenho</a:t>
-            </a:r>
+              <a:t>: Processos paralelos em Python. Sintaxe simples, multiplataforma</a:t>
+            </a:r>
+          </a:p>
+          <a:p>
+            <a:pPr lvl="1"/>
+            <a:endParaRPr lang="pt-BR" b="1" dirty="0"/>
+          </a:p>
+          <a:p>
+            <a:endParaRPr lang="en-US" dirty="0"/>
+          </a:p>
+          <a:p>
+            <a:pPr lvl="1"/>
             <a:endParaRPr lang="pt-BR" baseline="30000" dirty="0"/>
           </a:p>
-          <a:p>
-            <a:pPr marL="0" indent="0">
-              <a:buNone/>
-            </a:pPr>
-            <a:endParaRPr lang="pt-BR" baseline="30000" dirty="0"/>
-          </a:p>
         </p:txBody>
       </p:sp>
       <p:sp>
@@ -23232,7 +23996,7 @@
           <p:cNvPr id="4" name="Espaço Reservado para Número de Slide 3">
             <a:extLst>
               <a:ext uri="{FF2B5EF4-FFF2-40B4-BE49-F238E27FC236}">
-                <a16:creationId xmlns:a16="http://schemas.microsoft.com/office/drawing/2014/main" id="{B7394880-8F95-8EDB-B888-F8979ADF63CE}"/>
+                <a16:creationId xmlns:a16="http://schemas.microsoft.com/office/drawing/2014/main" id="{5F0C0811-187C-0CD2-D6FA-D774ED2D038B}"/>
               </a:ext>
             </a:extLst>
           </p:cNvPr>
@@ -23259,7 +24023,7 @@
     </p:spTree>
     <p:extLst>
       <p:ext uri="{BB962C8B-B14F-4D97-AF65-F5344CB8AC3E}">
-        <p14:creationId xmlns:p14="http://schemas.microsoft.com/office/powerpoint/2010/main" val="143472058"/>
+        <p14:creationId xmlns:p14="http://schemas.microsoft.com/office/powerpoint/2010/main" val="1992294698"/>
       </p:ext>
     </p:extLst>
   </p:cSld>
@@ -23277,7 +24041,7 @@
         <p:cNvPr id="1" name="">
           <a:extLst>
             <a:ext uri="{FF2B5EF4-FFF2-40B4-BE49-F238E27FC236}">
-              <a16:creationId xmlns:a16="http://schemas.microsoft.com/office/drawing/2014/main" id="{0EE88016-88EE-3304-77D1-E943179C9B04}"/>
+              <a16:creationId xmlns:a16="http://schemas.microsoft.com/office/drawing/2014/main" id="{49A27D71-F70A-EAA9-2E16-9A83D2A9B80A}"/>
             </a:ext>
           </a:extLst>
         </p:cNvPr>
@@ -23297,7 +24061,7 @@
           <p:cNvPr id="2" name="Título 1">
             <a:extLst>
               <a:ext uri="{FF2B5EF4-FFF2-40B4-BE49-F238E27FC236}">
-                <a16:creationId xmlns:a16="http://schemas.microsoft.com/office/drawing/2014/main" id="{4ABE5FA7-DB84-072F-170D-9FE55CFF5F4B}"/>
+                <a16:creationId xmlns:a16="http://schemas.microsoft.com/office/drawing/2014/main" id="{EF6B2D67-D628-5875-86AB-6F4080B7B6BF}"/>
               </a:ext>
             </a:extLst>
           </p:cNvPr>
@@ -23314,8 +24078,20 @@
           <a:lstStyle/>
           <a:p>
             <a:r>
-              <a:rPr lang="en-US"/>
-              <a:t>Motivação: Problemas e perguntas</a:t>
+              <a:rPr lang="en-US" dirty="0"/>
+              <a:t>Novas </a:t>
+            </a:r>
+            <a:r>
+              <a:rPr lang="en-US" dirty="0" err="1"/>
+              <a:t>Decisões</a:t>
+            </a:r>
+            <a:r>
+              <a:rPr lang="en-US" dirty="0"/>
+              <a:t> de </a:t>
+            </a:r>
+            <a:r>
+              <a:rPr lang="en-US" dirty="0" err="1"/>
+              <a:t>Projeto</a:t>
             </a:r>
             <a:endParaRPr lang="pt-BR" dirty="0"/>
           </a:p>
@@ -23326,7 +24102,7 @@
           <p:cNvPr id="3" name="Espaço Reservado para Conteúdo 2">
             <a:extLst>
               <a:ext uri="{FF2B5EF4-FFF2-40B4-BE49-F238E27FC236}">
-                <a16:creationId xmlns:a16="http://schemas.microsoft.com/office/drawing/2014/main" id="{65AAB43D-9E45-7B61-6B8C-5A62F4B41969}"/>
+                <a16:creationId xmlns:a16="http://schemas.microsoft.com/office/drawing/2014/main" id="{D1DF7931-1A4F-E468-D8DD-BDA28519EFEB}"/>
               </a:ext>
             </a:extLst>
           </p:cNvPr>
@@ -23345,39 +24121,169 @@
           <a:lstStyle/>
           <a:p>
             <a:r>
-              <a:rPr lang="en-US" b="1"/>
-              <a:t>Problemas</a:t>
-            </a:r>
+              <a:rPr lang="en-US" b="1" dirty="0" err="1"/>
+              <a:t>Informações</a:t>
+            </a:r>
+            <a:r>
+              <a:rPr lang="en-US" b="1" dirty="0"/>
+              <a:t> do Sistema: </a:t>
+            </a:r>
+            <a:r>
+              <a:rPr lang="en-US" dirty="0" err="1"/>
+              <a:t>Módulos</a:t>
+            </a:r>
+            <a:r>
+              <a:rPr lang="en-US" dirty="0"/>
+              <a:t> </a:t>
+            </a:r>
+            <a:r>
+              <a:rPr lang="en-US" dirty="0" err="1"/>
+              <a:t>psutil</a:t>
+            </a:r>
+            <a:r>
+              <a:rPr lang="en-US" dirty="0"/>
+              <a:t> e </a:t>
+            </a:r>
+            <a:r>
+              <a:rPr lang="en-US" dirty="0" err="1"/>
+              <a:t>os</a:t>
+            </a:r>
+            <a:endParaRPr lang="en-US" dirty="0"/>
           </a:p>
           <a:p>
             <a:pPr lvl="1"/>
             <a:r>
-              <a:rPr lang="en-US"/>
-              <a:t>Não é possível desabilitar o Thread Director</a:t>
-            </a:r>
-          </a:p>
-          <a:p>
-            <a:pPr lvl="2"/>
-            <a:r>
-              <a:rPr lang="en-US"/>
-              <a:t>Implementação em hardware</a:t>
-            </a:r>
-          </a:p>
-          <a:p>
-            <a:pPr lvl="2"/>
-            <a:endParaRPr lang="en-US"/>
+              <a:rPr lang="en-US" b="1" dirty="0" err="1"/>
+              <a:t>psutil</a:t>
+            </a:r>
+            <a:r>
+              <a:rPr lang="en-US" dirty="0"/>
+              <a:t>: </a:t>
+            </a:r>
+            <a:r>
+              <a:rPr lang="en-US" dirty="0" err="1"/>
+              <a:t>Informações</a:t>
+            </a:r>
+            <a:r>
+              <a:rPr lang="en-US" dirty="0"/>
+              <a:t> </a:t>
+            </a:r>
+            <a:r>
+              <a:rPr lang="en-US" dirty="0" err="1"/>
+              <a:t>sobre</a:t>
+            </a:r>
+            <a:r>
+              <a:rPr lang="en-US" dirty="0"/>
+              <a:t> </a:t>
+            </a:r>
+            <a:r>
+              <a:rPr lang="en-US" dirty="0" err="1"/>
+              <a:t>processos</a:t>
+            </a:r>
+            <a:r>
+              <a:rPr lang="en-US" dirty="0"/>
+              <a:t>, CPU, </a:t>
+            </a:r>
+            <a:r>
+              <a:rPr lang="en-US" dirty="0" err="1"/>
+              <a:t>memória</a:t>
+            </a:r>
+            <a:r>
+              <a:rPr lang="en-US" dirty="0"/>
+              <a:t>, discos, etc.</a:t>
+            </a:r>
           </a:p>
           <a:p>
             <a:pPr lvl="1"/>
             <a:r>
-              <a:rPr lang="en-US"/>
-              <a:t>Com Hyper-Threading habilitada, duas threads podem ser alocados para o mesmo núcleo p-core, ao invés de 2 núcleos (p-core e/ou e-core)</a:t>
-            </a:r>
-          </a:p>
-          <a:p>
-            <a:pPr lvl="2"/>
+              <a:rPr lang="en-US" b="1" dirty="0" err="1"/>
+              <a:t>os</a:t>
+            </a:r>
+            <a:r>
+              <a:rPr lang="en-US" b="1" dirty="0"/>
+              <a:t>: </a:t>
+            </a:r>
+            <a:r>
+              <a:rPr lang="en-US" dirty="0" err="1"/>
+              <a:t>Execução</a:t>
+            </a:r>
+            <a:r>
+              <a:rPr lang="en-US" dirty="0"/>
+              <a:t> de </a:t>
+            </a:r>
+            <a:r>
+              <a:rPr lang="en-US" dirty="0" err="1"/>
+              <a:t>comandos</a:t>
+            </a:r>
+            <a:r>
+              <a:rPr lang="en-US" dirty="0"/>
+              <a:t> bash Linux </a:t>
+            </a:r>
+            <a:r>
+              <a:rPr lang="en-US" dirty="0" err="1"/>
+              <a:t>ou</a:t>
+            </a:r>
+            <a:r>
+              <a:rPr lang="en-US" dirty="0"/>
+              <a:t> PowerShell Windows </a:t>
+            </a:r>
+            <a:r>
+              <a:rPr lang="en-US" dirty="0" err="1"/>
+              <a:t>dentro</a:t>
+            </a:r>
+            <a:r>
+              <a:rPr lang="en-US" dirty="0"/>
+              <a:t> do script Python.</a:t>
+            </a:r>
+          </a:p>
+          <a:p>
+            <a:pPr lvl="1"/>
+            <a:endParaRPr lang="en-US" b="1" dirty="0"/>
+          </a:p>
+          <a:p>
+            <a:r>
+              <a:rPr lang="en-US" b="1" dirty="0"/>
+              <a:t>Turbo Boost: </a:t>
+            </a:r>
+            <a:r>
+              <a:rPr lang="en-US" dirty="0"/>
+              <a:t>Manter Turbo Boost sempre </a:t>
+            </a:r>
+            <a:r>
+              <a:rPr lang="en-US" dirty="0" err="1"/>
+              <a:t>habilitado</a:t>
+            </a:r>
             <a:endParaRPr lang="en-US" dirty="0"/>
           </a:p>
+          <a:p>
+            <a:pPr lvl="1"/>
+            <a:r>
+              <a:rPr lang="en-US" dirty="0"/>
+              <a:t>POLÊMICO…</a:t>
+            </a:r>
+            <a:endParaRPr lang="pt-BR" dirty="0"/>
+          </a:p>
+          <a:p>
+            <a:pPr lvl="1"/>
+            <a:endParaRPr lang="pt-BR" b="1" dirty="0"/>
+          </a:p>
+          <a:p>
+            <a:pPr lvl="1"/>
+            <a:endParaRPr lang="pt-BR" b="1" dirty="0"/>
+          </a:p>
+          <a:p>
+            <a:pPr marL="457200" lvl="1" indent="0">
+              <a:buNone/>
+            </a:pPr>
+            <a:endParaRPr lang="pt-BR" b="1" dirty="0"/>
+          </a:p>
+          <a:p>
+            <a:endParaRPr lang="en-US" dirty="0"/>
+          </a:p>
+          <a:p>
+            <a:pPr lvl="1"/>
+            <a:endParaRPr lang="pt-BR" baseline="30000" dirty="0"/>
+          </a:p>
         </p:txBody>
       </p:sp>
       <p:sp>
@@ -23385,7 +24291,7 @@
           <p:cNvPr id="4" name="Espaço Reservado para Número de Slide 3">
             <a:extLst>
               <a:ext uri="{FF2B5EF4-FFF2-40B4-BE49-F238E27FC236}">
-                <a16:creationId xmlns:a16="http://schemas.microsoft.com/office/drawing/2014/main" id="{878D6F83-C125-8B06-9A0C-4BF7B0E2B6B8}"/>
+                <a16:creationId xmlns:a16="http://schemas.microsoft.com/office/drawing/2014/main" id="{CB3B5276-5E55-862B-BF74-208CD0082FF0}"/>
               </a:ext>
             </a:extLst>
           </p:cNvPr>
@@ -23412,7 +24318,7 @@
     </p:spTree>
     <p:extLst>
       <p:ext uri="{BB962C8B-B14F-4D97-AF65-F5344CB8AC3E}">
-        <p14:creationId xmlns:p14="http://schemas.microsoft.com/office/powerpoint/2010/main" val="2502414847"/>
+        <p14:creationId xmlns:p14="http://schemas.microsoft.com/office/powerpoint/2010/main" val="3585272815"/>
       </p:ext>
     </p:extLst>
   </p:cSld>
@@ -23430,7 +24336,7 @@
         <p:cNvPr id="1" name="">
           <a:extLst>
             <a:ext uri="{FF2B5EF4-FFF2-40B4-BE49-F238E27FC236}">
-              <a16:creationId xmlns:a16="http://schemas.microsoft.com/office/drawing/2014/main" id="{B9761816-74CB-03FF-FA24-A2D30D812E52}"/>
+              <a16:creationId xmlns:a16="http://schemas.microsoft.com/office/drawing/2014/main" id="{9C3ABBEA-9D86-3C15-14E2-D2E2912A676F}"/>
             </a:ext>
           </a:extLst>
         </p:cNvPr>
@@ -23450,7 +24356,7 @@
           <p:cNvPr id="2" name="Título 1">
             <a:extLst>
               <a:ext uri="{FF2B5EF4-FFF2-40B4-BE49-F238E27FC236}">
-                <a16:creationId xmlns:a16="http://schemas.microsoft.com/office/drawing/2014/main" id="{222853C3-F6F6-76D5-BB44-D35EC449F8CD}"/>
+                <a16:creationId xmlns:a16="http://schemas.microsoft.com/office/drawing/2014/main" id="{BF1D348F-FD48-0AC0-4FBF-AA8ADD337017}"/>
               </a:ext>
             </a:extLst>
           </p:cNvPr>
@@ -23467,202 +24373,75 @@
           <a:lstStyle/>
           <a:p>
             <a:r>
+              <a:rPr lang="en-US" dirty="0"/>
+              <a:t>Turbo Boost</a:t>
+            </a:r>
+            <a:endParaRPr lang="pt-BR" dirty="0"/>
+          </a:p>
+        </p:txBody>
+      </p:sp>
+      <p:sp>
+        <p:nvSpPr>
+          <p:cNvPr id="3" name="Espaço Reservado para Conteúdo 2">
+            <a:extLst>
+              <a:ext uri="{FF2B5EF4-FFF2-40B4-BE49-F238E27FC236}">
+                <a16:creationId xmlns:a16="http://schemas.microsoft.com/office/drawing/2014/main" id="{D85D38CC-A29D-8498-000F-84B79FC6F11C}"/>
+              </a:ext>
+            </a:extLst>
+          </p:cNvPr>
+          <p:cNvSpPr>
+            <a:spLocks noGrp="1"/>
+          </p:cNvSpPr>
+          <p:nvPr>
+            <p:ph idx="1"/>
+          </p:nvPr>
+        </p:nvSpPr>
+        <p:spPr/>
+        <p:txBody>
+          <a:bodyPr>
+            <a:normAutofit/>
+          </a:bodyPr>
+          <a:lstStyle/>
+          <a:p>
+            <a:r>
               <a:rPr lang="en-US" dirty="0" err="1"/>
-              <a:t>Motivação</a:t>
-            </a:r>
-            <a:r>
-              <a:rPr lang="en-US" dirty="0"/>
-              <a:t>: </a:t>
+              <a:t>Observou</a:t>
+            </a:r>
+            <a:r>
+              <a:rPr lang="en-US" dirty="0"/>
+              <a:t>-se que com Turbo Boost </a:t>
+            </a:r>
+            <a:r>
+              <a:rPr lang="en-US" b="1" dirty="0" err="1"/>
+              <a:t>desabilitado</a:t>
+            </a:r>
+            <a:r>
+              <a:rPr lang="en-US" dirty="0"/>
+              <a:t> a </a:t>
             </a:r>
             <a:r>
               <a:rPr lang="en-US" dirty="0" err="1"/>
-              <a:t>Problemas</a:t>
-            </a:r>
-            <a:r>
-              <a:rPr lang="en-US" dirty="0"/>
-              <a:t> e </a:t>
+              <a:t>frequência</a:t>
+            </a:r>
+            <a:r>
+              <a:rPr lang="en-US" dirty="0"/>
+              <a:t> </a:t>
             </a:r>
             <a:r>
               <a:rPr lang="en-US" dirty="0" err="1"/>
-              <a:t>perguntas</a:t>
-            </a:r>
-            <a:endParaRPr lang="pt-BR" dirty="0"/>
-          </a:p>
-        </p:txBody>
-      </p:sp>
-      <p:sp>
-        <p:nvSpPr>
-          <p:cNvPr id="3" name="Espaço Reservado para Conteúdo 2">
-            <a:extLst>
-              <a:ext uri="{FF2B5EF4-FFF2-40B4-BE49-F238E27FC236}">
-                <a16:creationId xmlns:a16="http://schemas.microsoft.com/office/drawing/2014/main" id="{860A2704-A691-C3BB-77DD-2B29C70E6426}"/>
-              </a:ext>
-            </a:extLst>
-          </p:cNvPr>
-          <p:cNvSpPr>
-            <a:spLocks noGrp="1"/>
-          </p:cNvSpPr>
-          <p:nvPr>
-            <p:ph idx="1"/>
-          </p:nvPr>
-        </p:nvSpPr>
-        <p:spPr/>
-        <p:txBody>
-          <a:bodyPr>
-            <a:normAutofit lnSpcReduction="10000"/>
-          </a:bodyPr>
-          <a:lstStyle/>
-          <a:p>
-            <a:r>
-              <a:rPr lang="en-US" b="1" dirty="0" err="1"/>
-              <a:t>Perguntas</a:t>
-            </a:r>
-            <a:endParaRPr lang="en-US" b="1" dirty="0"/>
-          </a:p>
-          <a:p>
-            <a:pPr lvl="1"/>
-            <a:r>
-              <a:rPr lang="en-US" dirty="0"/>
-              <a:t>Como </a:t>
+              <a:t>máxima</a:t>
+            </a:r>
+            <a:r>
+              <a:rPr lang="en-US" dirty="0"/>
+              <a:t> de </a:t>
             </a:r>
             <a:r>
               <a:rPr lang="en-US" dirty="0" err="1"/>
-              <a:t>ter</a:t>
-            </a:r>
-            <a:r>
-              <a:rPr lang="en-US" dirty="0"/>
-              <a:t> a </a:t>
-            </a:r>
-            <a:r>
-              <a:rPr lang="en-US" dirty="0" err="1"/>
-              <a:t>melhor</a:t>
-            </a:r>
-            <a:r>
-              <a:rPr lang="en-US" dirty="0"/>
-              <a:t> performance </a:t>
-            </a:r>
-            <a:r>
-              <a:rPr lang="en-US" dirty="0" err="1"/>
-              <a:t>ao</a:t>
-            </a:r>
-            <a:r>
-              <a:rPr lang="en-US" dirty="0"/>
-              <a:t> </a:t>
-            </a:r>
-            <a:r>
-              <a:rPr lang="en-US" dirty="0" err="1"/>
-              <a:t>executar</a:t>
-            </a:r>
-            <a:r>
-              <a:rPr lang="en-US" dirty="0"/>
-              <a:t> </a:t>
-            </a:r>
-            <a:r>
-              <a:rPr lang="en-US" dirty="0" err="1"/>
-              <a:t>uma</a:t>
-            </a:r>
-            <a:r>
-              <a:rPr lang="en-US" dirty="0"/>
-              <a:t> </a:t>
-            </a:r>
-            <a:r>
-              <a:rPr lang="en-US" b="1" dirty="0"/>
-              <a:t>carga CPU-bound </a:t>
-            </a:r>
-            <a:r>
-              <a:rPr lang="en-US" dirty="0"/>
-              <a:t>se é o Thread Director </a:t>
-            </a:r>
-            <a:r>
-              <a:rPr lang="en-US" dirty="0" err="1"/>
-              <a:t>quem</a:t>
-            </a:r>
-            <a:r>
-              <a:rPr lang="en-US" dirty="0"/>
-              <a:t> </a:t>
-            </a:r>
-            <a:r>
-              <a:rPr lang="en-US" dirty="0" err="1"/>
-              <a:t>escolhe</a:t>
-            </a:r>
-            <a:r>
-              <a:rPr lang="en-US" dirty="0"/>
-              <a:t> a </a:t>
-            </a:r>
-            <a:r>
-              <a:rPr lang="en-US" dirty="0" err="1"/>
-              <a:t>alocação</a:t>
-            </a:r>
-            <a:r>
-              <a:rPr lang="en-US" dirty="0"/>
-              <a:t> de threads entre p-cores e e-cores? </a:t>
-            </a:r>
-          </a:p>
-          <a:p>
-            <a:pPr lvl="2"/>
-            <a:r>
-              <a:rPr lang="en-US" dirty="0" err="1"/>
-              <a:t>Ainda</a:t>
-            </a:r>
-            <a:r>
-              <a:rPr lang="en-US" dirty="0"/>
-              <a:t>, com Hyper-Threading </a:t>
-            </a:r>
-            <a:r>
-              <a:rPr lang="en-US" dirty="0" err="1"/>
-              <a:t>habilitado</a:t>
-            </a:r>
-            <a:r>
-              <a:rPr lang="en-US" dirty="0"/>
-              <a:t> </a:t>
-            </a:r>
-            <a:r>
-              <a:rPr lang="en-US" dirty="0" err="1"/>
-              <a:t>pode</a:t>
-            </a:r>
-            <a:r>
-              <a:rPr lang="en-US" dirty="0"/>
-              <a:t> haver </a:t>
-            </a:r>
-            <a:r>
-              <a:rPr lang="en-US" dirty="0" err="1"/>
-              <a:t>concentração</a:t>
-            </a:r>
-            <a:r>
-              <a:rPr lang="en-US" dirty="0"/>
-              <a:t> </a:t>
-            </a:r>
-            <a:r>
-              <a:rPr lang="en-US" dirty="0" err="1"/>
-              <a:t>desnecessária</a:t>
-            </a:r>
-            <a:r>
-              <a:rPr lang="en-US" dirty="0"/>
-              <a:t> de threads em um </a:t>
-            </a:r>
-            <a:r>
-              <a:rPr lang="en-US" dirty="0" err="1"/>
-              <a:t>mesmo</a:t>
-            </a:r>
-            <a:r>
-              <a:rPr lang="en-US" dirty="0"/>
-              <a:t> </a:t>
-            </a:r>
-            <a:r>
-              <a:rPr lang="en-US" dirty="0" err="1"/>
-              <a:t>núcleo</a:t>
-            </a:r>
-            <a:r>
-              <a:rPr lang="en-US" dirty="0"/>
-              <a:t>, </a:t>
-            </a:r>
-            <a:r>
-              <a:rPr lang="en-US" dirty="0" err="1"/>
-              <a:t>mesmo</a:t>
-            </a:r>
-            <a:r>
-              <a:rPr lang="en-US" dirty="0"/>
-              <a:t> com </a:t>
+              <a:t>operação</a:t>
+            </a:r>
+            <a:r>
+              <a:rPr lang="en-US" dirty="0"/>
+              <a:t> de </a:t>
             </a:r>
             <a:r>
               <a:rPr lang="en-US" dirty="0" err="1"/>
@@ -23670,180 +24449,38 @@
             </a:r>
             <a:r>
               <a:rPr lang="en-US" dirty="0"/>
+              <a:t> p-cores e e-cores </a:t>
+            </a:r>
+            <a:r>
+              <a:rPr lang="en-US" dirty="0" err="1"/>
+              <a:t>fica</a:t>
+            </a:r>
+            <a:r>
+              <a:rPr lang="en-US" dirty="0"/>
               <a:t> </a:t>
             </a:r>
             <a:r>
               <a:rPr lang="en-US" dirty="0" err="1"/>
-              <a:t>disponíveis</a:t>
-            </a:r>
-            <a:r>
-              <a:rPr lang="en-US" dirty="0"/>
-              <a:t>.</a:t>
-            </a:r>
-          </a:p>
-          <a:p>
-            <a:pPr lvl="1"/>
-            <a:endParaRPr lang="en-US" dirty="0"/>
-          </a:p>
-          <a:p>
-            <a:pPr lvl="1"/>
-            <a:r>
-              <a:rPr lang="en-US" dirty="0"/>
-              <a:t>Qual o </a:t>
-            </a:r>
-            <a:r>
-              <a:rPr lang="en-US" dirty="0" err="1"/>
-              <a:t>impacto</a:t>
-            </a:r>
-            <a:r>
-              <a:rPr lang="en-US" dirty="0"/>
-              <a:t> no </a:t>
-            </a:r>
-            <a:r>
-              <a:rPr lang="en-US" dirty="0" err="1"/>
-              <a:t>desempenho</a:t>
-            </a:r>
-            <a:r>
-              <a:rPr lang="en-US" dirty="0"/>
-              <a:t> </a:t>
-            </a:r>
-            <a:r>
-              <a:rPr lang="en-US" dirty="0" err="1"/>
-              <a:t>ao</a:t>
-            </a:r>
-            <a:r>
-              <a:rPr lang="en-US" dirty="0"/>
-              <a:t> </a:t>
-            </a:r>
-            <a:r>
-              <a:rPr lang="en-US" dirty="0" err="1"/>
-              <a:t>executar</a:t>
-            </a:r>
-            <a:r>
-              <a:rPr lang="en-US" dirty="0"/>
-              <a:t> </a:t>
-            </a:r>
-            <a:r>
-              <a:rPr lang="en-US" dirty="0" err="1"/>
-              <a:t>uma</a:t>
-            </a:r>
-            <a:r>
-              <a:rPr lang="en-US" dirty="0"/>
-              <a:t> carga CPU-bound </a:t>
+              <a:t>limitada</a:t>
+            </a:r>
+            <a:r>
+              <a:rPr lang="en-US" dirty="0"/>
+              <a:t> à </a:t>
             </a:r>
             <a:r>
               <a:rPr lang="en-US" b="1" dirty="0" err="1"/>
-              <a:t>desabilitando</a:t>
-            </a:r>
-            <a:r>
-              <a:rPr lang="en-US" dirty="0"/>
-              <a:t> </a:t>
-            </a:r>
-            <a:r>
-              <a:rPr lang="en-US" dirty="0" err="1"/>
-              <a:t>os</a:t>
-            </a:r>
-            <a:r>
-              <a:rPr lang="en-US" dirty="0"/>
-              <a:t> </a:t>
+              <a:t>frequência</a:t>
             </a:r>
             <a:r>
               <a:rPr lang="en-US" b="1" dirty="0"/>
-              <a:t>e-cores</a:t>
-            </a:r>
-            <a:r>
-              <a:rPr lang="en-US" dirty="0"/>
-              <a:t>?</a:t>
-            </a:r>
-          </a:p>
-          <a:p>
-            <a:pPr lvl="1"/>
-            <a:endParaRPr lang="en-US" dirty="0"/>
-          </a:p>
-          <a:p>
-            <a:pPr lvl="1"/>
-            <a:r>
-              <a:rPr lang="en-US" dirty="0"/>
-              <a:t>Qual o </a:t>
-            </a:r>
-            <a:r>
-              <a:rPr lang="en-US" dirty="0" err="1"/>
-              <a:t>impacto</a:t>
-            </a:r>
-            <a:r>
-              <a:rPr lang="en-US" dirty="0"/>
-              <a:t> no </a:t>
-            </a:r>
-            <a:r>
-              <a:rPr lang="en-US" dirty="0" err="1"/>
-              <a:t>desempenho</a:t>
-            </a:r>
-            <a:r>
-              <a:rPr lang="en-US" dirty="0"/>
-              <a:t> </a:t>
-            </a:r>
-            <a:r>
-              <a:rPr lang="en-US" dirty="0" err="1"/>
-              <a:t>ao</a:t>
-            </a:r>
-            <a:r>
-              <a:rPr lang="en-US" dirty="0"/>
-              <a:t> </a:t>
-            </a:r>
-            <a:r>
-              <a:rPr lang="en-US" dirty="0" err="1"/>
-              <a:t>executar</a:t>
-            </a:r>
-            <a:r>
-              <a:rPr lang="en-US" dirty="0"/>
-              <a:t> </a:t>
-            </a:r>
-            <a:r>
-              <a:rPr lang="en-US" dirty="0" err="1"/>
-              <a:t>uma</a:t>
-            </a:r>
-            <a:r>
-              <a:rPr lang="en-US" dirty="0"/>
-              <a:t> carga CPU-bound </a:t>
-            </a:r>
-            <a:r>
-              <a:rPr lang="en-US" b="1" dirty="0" err="1"/>
-              <a:t>desabilitando</a:t>
-            </a:r>
-            <a:r>
-              <a:rPr lang="en-US" dirty="0"/>
-              <a:t> </a:t>
-            </a:r>
-            <a:r>
-              <a:rPr lang="en-US" dirty="0" err="1"/>
-              <a:t>os</a:t>
-            </a:r>
-            <a:r>
-              <a:rPr lang="en-US" dirty="0"/>
-              <a:t> </a:t>
-            </a:r>
-            <a:r>
-              <a:rPr lang="en-US" b="1" dirty="0"/>
-              <a:t>e-cores</a:t>
-            </a:r>
-            <a:r>
-              <a:rPr lang="en-US" dirty="0"/>
-              <a:t> e o </a:t>
-            </a:r>
-            <a:r>
-              <a:rPr lang="en-US" b="1" dirty="0"/>
-              <a:t>Hyper-Threading</a:t>
-            </a:r>
-            <a:r>
-              <a:rPr lang="en-US" dirty="0"/>
-              <a:t>?</a:t>
-            </a:r>
-          </a:p>
-          <a:p>
-            <a:pPr marL="457200" lvl="1" indent="0">
-              <a:buNone/>
-            </a:pPr>
-            <a:endParaRPr lang="pt-BR" dirty="0"/>
+              <a:t> base</a:t>
+            </a:r>
+          </a:p>
+          <a:p>
+            <a:endParaRPr lang="en-US" b="1" dirty="0"/>
+          </a:p>
+          <a:p>
+            <a:endParaRPr lang="pt-BR" b="1" dirty="0"/>
           </a:p>
         </p:txBody>
       </p:sp>
@@ -23852,7 +24489,7 @@
           <p:cNvPr id="4" name="Espaço Reservado para Número de Slide 3">
             <a:extLst>
               <a:ext uri="{FF2B5EF4-FFF2-40B4-BE49-F238E27FC236}">
-                <a16:creationId xmlns:a16="http://schemas.microsoft.com/office/drawing/2014/main" id="{91A6BD61-4668-5EAA-8174-C689DA5B1A45}"/>
+                <a16:creationId xmlns:a16="http://schemas.microsoft.com/office/drawing/2014/main" id="{0A91A1F6-8A6C-0932-9A8B-203A98921979}"/>
               </a:ext>
             </a:extLst>
           </p:cNvPr>
@@ -23876,10 +24513,40 @@
           </a:p>
         </p:txBody>
       </p:sp>
+      <p:pic>
+        <p:nvPicPr>
+          <p:cNvPr id="6" name="Imagem 5">
+            <a:extLst>
+              <a:ext uri="{FF2B5EF4-FFF2-40B4-BE49-F238E27FC236}">
+                <a16:creationId xmlns:a16="http://schemas.microsoft.com/office/drawing/2014/main" id="{1D436A86-3CB4-E809-CC4D-546D3CACE632}"/>
+              </a:ext>
+            </a:extLst>
+          </p:cNvPr>
+          <p:cNvPicPr>
+            <a:picLocks noChangeAspect="1"/>
+          </p:cNvPicPr>
+          <p:nvPr/>
+        </p:nvPicPr>
+        <p:blipFill>
+          <a:blip r:embed="rId2"/>
+          <a:stretch>
+            <a:fillRect/>
+          </a:stretch>
+        </p:blipFill>
+        <p:spPr>
+          <a:xfrm>
+            <a:off x="838200" y="3429000"/>
+            <a:ext cx="6662951" cy="2621249"/>
+          </a:xfrm>
+          <a:prstGeom prst="rect">
+            <a:avLst/>
+          </a:prstGeom>
+        </p:spPr>
+      </p:pic>
     </p:spTree>
     <p:extLst>
       <p:ext uri="{BB962C8B-B14F-4D97-AF65-F5344CB8AC3E}">
-        <p14:creationId xmlns:p14="http://schemas.microsoft.com/office/powerpoint/2010/main" val="2251275311"/>
+        <p14:creationId xmlns:p14="http://schemas.microsoft.com/office/powerpoint/2010/main" val="3312667182"/>
       </p:ext>
     </p:extLst>
   </p:cSld>
@@ -23897,7 +24564,7 @@
         <p:cNvPr id="1" name="">
           <a:extLst>
             <a:ext uri="{FF2B5EF4-FFF2-40B4-BE49-F238E27FC236}">
-              <a16:creationId xmlns:a16="http://schemas.microsoft.com/office/drawing/2014/main" id="{6B7A8E0D-AF0E-4842-DE3F-F251824214C8}"/>
+              <a16:creationId xmlns:a16="http://schemas.microsoft.com/office/drawing/2014/main" id="{6A6BB505-F715-21F8-586C-D825A5D48EA4}"/>
             </a:ext>
           </a:extLst>
         </p:cNvPr>
@@ -23914,133 +24581,10 @@
       </p:grpSpPr>
       <p:sp>
         <p:nvSpPr>
-          <p:cNvPr id="2" name="Título 1">
-            <a:extLst>
-              <a:ext uri="{FF2B5EF4-FFF2-40B4-BE49-F238E27FC236}">
-                <a16:creationId xmlns:a16="http://schemas.microsoft.com/office/drawing/2014/main" id="{FAF9D092-B3A2-DDBB-E822-3B2F15C64D5B}"/>
-              </a:ext>
-            </a:extLst>
-          </p:cNvPr>
-          <p:cNvSpPr>
-            <a:spLocks noGrp="1"/>
-          </p:cNvSpPr>
-          <p:nvPr>
-            <p:ph type="title"/>
-          </p:nvPr>
-        </p:nvSpPr>
-        <p:spPr/>
-        <p:txBody>
-          <a:bodyPr/>
-          <a:lstStyle/>
-          <a:p>
-            <a:r>
-              <a:rPr lang="en-US" dirty="0" err="1"/>
-              <a:t>Objetivo</a:t>
-            </a:r>
-            <a:endParaRPr lang="pt-BR" dirty="0"/>
-          </a:p>
-        </p:txBody>
-      </p:sp>
-      <p:sp>
-        <p:nvSpPr>
-          <p:cNvPr id="3" name="Espaço Reservado para Conteúdo 2">
-            <a:extLst>
-              <a:ext uri="{FF2B5EF4-FFF2-40B4-BE49-F238E27FC236}">
-                <a16:creationId xmlns:a16="http://schemas.microsoft.com/office/drawing/2014/main" id="{60D2E380-F776-C84E-9E75-724F15BE3182}"/>
-              </a:ext>
-            </a:extLst>
-          </p:cNvPr>
-          <p:cNvSpPr>
-            <a:spLocks noGrp="1"/>
-          </p:cNvSpPr>
-          <p:nvPr>
-            <p:ph idx="1"/>
-          </p:nvPr>
-        </p:nvSpPr>
-        <p:spPr/>
-        <p:txBody>
-          <a:bodyPr>
-            <a:normAutofit/>
-          </a:bodyPr>
-          <a:lstStyle/>
-          <a:p>
-            <a:r>
-              <a:rPr lang="en-US" dirty="0"/>
-              <a:t>Análise da performance global de </a:t>
-            </a:r>
-            <a:r>
-              <a:rPr lang="en-US" dirty="0" err="1"/>
-              <a:t>aplicações</a:t>
-            </a:r>
-            <a:r>
-              <a:rPr lang="en-US" dirty="0"/>
-              <a:t> </a:t>
-            </a:r>
-            <a:r>
-              <a:rPr lang="en-US" dirty="0" err="1"/>
-              <a:t>paralelas</a:t>
-            </a:r>
-            <a:r>
-              <a:rPr lang="en-US" dirty="0"/>
-              <a:t> CPU-bound em CPU da 14</a:t>
-            </a:r>
-            <a:r>
-              <a:rPr lang="pt-BR" dirty="0"/>
-              <a:t>ª geração</a:t>
-            </a:r>
-          </a:p>
-          <a:p>
-            <a:pPr lvl="1"/>
-            <a:r>
-              <a:rPr lang="pt-BR" dirty="0"/>
-              <a:t>Sem foco em performance por watt</a:t>
-            </a:r>
-          </a:p>
-          <a:p>
-            <a:r>
-              <a:rPr lang="pt-BR" dirty="0"/>
-              <a:t>Observação do impacto de</a:t>
-            </a:r>
-          </a:p>
-          <a:p>
-            <a:pPr lvl="1"/>
-            <a:r>
-              <a:rPr lang="pt-BR" dirty="0"/>
-              <a:t>Núcleos p-core</a:t>
-            </a:r>
-          </a:p>
-          <a:p>
-            <a:pPr lvl="1"/>
-            <a:r>
-              <a:rPr lang="pt-BR" dirty="0"/>
-              <a:t>Núcleos </a:t>
-            </a:r>
-            <a:r>
-              <a:rPr lang="pt-BR" dirty="0" err="1"/>
-              <a:t>e-core</a:t>
-            </a:r>
-            <a:endParaRPr lang="pt-BR" dirty="0"/>
-          </a:p>
-          <a:p>
-            <a:pPr lvl="1"/>
-            <a:r>
-              <a:rPr lang="pt-BR" dirty="0"/>
-              <a:t>Hyper-</a:t>
-            </a:r>
-            <a:r>
-              <a:rPr lang="pt-BR" dirty="0" err="1"/>
-              <a:t>Threading</a:t>
-            </a:r>
-            <a:endParaRPr lang="pt-BR" dirty="0"/>
-          </a:p>
-        </p:txBody>
-      </p:sp>
-      <p:sp>
-        <p:nvSpPr>
           <p:cNvPr id="4" name="Espaço Reservado para Número de Slide 3">
             <a:extLst>
               <a:ext uri="{FF2B5EF4-FFF2-40B4-BE49-F238E27FC236}">
-                <a16:creationId xmlns:a16="http://schemas.microsoft.com/office/drawing/2014/main" id="{8B793B1F-A151-41A3-B16C-902CFE8CC723}"/>
+                <a16:creationId xmlns:a16="http://schemas.microsoft.com/office/drawing/2014/main" id="{B3E9B602-608E-D835-A861-01B02B0C2FED}"/>
               </a:ext>
             </a:extLst>
           </p:cNvPr>
@@ -24064,10 +24608,150 @@
           </a:p>
         </p:txBody>
       </p:sp>
+      <p:pic>
+        <p:nvPicPr>
+          <p:cNvPr id="11" name="Imagem 10">
+            <a:extLst>
+              <a:ext uri="{FF2B5EF4-FFF2-40B4-BE49-F238E27FC236}">
+                <a16:creationId xmlns:a16="http://schemas.microsoft.com/office/drawing/2014/main" id="{37F7EA34-498B-D96B-6538-628B20EAE112}"/>
+              </a:ext>
+            </a:extLst>
+          </p:cNvPr>
+          <p:cNvPicPr>
+            <a:picLocks noChangeAspect="1"/>
+          </p:cNvPicPr>
+          <p:nvPr/>
+        </p:nvPicPr>
+        <p:blipFill>
+          <a:blip r:embed="rId2"/>
+          <a:srcRect b="24065"/>
+          <a:stretch>
+            <a:fillRect/>
+          </a:stretch>
+        </p:blipFill>
+        <p:spPr>
+          <a:xfrm>
+            <a:off x="288757" y="968649"/>
+            <a:ext cx="7691726" cy="2749109"/>
+          </a:xfrm>
+          <a:prstGeom prst="rect">
+            <a:avLst/>
+          </a:prstGeom>
+        </p:spPr>
+      </p:pic>
+      <p:pic>
+        <p:nvPicPr>
+          <p:cNvPr id="13" name="Imagem 12">
+            <a:extLst>
+              <a:ext uri="{FF2B5EF4-FFF2-40B4-BE49-F238E27FC236}">
+                <a16:creationId xmlns:a16="http://schemas.microsoft.com/office/drawing/2014/main" id="{12121A29-F1A1-D9E1-73F3-2CF698EB1B7C}"/>
+              </a:ext>
+            </a:extLst>
+          </p:cNvPr>
+          <p:cNvPicPr>
+            <a:picLocks noChangeAspect="1"/>
+          </p:cNvPicPr>
+          <p:nvPr/>
+        </p:nvPicPr>
+        <p:blipFill>
+          <a:blip r:embed="rId3"/>
+          <a:srcRect b="24649"/>
+          <a:stretch>
+            <a:fillRect/>
+          </a:stretch>
+        </p:blipFill>
+        <p:spPr>
+          <a:xfrm>
+            <a:off x="288757" y="3835817"/>
+            <a:ext cx="7529364" cy="2749109"/>
+          </a:xfrm>
+          <a:prstGeom prst="rect">
+            <a:avLst/>
+          </a:prstGeom>
+        </p:spPr>
+      </p:pic>
+      <p:sp>
+        <p:nvSpPr>
+          <p:cNvPr id="14" name="CaixaDeTexto 13">
+            <a:extLst>
+              <a:ext uri="{FF2B5EF4-FFF2-40B4-BE49-F238E27FC236}">
+                <a16:creationId xmlns:a16="http://schemas.microsoft.com/office/drawing/2014/main" id="{28FF7AEC-CD68-2544-0285-998C3BA17C74}"/>
+              </a:ext>
+            </a:extLst>
+          </p:cNvPr>
+          <p:cNvSpPr txBox="1"/>
+          <p:nvPr/>
+        </p:nvSpPr>
+        <p:spPr>
+          <a:xfrm>
+            <a:off x="288756" y="319088"/>
+            <a:ext cx="7403339" cy="461665"/>
+          </a:xfrm>
+          <a:prstGeom prst="rect">
+            <a:avLst/>
+          </a:prstGeom>
+          <a:noFill/>
+        </p:spPr>
+        <p:txBody>
+          <a:bodyPr wrap="square" rtlCol="0">
+            <a:spAutoFit/>
+          </a:bodyPr>
+          <a:lstStyle/>
+          <a:p>
+            <a:r>
+              <a:rPr lang="en-US" sz="2400" dirty="0" err="1"/>
+              <a:t>Comando</a:t>
+            </a:r>
+            <a:r>
+              <a:rPr lang="en-US" sz="2400" dirty="0"/>
+              <a:t>: </a:t>
+            </a:r>
+            <a:r>
+              <a:rPr lang="en-US" sz="2400" b="1" dirty="0" err="1"/>
+              <a:t>cpupower</a:t>
+            </a:r>
+            <a:r>
+              <a:rPr lang="en-US" sz="2400" b="1" dirty="0"/>
+              <a:t> -c 0 frequency-info</a:t>
+            </a:r>
+            <a:endParaRPr lang="pt-BR" sz="2400" b="1" dirty="0"/>
+          </a:p>
+        </p:txBody>
+      </p:sp>
+      <p:pic>
+        <p:nvPicPr>
+          <p:cNvPr id="15" name="Imagem 14">
+            <a:extLst>
+              <a:ext uri="{FF2B5EF4-FFF2-40B4-BE49-F238E27FC236}">
+                <a16:creationId xmlns:a16="http://schemas.microsoft.com/office/drawing/2014/main" id="{71D5BC68-7119-4AF4-35D3-8F3CD027AD65}"/>
+              </a:ext>
+            </a:extLst>
+          </p:cNvPr>
+          <p:cNvPicPr>
+            <a:picLocks noChangeAspect="1"/>
+          </p:cNvPicPr>
+          <p:nvPr/>
+        </p:nvPicPr>
+        <p:blipFill>
+          <a:blip r:embed="rId4"/>
+          <a:stretch>
+            <a:fillRect/>
+          </a:stretch>
+        </p:blipFill>
+        <p:spPr>
+          <a:xfrm>
+            <a:off x="7980483" y="2636105"/>
+            <a:ext cx="4030915" cy="1585789"/>
+          </a:xfrm>
+          <a:prstGeom prst="rect">
+            <a:avLst/>
+          </a:prstGeom>
+        </p:spPr>
+      </p:pic>
     </p:spTree>
     <p:extLst>
       <p:ext uri="{BB962C8B-B14F-4D97-AF65-F5344CB8AC3E}">
-        <p14:creationId xmlns:p14="http://schemas.microsoft.com/office/powerpoint/2010/main" val="1312181359"/>
+        <p14:creationId xmlns:p14="http://schemas.microsoft.com/office/powerpoint/2010/main" val="2656067867"/>
       </p:ext>
     </p:extLst>
   </p:cSld>
@@ -24082,7 +24766,13 @@
   <p:cSld>
     <p:spTree>
       <p:nvGrpSpPr>
-        <p:cNvPr id="1" name=""/>
+        <p:cNvPr id="1" name="">
+          <a:extLst>
+            <a:ext uri="{FF2B5EF4-FFF2-40B4-BE49-F238E27FC236}">
+              <a16:creationId xmlns:a16="http://schemas.microsoft.com/office/drawing/2014/main" id="{EA0EE554-EBA9-65A2-85D7-73D5C96AD1A1}"/>
+            </a:ext>
+          </a:extLst>
+        </p:cNvPr>
         <p:cNvGrpSpPr/>
         <p:nvPr/>
       </p:nvGrpSpPr>
@@ -24096,124 +24786,10 @@
       </p:grpSpPr>
       <p:sp>
         <p:nvSpPr>
-          <p:cNvPr id="2" name="Título 1">
-            <a:extLst>
-              <a:ext uri="{FF2B5EF4-FFF2-40B4-BE49-F238E27FC236}">
-                <a16:creationId xmlns:a16="http://schemas.microsoft.com/office/drawing/2014/main" id="{3F92635D-7411-3844-4E85-1D65CD1D506E}"/>
-              </a:ext>
-            </a:extLst>
-          </p:cNvPr>
-          <p:cNvSpPr>
-            <a:spLocks noGrp="1"/>
-          </p:cNvSpPr>
-          <p:nvPr>
-            <p:ph type="title"/>
-          </p:nvPr>
-        </p:nvSpPr>
-        <p:spPr/>
-        <p:txBody>
-          <a:bodyPr/>
-          <a:lstStyle/>
-          <a:p>
-            <a:r>
-              <a:rPr lang="en-US" dirty="0" err="1"/>
-              <a:t>Objeto</a:t>
-            </a:r>
-            <a:r>
-              <a:rPr lang="en-US" dirty="0"/>
-              <a:t> </a:t>
-            </a:r>
-            <a:r>
-              <a:rPr lang="en-US" dirty="0" err="1"/>
-              <a:t>computacional</a:t>
-            </a:r>
-            <a:r>
-              <a:rPr lang="en-US" dirty="0"/>
-              <a:t>: </a:t>
-            </a:r>
-            <a:r>
-              <a:rPr lang="en-US" dirty="0" err="1"/>
-              <a:t>Descrição</a:t>
-            </a:r>
-            <a:r>
-              <a:rPr lang="en-US" dirty="0"/>
-              <a:t> </a:t>
-            </a:r>
-            <a:r>
-              <a:rPr lang="en-US" dirty="0" err="1"/>
-              <a:t>geral</a:t>
-            </a:r>
-            <a:endParaRPr lang="pt-BR" dirty="0"/>
-          </a:p>
-        </p:txBody>
-      </p:sp>
-      <p:sp>
-        <p:nvSpPr>
-          <p:cNvPr id="3" name="Espaço Reservado para Conteúdo 2">
-            <a:extLst>
-              <a:ext uri="{FF2B5EF4-FFF2-40B4-BE49-F238E27FC236}">
-                <a16:creationId xmlns:a16="http://schemas.microsoft.com/office/drawing/2014/main" id="{7752EC7E-F974-D739-D29B-44C638496680}"/>
-              </a:ext>
-            </a:extLst>
-          </p:cNvPr>
-          <p:cNvSpPr>
-            <a:spLocks noGrp="1"/>
-          </p:cNvSpPr>
-          <p:nvPr>
-            <p:ph idx="1"/>
-          </p:nvPr>
-        </p:nvSpPr>
-        <p:spPr/>
-        <p:txBody>
-          <a:bodyPr>
-            <a:normAutofit/>
-          </a:bodyPr>
-          <a:lstStyle/>
-          <a:p>
-            <a:r>
-              <a:rPr lang="pt-BR" dirty="0"/>
-              <a:t>Serão analisadas aplicações paralelas CPU-</a:t>
-            </a:r>
-            <a:r>
-              <a:rPr lang="pt-BR" dirty="0" err="1"/>
-              <a:t>bound</a:t>
-            </a:r>
-            <a:endParaRPr lang="pt-BR" dirty="0"/>
-          </a:p>
-          <a:p>
-            <a:r>
-              <a:rPr lang="pt-BR" dirty="0"/>
-              <a:t>Serão observadas 2 cargas de trabalho que possuem implementações paralelas</a:t>
-            </a:r>
-          </a:p>
-          <a:p>
-            <a:r>
-              <a:rPr lang="pt-BR" dirty="0"/>
-              <a:t>Cargas</a:t>
-            </a:r>
-          </a:p>
-          <a:p>
-            <a:pPr lvl="1"/>
-            <a:r>
-              <a:rPr lang="pt-BR" dirty="0"/>
-              <a:t>Carga 1: Algoritmo de Criptografia</a:t>
-            </a:r>
-          </a:p>
-          <a:p>
-            <a:pPr lvl="1"/>
-            <a:r>
-              <a:rPr lang="pt-BR" dirty="0"/>
-              <a:t>Carga 2: Algoritmo de Multiplicação de matrizes</a:t>
-            </a:r>
-          </a:p>
-        </p:txBody>
-      </p:sp>
-      <p:sp>
-        <p:nvSpPr>
           <p:cNvPr id="4" name="Espaço Reservado para Número de Slide 3">
             <a:extLst>
               <a:ext uri="{FF2B5EF4-FFF2-40B4-BE49-F238E27FC236}">
-                <a16:creationId xmlns:a16="http://schemas.microsoft.com/office/drawing/2014/main" id="{9685CE73-BA77-20AC-0F83-5F57AFA5ADF2}"/>
+                <a16:creationId xmlns:a16="http://schemas.microsoft.com/office/drawing/2014/main" id="{0E2D8DBF-FEDE-589D-9F86-5FF1D5D2A632}"/>
               </a:ext>
             </a:extLst>
           </p:cNvPr>
@@ -24237,10 +24813,150 @@
           </a:p>
         </p:txBody>
       </p:sp>
+      <p:sp>
+        <p:nvSpPr>
+          <p:cNvPr id="14" name="CaixaDeTexto 13">
+            <a:extLst>
+              <a:ext uri="{FF2B5EF4-FFF2-40B4-BE49-F238E27FC236}">
+                <a16:creationId xmlns:a16="http://schemas.microsoft.com/office/drawing/2014/main" id="{A718B5EB-2838-0E15-607B-72C57F009126}"/>
+              </a:ext>
+            </a:extLst>
+          </p:cNvPr>
+          <p:cNvSpPr txBox="1"/>
+          <p:nvPr/>
+        </p:nvSpPr>
+        <p:spPr>
+          <a:xfrm>
+            <a:off x="288756" y="319088"/>
+            <a:ext cx="7403339" cy="461665"/>
+          </a:xfrm>
+          <a:prstGeom prst="rect">
+            <a:avLst/>
+          </a:prstGeom>
+          <a:noFill/>
+        </p:spPr>
+        <p:txBody>
+          <a:bodyPr wrap="square" rtlCol="0">
+            <a:spAutoFit/>
+          </a:bodyPr>
+          <a:lstStyle/>
+          <a:p>
+            <a:r>
+              <a:rPr lang="en-US" sz="2400" dirty="0" err="1"/>
+              <a:t>Comando</a:t>
+            </a:r>
+            <a:r>
+              <a:rPr lang="en-US" sz="2400" dirty="0"/>
+              <a:t>: </a:t>
+            </a:r>
+            <a:r>
+              <a:rPr lang="en-US" sz="2400" b="1" dirty="0" err="1"/>
+              <a:t>cpupower</a:t>
+            </a:r>
+            <a:r>
+              <a:rPr lang="en-US" sz="2400" b="1" dirty="0"/>
+              <a:t> -c 16 frequency-info</a:t>
+            </a:r>
+            <a:endParaRPr lang="pt-BR" sz="2400" b="1" dirty="0"/>
+          </a:p>
+        </p:txBody>
+      </p:sp>
+      <p:pic>
+        <p:nvPicPr>
+          <p:cNvPr id="3" name="Imagem 2">
+            <a:extLst>
+              <a:ext uri="{FF2B5EF4-FFF2-40B4-BE49-F238E27FC236}">
+                <a16:creationId xmlns:a16="http://schemas.microsoft.com/office/drawing/2014/main" id="{1F623138-567A-34E6-E896-ACB143CF417A}"/>
+              </a:ext>
+            </a:extLst>
+          </p:cNvPr>
+          <p:cNvPicPr>
+            <a:picLocks noChangeAspect="1"/>
+          </p:cNvPicPr>
+          <p:nvPr/>
+        </p:nvPicPr>
+        <p:blipFill>
+          <a:blip r:embed="rId2"/>
+          <a:srcRect b="24066"/>
+          <a:stretch>
+            <a:fillRect/>
+          </a:stretch>
+        </p:blipFill>
+        <p:spPr>
+          <a:xfrm>
+            <a:off x="288756" y="888906"/>
+            <a:ext cx="7691727" cy="2706974"/>
+          </a:xfrm>
+          <a:prstGeom prst="rect">
+            <a:avLst/>
+          </a:prstGeom>
+        </p:spPr>
+      </p:pic>
+      <p:pic>
+        <p:nvPicPr>
+          <p:cNvPr id="6" name="Imagem 5">
+            <a:extLst>
+              <a:ext uri="{FF2B5EF4-FFF2-40B4-BE49-F238E27FC236}">
+                <a16:creationId xmlns:a16="http://schemas.microsoft.com/office/drawing/2014/main" id="{1AEC4657-C34A-6314-B086-377EE9CFE144}"/>
+              </a:ext>
+            </a:extLst>
+          </p:cNvPr>
+          <p:cNvPicPr>
+            <a:picLocks noChangeAspect="1"/>
+          </p:cNvPicPr>
+          <p:nvPr/>
+        </p:nvPicPr>
+        <p:blipFill>
+          <a:blip r:embed="rId3"/>
+          <a:srcRect b="23537"/>
+          <a:stretch>
+            <a:fillRect/>
+          </a:stretch>
+        </p:blipFill>
+        <p:spPr>
+          <a:xfrm>
+            <a:off x="288756" y="3794448"/>
+            <a:ext cx="7691727" cy="2799733"/>
+          </a:xfrm>
+          <a:prstGeom prst="rect">
+            <a:avLst/>
+          </a:prstGeom>
+        </p:spPr>
+      </p:pic>
+      <p:pic>
+        <p:nvPicPr>
+          <p:cNvPr id="8" name="Imagem 7">
+            <a:extLst>
+              <a:ext uri="{FF2B5EF4-FFF2-40B4-BE49-F238E27FC236}">
+                <a16:creationId xmlns:a16="http://schemas.microsoft.com/office/drawing/2014/main" id="{36CD340B-61E4-68A8-95F7-82283A5177D7}"/>
+              </a:ext>
+            </a:extLst>
+          </p:cNvPr>
+          <p:cNvPicPr>
+            <a:picLocks noChangeAspect="1"/>
+          </p:cNvPicPr>
+          <p:nvPr/>
+        </p:nvPicPr>
+        <p:blipFill>
+          <a:blip r:embed="rId4"/>
+          <a:stretch>
+            <a:fillRect/>
+          </a:stretch>
+        </p:blipFill>
+        <p:spPr>
+          <a:xfrm>
+            <a:off x="7980483" y="2636105"/>
+            <a:ext cx="4030915" cy="1585789"/>
+          </a:xfrm>
+          <a:prstGeom prst="rect">
+            <a:avLst/>
+          </a:prstGeom>
+        </p:spPr>
+      </p:pic>
     </p:spTree>
     <p:extLst>
       <p:ext uri="{BB962C8B-B14F-4D97-AF65-F5344CB8AC3E}">
-        <p14:creationId xmlns:p14="http://schemas.microsoft.com/office/powerpoint/2010/main" val="794135920"/>
+        <p14:creationId xmlns:p14="http://schemas.microsoft.com/office/powerpoint/2010/main" val="3775376469"/>
       </p:ext>
     </p:extLst>
   </p:cSld>
@@ -24258,7 +24974,7 @@
         <p:cNvPr id="1" name="">
           <a:extLst>
             <a:ext uri="{FF2B5EF4-FFF2-40B4-BE49-F238E27FC236}">
-              <a16:creationId xmlns:a16="http://schemas.microsoft.com/office/drawing/2014/main" id="{8C8837FB-BAB0-408A-C799-7136EE302440}"/>
+              <a16:creationId xmlns:a16="http://schemas.microsoft.com/office/drawing/2014/main" id="{FCA57A0A-6019-09A9-9BC2-9FCE50535229}"/>
             </a:ext>
           </a:extLst>
         </p:cNvPr>
@@ -24278,7 +24994,7 @@
           <p:cNvPr id="2" name="Título 1">
             <a:extLst>
               <a:ext uri="{FF2B5EF4-FFF2-40B4-BE49-F238E27FC236}">
-                <a16:creationId xmlns:a16="http://schemas.microsoft.com/office/drawing/2014/main" id="{974E9115-A5B8-25F5-2CF5-CF78C96F5F6B}"/>
+                <a16:creationId xmlns:a16="http://schemas.microsoft.com/office/drawing/2014/main" id="{39713913-BE32-BC8E-EACD-25E0EE829A37}"/>
               </a:ext>
             </a:extLst>
           </p:cNvPr>
@@ -24295,20 +25011,16 @@
           <a:lstStyle/>
           <a:p>
             <a:r>
+              <a:rPr lang="en-US" dirty="0"/>
+              <a:t>Teste de </a:t>
+            </a:r>
+            <a:r>
               <a:rPr lang="en-US" dirty="0" err="1"/>
-              <a:t>Objeto</a:t>
-            </a:r>
-            <a:r>
-              <a:rPr lang="en-US" dirty="0"/>
-              <a:t> </a:t>
-            </a:r>
-            <a:r>
-              <a:rPr lang="en-US" dirty="0" err="1"/>
-              <a:t>computacional</a:t>
-            </a:r>
-            <a:r>
-              <a:rPr lang="en-US" dirty="0"/>
-              <a:t>: Carga 1</a:t>
+              <a:t>Frequência</a:t>
+            </a:r>
+            <a:r>
+              <a:rPr lang="en-US" dirty="0"/>
+              <a:t> de CPU</a:t>
             </a:r>
             <a:endParaRPr lang="pt-BR" dirty="0"/>
           </a:p>
@@ -24319,7 +25031,7 @@
           <p:cNvPr id="3" name="Espaço Reservado para Conteúdo 2">
             <a:extLst>
               <a:ext uri="{FF2B5EF4-FFF2-40B4-BE49-F238E27FC236}">
-                <a16:creationId xmlns:a16="http://schemas.microsoft.com/office/drawing/2014/main" id="{E57CF841-34A1-BC08-984A-F9DC94607B0F}"/>
+                <a16:creationId xmlns:a16="http://schemas.microsoft.com/office/drawing/2014/main" id="{B588263A-584E-F8D5-A4AE-51D290B5ACD3}"/>
               </a:ext>
             </a:extLst>
           </p:cNvPr>
@@ -24333,113 +25045,14 @@
         <p:spPr/>
         <p:txBody>
           <a:bodyPr>
-            <a:normAutofit lnSpcReduction="10000"/>
+            <a:normAutofit/>
           </a:bodyPr>
           <a:lstStyle/>
           <a:p>
-            <a:r>
-              <a:rPr lang="pt-BR" dirty="0"/>
-              <a:t>Algoritmo: Criptografia AES-CTR</a:t>
-            </a:r>
-            <a:r>
-              <a:rPr lang="pt-BR" baseline="30000" dirty="0"/>
-              <a:t>5</a:t>
-            </a:r>
-          </a:p>
-          <a:p>
-            <a:endParaRPr lang="pt-BR" dirty="0"/>
-          </a:p>
-          <a:p>
-            <a:r>
-              <a:rPr lang="pt-BR" dirty="0"/>
-              <a:t>Características</a:t>
-            </a:r>
-          </a:p>
-          <a:p>
-            <a:pPr lvl="1"/>
-            <a:r>
-              <a:rPr lang="pt-BR" dirty="0"/>
-              <a:t>Modo de operação CTR (Counter </a:t>
-            </a:r>
-            <a:r>
-              <a:rPr lang="pt-BR" dirty="0" err="1"/>
-              <a:t>Mode</a:t>
-            </a:r>
-            <a:r>
-              <a:rPr lang="pt-BR" dirty="0"/>
-              <a:t>)</a:t>
-            </a:r>
-          </a:p>
-          <a:p>
-            <a:pPr lvl="2"/>
-            <a:r>
-              <a:rPr lang="pt-BR" dirty="0"/>
-              <a:t>Transforma o AES em um cifrador de fluxo.</a:t>
-            </a:r>
-          </a:p>
-          <a:p>
-            <a:pPr lvl="2"/>
-            <a:r>
-              <a:rPr lang="pt-BR" dirty="0"/>
-              <a:t>Usa um contador (</a:t>
-            </a:r>
-            <a:r>
-              <a:rPr lang="pt-BR" dirty="0" err="1"/>
-              <a:t>nonce</a:t>
-            </a:r>
-            <a:r>
-              <a:rPr lang="pt-BR" dirty="0"/>
-              <a:t> + incremento) para gerar blocos únicos de chave.</a:t>
-            </a:r>
-          </a:p>
-          <a:p>
-            <a:pPr lvl="1"/>
-            <a:r>
-              <a:rPr lang="pt-BR" dirty="0"/>
-              <a:t>Paralelismo natural</a:t>
-            </a:r>
-          </a:p>
-          <a:p>
-            <a:pPr lvl="2"/>
-            <a:r>
-              <a:rPr lang="pt-BR" dirty="0"/>
-              <a:t>Cada bloco pode ser cifrado/decifrado independentemente.</a:t>
-            </a:r>
-          </a:p>
-          <a:p>
-            <a:pPr lvl="2"/>
-            <a:r>
-              <a:rPr lang="pt-BR" dirty="0"/>
-              <a:t>Ideal para execução em múltiplos núcleos/threads.</a:t>
-            </a:r>
-          </a:p>
-          <a:p>
-            <a:pPr lvl="2"/>
-            <a:endParaRPr lang="pt-BR" dirty="0"/>
-          </a:p>
-          <a:p>
-            <a:r>
-              <a:rPr lang="pt-BR" dirty="0"/>
-              <a:t>Implementação: biblioteca PyCryptodome</a:t>
-            </a:r>
-            <a:r>
-              <a:rPr lang="pt-BR" baseline="30000" dirty="0"/>
-              <a:t>6</a:t>
-            </a:r>
-            <a:r>
-              <a:rPr lang="pt-BR" dirty="0"/>
-              <a:t> (Python)</a:t>
-            </a:r>
-          </a:p>
-          <a:p>
-            <a:pPr marL="0" indent="0">
-              <a:buNone/>
-            </a:pPr>
-            <a:endParaRPr lang="pt-BR" dirty="0"/>
-          </a:p>
-          <a:p>
-            <a:pPr lvl="2"/>
-            <a:endParaRPr lang="pt-BR" dirty="0"/>
+            <a:endParaRPr lang="en-US" b="1" dirty="0"/>
+          </a:p>
+          <a:p>
+            <a:endParaRPr lang="pt-BR" b="1" dirty="0"/>
           </a:p>
         </p:txBody>
       </p:sp>
@@ -24448,7 +25061,7 @@
           <p:cNvPr id="4" name="Espaço Reservado para Número de Slide 3">
             <a:extLst>
               <a:ext uri="{FF2B5EF4-FFF2-40B4-BE49-F238E27FC236}">
-                <a16:creationId xmlns:a16="http://schemas.microsoft.com/office/drawing/2014/main" id="{BFEEBBDC-39E2-EF57-FB2A-189C4C55E0F1}"/>
+                <a16:creationId xmlns:a16="http://schemas.microsoft.com/office/drawing/2014/main" id="{68F76967-C050-DB5C-D1D7-624B0C5F0BAA}"/>
               </a:ext>
             </a:extLst>
           </p:cNvPr>
@@ -24472,10 +25085,174 @@
           </a:p>
         </p:txBody>
       </p:sp>
+      <p:pic>
+        <p:nvPicPr>
+          <p:cNvPr id="7" name="Imagem 6">
+            <a:extLst>
+              <a:ext uri="{FF2B5EF4-FFF2-40B4-BE49-F238E27FC236}">
+                <a16:creationId xmlns:a16="http://schemas.microsoft.com/office/drawing/2014/main" id="{CDF7E3F5-66E2-6B4A-DD5E-DE49576082E3}"/>
+              </a:ext>
+            </a:extLst>
+          </p:cNvPr>
+          <p:cNvPicPr>
+            <a:picLocks noChangeAspect="1"/>
+          </p:cNvPicPr>
+          <p:nvPr/>
+        </p:nvPicPr>
+        <p:blipFill>
+          <a:blip r:embed="rId2"/>
+          <a:stretch>
+            <a:fillRect/>
+          </a:stretch>
+        </p:blipFill>
+        <p:spPr>
+          <a:xfrm>
+            <a:off x="4991748" y="1370125"/>
+            <a:ext cx="7026853" cy="5351350"/>
+          </a:xfrm>
+          <a:prstGeom prst="rect">
+            <a:avLst/>
+          </a:prstGeom>
+        </p:spPr>
+      </p:pic>
+      <p:pic>
+        <p:nvPicPr>
+          <p:cNvPr id="9" name="Imagem 8">
+            <a:extLst>
+              <a:ext uri="{FF2B5EF4-FFF2-40B4-BE49-F238E27FC236}">
+                <a16:creationId xmlns:a16="http://schemas.microsoft.com/office/drawing/2014/main" id="{40FE9EC6-7D0F-0715-46B1-C1A1DC0F2D32}"/>
+              </a:ext>
+            </a:extLst>
+          </p:cNvPr>
+          <p:cNvPicPr>
+            <a:picLocks noChangeAspect="1"/>
+          </p:cNvPicPr>
+          <p:nvPr/>
+        </p:nvPicPr>
+        <p:blipFill>
+          <a:blip r:embed="rId3"/>
+          <a:stretch>
+            <a:fillRect/>
+          </a:stretch>
+        </p:blipFill>
+        <p:spPr>
+          <a:xfrm>
+            <a:off x="635515" y="1645803"/>
+            <a:ext cx="4918852" cy="3177395"/>
+          </a:xfrm>
+          <a:prstGeom prst="rect">
+            <a:avLst/>
+          </a:prstGeom>
+        </p:spPr>
+      </p:pic>
+      <p:sp>
+        <p:nvSpPr>
+          <p:cNvPr id="10" name="Elipse 9">
+            <a:extLst>
+              <a:ext uri="{FF2B5EF4-FFF2-40B4-BE49-F238E27FC236}">
+                <a16:creationId xmlns:a16="http://schemas.microsoft.com/office/drawing/2014/main" id="{3828B902-EC4D-FF07-D4C4-B5E26DECA2BF}"/>
+              </a:ext>
+            </a:extLst>
+          </p:cNvPr>
+          <p:cNvSpPr/>
+          <p:nvPr/>
+        </p:nvSpPr>
+        <p:spPr>
+          <a:xfrm>
+            <a:off x="7118555" y="3775587"/>
+            <a:ext cx="3028335" cy="393290"/>
+          </a:xfrm>
+          <a:prstGeom prst="ellipse">
+            <a:avLst/>
+          </a:prstGeom>
+          <a:noFill/>
+          <a:ln>
+            <a:solidFill>
+              <a:srgbClr val="FF0000"/>
+            </a:solidFill>
+          </a:ln>
+        </p:spPr>
+        <p:style>
+          <a:lnRef idx="2">
+            <a:schemeClr val="accent1">
+              <a:shade val="15000"/>
+            </a:schemeClr>
+          </a:lnRef>
+          <a:fillRef idx="1">
+            <a:schemeClr val="accent1"/>
+          </a:fillRef>
+          <a:effectRef idx="0">
+            <a:schemeClr val="accent1"/>
+          </a:effectRef>
+          <a:fontRef idx="minor">
+            <a:schemeClr val="lt1"/>
+          </a:fontRef>
+        </p:style>
+        <p:txBody>
+          <a:bodyPr rtlCol="0" anchor="ctr"/>
+          <a:lstStyle/>
+          <a:p>
+            <a:pPr algn="ctr"/>
+            <a:endParaRPr lang="pt-BR"/>
+          </a:p>
+        </p:txBody>
+      </p:sp>
+      <p:sp>
+        <p:nvSpPr>
+          <p:cNvPr id="12" name="Retângulo 11">
+            <a:extLst>
+              <a:ext uri="{FF2B5EF4-FFF2-40B4-BE49-F238E27FC236}">
+                <a16:creationId xmlns:a16="http://schemas.microsoft.com/office/drawing/2014/main" id="{CC32D044-4DFB-D040-589C-CCAF0BE53C69}"/>
+              </a:ext>
+            </a:extLst>
+          </p:cNvPr>
+          <p:cNvSpPr/>
+          <p:nvPr/>
+        </p:nvSpPr>
+        <p:spPr>
+          <a:xfrm>
+            <a:off x="1219200" y="3696929"/>
+            <a:ext cx="3687097" cy="196645"/>
+          </a:xfrm>
+          <a:prstGeom prst="rect">
+            <a:avLst/>
+          </a:prstGeom>
+          <a:noFill/>
+          <a:ln>
+            <a:solidFill>
+              <a:srgbClr val="FF0000"/>
+            </a:solidFill>
+          </a:ln>
+        </p:spPr>
+        <p:style>
+          <a:lnRef idx="2">
+            <a:schemeClr val="accent1">
+              <a:shade val="15000"/>
+            </a:schemeClr>
+          </a:lnRef>
+          <a:fillRef idx="1">
+            <a:schemeClr val="accent1"/>
+          </a:fillRef>
+          <a:effectRef idx="0">
+            <a:schemeClr val="accent1"/>
+          </a:effectRef>
+          <a:fontRef idx="minor">
+            <a:schemeClr val="lt1"/>
+          </a:fontRef>
+        </p:style>
+        <p:txBody>
+          <a:bodyPr rtlCol="0" anchor="ctr"/>
+          <a:lstStyle/>
+          <a:p>
+            <a:pPr algn="ctr"/>
+            <a:endParaRPr lang="pt-BR"/>
+          </a:p>
+        </p:txBody>
+      </p:sp>
     </p:spTree>
     <p:extLst>
       <p:ext uri="{BB962C8B-B14F-4D97-AF65-F5344CB8AC3E}">
-        <p14:creationId xmlns:p14="http://schemas.microsoft.com/office/powerpoint/2010/main" val="266257524"/>
+        <p14:creationId xmlns:p14="http://schemas.microsoft.com/office/powerpoint/2010/main" val="1170554390"/>
       </p:ext>
     </p:extLst>
   </p:cSld>

--- a/02-Parcial/02-Parcial-Apresentacao.pptx
+++ b/02-Parcial/02-Parcial-Apresentacao.pptx
@@ -15,21 +15,21 @@
     <p:sldId id="277" r:id="rId6"/>
     <p:sldId id="278" r:id="rId7"/>
     <p:sldId id="273" r:id="rId8"/>
-    <p:sldId id="280" r:id="rId9"/>
-    <p:sldId id="281" r:id="rId10"/>
-    <p:sldId id="282" r:id="rId11"/>
-    <p:sldId id="283" r:id="rId12"/>
-    <p:sldId id="265" r:id="rId13"/>
-    <p:sldId id="276" r:id="rId14"/>
-    <p:sldId id="279" r:id="rId15"/>
-    <p:sldId id="258" r:id="rId16"/>
-    <p:sldId id="260" r:id="rId17"/>
-    <p:sldId id="262" r:id="rId18"/>
-    <p:sldId id="275" r:id="rId19"/>
-    <p:sldId id="261" r:id="rId20"/>
-    <p:sldId id="263" r:id="rId21"/>
-    <p:sldId id="266" r:id="rId22"/>
-    <p:sldId id="274" r:id="rId23"/>
+    <p:sldId id="265" r:id="rId9"/>
+    <p:sldId id="280" r:id="rId10"/>
+    <p:sldId id="281" r:id="rId11"/>
+    <p:sldId id="282" r:id="rId12"/>
+    <p:sldId id="283" r:id="rId13"/>
+    <p:sldId id="284" r:id="rId14"/>
+    <p:sldId id="285" r:id="rId15"/>
+    <p:sldId id="286" r:id="rId16"/>
+    <p:sldId id="287" r:id="rId17"/>
+    <p:sldId id="288" r:id="rId18"/>
+    <p:sldId id="276" r:id="rId19"/>
+    <p:sldId id="289" r:id="rId20"/>
+    <p:sldId id="279" r:id="rId21"/>
+    <p:sldId id="263" r:id="rId22"/>
+    <p:sldId id="266" r:id="rId23"/>
   </p:sldIdLst>
   <p:sldSz cx="12192000" cy="6858000"/>
   <p:notesSz cx="6858000" cy="9144000"/>
@@ -139,7 +139,7 @@
 <file path=ppt/revisionInfo.xml><?xml version="1.0" encoding="utf-8"?>
 <p1510:revInfo xmlns:a="http://schemas.openxmlformats.org/drawingml/2006/main" xmlns:r="http://schemas.openxmlformats.org/officeDocument/2006/relationships" xmlns:p1510="http://schemas.microsoft.com/office/powerpoint/2015/10/main">
   <p1510:revLst>
-    <p1510:client id="{9DA59AF8-04B2-48DB-8084-3B24E39CA914}" v="35" dt="2025-10-01T22:15:15.664"/>
+    <p1510:client id="{9DA59AF8-04B2-48DB-8084-3B24E39CA914}" v="82" dt="2025-10-02T12:57:10.691"/>
   </p1510:revLst>
 </p1510:revInfo>
 </file>
@@ -149,7 +149,7 @@
   <pc:docChgLst>
     <pc:chgData name="João Luiz Grave Gross" userId="70663aa8-58a3-482c-a5ab-33e75f2c9147" providerId="ADAL" clId="{1642D5D4-6F90-4729-B6C8-CF446D4D64F7}"/>
     <pc:docChg chg="undo redo custSel addSld delSld modSld sldOrd">
-      <pc:chgData name="João Luiz Grave Gross" userId="70663aa8-58a3-482c-a5ab-33e75f2c9147" providerId="ADAL" clId="{1642D5D4-6F90-4729-B6C8-CF446D4D64F7}" dt="2025-10-01T22:17:03.381" v="2494" actId="1076"/>
+      <pc:chgData name="João Luiz Grave Gross" userId="70663aa8-58a3-482c-a5ab-33e75f2c9147" providerId="ADAL" clId="{1642D5D4-6F90-4729-B6C8-CF446D4D64F7}" dt="2025-10-02T12:59:41.487" v="4499" actId="13926"/>
       <pc:docMkLst>
         <pc:docMk/>
       </pc:docMkLst>
@@ -177,13 +177,13 @@
         </pc:spChg>
       </pc:sldChg>
       <pc:sldChg chg="modSp mod">
-        <pc:chgData name="João Luiz Grave Gross" userId="70663aa8-58a3-482c-a5ab-33e75f2c9147" providerId="ADAL" clId="{1642D5D4-6F90-4729-B6C8-CF446D4D64F7}" dt="2025-10-01T21:56:35.594" v="2307"/>
+        <pc:chgData name="João Luiz Grave Gross" userId="70663aa8-58a3-482c-a5ab-33e75f2c9147" providerId="ADAL" clId="{1642D5D4-6F90-4729-B6C8-CF446D4D64F7}" dt="2025-10-02T12:58:33.413" v="4442" actId="20577"/>
         <pc:sldMkLst>
           <pc:docMk/>
           <pc:sldMk cId="1631264518" sldId="257"/>
         </pc:sldMkLst>
         <pc:spChg chg="mod">
-          <ac:chgData name="João Luiz Grave Gross" userId="70663aa8-58a3-482c-a5ab-33e75f2c9147" providerId="ADAL" clId="{1642D5D4-6F90-4729-B6C8-CF446D4D64F7}" dt="2025-10-01T21:56:35.594" v="2307"/>
+          <ac:chgData name="João Luiz Grave Gross" userId="70663aa8-58a3-482c-a5ab-33e75f2c9147" providerId="ADAL" clId="{1642D5D4-6F90-4729-B6C8-CF446D4D64F7}" dt="2025-10-02T12:58:33.413" v="4442" actId="20577"/>
           <ac:spMkLst>
             <pc:docMk/>
             <pc:sldMk cId="1631264518" sldId="257"/>
@@ -192,14 +192,57 @@
         </pc:spChg>
       </pc:sldChg>
       <pc:sldChg chg="del">
+        <pc:chgData name="João Luiz Grave Gross" userId="70663aa8-58a3-482c-a5ab-33e75f2c9147" providerId="ADAL" clId="{1642D5D4-6F90-4729-B6C8-CF446D4D64F7}" dt="2025-10-02T12:43:32.425" v="3514" actId="47"/>
+        <pc:sldMkLst>
+          <pc:docMk/>
+          <pc:sldMk cId="374058148" sldId="258"/>
+        </pc:sldMkLst>
+      </pc:sldChg>
+      <pc:sldChg chg="del">
         <pc:chgData name="João Luiz Grave Gross" userId="70663aa8-58a3-482c-a5ab-33e75f2c9147" providerId="ADAL" clId="{1642D5D4-6F90-4729-B6C8-CF446D4D64F7}" dt="2025-10-01T21:03:51.277" v="661" actId="47"/>
         <pc:sldMkLst>
           <pc:docMk/>
           <pc:sldMk cId="794135920" sldId="259"/>
         </pc:sldMkLst>
       </pc:sldChg>
+      <pc:sldChg chg="del">
+        <pc:chgData name="João Luiz Grave Gross" userId="70663aa8-58a3-482c-a5ab-33e75f2c9147" providerId="ADAL" clId="{1642D5D4-6F90-4729-B6C8-CF446D4D64F7}" dt="2025-10-02T12:51:17.799" v="3949" actId="47"/>
+        <pc:sldMkLst>
+          <pc:docMk/>
+          <pc:sldMk cId="288332579" sldId="260"/>
+        </pc:sldMkLst>
+      </pc:sldChg>
+      <pc:sldChg chg="del">
+        <pc:chgData name="João Luiz Grave Gross" userId="70663aa8-58a3-482c-a5ab-33e75f2c9147" providerId="ADAL" clId="{1642D5D4-6F90-4729-B6C8-CF446D4D64F7}" dt="2025-10-02T12:10:35.476" v="2588" actId="2696"/>
+        <pc:sldMkLst>
+          <pc:docMk/>
+          <pc:sldMk cId="939074047" sldId="261"/>
+        </pc:sldMkLst>
+      </pc:sldChg>
+      <pc:sldChg chg="del">
+        <pc:chgData name="João Luiz Grave Gross" userId="70663aa8-58a3-482c-a5ab-33e75f2c9147" providerId="ADAL" clId="{1642D5D4-6F90-4729-B6C8-CF446D4D64F7}" dt="2025-10-02T12:51:19.846" v="3950" actId="47"/>
+        <pc:sldMkLst>
+          <pc:docMk/>
+          <pc:sldMk cId="1293801074" sldId="262"/>
+        </pc:sldMkLst>
+      </pc:sldChg>
       <pc:sldChg chg="modSp mod">
-        <pc:chgData name="João Luiz Grave Gross" userId="70663aa8-58a3-482c-a5ab-33e75f2c9147" providerId="ADAL" clId="{1642D5D4-6F90-4729-B6C8-CF446D4D64F7}" dt="2025-10-01T21:34:30.764" v="1748" actId="20577"/>
+        <pc:chgData name="João Luiz Grave Gross" userId="70663aa8-58a3-482c-a5ab-33e75f2c9147" providerId="ADAL" clId="{1642D5D4-6F90-4729-B6C8-CF446D4D64F7}" dt="2025-10-02T12:10:28.194" v="2587" actId="20577"/>
+        <pc:sldMkLst>
+          <pc:docMk/>
+          <pc:sldMk cId="1117785298" sldId="263"/>
+        </pc:sldMkLst>
+        <pc:spChg chg="mod">
+          <ac:chgData name="João Luiz Grave Gross" userId="70663aa8-58a3-482c-a5ab-33e75f2c9147" providerId="ADAL" clId="{1642D5D4-6F90-4729-B6C8-CF446D4D64F7}" dt="2025-10-02T12:10:28.194" v="2587" actId="20577"/>
+          <ac:spMkLst>
+            <pc:docMk/>
+            <pc:sldMk cId="1117785298" sldId="263"/>
+            <ac:spMk id="2" creationId="{A66112D4-7AEF-8961-9586-ABE3196D77CD}"/>
+          </ac:spMkLst>
+        </pc:spChg>
+      </pc:sldChg>
+      <pc:sldChg chg="modSp mod">
+        <pc:chgData name="João Luiz Grave Gross" userId="70663aa8-58a3-482c-a5ab-33e75f2c9147" providerId="ADAL" clId="{1642D5D4-6F90-4729-B6C8-CF446D4D64F7}" dt="2025-10-02T12:19:04.875" v="2816" actId="20577"/>
         <pc:sldMkLst>
           <pc:docMk/>
           <pc:sldMk cId="143472058" sldId="264"/>
@@ -213,7 +256,7 @@
           </ac:spMkLst>
         </pc:spChg>
         <pc:spChg chg="mod">
-          <ac:chgData name="João Luiz Grave Gross" userId="70663aa8-58a3-482c-a5ab-33e75f2c9147" providerId="ADAL" clId="{1642D5D4-6F90-4729-B6C8-CF446D4D64F7}" dt="2025-10-01T21:20:15.620" v="1067" actId="20577"/>
+          <ac:chgData name="João Luiz Grave Gross" userId="70663aa8-58a3-482c-a5ab-33e75f2c9147" providerId="ADAL" clId="{1642D5D4-6F90-4729-B6C8-CF446D4D64F7}" dt="2025-10-02T12:19:04.875" v="2816" actId="20577"/>
           <ac:spMkLst>
             <pc:docMk/>
             <pc:sldMk cId="143472058" sldId="264"/>
@@ -222,7 +265,7 @@
         </pc:spChg>
       </pc:sldChg>
       <pc:sldChg chg="addSp delSp modSp mod ord">
-        <pc:chgData name="João Luiz Grave Gross" userId="70663aa8-58a3-482c-a5ab-33e75f2c9147" providerId="ADAL" clId="{1642D5D4-6F90-4729-B6C8-CF446D4D64F7}" dt="2025-10-01T22:17:03.381" v="2494" actId="1076"/>
+        <pc:chgData name="João Luiz Grave Gross" userId="70663aa8-58a3-482c-a5ab-33e75f2c9147" providerId="ADAL" clId="{1642D5D4-6F90-4729-B6C8-CF446D4D64F7}" dt="2025-10-02T12:46:16.389" v="3577" actId="1076"/>
         <pc:sldMkLst>
           <pc:docMk/>
           <pc:sldMk cId="203766769" sldId="265"/>
@@ -236,7 +279,7 @@
           </ac:spMkLst>
         </pc:spChg>
         <pc:spChg chg="add mod">
-          <ac:chgData name="João Luiz Grave Gross" userId="70663aa8-58a3-482c-a5ab-33e75f2c9147" providerId="ADAL" clId="{1642D5D4-6F90-4729-B6C8-CF446D4D64F7}" dt="2025-10-01T22:15:06.181" v="2487" actId="20577"/>
+          <ac:chgData name="João Luiz Grave Gross" userId="70663aa8-58a3-482c-a5ab-33e75f2c9147" providerId="ADAL" clId="{1642D5D4-6F90-4729-B6C8-CF446D4D64F7}" dt="2025-10-02T12:27:33.684" v="3003" actId="21"/>
           <ac:spMkLst>
             <pc:docMk/>
             <pc:sldMk cId="203766769" sldId="265"/>
@@ -252,19 +295,83 @@
           </ac:spMkLst>
         </pc:spChg>
         <pc:spChg chg="add mod">
-          <ac:chgData name="João Luiz Grave Gross" userId="70663aa8-58a3-482c-a5ab-33e75f2c9147" providerId="ADAL" clId="{1642D5D4-6F90-4729-B6C8-CF446D4D64F7}" dt="2025-10-01T22:17:03.381" v="2494" actId="1076"/>
+          <ac:chgData name="João Luiz Grave Gross" userId="70663aa8-58a3-482c-a5ab-33e75f2c9147" providerId="ADAL" clId="{1642D5D4-6F90-4729-B6C8-CF446D4D64F7}" dt="2025-10-02T12:25:15.523" v="2920" actId="14100"/>
+          <ac:spMkLst>
+            <pc:docMk/>
+            <pc:sldMk cId="203766769" sldId="265"/>
+            <ac:spMk id="4" creationId="{2994BD9E-6C91-9B71-C3A4-AF66A54B1B54}"/>
+          </ac:spMkLst>
+        </pc:spChg>
+        <pc:spChg chg="add del mod">
+          <ac:chgData name="João Luiz Grave Gross" userId="70663aa8-58a3-482c-a5ab-33e75f2c9147" providerId="ADAL" clId="{1642D5D4-6F90-4729-B6C8-CF446D4D64F7}" dt="2025-10-02T12:14:32.896" v="2763"/>
           <ac:spMkLst>
             <pc:docMk/>
             <pc:sldMk cId="203766769" sldId="265"/>
             <ac:spMk id="6" creationId="{7F1B9887-A9C3-D1BA-2628-CE4BD007EC0D}"/>
           </ac:spMkLst>
         </pc:spChg>
+        <pc:spChg chg="add del mod">
+          <ac:chgData name="João Luiz Grave Gross" userId="70663aa8-58a3-482c-a5ab-33e75f2c9147" providerId="ADAL" clId="{1642D5D4-6F90-4729-B6C8-CF446D4D64F7}" dt="2025-10-02T12:27:50.711" v="3010"/>
+          <ac:spMkLst>
+            <pc:docMk/>
+            <pc:sldMk cId="203766769" sldId="265"/>
+            <ac:spMk id="9" creationId="{4B1CA18B-C121-24B0-8BC1-FE2D3779CC14}"/>
+          </ac:spMkLst>
+        </pc:spChg>
+        <pc:spChg chg="add del mod">
+          <ac:chgData name="João Luiz Grave Gross" userId="70663aa8-58a3-482c-a5ab-33e75f2c9147" providerId="ADAL" clId="{1642D5D4-6F90-4729-B6C8-CF446D4D64F7}" dt="2025-10-02T12:28:04.300" v="3015" actId="478"/>
+          <ac:spMkLst>
+            <pc:docMk/>
+            <pc:sldMk cId="203766769" sldId="265"/>
+            <ac:spMk id="10" creationId="{79F4F5FB-A2EA-5677-6CE6-A97E9075D6E6}"/>
+          </ac:spMkLst>
+        </pc:spChg>
+        <pc:spChg chg="add mod">
+          <ac:chgData name="João Luiz Grave Gross" userId="70663aa8-58a3-482c-a5ab-33e75f2c9147" providerId="ADAL" clId="{1642D5D4-6F90-4729-B6C8-CF446D4D64F7}" dt="2025-10-02T12:28:41.341" v="3023" actId="1076"/>
+          <ac:spMkLst>
+            <pc:docMk/>
+            <pc:sldMk cId="203766769" sldId="265"/>
+            <ac:spMk id="13" creationId="{9981C08A-4EB5-1C60-A822-040BE1542427}"/>
+          </ac:spMkLst>
+        </pc:spChg>
+        <pc:spChg chg="add mod">
+          <ac:chgData name="João Luiz Grave Gross" userId="70663aa8-58a3-482c-a5ab-33e75f2c9147" providerId="ADAL" clId="{1642D5D4-6F90-4729-B6C8-CF446D4D64F7}" dt="2025-10-02T12:28:12.491" v="3019" actId="1076"/>
+          <ac:spMkLst>
+            <pc:docMk/>
+            <pc:sldMk cId="203766769" sldId="265"/>
+            <ac:spMk id="14" creationId="{9831B8E5-FD1B-72EF-275D-B659CA536DF9}"/>
+          </ac:spMkLst>
+        </pc:spChg>
+        <pc:spChg chg="add mod">
+          <ac:chgData name="João Luiz Grave Gross" userId="70663aa8-58a3-482c-a5ab-33e75f2c9147" providerId="ADAL" clId="{1642D5D4-6F90-4729-B6C8-CF446D4D64F7}" dt="2025-10-02T12:46:16.389" v="3577" actId="1076"/>
+          <ac:spMkLst>
+            <pc:docMk/>
+            <pc:sldMk cId="203766769" sldId="265"/>
+            <ac:spMk id="15" creationId="{F07C56CD-31C7-C390-9315-8E0E49093067}"/>
+          </ac:spMkLst>
+        </pc:spChg>
+        <pc:picChg chg="add mod">
+          <ac:chgData name="João Luiz Grave Gross" userId="70663aa8-58a3-482c-a5ab-33e75f2c9147" providerId="ADAL" clId="{1642D5D4-6F90-4729-B6C8-CF446D4D64F7}" dt="2025-10-02T12:27:17.155" v="3000" actId="1076"/>
+          <ac:picMkLst>
+            <pc:docMk/>
+            <pc:sldMk cId="203766769" sldId="265"/>
+            <ac:picMk id="5" creationId="{0D97885D-0D7E-3BE2-2190-BC18B3CF77FE}"/>
+          </ac:picMkLst>
+        </pc:picChg>
         <pc:picChg chg="del">
           <ac:chgData name="João Luiz Grave Gross" userId="70663aa8-58a3-482c-a5ab-33e75f2c9147" providerId="ADAL" clId="{1642D5D4-6F90-4729-B6C8-CF446D4D64F7}" dt="2025-10-01T21:57:53.506" v="2363" actId="478"/>
           <ac:picMkLst>
             <pc:docMk/>
             <pc:sldMk cId="203766769" sldId="265"/>
             <ac:picMk id="7" creationId="{C30E864B-98BB-0F21-4E57-76A5238D9621}"/>
+          </ac:picMkLst>
+        </pc:picChg>
+        <pc:picChg chg="add mod">
+          <ac:chgData name="João Luiz Grave Gross" userId="70663aa8-58a3-482c-a5ab-33e75f2c9147" providerId="ADAL" clId="{1642D5D4-6F90-4729-B6C8-CF446D4D64F7}" dt="2025-10-02T12:28:43.853" v="3024" actId="1076"/>
+          <ac:picMkLst>
+            <pc:docMk/>
+            <pc:sldMk cId="203766769" sldId="265"/>
+            <ac:picMk id="8" creationId="{BEC204D4-52F2-A0C0-B4C0-651965C8FB3D}"/>
           </ac:picMkLst>
         </pc:picChg>
         <pc:picChg chg="del">
@@ -276,13 +383,28 @@
           </ac:picMkLst>
         </pc:picChg>
         <pc:picChg chg="mod">
-          <ac:chgData name="João Luiz Grave Gross" userId="70663aa8-58a3-482c-a5ab-33e75f2c9147" providerId="ADAL" clId="{1642D5D4-6F90-4729-B6C8-CF446D4D64F7}" dt="2025-10-01T22:15:22.973" v="2492" actId="14100"/>
+          <ac:chgData name="João Luiz Grave Gross" userId="70663aa8-58a3-482c-a5ab-33e75f2c9147" providerId="ADAL" clId="{1642D5D4-6F90-4729-B6C8-CF446D4D64F7}" dt="2025-10-02T12:46:12.951" v="3576" actId="1076"/>
           <ac:picMkLst>
             <pc:docMk/>
             <pc:sldMk cId="203766769" sldId="265"/>
             <ac:picMk id="11" creationId="{C0FC9812-F6D1-CF35-E1AC-4717A4441B8E}"/>
           </ac:picMkLst>
         </pc:picChg>
+      </pc:sldChg>
+      <pc:sldChg chg="modSp mod">
+        <pc:chgData name="João Luiz Grave Gross" userId="70663aa8-58a3-482c-a5ab-33e75f2c9147" providerId="ADAL" clId="{1642D5D4-6F90-4729-B6C8-CF446D4D64F7}" dt="2025-10-02T12:24:53.180" v="2916" actId="20577"/>
+        <pc:sldMkLst>
+          <pc:docMk/>
+          <pc:sldMk cId="676808302" sldId="266"/>
+        </pc:sldMkLst>
+        <pc:spChg chg="mod">
+          <ac:chgData name="João Luiz Grave Gross" userId="70663aa8-58a3-482c-a5ab-33e75f2c9147" providerId="ADAL" clId="{1642D5D4-6F90-4729-B6C8-CF446D4D64F7}" dt="2025-10-02T12:24:53.180" v="2916" actId="20577"/>
+          <ac:spMkLst>
+            <pc:docMk/>
+            <pc:sldMk cId="676808302" sldId="266"/>
+            <ac:spMk id="3" creationId="{06E409B8-D47B-AAF7-986E-43C23519D4D4}"/>
+          </ac:spMkLst>
+        </pc:spChg>
       </pc:sldChg>
       <pc:sldChg chg="del">
         <pc:chgData name="João Luiz Grave Gross" userId="70663aa8-58a3-482c-a5ab-33e75f2c9147" providerId="ADAL" clId="{1642D5D4-6F90-4729-B6C8-CF446D4D64F7}" dt="2025-10-01T21:03:47.029" v="658" actId="47"/>
@@ -326,8 +448,8 @@
           <pc:sldMk cId="3551033221" sldId="272"/>
         </pc:sldMkLst>
       </pc:sldChg>
-      <pc:sldChg chg="addSp modSp mod">
-        <pc:chgData name="João Luiz Grave Gross" userId="70663aa8-58a3-482c-a5ab-33e75f2c9147" providerId="ADAL" clId="{1642D5D4-6F90-4729-B6C8-CF446D4D64F7}" dt="2025-10-01T21:42:30.156" v="2127" actId="1076"/>
+      <pc:sldChg chg="addSp delSp modSp add del mod">
+        <pc:chgData name="João Luiz Grave Gross" userId="70663aa8-58a3-482c-a5ab-33e75f2c9147" providerId="ADAL" clId="{1642D5D4-6F90-4729-B6C8-CF446D4D64F7}" dt="2025-10-02T12:23:58.922" v="2894" actId="20577"/>
         <pc:sldMkLst>
           <pc:docMk/>
           <pc:sldMk cId="3312667182" sldId="273"/>
@@ -341,15 +463,23 @@
           </ac:spMkLst>
         </pc:spChg>
         <pc:spChg chg="mod">
-          <ac:chgData name="João Luiz Grave Gross" userId="70663aa8-58a3-482c-a5ab-33e75f2c9147" providerId="ADAL" clId="{1642D5D4-6F90-4729-B6C8-CF446D4D64F7}" dt="2025-10-01T21:41:30.824" v="2123" actId="20577"/>
+          <ac:chgData name="João Luiz Grave Gross" userId="70663aa8-58a3-482c-a5ab-33e75f2c9147" providerId="ADAL" clId="{1642D5D4-6F90-4729-B6C8-CF446D4D64F7}" dt="2025-10-02T12:23:58.922" v="2894" actId="20577"/>
           <ac:spMkLst>
             <pc:docMk/>
             <pc:sldMk cId="3312667182" sldId="273"/>
             <ac:spMk id="3" creationId="{D85D38CC-A29D-8498-000F-84B79FC6F11C}"/>
           </ac:spMkLst>
         </pc:spChg>
-        <pc:picChg chg="add mod">
-          <ac:chgData name="João Luiz Grave Gross" userId="70663aa8-58a3-482c-a5ab-33e75f2c9147" providerId="ADAL" clId="{1642D5D4-6F90-4729-B6C8-CF446D4D64F7}" dt="2025-10-01T21:42:30.156" v="2127" actId="1076"/>
+        <pc:spChg chg="add del mod">
+          <ac:chgData name="João Luiz Grave Gross" userId="70663aa8-58a3-482c-a5ab-33e75f2c9147" providerId="ADAL" clId="{1642D5D4-6F90-4729-B6C8-CF446D4D64F7}" dt="2025-10-02T12:22:13.329" v="2828" actId="21"/>
+          <ac:spMkLst>
+            <pc:docMk/>
+            <pc:sldMk cId="3312667182" sldId="273"/>
+            <ac:spMk id="5" creationId="{3B468E3C-B771-02CC-0FD9-D7AF2B002593}"/>
+          </ac:spMkLst>
+        </pc:spChg>
+        <pc:picChg chg="add del mod">
+          <ac:chgData name="João Luiz Grave Gross" userId="70663aa8-58a3-482c-a5ab-33e75f2c9147" providerId="ADAL" clId="{1642D5D4-6F90-4729-B6C8-CF446D4D64F7}" dt="2025-10-02T12:22:10.395" v="2827" actId="478"/>
           <ac:picMkLst>
             <pc:docMk/>
             <pc:sldMk cId="3312667182" sldId="273"/>
@@ -357,39 +487,93 @@
           </ac:picMkLst>
         </pc:picChg>
       </pc:sldChg>
-      <pc:sldChg chg="addSp modSp new mod ord">
-        <pc:chgData name="João Luiz Grave Gross" userId="70663aa8-58a3-482c-a5ab-33e75f2c9147" providerId="ADAL" clId="{1642D5D4-6F90-4729-B6C8-CF446D4D64F7}" dt="2025-10-01T21:43:05.509" v="2136"/>
+      <pc:sldChg chg="modSp del mod">
+        <pc:chgData name="João Luiz Grave Gross" userId="70663aa8-58a3-482c-a5ab-33e75f2c9147" providerId="ADAL" clId="{1642D5D4-6F90-4729-B6C8-CF446D4D64F7}" dt="2025-10-02T12:10:08.630" v="2584" actId="2696"/>
+        <pc:sldMkLst>
+          <pc:docMk/>
+          <pc:sldMk cId="3028708895" sldId="274"/>
+        </pc:sldMkLst>
+        <pc:spChg chg="mod">
+          <ac:chgData name="João Luiz Grave Gross" userId="70663aa8-58a3-482c-a5ab-33e75f2c9147" providerId="ADAL" clId="{1642D5D4-6F90-4729-B6C8-CF446D4D64F7}" dt="2025-10-02T12:09:39.598" v="2582" actId="20577"/>
+          <ac:spMkLst>
+            <pc:docMk/>
+            <pc:sldMk cId="3028708895" sldId="274"/>
+            <ac:spMk id="3" creationId="{9FDB5994-0076-8712-9A3A-F8EB5823C68A}"/>
+          </ac:spMkLst>
+        </pc:spChg>
+      </pc:sldChg>
+      <pc:sldChg chg="del ord">
+        <pc:chgData name="João Luiz Grave Gross" userId="70663aa8-58a3-482c-a5ab-33e75f2c9147" providerId="ADAL" clId="{1642D5D4-6F90-4729-B6C8-CF446D4D64F7}" dt="2025-10-02T12:57:56.708" v="4365" actId="47"/>
+        <pc:sldMkLst>
+          <pc:docMk/>
+          <pc:sldMk cId="3944873945" sldId="275"/>
+        </pc:sldMkLst>
+      </pc:sldChg>
+      <pc:sldChg chg="addSp delSp modSp new mod ord">
+        <pc:chgData name="João Luiz Grave Gross" userId="70663aa8-58a3-482c-a5ab-33e75f2c9147" providerId="ADAL" clId="{1642D5D4-6F90-4729-B6C8-CF446D4D64F7}" dt="2025-10-02T12:56:13.602" v="4313" actId="27636"/>
         <pc:sldMkLst>
           <pc:docMk/>
           <pc:sldMk cId="2496614450" sldId="276"/>
         </pc:sldMkLst>
         <pc:spChg chg="mod">
-          <ac:chgData name="João Luiz Grave Gross" userId="70663aa8-58a3-482c-a5ab-33e75f2c9147" providerId="ADAL" clId="{1642D5D4-6F90-4729-B6C8-CF446D4D64F7}" dt="2025-10-01T21:19:12.753" v="995" actId="20577"/>
+          <ac:chgData name="João Luiz Grave Gross" userId="70663aa8-58a3-482c-a5ab-33e75f2c9147" providerId="ADAL" clId="{1642D5D4-6F90-4729-B6C8-CF446D4D64F7}" dt="2025-10-02T12:48:19.576" v="3703" actId="20577"/>
           <ac:spMkLst>
             <pc:docMk/>
             <pc:sldMk cId="2496614450" sldId="276"/>
             <ac:spMk id="2" creationId="{164A5A54-B22E-BAE2-EBD5-CA8BDF60173A}"/>
           </ac:spMkLst>
         </pc:spChg>
-        <pc:spChg chg="mod">
-          <ac:chgData name="João Luiz Grave Gross" userId="70663aa8-58a3-482c-a5ab-33e75f2c9147" providerId="ADAL" clId="{1642D5D4-6F90-4729-B6C8-CF446D4D64F7}" dt="2025-09-30T20:04:37.573" v="655" actId="27636"/>
+        <pc:spChg chg="del mod">
+          <ac:chgData name="João Luiz Grave Gross" userId="70663aa8-58a3-482c-a5ab-33e75f2c9147" providerId="ADAL" clId="{1642D5D4-6F90-4729-B6C8-CF446D4D64F7}" dt="2025-10-02T12:48:23.827" v="3705" actId="478"/>
           <ac:spMkLst>
             <pc:docMk/>
             <pc:sldMk cId="2496614450" sldId="276"/>
             <ac:spMk id="3" creationId="{E3CB3356-A408-78BD-432D-C9EAFEA17778}"/>
           </ac:spMkLst>
         </pc:spChg>
-        <pc:spChg chg="add">
-          <ac:chgData name="João Luiz Grave Gross" userId="70663aa8-58a3-482c-a5ab-33e75f2c9147" providerId="ADAL" clId="{1642D5D4-6F90-4729-B6C8-CF446D4D64F7}" dt="2025-09-30T20:00:26.387" v="431"/>
+        <pc:spChg chg="add del mod">
+          <ac:chgData name="João Luiz Grave Gross" userId="70663aa8-58a3-482c-a5ab-33e75f2c9147" providerId="ADAL" clId="{1642D5D4-6F90-4729-B6C8-CF446D4D64F7}" dt="2025-10-02T12:48:40.857" v="3706"/>
           <ac:spMkLst>
             <pc:docMk/>
             <pc:sldMk cId="2496614450" sldId="276"/>
-            <ac:spMk id="5" creationId="{FCDEFEAD-0AC6-D612-0B4E-48D96741128E}"/>
+            <ac:spMk id="6" creationId="{928D07F4-486D-ADF7-1761-6F184BC41610}"/>
           </ac:spMkLst>
         </pc:spChg>
+        <pc:spChg chg="add mod">
+          <ac:chgData name="João Luiz Grave Gross" userId="70663aa8-58a3-482c-a5ab-33e75f2c9147" providerId="ADAL" clId="{1642D5D4-6F90-4729-B6C8-CF446D4D64F7}" dt="2025-10-02T12:56:13.602" v="4313" actId="27636"/>
+          <ac:spMkLst>
+            <pc:docMk/>
+            <pc:sldMk cId="2496614450" sldId="276"/>
+            <ac:spMk id="12" creationId="{74363B1E-0213-D155-F20E-AE64B04D7BE3}"/>
+          </ac:spMkLst>
+        </pc:spChg>
+        <pc:spChg chg="add mod">
+          <ac:chgData name="João Luiz Grave Gross" userId="70663aa8-58a3-482c-a5ab-33e75f2c9147" providerId="ADAL" clId="{1642D5D4-6F90-4729-B6C8-CF446D4D64F7}" dt="2025-10-02T12:55:54.810" v="4311" actId="14100"/>
+          <ac:spMkLst>
+            <pc:docMk/>
+            <pc:sldMk cId="2496614450" sldId="276"/>
+            <ac:spMk id="13" creationId="{796C9C2B-FC1A-F433-6439-DC6659589AA5}"/>
+          </ac:spMkLst>
+        </pc:spChg>
+        <pc:picChg chg="add del mod">
+          <ac:chgData name="João Luiz Grave Gross" userId="70663aa8-58a3-482c-a5ab-33e75f2c9147" providerId="ADAL" clId="{1642D5D4-6F90-4729-B6C8-CF446D4D64F7}" dt="2025-10-02T12:51:49.377" v="3956" actId="478"/>
+          <ac:picMkLst>
+            <pc:docMk/>
+            <pc:sldMk cId="2496614450" sldId="276"/>
+            <ac:picMk id="8" creationId="{A669BEEA-2BCC-ED04-14CE-47EE9ED3F758}"/>
+          </ac:picMkLst>
+        </pc:picChg>
+        <pc:picChg chg="add del">
+          <ac:chgData name="João Luiz Grave Gross" userId="70663aa8-58a3-482c-a5ab-33e75f2c9147" providerId="ADAL" clId="{1642D5D4-6F90-4729-B6C8-CF446D4D64F7}" dt="2025-10-02T12:51:42.972" v="3954" actId="22"/>
+          <ac:picMkLst>
+            <pc:docMk/>
+            <pc:sldMk cId="2496614450" sldId="276"/>
+            <ac:picMk id="10" creationId="{7C9ABC1C-3FED-60CC-33B7-B271206235A6}"/>
+          </ac:picMkLst>
+        </pc:picChg>
       </pc:sldChg>
       <pc:sldChg chg="modSp add mod">
-        <pc:chgData name="João Luiz Grave Gross" userId="70663aa8-58a3-482c-a5ab-33e75f2c9147" providerId="ADAL" clId="{1642D5D4-6F90-4729-B6C8-CF446D4D64F7}" dt="2025-10-01T21:35:40.402" v="1794" actId="20577"/>
+        <pc:chgData name="João Luiz Grave Gross" userId="70663aa8-58a3-482c-a5ab-33e75f2c9147" providerId="ADAL" clId="{1642D5D4-6F90-4729-B6C8-CF446D4D64F7}" dt="2025-10-02T12:19:15.078" v="2823" actId="20577"/>
         <pc:sldMkLst>
           <pc:docMk/>
           <pc:sldMk cId="1992294698" sldId="277"/>
@@ -403,7 +587,7 @@
           </ac:spMkLst>
         </pc:spChg>
         <pc:spChg chg="mod">
-          <ac:chgData name="João Luiz Grave Gross" userId="70663aa8-58a3-482c-a5ab-33e75f2c9147" providerId="ADAL" clId="{1642D5D4-6F90-4729-B6C8-CF446D4D64F7}" dt="2025-10-01T21:26:51.216" v="1509" actId="20577"/>
+          <ac:chgData name="João Luiz Grave Gross" userId="70663aa8-58a3-482c-a5ab-33e75f2c9147" providerId="ADAL" clId="{1642D5D4-6F90-4729-B6C8-CF446D4D64F7}" dt="2025-10-02T12:19:15.078" v="2823" actId="20577"/>
           <ac:spMkLst>
             <pc:docMk/>
             <pc:sldMk cId="1992294698" sldId="277"/>
@@ -412,7 +596,7 @@
         </pc:spChg>
       </pc:sldChg>
       <pc:sldChg chg="modSp add mod">
-        <pc:chgData name="João Luiz Grave Gross" userId="70663aa8-58a3-482c-a5ab-33e75f2c9147" providerId="ADAL" clId="{1642D5D4-6F90-4729-B6C8-CF446D4D64F7}" dt="2025-10-01T21:37:27.620" v="1868" actId="5793"/>
+        <pc:chgData name="João Luiz Grave Gross" userId="70663aa8-58a3-482c-a5ab-33e75f2c9147" providerId="ADAL" clId="{1642D5D4-6F90-4729-B6C8-CF446D4D64F7}" dt="2025-10-02T12:19:19.560" v="2825" actId="20577"/>
         <pc:sldMkLst>
           <pc:docMk/>
           <pc:sldMk cId="3585272815" sldId="278"/>
@@ -426,7 +610,7 @@
           </ac:spMkLst>
         </pc:spChg>
         <pc:spChg chg="mod">
-          <ac:chgData name="João Luiz Grave Gross" userId="70663aa8-58a3-482c-a5ab-33e75f2c9147" providerId="ADAL" clId="{1642D5D4-6F90-4729-B6C8-CF446D4D64F7}" dt="2025-10-01T21:37:27.620" v="1868" actId="5793"/>
+          <ac:chgData name="João Luiz Grave Gross" userId="70663aa8-58a3-482c-a5ab-33e75f2c9147" providerId="ADAL" clId="{1642D5D4-6F90-4729-B6C8-CF446D4D64F7}" dt="2025-10-02T12:19:19.560" v="2825" actId="20577"/>
           <ac:spMkLst>
             <pc:docMk/>
             <pc:sldMk cId="3585272815" sldId="278"/>
@@ -435,11 +619,27 @@
         </pc:spChg>
       </pc:sldChg>
       <pc:sldChg chg="addSp delSp modSp add mod">
-        <pc:chgData name="João Luiz Grave Gross" userId="70663aa8-58a3-482c-a5ab-33e75f2c9147" providerId="ADAL" clId="{1642D5D4-6F90-4729-B6C8-CF446D4D64F7}" dt="2025-10-01T21:42:52.392" v="2134" actId="1076"/>
+        <pc:chgData name="João Luiz Grave Gross" userId="70663aa8-58a3-482c-a5ab-33e75f2c9147" providerId="ADAL" clId="{1642D5D4-6F90-4729-B6C8-CF446D4D64F7}" dt="2025-10-02T12:59:41.487" v="4499" actId="13926"/>
         <pc:sldMkLst>
           <pc:docMk/>
           <pc:sldMk cId="3072866178" sldId="279"/>
         </pc:sldMkLst>
+        <pc:spChg chg="mod">
+          <ac:chgData name="João Luiz Grave Gross" userId="70663aa8-58a3-482c-a5ab-33e75f2c9147" providerId="ADAL" clId="{1642D5D4-6F90-4729-B6C8-CF446D4D64F7}" dt="2025-10-02T12:49:19.508" v="3736" actId="20577"/>
+          <ac:spMkLst>
+            <pc:docMk/>
+            <pc:sldMk cId="3072866178" sldId="279"/>
+            <ac:spMk id="2" creationId="{67550447-B55F-B687-0291-F4DAA1DB708E}"/>
+          </ac:spMkLst>
+        </pc:spChg>
+        <pc:spChg chg="mod">
+          <ac:chgData name="João Luiz Grave Gross" userId="70663aa8-58a3-482c-a5ab-33e75f2c9147" providerId="ADAL" clId="{1642D5D4-6F90-4729-B6C8-CF446D4D64F7}" dt="2025-10-02T12:59:41.487" v="4499" actId="13926"/>
+          <ac:spMkLst>
+            <pc:docMk/>
+            <pc:sldMk cId="3072866178" sldId="279"/>
+            <ac:spMk id="3" creationId="{4AAF4232-2E11-F2F3-791D-DA4834D46694}"/>
+          </ac:spMkLst>
+        </pc:spChg>
         <pc:spChg chg="add del">
           <ac:chgData name="João Luiz Grave Gross" userId="70663aa8-58a3-482c-a5ab-33e75f2c9147" providerId="ADAL" clId="{1642D5D4-6F90-4729-B6C8-CF446D4D64F7}" dt="2025-10-01T21:42:44.583" v="2131" actId="22"/>
           <ac:spMkLst>
@@ -448,16 +648,16 @@
             <ac:spMk id="7" creationId="{6E9094F3-7A2C-1D2E-76AD-4803146E4E1E}"/>
           </ac:spMkLst>
         </pc:spChg>
-        <pc:spChg chg="add mod">
-          <ac:chgData name="João Luiz Grave Gross" userId="70663aa8-58a3-482c-a5ab-33e75f2c9147" providerId="ADAL" clId="{1642D5D4-6F90-4729-B6C8-CF446D4D64F7}" dt="2025-10-01T21:42:52.392" v="2134" actId="1076"/>
+        <pc:spChg chg="add del mod">
+          <ac:chgData name="João Luiz Grave Gross" userId="70663aa8-58a3-482c-a5ab-33e75f2c9147" providerId="ADAL" clId="{1642D5D4-6F90-4729-B6C8-CF446D4D64F7}" dt="2025-10-02T12:49:23.856" v="3738" actId="478"/>
           <ac:spMkLst>
             <pc:docMk/>
             <pc:sldMk cId="3072866178" sldId="279"/>
             <ac:spMk id="9" creationId="{0DA22ACA-E9F2-8A62-4773-51A865F3B5F0}"/>
           </ac:spMkLst>
         </pc:spChg>
-        <pc:picChg chg="mod">
-          <ac:chgData name="João Luiz Grave Gross" userId="70663aa8-58a3-482c-a5ab-33e75f2c9147" providerId="ADAL" clId="{1642D5D4-6F90-4729-B6C8-CF446D4D64F7}" dt="2025-10-01T21:42:40.386" v="2129" actId="14100"/>
+        <pc:picChg chg="del mod">
+          <ac:chgData name="João Luiz Grave Gross" userId="70663aa8-58a3-482c-a5ab-33e75f2c9147" providerId="ADAL" clId="{1642D5D4-6F90-4729-B6C8-CF446D4D64F7}" dt="2025-10-02T12:49:20.949" v="3737" actId="478"/>
           <ac:picMkLst>
             <pc:docMk/>
             <pc:sldMk cId="3072866178" sldId="279"/>
@@ -466,7 +666,7 @@
         </pc:picChg>
       </pc:sldChg>
       <pc:sldChg chg="addSp delSp modSp add mod">
-        <pc:chgData name="João Luiz Grave Gross" userId="70663aa8-58a3-482c-a5ab-33e75f2c9147" providerId="ADAL" clId="{1642D5D4-6F90-4729-B6C8-CF446D4D64F7}" dt="2025-10-01T21:51:29.836" v="2229" actId="14100"/>
+        <pc:chgData name="João Luiz Grave Gross" userId="70663aa8-58a3-482c-a5ab-33e75f2c9147" providerId="ADAL" clId="{1642D5D4-6F90-4729-B6C8-CF446D4D64F7}" dt="2025-10-02T12:30:27.590" v="3089" actId="1036"/>
         <pc:sldMkLst>
           <pc:docMk/>
           <pc:sldMk cId="2656067867" sldId="280"/>
@@ -479,12 +679,28 @@
             <ac:spMk id="2" creationId="{0424D309-68B1-B510-9FAC-844D9E142E4E}"/>
           </ac:spMkLst>
         </pc:spChg>
+        <pc:spChg chg="add mod">
+          <ac:chgData name="João Luiz Grave Gross" userId="70663aa8-58a3-482c-a5ab-33e75f2c9147" providerId="ADAL" clId="{1642D5D4-6F90-4729-B6C8-CF446D4D64F7}" dt="2025-10-02T12:30:24.447" v="3082" actId="1076"/>
+          <ac:spMkLst>
+            <pc:docMk/>
+            <pc:sldMk cId="2656067867" sldId="280"/>
+            <ac:spMk id="2" creationId="{DFC06BAD-CB83-57BE-1375-D0852D7C7D4D}"/>
+          </ac:spMkLst>
+        </pc:spChg>
         <pc:spChg chg="del">
           <ac:chgData name="João Luiz Grave Gross" userId="70663aa8-58a3-482c-a5ab-33e75f2c9147" providerId="ADAL" clId="{1642D5D4-6F90-4729-B6C8-CF446D4D64F7}" dt="2025-10-01T21:43:12.996" v="2138" actId="478"/>
           <ac:spMkLst>
             <pc:docMk/>
             <pc:sldMk cId="2656067867" sldId="280"/>
             <ac:spMk id="3" creationId="{12797093-FE3B-9CC7-5720-25EC520CB668}"/>
+          </ac:spMkLst>
+        </pc:spChg>
+        <pc:spChg chg="add mod">
+          <ac:chgData name="João Luiz Grave Gross" userId="70663aa8-58a3-482c-a5ab-33e75f2c9147" providerId="ADAL" clId="{1642D5D4-6F90-4729-B6C8-CF446D4D64F7}" dt="2025-10-02T12:29:08.431" v="3042" actId="1036"/>
+          <ac:spMkLst>
+            <pc:docMk/>
+            <pc:sldMk cId="2656067867" sldId="280"/>
+            <ac:spMk id="5" creationId="{3B468E3C-B771-02CC-0FD9-D7AF2B002593}"/>
           </ac:spMkLst>
         </pc:spChg>
         <pc:spChg chg="add del mod">
@@ -504,7 +720,7 @@
           </ac:spMkLst>
         </pc:spChg>
         <pc:spChg chg="add mod">
-          <ac:chgData name="João Luiz Grave Gross" userId="70663aa8-58a3-482c-a5ab-33e75f2c9147" providerId="ADAL" clId="{1642D5D4-6F90-4729-B6C8-CF446D4D64F7}" dt="2025-10-01T21:48:16.884" v="2192" actId="1076"/>
+          <ac:chgData name="João Luiz Grave Gross" userId="70663aa8-58a3-482c-a5ab-33e75f2c9147" providerId="ADAL" clId="{1642D5D4-6F90-4729-B6C8-CF446D4D64F7}" dt="2025-10-02T12:29:41.074" v="3049" actId="1076"/>
           <ac:spMkLst>
             <pc:docMk/>
             <pc:sldMk cId="2656067867" sldId="280"/>
@@ -520,7 +736,7 @@
           </ac:picMkLst>
         </pc:picChg>
         <pc:picChg chg="add del mod modCrop">
-          <ac:chgData name="João Luiz Grave Gross" userId="70663aa8-58a3-482c-a5ab-33e75f2c9147" providerId="ADAL" clId="{1642D5D4-6F90-4729-B6C8-CF446D4D64F7}" dt="2025-10-01T21:51:26.770" v="2228" actId="14100"/>
+          <ac:chgData name="João Luiz Grave Gross" userId="70663aa8-58a3-482c-a5ab-33e75f2c9147" providerId="ADAL" clId="{1642D5D4-6F90-4729-B6C8-CF446D4D64F7}" dt="2025-10-02T12:30:27.590" v="3089" actId="1036"/>
           <ac:picMkLst>
             <pc:docMk/>
             <pc:sldMk cId="2656067867" sldId="280"/>
@@ -536,7 +752,7 @@
           </ac:picMkLst>
         </pc:picChg>
         <pc:picChg chg="add mod">
-          <ac:chgData name="João Luiz Grave Gross" userId="70663aa8-58a3-482c-a5ab-33e75f2c9147" providerId="ADAL" clId="{1642D5D4-6F90-4729-B6C8-CF446D4D64F7}" dt="2025-10-01T21:51:00.544" v="2218" actId="1076"/>
+          <ac:chgData name="João Luiz Grave Gross" userId="70663aa8-58a3-482c-a5ab-33e75f2c9147" providerId="ADAL" clId="{1642D5D4-6F90-4729-B6C8-CF446D4D64F7}" dt="2025-10-02T12:29:08.431" v="3042" actId="1036"/>
           <ac:picMkLst>
             <pc:docMk/>
             <pc:sldMk cId="2656067867" sldId="280"/>
@@ -545,13 +761,37 @@
         </pc:picChg>
       </pc:sldChg>
       <pc:sldChg chg="addSp delSp modSp add mod">
-        <pc:chgData name="João Luiz Grave Gross" userId="70663aa8-58a3-482c-a5ab-33e75f2c9147" providerId="ADAL" clId="{1642D5D4-6F90-4729-B6C8-CF446D4D64F7}" dt="2025-10-01T21:51:41.060" v="2240" actId="1036"/>
+        <pc:chgData name="João Luiz Grave Gross" userId="70663aa8-58a3-482c-a5ab-33e75f2c9147" providerId="ADAL" clId="{1642D5D4-6F90-4729-B6C8-CF446D4D64F7}" dt="2025-10-02T12:31:30.307" v="3179"/>
         <pc:sldMkLst>
           <pc:docMk/>
           <pc:sldMk cId="3775376469" sldId="281"/>
         </pc:sldMkLst>
-        <pc:spChg chg="mod">
-          <ac:chgData name="João Luiz Grave Gross" userId="70663aa8-58a3-482c-a5ab-33e75f2c9147" providerId="ADAL" clId="{1642D5D4-6F90-4729-B6C8-CF446D4D64F7}" dt="2025-10-01T21:48:34.909" v="2196" actId="20577"/>
+        <pc:spChg chg="add mod">
+          <ac:chgData name="João Luiz Grave Gross" userId="70663aa8-58a3-482c-a5ab-33e75f2c9147" providerId="ADAL" clId="{1642D5D4-6F90-4729-B6C8-CF446D4D64F7}" dt="2025-10-02T12:31:14.005" v="3164" actId="1036"/>
+          <ac:spMkLst>
+            <pc:docMk/>
+            <pc:sldMk cId="3775376469" sldId="281"/>
+            <ac:spMk id="2" creationId="{A86FBEB8-BE3B-9B4D-4DDB-818C5EE7F039}"/>
+          </ac:spMkLst>
+        </pc:spChg>
+        <pc:spChg chg="add mod">
+          <ac:chgData name="João Luiz Grave Gross" userId="70663aa8-58a3-482c-a5ab-33e75f2c9147" providerId="ADAL" clId="{1642D5D4-6F90-4729-B6C8-CF446D4D64F7}" dt="2025-10-02T12:31:08.858" v="3144"/>
+          <ac:spMkLst>
+            <pc:docMk/>
+            <pc:sldMk cId="3775376469" sldId="281"/>
+            <ac:spMk id="5" creationId="{1199EBE9-9B2A-C8DF-E33D-D574F7E0D9F5}"/>
+          </ac:spMkLst>
+        </pc:spChg>
+        <pc:spChg chg="add mod">
+          <ac:chgData name="João Luiz Grave Gross" userId="70663aa8-58a3-482c-a5ab-33e75f2c9147" providerId="ADAL" clId="{1642D5D4-6F90-4729-B6C8-CF446D4D64F7}" dt="2025-10-02T12:31:30.307" v="3179"/>
+          <ac:spMkLst>
+            <pc:docMk/>
+            <pc:sldMk cId="3775376469" sldId="281"/>
+            <ac:spMk id="7" creationId="{92EEA7E1-7C7D-DF93-37F7-6A98B448DDBC}"/>
+          </ac:spMkLst>
+        </pc:spChg>
+        <pc:spChg chg="del mod">
+          <ac:chgData name="João Luiz Grave Gross" userId="70663aa8-58a3-482c-a5ab-33e75f2c9147" providerId="ADAL" clId="{1642D5D4-6F90-4729-B6C8-CF446D4D64F7}" dt="2025-10-02T12:31:26.473" v="3178" actId="478"/>
           <ac:spMkLst>
             <pc:docMk/>
             <pc:sldMk cId="3775376469" sldId="281"/>
@@ -559,7 +799,7 @@
           </ac:spMkLst>
         </pc:spChg>
         <pc:picChg chg="add mod modCrop">
-          <ac:chgData name="João Luiz Grave Gross" userId="70663aa8-58a3-482c-a5ab-33e75f2c9147" providerId="ADAL" clId="{1642D5D4-6F90-4729-B6C8-CF446D4D64F7}" dt="2025-10-01T21:51:41.060" v="2240" actId="1036"/>
+          <ac:chgData name="João Luiz Grave Gross" userId="70663aa8-58a3-482c-a5ab-33e75f2c9147" providerId="ADAL" clId="{1642D5D4-6F90-4729-B6C8-CF446D4D64F7}" dt="2025-10-02T12:31:23.713" v="3177" actId="1036"/>
           <ac:picMkLst>
             <pc:docMk/>
             <pc:sldMk cId="3775376469" sldId="281"/>
@@ -567,7 +807,7 @@
           </ac:picMkLst>
         </pc:picChg>
         <pc:picChg chg="add mod modCrop">
-          <ac:chgData name="João Luiz Grave Gross" userId="70663aa8-58a3-482c-a5ab-33e75f2c9147" providerId="ADAL" clId="{1642D5D4-6F90-4729-B6C8-CF446D4D64F7}" dt="2025-10-01T21:51:23.171" v="2227" actId="14100"/>
+          <ac:chgData name="João Luiz Grave Gross" userId="70663aa8-58a3-482c-a5ab-33e75f2c9147" providerId="ADAL" clId="{1642D5D4-6F90-4729-B6C8-CF446D4D64F7}" dt="2025-10-02T12:31:20.665" v="3166" actId="14100"/>
           <ac:picMkLst>
             <pc:docMk/>
             <pc:sldMk cId="3775376469" sldId="281"/>
@@ -583,7 +823,7 @@
           </ac:picMkLst>
         </pc:picChg>
         <pc:picChg chg="add mod">
-          <ac:chgData name="João Luiz Grave Gross" userId="70663aa8-58a3-482c-a5ab-33e75f2c9147" providerId="ADAL" clId="{1642D5D4-6F90-4729-B6C8-CF446D4D64F7}" dt="2025-10-01T21:51:18.407" v="2225"/>
+          <ac:chgData name="João Luiz Grave Gross" userId="70663aa8-58a3-482c-a5ab-33e75f2c9147" providerId="ADAL" clId="{1642D5D4-6F90-4729-B6C8-CF446D4D64F7}" dt="2025-10-02T12:31:14.005" v="3164" actId="1036"/>
           <ac:picMkLst>
             <pc:docMk/>
             <pc:sldMk cId="3775376469" sldId="281"/>
@@ -722,6 +962,287 @@
             <pc:docMk/>
             <pc:sldMk cId="1433434" sldId="283"/>
             <ac:picMk id="9" creationId="{C34EFB18-25E0-3A26-44D7-F902240A162C}"/>
+          </ac:picMkLst>
+        </pc:picChg>
+      </pc:sldChg>
+      <pc:sldChg chg="new del">
+        <pc:chgData name="João Luiz Grave Gross" userId="70663aa8-58a3-482c-a5ab-33e75f2c9147" providerId="ADAL" clId="{1642D5D4-6F90-4729-B6C8-CF446D4D64F7}" dt="2025-10-02T12:11:09.713" v="2590" actId="47"/>
+        <pc:sldMkLst>
+          <pc:docMk/>
+          <pc:sldMk cId="857435538" sldId="284"/>
+        </pc:sldMkLst>
+      </pc:sldChg>
+      <pc:sldChg chg="delSp modSp add mod ord">
+        <pc:chgData name="João Luiz Grave Gross" userId="70663aa8-58a3-482c-a5ab-33e75f2c9147" providerId="ADAL" clId="{1642D5D4-6F90-4729-B6C8-CF446D4D64F7}" dt="2025-10-02T12:43:20.513" v="3513" actId="20577"/>
+        <pc:sldMkLst>
+          <pc:docMk/>
+          <pc:sldMk cId="4184877138" sldId="284"/>
+        </pc:sldMkLst>
+        <pc:spChg chg="mod">
+          <ac:chgData name="João Luiz Grave Gross" userId="70663aa8-58a3-482c-a5ab-33e75f2c9147" providerId="ADAL" clId="{1642D5D4-6F90-4729-B6C8-CF446D4D64F7}" dt="2025-10-02T12:11:19.922" v="2608" actId="20577"/>
+          <ac:spMkLst>
+            <pc:docMk/>
+            <pc:sldMk cId="4184877138" sldId="284"/>
+            <ac:spMk id="2" creationId="{A88C3032-6FB4-76E8-31B8-4FA0191B3DC1}"/>
+          </ac:spMkLst>
+        </pc:spChg>
+        <pc:spChg chg="mod">
+          <ac:chgData name="João Luiz Grave Gross" userId="70663aa8-58a3-482c-a5ab-33e75f2c9147" providerId="ADAL" clId="{1642D5D4-6F90-4729-B6C8-CF446D4D64F7}" dt="2025-10-02T12:43:20.513" v="3513" actId="20577"/>
+          <ac:spMkLst>
+            <pc:docMk/>
+            <pc:sldMk cId="4184877138" sldId="284"/>
+            <ac:spMk id="3" creationId="{1C980AE3-41E4-E840-731F-50FBC6A78096}"/>
+          </ac:spMkLst>
+        </pc:spChg>
+        <pc:spChg chg="del">
+          <ac:chgData name="João Luiz Grave Gross" userId="70663aa8-58a3-482c-a5ab-33e75f2c9147" providerId="ADAL" clId="{1642D5D4-6F90-4729-B6C8-CF446D4D64F7}" dt="2025-10-02T12:12:21.851" v="2681" actId="478"/>
+          <ac:spMkLst>
+            <pc:docMk/>
+            <pc:sldMk cId="4184877138" sldId="284"/>
+            <ac:spMk id="9" creationId="{A6C104FA-68AC-AFD1-C7A0-0AF1836A1794}"/>
+          </ac:spMkLst>
+        </pc:spChg>
+        <pc:picChg chg="del">
+          <ac:chgData name="João Luiz Grave Gross" userId="70663aa8-58a3-482c-a5ab-33e75f2c9147" providerId="ADAL" clId="{1642D5D4-6F90-4729-B6C8-CF446D4D64F7}" dt="2025-10-02T12:12:18.821" v="2680" actId="478"/>
+          <ac:picMkLst>
+            <pc:docMk/>
+            <pc:sldMk cId="4184877138" sldId="284"/>
+            <ac:picMk id="6" creationId="{FDA58964-06C9-71A2-9D99-C6B28CD39586}"/>
+          </ac:picMkLst>
+        </pc:picChg>
+      </pc:sldChg>
+      <pc:sldChg chg="addSp modSp add mod">
+        <pc:chgData name="João Luiz Grave Gross" userId="70663aa8-58a3-482c-a5ab-33e75f2c9147" providerId="ADAL" clId="{1642D5D4-6F90-4729-B6C8-CF446D4D64F7}" dt="2025-10-02T12:34:21.253" v="3361" actId="20577"/>
+        <pc:sldMkLst>
+          <pc:docMk/>
+          <pc:sldMk cId="2181929786" sldId="285"/>
+        </pc:sldMkLst>
+        <pc:spChg chg="mod">
+          <ac:chgData name="João Luiz Grave Gross" userId="70663aa8-58a3-482c-a5ab-33e75f2c9147" providerId="ADAL" clId="{1642D5D4-6F90-4729-B6C8-CF446D4D64F7}" dt="2025-10-02T12:33:17.195" v="3308" actId="20577"/>
+          <ac:spMkLst>
+            <pc:docMk/>
+            <pc:sldMk cId="2181929786" sldId="285"/>
+            <ac:spMk id="2" creationId="{BD3CB7E4-95D0-9D5A-4804-FB8B31E44499}"/>
+          </ac:spMkLst>
+        </pc:spChg>
+        <pc:spChg chg="mod">
+          <ac:chgData name="João Luiz Grave Gross" userId="70663aa8-58a3-482c-a5ab-33e75f2c9147" providerId="ADAL" clId="{1642D5D4-6F90-4729-B6C8-CF446D4D64F7}" dt="2025-10-02T12:34:21.253" v="3361" actId="20577"/>
+          <ac:spMkLst>
+            <pc:docMk/>
+            <pc:sldMk cId="2181929786" sldId="285"/>
+            <ac:spMk id="3" creationId="{AE568FDB-26A3-830A-6EA8-6A40013C11E5}"/>
+          </ac:spMkLst>
+        </pc:spChg>
+        <pc:picChg chg="add mod">
+          <ac:chgData name="João Luiz Grave Gross" userId="70663aa8-58a3-482c-a5ab-33e75f2c9147" providerId="ADAL" clId="{1642D5D4-6F90-4729-B6C8-CF446D4D64F7}" dt="2025-10-02T12:34:05.894" v="3333" actId="14100"/>
+          <ac:picMkLst>
+            <pc:docMk/>
+            <pc:sldMk cId="2181929786" sldId="285"/>
+            <ac:picMk id="6" creationId="{C00DAAED-7FD5-A15F-FF31-A70B50056F1B}"/>
+          </ac:picMkLst>
+        </pc:picChg>
+      </pc:sldChg>
+      <pc:sldChg chg="addSp delSp modSp add mod">
+        <pc:chgData name="João Luiz Grave Gross" userId="70663aa8-58a3-482c-a5ab-33e75f2c9147" providerId="ADAL" clId="{1642D5D4-6F90-4729-B6C8-CF446D4D64F7}" dt="2025-10-02T12:46:59.358" v="3618" actId="20577"/>
+        <pc:sldMkLst>
+          <pc:docMk/>
+          <pc:sldMk cId="2547759613" sldId="286"/>
+        </pc:sldMkLst>
+        <pc:spChg chg="mod">
+          <ac:chgData name="João Luiz Grave Gross" userId="70663aa8-58a3-482c-a5ab-33e75f2c9147" providerId="ADAL" clId="{1642D5D4-6F90-4729-B6C8-CF446D4D64F7}" dt="2025-10-02T12:46:59.358" v="3618" actId="20577"/>
+          <ac:spMkLst>
+            <pc:docMk/>
+            <pc:sldMk cId="2547759613" sldId="286"/>
+            <ac:spMk id="3" creationId="{9ECA5A31-9553-43DA-0723-6BCAC709BA10}"/>
+          </ac:spMkLst>
+        </pc:spChg>
+        <pc:picChg chg="del">
+          <ac:chgData name="João Luiz Grave Gross" userId="70663aa8-58a3-482c-a5ab-33e75f2c9147" providerId="ADAL" clId="{1642D5D4-6F90-4729-B6C8-CF446D4D64F7}" dt="2025-10-02T12:35:10.513" v="3392" actId="478"/>
+          <ac:picMkLst>
+            <pc:docMk/>
+            <pc:sldMk cId="2547759613" sldId="286"/>
+            <ac:picMk id="6" creationId="{69044A89-AE9D-712F-3A5A-B89108017F89}"/>
+          </ac:picMkLst>
+        </pc:picChg>
+        <pc:picChg chg="add mod">
+          <ac:chgData name="João Luiz Grave Gross" userId="70663aa8-58a3-482c-a5ab-33e75f2c9147" providerId="ADAL" clId="{1642D5D4-6F90-4729-B6C8-CF446D4D64F7}" dt="2025-10-02T12:46:45.077" v="3580" actId="1076"/>
+          <ac:picMkLst>
+            <pc:docMk/>
+            <pc:sldMk cId="2547759613" sldId="286"/>
+            <ac:picMk id="7" creationId="{3747247B-11E4-A2F1-96D9-758E149EE98C}"/>
+          </ac:picMkLst>
+        </pc:picChg>
+        <pc:picChg chg="add del">
+          <ac:chgData name="João Luiz Grave Gross" userId="70663aa8-58a3-482c-a5ab-33e75f2c9147" providerId="ADAL" clId="{1642D5D4-6F90-4729-B6C8-CF446D4D64F7}" dt="2025-10-02T12:35:33.635" v="3398" actId="22"/>
+          <ac:picMkLst>
+            <pc:docMk/>
+            <pc:sldMk cId="2547759613" sldId="286"/>
+            <ac:picMk id="9" creationId="{D5C4E927-96FA-DC8C-FD24-42F5F4CFEBC2}"/>
+          </ac:picMkLst>
+        </pc:picChg>
+      </pc:sldChg>
+      <pc:sldChg chg="addSp delSp modSp add mod">
+        <pc:chgData name="João Luiz Grave Gross" userId="70663aa8-58a3-482c-a5ab-33e75f2c9147" providerId="ADAL" clId="{1642D5D4-6F90-4729-B6C8-CF446D4D64F7}" dt="2025-10-02T12:42:48.099" v="3493" actId="1076"/>
+        <pc:sldMkLst>
+          <pc:docMk/>
+          <pc:sldMk cId="357584813" sldId="287"/>
+        </pc:sldMkLst>
+        <pc:spChg chg="mod">
+          <ac:chgData name="João Luiz Grave Gross" userId="70663aa8-58a3-482c-a5ab-33e75f2c9147" providerId="ADAL" clId="{1642D5D4-6F90-4729-B6C8-CF446D4D64F7}" dt="2025-10-02T12:36:15.693" v="3456" actId="20577"/>
+          <ac:spMkLst>
+            <pc:docMk/>
+            <pc:sldMk cId="357584813" sldId="287"/>
+            <ac:spMk id="3" creationId="{E4CFD4E7-509E-D031-9A82-CF231F722678}"/>
+          </ac:spMkLst>
+        </pc:spChg>
+        <pc:picChg chg="add del mod modCrop">
+          <ac:chgData name="João Luiz Grave Gross" userId="70663aa8-58a3-482c-a5ab-33e75f2c9147" providerId="ADAL" clId="{1642D5D4-6F90-4729-B6C8-CF446D4D64F7}" dt="2025-10-02T12:37:04.775" v="3461" actId="478"/>
+          <ac:picMkLst>
+            <pc:docMk/>
+            <pc:sldMk cId="357584813" sldId="287"/>
+            <ac:picMk id="6" creationId="{5C964EF1-4AF0-379C-C98F-8F329480245A}"/>
+          </ac:picMkLst>
+        </pc:picChg>
+        <pc:picChg chg="del mod">
+          <ac:chgData name="João Luiz Grave Gross" userId="70663aa8-58a3-482c-a5ab-33e75f2c9147" providerId="ADAL" clId="{1642D5D4-6F90-4729-B6C8-CF446D4D64F7}" dt="2025-10-02T12:35:44.640" v="3421" actId="478"/>
+          <ac:picMkLst>
+            <pc:docMk/>
+            <pc:sldMk cId="357584813" sldId="287"/>
+            <ac:picMk id="7" creationId="{4B3AA0F7-CB6D-C858-29B6-22C965FA8D1B}"/>
+          </ac:picMkLst>
+        </pc:picChg>
+        <pc:picChg chg="add del mod">
+          <ac:chgData name="João Luiz Grave Gross" userId="70663aa8-58a3-482c-a5ab-33e75f2c9147" providerId="ADAL" clId="{1642D5D4-6F90-4729-B6C8-CF446D4D64F7}" dt="2025-10-02T12:38:44.456" v="3473" actId="478"/>
+          <ac:picMkLst>
+            <pc:docMk/>
+            <pc:sldMk cId="357584813" sldId="287"/>
+            <ac:picMk id="9" creationId="{DC3F20D1-3BEF-0AA7-5676-F7251ECE7A66}"/>
+          </ac:picMkLst>
+        </pc:picChg>
+        <pc:picChg chg="add del">
+          <ac:chgData name="João Luiz Grave Gross" userId="70663aa8-58a3-482c-a5ab-33e75f2c9147" providerId="ADAL" clId="{1642D5D4-6F90-4729-B6C8-CF446D4D64F7}" dt="2025-10-02T12:37:14.417" v="3463" actId="22"/>
+          <ac:picMkLst>
+            <pc:docMk/>
+            <pc:sldMk cId="357584813" sldId="287"/>
+            <ac:picMk id="11" creationId="{48408BB3-E17B-1FA0-D624-7575ADD918D8}"/>
+          </ac:picMkLst>
+        </pc:picChg>
+        <pc:picChg chg="add mod">
+          <ac:chgData name="João Luiz Grave Gross" userId="70663aa8-58a3-482c-a5ab-33e75f2c9147" providerId="ADAL" clId="{1642D5D4-6F90-4729-B6C8-CF446D4D64F7}" dt="2025-10-02T12:39:12.151" v="3482" actId="1076"/>
+          <ac:picMkLst>
+            <pc:docMk/>
+            <pc:sldMk cId="357584813" sldId="287"/>
+            <ac:picMk id="13" creationId="{58196CD1-6E67-476D-B028-260AB30C8BF8}"/>
+          </ac:picMkLst>
+        </pc:picChg>
+        <pc:picChg chg="add del mod">
+          <ac:chgData name="João Luiz Grave Gross" userId="70663aa8-58a3-482c-a5ab-33e75f2c9147" providerId="ADAL" clId="{1642D5D4-6F90-4729-B6C8-CF446D4D64F7}" dt="2025-10-02T12:39:17.421" v="3485" actId="478"/>
+          <ac:picMkLst>
+            <pc:docMk/>
+            <pc:sldMk cId="357584813" sldId="287"/>
+            <ac:picMk id="15" creationId="{B9A93E7C-8B4F-2E53-A642-2B7955E4E369}"/>
+          </ac:picMkLst>
+        </pc:picChg>
+        <pc:picChg chg="add mod">
+          <ac:chgData name="João Luiz Grave Gross" userId="70663aa8-58a3-482c-a5ab-33e75f2c9147" providerId="ADAL" clId="{1642D5D4-6F90-4729-B6C8-CF446D4D64F7}" dt="2025-10-02T12:39:51.465" v="3490" actId="14100"/>
+          <ac:picMkLst>
+            <pc:docMk/>
+            <pc:sldMk cId="357584813" sldId="287"/>
+            <ac:picMk id="17" creationId="{93F0B778-4014-B1A0-AE38-72EEAE7286EB}"/>
+          </ac:picMkLst>
+        </pc:picChg>
+        <pc:picChg chg="add mod">
+          <ac:chgData name="João Luiz Grave Gross" userId="70663aa8-58a3-482c-a5ab-33e75f2c9147" providerId="ADAL" clId="{1642D5D4-6F90-4729-B6C8-CF446D4D64F7}" dt="2025-10-02T12:42:48.099" v="3493" actId="1076"/>
+          <ac:picMkLst>
+            <pc:docMk/>
+            <pc:sldMk cId="357584813" sldId="287"/>
+            <ac:picMk id="19" creationId="{419FC841-708D-D58C-7692-53617E707CAC}"/>
+          </ac:picMkLst>
+        </pc:picChg>
+      </pc:sldChg>
+      <pc:sldChg chg="addSp delSp modSp add mod">
+        <pc:chgData name="João Luiz Grave Gross" userId="70663aa8-58a3-482c-a5ab-33e75f2c9147" providerId="ADAL" clId="{1642D5D4-6F90-4729-B6C8-CF446D4D64F7}" dt="2025-10-02T12:48:02.347" v="3680" actId="1036"/>
+        <pc:sldMkLst>
+          <pc:docMk/>
+          <pc:sldMk cId="1132930727" sldId="288"/>
+        </pc:sldMkLst>
+        <pc:spChg chg="mod">
+          <ac:chgData name="João Luiz Grave Gross" userId="70663aa8-58a3-482c-a5ab-33e75f2c9147" providerId="ADAL" clId="{1642D5D4-6F90-4729-B6C8-CF446D4D64F7}" dt="2025-10-02T12:47:27.279" v="3673" actId="20577"/>
+          <ac:spMkLst>
+            <pc:docMk/>
+            <pc:sldMk cId="1132930727" sldId="288"/>
+            <ac:spMk id="3" creationId="{09675329-5578-6712-1D7D-A10C3925E2D5}"/>
+          </ac:spMkLst>
+        </pc:spChg>
+        <pc:picChg chg="add mod">
+          <ac:chgData name="João Luiz Grave Gross" userId="70663aa8-58a3-482c-a5ab-33e75f2c9147" providerId="ADAL" clId="{1642D5D4-6F90-4729-B6C8-CF446D4D64F7}" dt="2025-10-02T12:48:02.347" v="3680" actId="1036"/>
+          <ac:picMkLst>
+            <pc:docMk/>
+            <pc:sldMk cId="1132930727" sldId="288"/>
+            <ac:picMk id="6" creationId="{06C3ED27-ECB9-687E-DC03-7D9466099F43}"/>
+          </ac:picMkLst>
+        </pc:picChg>
+        <pc:picChg chg="del">
+          <ac:chgData name="João Luiz Grave Gross" userId="70663aa8-58a3-482c-a5ab-33e75f2c9147" providerId="ADAL" clId="{1642D5D4-6F90-4729-B6C8-CF446D4D64F7}" dt="2025-10-02T12:47:29.676" v="3675" actId="478"/>
+          <ac:picMkLst>
+            <pc:docMk/>
+            <pc:sldMk cId="1132930727" sldId="288"/>
+            <ac:picMk id="13" creationId="{63E06FB1-057B-2010-5706-50C87C814559}"/>
+          </ac:picMkLst>
+        </pc:picChg>
+        <pc:picChg chg="del">
+          <ac:chgData name="João Luiz Grave Gross" userId="70663aa8-58a3-482c-a5ab-33e75f2c9147" providerId="ADAL" clId="{1642D5D4-6F90-4729-B6C8-CF446D4D64F7}" dt="2025-10-02T12:47:29.264" v="3674" actId="478"/>
+          <ac:picMkLst>
+            <pc:docMk/>
+            <pc:sldMk cId="1132930727" sldId="288"/>
+            <ac:picMk id="17" creationId="{03A4E543-939B-5015-9799-5994A401F251}"/>
+          </ac:picMkLst>
+        </pc:picChg>
+        <pc:picChg chg="del">
+          <ac:chgData name="João Luiz Grave Gross" userId="70663aa8-58a3-482c-a5ab-33e75f2c9147" providerId="ADAL" clId="{1642D5D4-6F90-4729-B6C8-CF446D4D64F7}" dt="2025-10-02T12:47:30.193" v="3676" actId="478"/>
+          <ac:picMkLst>
+            <pc:docMk/>
+            <pc:sldMk cId="1132930727" sldId="288"/>
+            <ac:picMk id="19" creationId="{44188B6F-396D-E438-14C2-27E3D6BEA81F}"/>
+          </ac:picMkLst>
+        </pc:picChg>
+      </pc:sldChg>
+      <pc:sldChg chg="addSp delSp modSp add mod">
+        <pc:chgData name="João Luiz Grave Gross" userId="70663aa8-58a3-482c-a5ab-33e75f2c9147" providerId="ADAL" clId="{1642D5D4-6F90-4729-B6C8-CF446D4D64F7}" dt="2025-10-02T12:57:51.645" v="4364" actId="14100"/>
+        <pc:sldMkLst>
+          <pc:docMk/>
+          <pc:sldMk cId="3745213728" sldId="289"/>
+        </pc:sldMkLst>
+        <pc:spChg chg="del">
+          <ac:chgData name="João Luiz Grave Gross" userId="70663aa8-58a3-482c-a5ab-33e75f2c9147" providerId="ADAL" clId="{1642D5D4-6F90-4729-B6C8-CF446D4D64F7}" dt="2025-10-02T12:56:33.762" v="4314" actId="478"/>
+          <ac:spMkLst>
+            <pc:docMk/>
+            <pc:sldMk cId="3745213728" sldId="289"/>
+            <ac:spMk id="2" creationId="{746A9A9A-910C-1010-D666-F132F511D139}"/>
+          </ac:spMkLst>
+        </pc:spChg>
+        <pc:spChg chg="add del mod">
+          <ac:chgData name="João Luiz Grave Gross" userId="70663aa8-58a3-482c-a5ab-33e75f2c9147" providerId="ADAL" clId="{1642D5D4-6F90-4729-B6C8-CF446D4D64F7}" dt="2025-10-02T12:56:35.522" v="4315" actId="478"/>
+          <ac:spMkLst>
+            <pc:docMk/>
+            <pc:sldMk cId="3745213728" sldId="289"/>
+            <ac:spMk id="5" creationId="{8E33CD5B-9BD8-76DE-6999-00F8803257B5}"/>
+          </ac:spMkLst>
+        </pc:spChg>
+        <pc:spChg chg="add mod">
+          <ac:chgData name="João Luiz Grave Gross" userId="70663aa8-58a3-482c-a5ab-33e75f2c9147" providerId="ADAL" clId="{1642D5D4-6F90-4729-B6C8-CF446D4D64F7}" dt="2025-10-02T12:57:51.645" v="4364" actId="14100"/>
+          <ac:spMkLst>
+            <pc:docMk/>
+            <pc:sldMk cId="3745213728" sldId="289"/>
+            <ac:spMk id="6" creationId="{952F2D54-3EB1-C81D-9007-7A7DC94C1C92}"/>
+          </ac:spMkLst>
+        </pc:spChg>
+        <pc:picChg chg="mod">
+          <ac:chgData name="João Luiz Grave Gross" userId="70663aa8-58a3-482c-a5ab-33e75f2c9147" providerId="ADAL" clId="{1642D5D4-6F90-4729-B6C8-CF446D4D64F7}" dt="2025-10-02T12:57:41.088" v="4362" actId="1076"/>
+          <ac:picMkLst>
+            <pc:docMk/>
+            <pc:sldMk cId="3745213728" sldId="289"/>
+            <ac:picMk id="8" creationId="{36F05054-8A86-D834-351B-2C9DCBE3C7FD}"/>
           </ac:picMkLst>
         </pc:picChg>
       </pc:sldChg>
@@ -982,7 +1503,7 @@
           <a:p>
             <a:fld id="{B7E37165-AD05-40CF-837F-87AAE2E9CB3C}" type="datetimeFigureOut">
               <a:rPr lang="pt-BR" smtClean="0"/>
-              <a:t>01/10/2025</a:t>
+              <a:t>02/10/2025</a:t>
             </a:fld>
             <a:endParaRPr lang="pt-BR"/>
           </a:p>
@@ -1540,7 +2061,7 @@
           <a:p>
             <a:fld id="{5A5CB361-D3A0-4F07-9956-A4088440887D}" type="datetime1">
               <a:rPr lang="en-US" smtClean="0"/>
-              <a:t>10/1/2025</a:t>
+              <a:t>10/2/2025</a:t>
             </a:fld>
             <a:endParaRPr lang="en-US"/>
           </a:p>
@@ -1818,7 +2339,7 @@
           <a:p>
             <a:fld id="{26DBD6ED-30C1-434C-9E13-883544CD1709}" type="datetime1">
               <a:rPr lang="en-US" smtClean="0"/>
-              <a:t>10/1/2025</a:t>
+              <a:t>10/2/2025</a:t>
             </a:fld>
             <a:endParaRPr lang="en-US"/>
           </a:p>
@@ -2211,7 +2732,7 @@
           <a:p>
             <a:fld id="{408DA9F0-F28D-4CBB-B6B2-41B75FEA0475}" type="datetime1">
               <a:rPr lang="en-US" smtClean="0"/>
-              <a:t>10/1/2025</a:t>
+              <a:t>10/2/2025</a:t>
             </a:fld>
             <a:endParaRPr lang="en-US"/>
           </a:p>
@@ -2451,7 +2972,7 @@
           <a:p>
             <a:fld id="{000B8031-D506-4594-9A76-9D37B195C745}" type="datetime1">
               <a:rPr lang="en-US" smtClean="0"/>
-              <a:t>10/1/2025</a:t>
+              <a:t>10/2/2025</a:t>
             </a:fld>
             <a:endParaRPr lang="en-US"/>
           </a:p>
@@ -2686,7 +3207,7 @@
           <a:p>
             <a:fld id="{D926BC3F-B712-47C4-8854-E94AD7571356}" type="datetime1">
               <a:rPr lang="en-US" smtClean="0"/>
-              <a:t>10/1/2025</a:t>
+              <a:t>10/2/2025</a:t>
             </a:fld>
             <a:endParaRPr lang="en-US"/>
           </a:p>
@@ -2921,7 +3442,7 @@
           <a:p>
             <a:fld id="{8600CF2C-F450-4EC5-86D2-EB2C14EEBFFF}" type="datetime1">
               <a:rPr lang="en-US" smtClean="0"/>
-              <a:t>10/1/2025</a:t>
+              <a:t>10/2/2025</a:t>
             </a:fld>
             <a:endParaRPr lang="en-US"/>
           </a:p>
@@ -3156,7 +3677,7 @@
           <a:p>
             <a:fld id="{E13D3A79-491D-47A2-937F-CA21998A7535}" type="datetime1">
               <a:rPr lang="en-US" smtClean="0"/>
-              <a:t>10/1/2025</a:t>
+              <a:t>10/2/2025</a:t>
             </a:fld>
             <a:endParaRPr lang="en-US"/>
           </a:p>
@@ -3374,7 +3895,7 @@
           <a:p>
             <a:fld id="{4783ECC0-AEA6-445E-8230-8330ABD10170}" type="datetime1">
               <a:rPr lang="en-US" smtClean="0"/>
-              <a:t>10/1/2025</a:t>
+              <a:t>10/2/2025</a:t>
             </a:fld>
             <a:endParaRPr lang="en-US"/>
           </a:p>
@@ -3737,7 +4258,7 @@
           <a:p>
             <a:fld id="{C62910BB-B356-4E1E-9EF6-AA69F18758E6}" type="datetime1">
               <a:rPr lang="en-US" smtClean="0"/>
-              <a:t>10/1/2025</a:t>
+              <a:t>10/2/2025</a:t>
             </a:fld>
             <a:endParaRPr lang="en-US"/>
           </a:p>
@@ -3948,7 +4469,7 @@
           <a:p>
             <a:fld id="{CC0B0B20-A004-471C-A09C-39CE2996BC18}" type="datetime1">
               <a:rPr lang="en-US" smtClean="0"/>
-              <a:t>10/1/2025</a:t>
+              <a:t>10/2/2025</a:t>
             </a:fld>
             <a:endParaRPr lang="en-US"/>
           </a:p>
@@ -4472,7 +4993,7 @@
           <a:p>
             <a:fld id="{3FA03E86-CE53-4CE4-AF06-E870A663030F}" type="datetime1">
               <a:rPr lang="en-US" smtClean="0"/>
-              <a:t>10/1/2025</a:t>
+              <a:t>10/2/2025</a:t>
             </a:fld>
             <a:endParaRPr lang="en-US"/>
           </a:p>
@@ -4673,7 +5194,7 @@
           <a:p>
             <a:fld id="{9F242DC5-C96C-4C2E-B22D-93D764C3B6F2}" type="datetime1">
               <a:rPr lang="en-US" smtClean="0"/>
-              <a:t>10/1/2025</a:t>
+              <a:t>10/2/2025</a:t>
             </a:fld>
             <a:endParaRPr lang="en-US"/>
           </a:p>
@@ -4884,7 +5405,7 @@
           <a:p>
             <a:fld id="{E5BC3ADE-C383-4FAD-B241-EE91D3116F3B}" type="datetime1">
               <a:rPr lang="en-US" smtClean="0"/>
-              <a:t>10/1/2025</a:t>
+              <a:t>10/2/2025</a:t>
             </a:fld>
             <a:endParaRPr lang="en-US"/>
           </a:p>
@@ -5408,7 +5929,7 @@
           <a:p>
             <a:fld id="{2E5ACAA0-61D8-40E6-A863-3A95CCE0CAA6}" type="datetime1">
               <a:rPr lang="en-US" smtClean="0"/>
-              <a:t>10/1/2025</a:t>
+              <a:t>10/2/2025</a:t>
             </a:fld>
             <a:endParaRPr lang="en-US"/>
           </a:p>
@@ -5619,7 +6140,7 @@
           <a:p>
             <a:fld id="{AECDDE93-A6B1-401A-BEF2-E973E6F61C42}" type="datetime1">
               <a:rPr lang="en-US" smtClean="0"/>
-              <a:t>10/1/2025</a:t>
+              <a:t>10/2/2025</a:t>
             </a:fld>
             <a:endParaRPr lang="en-US"/>
           </a:p>
@@ -6143,7 +6664,7 @@
           <a:p>
             <a:fld id="{4E2D1C80-3E13-4421-AB94-FA5DC61EC52B}" type="datetime1">
               <a:rPr lang="en-US" smtClean="0"/>
-              <a:t>10/1/2025</a:t>
+              <a:t>10/2/2025</a:t>
             </a:fld>
             <a:endParaRPr lang="en-US"/>
           </a:p>
@@ -6354,7 +6875,7 @@
           <a:p>
             <a:fld id="{16BD149D-AAAF-49C7-8A9D-E6F2449D184C}" type="datetime1">
               <a:rPr lang="en-US" smtClean="0"/>
-              <a:t>10/1/2025</a:t>
+              <a:t>10/2/2025</a:t>
             </a:fld>
             <a:endParaRPr lang="en-US"/>
           </a:p>
@@ -6896,7 +7417,7 @@
           <a:p>
             <a:fld id="{781E9FAD-CB1C-45FF-A8BC-28EBDB0E7C90}" type="datetime1">
               <a:rPr lang="en-US" smtClean="0"/>
-              <a:t>10/1/2025</a:t>
+              <a:t>10/2/2025</a:t>
             </a:fld>
             <a:endParaRPr lang="en-US"/>
           </a:p>
@@ -7277,7 +7798,7 @@
           <a:p>
             <a:fld id="{C510CFBE-C968-4591-8E57-F31E41AFB964}" type="datetime1">
               <a:rPr lang="en-US" smtClean="0"/>
-              <a:t>10/1/2025</a:t>
+              <a:t>10/2/2025</a:t>
             </a:fld>
             <a:endParaRPr lang="en-US"/>
           </a:p>
@@ -7663,7 +8184,7 @@
           <a:p>
             <a:fld id="{3BBAA7D9-0A22-4F46-8031-4852CC0D5860}" type="datetime1">
               <a:rPr lang="en-US" smtClean="0"/>
-              <a:t>10/1/2025</a:t>
+              <a:t>10/2/2025</a:t>
             </a:fld>
             <a:endParaRPr lang="en-US"/>
           </a:p>
@@ -7961,7 +8482,7 @@
           <a:p>
             <a:fld id="{1CAB6D8A-C267-445F-A5F2-83ABED06E8BD}" type="datetime1">
               <a:rPr lang="en-US" smtClean="0"/>
-              <a:t>10/1/2025</a:t>
+              <a:t>10/2/2025</a:t>
             </a:fld>
             <a:endParaRPr lang="en-US"/>
           </a:p>
@@ -8349,7 +8870,7 @@
           <a:p>
             <a:fld id="{8B73BB16-461A-42F3-8ED5-1C1B26A7B645}" type="datetime1">
               <a:rPr lang="en-US" smtClean="0"/>
-              <a:t>10/1/2025</a:t>
+              <a:t>10/2/2025</a:t>
             </a:fld>
             <a:endParaRPr lang="en-US"/>
           </a:p>
@@ -8801,7 +9322,7 @@
           <a:p>
             <a:fld id="{E221F185-75C3-4B3C-AA1F-553DC8149EBC}" type="datetime1">
               <a:rPr lang="en-US" smtClean="0"/>
-              <a:t>10/1/2025</a:t>
+              <a:t>10/2/2025</a:t>
             </a:fld>
             <a:endParaRPr lang="en-US"/>
           </a:p>
@@ -9120,7 +9641,7 @@
           <a:p>
             <a:fld id="{ACC73482-79A8-4554-A143-C40EA112FFDB}" type="datetime1">
               <a:rPr lang="en-US" smtClean="0"/>
-              <a:t>10/1/2025</a:t>
+              <a:t>10/2/2025</a:t>
             </a:fld>
             <a:endParaRPr lang="en-US"/>
           </a:p>
@@ -9574,7 +10095,7 @@
           <a:p>
             <a:fld id="{B17E97F6-40B1-4130-9CC0-49072FDE2D22}" type="datetime1">
               <a:rPr lang="en-US" smtClean="0"/>
-              <a:t>10/1/2025</a:t>
+              <a:t>10/2/2025</a:t>
             </a:fld>
             <a:endParaRPr lang="en-US"/>
           </a:p>
@@ -9944,7 +10465,7 @@
           <a:p>
             <a:fld id="{55E7A8F7-C80F-41DF-B88F-58AAA8CFE67C}" type="datetime1">
               <a:rPr lang="en-US" smtClean="0"/>
-              <a:t>10/1/2025</a:t>
+              <a:t>10/2/2025</a:t>
             </a:fld>
             <a:endParaRPr lang="en-US"/>
           </a:p>
@@ -10304,7 +10825,7 @@
           <a:p>
             <a:fld id="{70046AC6-D67A-4524-970E-84C464485184}" type="datetime1">
               <a:rPr lang="en-US" smtClean="0"/>
-              <a:t>10/1/2025</a:t>
+              <a:t>10/2/2025</a:t>
             </a:fld>
             <a:endParaRPr lang="en-US"/>
           </a:p>
@@ -10469,7 +10990,7 @@
           <a:p>
             <a:fld id="{2A3D1F8B-1E4F-40A6-B302-1DA3A1F26854}" type="datetime1">
               <a:rPr lang="en-US" smtClean="0"/>
-              <a:t>10/1/2025</a:t>
+              <a:t>10/2/2025</a:t>
             </a:fld>
             <a:endParaRPr lang="en-US"/>
           </a:p>
@@ -10684,7 +11205,7 @@
           <a:p>
             <a:fld id="{ABD8140A-0B1E-4DEB-97D5-C47D738675EC}" type="datetime1">
               <a:rPr lang="en-US" smtClean="0"/>
-              <a:t>10/1/2025</a:t>
+              <a:t>10/2/2025</a:t>
             </a:fld>
             <a:endParaRPr lang="en-US"/>
           </a:p>
@@ -10895,7 +11416,7 @@
           <a:p>
             <a:fld id="{894DDB46-35CC-4332-96BF-2EE0A5BA77BB}" type="datetime1">
               <a:rPr lang="en-US" smtClean="0"/>
-              <a:t>10/1/2025</a:t>
+              <a:t>10/2/2025</a:t>
             </a:fld>
             <a:endParaRPr lang="en-US"/>
           </a:p>
@@ -11098,7 +11619,7 @@
           <a:p>
             <a:fld id="{0E3BD9E6-4B36-4623-BA39-E790911F0839}" type="datetime1">
               <a:rPr lang="en-US" smtClean="0"/>
-              <a:t>10/1/2025</a:t>
+              <a:t>10/2/2025</a:t>
             </a:fld>
             <a:endParaRPr lang="en-US"/>
           </a:p>
@@ -11347,7 +11868,7 @@
           <a:p>
             <a:fld id="{252CCF03-959D-4A8D-A11F-ED3751D9DDA1}" type="datetime1">
               <a:rPr lang="en-US" smtClean="0"/>
-              <a:t>10/1/2025</a:t>
+              <a:t>10/2/2025</a:t>
             </a:fld>
             <a:endParaRPr lang="en-US"/>
           </a:p>
@@ -11596,7 +12117,7 @@
           <a:p>
             <a:fld id="{326CCF64-DFA6-4283-BFF4-DF429D795EA9}" type="datetime1">
               <a:rPr lang="en-US" smtClean="0"/>
-              <a:t>10/1/2025</a:t>
+              <a:t>10/2/2025</a:t>
             </a:fld>
             <a:endParaRPr lang="en-US"/>
           </a:p>
@@ -11915,7 +12436,7 @@
           <a:p>
             <a:fld id="{2D7726DA-198B-4787-9EBC-75A0992C3644}" type="datetime1">
               <a:rPr lang="en-US" smtClean="0"/>
-              <a:t>10/1/2025</a:t>
+              <a:t>10/2/2025</a:t>
             </a:fld>
             <a:endParaRPr lang="en-US"/>
           </a:p>
@@ -12287,7 +12808,7 @@
           <a:p>
             <a:fld id="{D2C89B7A-2960-479C-B727-901A9D45CBAF}" type="datetime1">
               <a:rPr lang="en-US" smtClean="0"/>
-              <a:t>10/1/2025</a:t>
+              <a:t>10/2/2025</a:t>
             </a:fld>
             <a:endParaRPr lang="en-US"/>
           </a:p>
@@ -12580,7 +13101,7 @@
           <a:p>
             <a:fld id="{6F1A3736-487E-4F2A-80CA-49CCD14A560C}" type="datetime1">
               <a:rPr lang="en-US" smtClean="0"/>
-              <a:t>10/1/2025</a:t>
+              <a:t>10/2/2025</a:t>
             </a:fld>
             <a:endParaRPr lang="en-US"/>
           </a:p>
@@ -12795,7 +13316,7 @@
           <a:p>
             <a:fld id="{9BA1CBF1-D179-4F64-AB89-5245ADC3AF7B}" type="datetime1">
               <a:rPr lang="en-US" smtClean="0"/>
-              <a:t>10/1/2025</a:t>
+              <a:t>10/2/2025</a:t>
             </a:fld>
             <a:endParaRPr lang="en-US"/>
           </a:p>
@@ -13010,7 +13531,7 @@
           <a:p>
             <a:fld id="{435652A1-036F-4B93-8E58-D1056284BEE1}" type="datetime1">
               <a:rPr lang="en-US" smtClean="0"/>
-              <a:t>10/1/2025</a:t>
+              <a:t>10/2/2025</a:t>
             </a:fld>
             <a:endParaRPr lang="en-US"/>
           </a:p>
@@ -13283,7 +13804,7 @@
           <a:p>
             <a:fld id="{BF47BDFE-3386-489C-B159-31CC2F6CACF7}" type="datetime1">
               <a:rPr lang="en-US" smtClean="0"/>
-              <a:t>10/1/2025</a:t>
+              <a:t>10/2/2025</a:t>
             </a:fld>
             <a:endParaRPr lang="en-US"/>
           </a:p>
@@ -13708,7 +14229,7 @@
           <a:p>
             <a:fld id="{30E94FF3-36C1-41E9-92E4-A092518FF1A7}" type="datetime1">
               <a:rPr lang="en-US" smtClean="0"/>
-              <a:t>10/1/2025</a:t>
+              <a:t>10/2/2025</a:t>
             </a:fld>
             <a:endParaRPr lang="en-US"/>
           </a:p>
@@ -13852,7 +14373,7 @@
           <a:p>
             <a:fld id="{AE7DBB62-5A8F-4216-BC01-04FD3E06477C}" type="datetime1">
               <a:rPr lang="en-US" smtClean="0"/>
-              <a:t>10/1/2025</a:t>
+              <a:t>10/2/2025</a:t>
             </a:fld>
             <a:endParaRPr lang="en-US"/>
           </a:p>
@@ -13968,7 +14489,7 @@
           <a:p>
             <a:fld id="{9B045D10-D845-4EB1-925A-CA957D9BBB50}" type="datetime1">
               <a:rPr lang="en-US" smtClean="0"/>
-              <a:t>10/1/2025</a:t>
+              <a:t>10/2/2025</a:t>
             </a:fld>
             <a:endParaRPr lang="en-US"/>
           </a:p>
@@ -14276,7 +14797,7 @@
           <a:p>
             <a:fld id="{23814DDD-C878-448A-BAE3-9D5C8FDC8846}" type="datetime1">
               <a:rPr lang="en-US" smtClean="0"/>
-              <a:t>10/1/2025</a:t>
+              <a:t>10/2/2025</a:t>
             </a:fld>
             <a:endParaRPr lang="en-US"/>
           </a:p>
@@ -14677,7 +15198,7 @@
           <a:p>
             <a:fld id="{A83D6000-F2DF-436B-984A-9AC9C9331F57}" type="datetime1">
               <a:rPr lang="en-US" smtClean="0"/>
-              <a:t>10/1/2025</a:t>
+              <a:t>10/2/2025</a:t>
             </a:fld>
             <a:endParaRPr lang="en-US"/>
           </a:p>
@@ -15039,7 +15560,7 @@
           <a:p>
             <a:fld id="{D45A536A-73D3-4014-B6E9-451150722166}" type="datetime1">
               <a:rPr lang="en-US" smtClean="0"/>
-              <a:t>10/1/2025</a:t>
+              <a:t>10/2/2025</a:t>
             </a:fld>
             <a:endParaRPr lang="en-US"/>
           </a:p>
@@ -15295,7 +15816,7 @@
           <a:p>
             <a:fld id="{CC2CD543-CCDB-4FFB-ADF5-19D832983AAB}" type="datetime1">
               <a:rPr lang="en-US" smtClean="0"/>
-              <a:t>10/1/2025</a:t>
+              <a:t>10/2/2025</a:t>
             </a:fld>
             <a:endParaRPr lang="en-US"/>
           </a:p>
@@ -15540,7 +16061,7 @@
           <a:p>
             <a:fld id="{1277EF9F-30E0-4643-A418-2CA208888ACD}" type="datetime1">
               <a:rPr lang="en-US" smtClean="0"/>
-              <a:t>10/1/2025</a:t>
+              <a:t>10/2/2025</a:t>
             </a:fld>
             <a:endParaRPr lang="en-US"/>
           </a:p>
@@ -15763,7 +16284,7 @@
           <a:p>
             <a:fld id="{301E127A-91CA-46FF-BC59-FF98D01A476D}" type="datetime1">
               <a:rPr lang="en-US" smtClean="0"/>
-              <a:t>10/1/2025</a:t>
+              <a:t>10/2/2025</a:t>
             </a:fld>
             <a:endParaRPr lang="en-US"/>
           </a:p>
@@ -15964,7 +16485,7 @@
           <a:p>
             <a:fld id="{6F8F9046-2AA6-409B-9E4D-B723DCC88FDA}" type="datetime1">
               <a:rPr lang="en-US" smtClean="0"/>
-              <a:t>10/1/2025</a:t>
+              <a:t>10/2/2025</a:t>
             </a:fld>
             <a:endParaRPr lang="en-US"/>
           </a:p>
@@ -16242,7 +16763,7 @@
           <a:p>
             <a:fld id="{FF9FA8A8-3C42-405C-A845-EDA74342D7D6}" type="datetime1">
               <a:rPr lang="en-US" smtClean="0"/>
-              <a:t>10/1/2025</a:t>
+              <a:t>10/2/2025</a:t>
             </a:fld>
             <a:endParaRPr lang="en-US"/>
           </a:p>
@@ -16510,7 +17031,7 @@
           <a:p>
             <a:fld id="{D8F726DA-E852-4173-994B-325EDB7D946D}" type="datetime1">
               <a:rPr lang="en-US" smtClean="0"/>
-              <a:t>10/1/2025</a:t>
+              <a:t>10/2/2025</a:t>
             </a:fld>
             <a:endParaRPr lang="en-US"/>
           </a:p>
@@ -16925,7 +17446,7 @@
           <a:p>
             <a:fld id="{96A415C4-6826-4CC5-AB57-0B4EF147A936}" type="datetime1">
               <a:rPr lang="en-US" smtClean="0"/>
-              <a:t>10/1/2025</a:t>
+              <a:t>10/2/2025</a:t>
             </a:fld>
             <a:endParaRPr lang="en-US"/>
           </a:p>
@@ -17069,7 +17590,7 @@
           <a:p>
             <a:fld id="{FC71E2AD-32CF-44A6-BC61-B01A29B43C16}" type="datetime1">
               <a:rPr lang="en-US" smtClean="0"/>
-              <a:t>10/1/2025</a:t>
+              <a:t>10/2/2025</a:t>
             </a:fld>
             <a:endParaRPr lang="en-US"/>
           </a:p>
@@ -17185,7 +17706,7 @@
           <a:p>
             <a:fld id="{448F4039-F262-4913-BAEA-20C96B2EB2D8}" type="datetime1">
               <a:rPr lang="en-US" smtClean="0"/>
-              <a:t>10/1/2025</a:t>
+              <a:t>10/2/2025</a:t>
             </a:fld>
             <a:endParaRPr lang="en-US"/>
           </a:p>
@@ -17499,7 +18020,7 @@
           <a:p>
             <a:fld id="{9DA2500A-7F73-4593-BADA-6EF82DBD0456}" type="datetime1">
               <a:rPr lang="en-US" smtClean="0"/>
-              <a:t>10/1/2025</a:t>
+              <a:t>10/2/2025</a:t>
             </a:fld>
             <a:endParaRPr lang="en-US"/>
           </a:p>
@@ -17717,7 +18238,7 @@
           <a:p>
             <a:fld id="{1C483498-199A-4D1B-8519-AB33EB483840}" type="datetime1">
               <a:rPr lang="en-US" smtClean="0"/>
-              <a:t>10/1/2025</a:t>
+              <a:t>10/2/2025</a:t>
             </a:fld>
             <a:endParaRPr lang="en-US"/>
           </a:p>
@@ -18024,7 +18545,7 @@
           <a:p>
             <a:fld id="{332E274C-9940-4C58-9588-AEBBD50B52D0}" type="datetime1">
               <a:rPr lang="en-US" smtClean="0"/>
-              <a:t>10/1/2025</a:t>
+              <a:t>10/2/2025</a:t>
             </a:fld>
             <a:endParaRPr lang="en-US"/>
           </a:p>
@@ -18225,7 +18746,7 @@
           <a:p>
             <a:fld id="{2B5C771A-C952-410E-B1F6-C29C797294A1}" type="datetime1">
               <a:rPr lang="en-US" smtClean="0"/>
-              <a:t>10/1/2025</a:t>
+              <a:t>10/2/2025</a:t>
             </a:fld>
             <a:endParaRPr lang="en-US"/>
           </a:p>
@@ -18436,7 +18957,7 @@
           <a:p>
             <a:fld id="{7F309C4D-F421-4343-875C-A686A2B3F758}" type="datetime1">
               <a:rPr lang="en-US" smtClean="0"/>
-              <a:t>10/1/2025</a:t>
+              <a:t>10/2/2025</a:t>
             </a:fld>
             <a:endParaRPr lang="en-US"/>
           </a:p>
@@ -18684,7 +19205,7 @@
           <a:p>
             <a:fld id="{828A20DD-4DDE-40E8-A9B0-06CB2FF6486B}" type="datetime1">
               <a:rPr lang="en-US" smtClean="0"/>
-              <a:t>10/1/2025</a:t>
+              <a:t>10/2/2025</a:t>
             </a:fld>
             <a:endParaRPr lang="en-US"/>
           </a:p>
@@ -18918,7 +19439,7 @@
           <a:p>
             <a:fld id="{A92C6F27-A153-4762-98CC-FD765AF336E3}" type="datetime1">
               <a:rPr lang="en-US" smtClean="0"/>
-              <a:t>10/1/2025</a:t>
+              <a:t>10/2/2025</a:t>
             </a:fld>
             <a:endParaRPr lang="en-US"/>
           </a:p>
@@ -19161,7 +19682,7 @@
           <a:p>
             <a:fld id="{8654BDFB-221D-439B-9FE1-56A9848B7E3C}" type="datetime1">
               <a:rPr lang="en-US" smtClean="0"/>
-              <a:t>10/1/2025</a:t>
+              <a:t>10/2/2025</a:t>
             </a:fld>
             <a:endParaRPr lang="en-US"/>
           </a:p>
@@ -19420,7 +19941,7 @@
           <a:p>
             <a:fld id="{CF1E374B-038E-49DF-93C9-EBE7D5930F04}" type="datetime1">
               <a:rPr lang="en-US" smtClean="0"/>
-              <a:t>10/1/2025</a:t>
+              <a:t>10/2/2025</a:t>
             </a:fld>
             <a:endParaRPr lang="en-US"/>
           </a:p>
@@ -20028,7 +20549,7 @@
           <a:p>
             <a:fld id="{A3C4F98B-79FF-4D6E-A7F1-90977450B57D}" type="datetime1">
               <a:rPr lang="en-US" smtClean="0"/>
-              <a:t>10/1/2025</a:t>
+              <a:t>10/2/2025</a:t>
             </a:fld>
             <a:endParaRPr lang="en-US"/>
           </a:p>
@@ -20552,6 +21073,302 @@
         <p:cNvPr id="1" name="">
           <a:extLst>
             <a:ext uri="{FF2B5EF4-FFF2-40B4-BE49-F238E27FC236}">
+              <a16:creationId xmlns:a16="http://schemas.microsoft.com/office/drawing/2014/main" id="{FCA57A0A-6019-09A9-9BC2-9FCE50535229}"/>
+            </a:ext>
+          </a:extLst>
+        </p:cNvPr>
+        <p:cNvGrpSpPr/>
+        <p:nvPr/>
+      </p:nvGrpSpPr>
+      <p:grpSpPr>
+        <a:xfrm>
+          <a:off x="0" y="0"/>
+          <a:ext cx="0" cy="0"/>
+          <a:chOff x="0" y="0"/>
+          <a:chExt cx="0" cy="0"/>
+        </a:xfrm>
+      </p:grpSpPr>
+      <p:sp>
+        <p:nvSpPr>
+          <p:cNvPr id="2" name="Título 1">
+            <a:extLst>
+              <a:ext uri="{FF2B5EF4-FFF2-40B4-BE49-F238E27FC236}">
+                <a16:creationId xmlns:a16="http://schemas.microsoft.com/office/drawing/2014/main" id="{39713913-BE32-BC8E-EACD-25E0EE829A37}"/>
+              </a:ext>
+            </a:extLst>
+          </p:cNvPr>
+          <p:cNvSpPr>
+            <a:spLocks noGrp="1"/>
+          </p:cNvSpPr>
+          <p:nvPr>
+            <p:ph type="title"/>
+          </p:nvPr>
+        </p:nvSpPr>
+        <p:spPr/>
+        <p:txBody>
+          <a:bodyPr/>
+          <a:lstStyle/>
+          <a:p>
+            <a:r>
+              <a:rPr lang="en-US" dirty="0"/>
+              <a:t>Teste de </a:t>
+            </a:r>
+            <a:r>
+              <a:rPr lang="en-US" dirty="0" err="1"/>
+              <a:t>Frequência</a:t>
+            </a:r>
+            <a:r>
+              <a:rPr lang="en-US" dirty="0"/>
+              <a:t> de CPU</a:t>
+            </a:r>
+            <a:endParaRPr lang="pt-BR" dirty="0"/>
+          </a:p>
+        </p:txBody>
+      </p:sp>
+      <p:sp>
+        <p:nvSpPr>
+          <p:cNvPr id="3" name="Espaço Reservado para Conteúdo 2">
+            <a:extLst>
+              <a:ext uri="{FF2B5EF4-FFF2-40B4-BE49-F238E27FC236}">
+                <a16:creationId xmlns:a16="http://schemas.microsoft.com/office/drawing/2014/main" id="{B588263A-584E-F8D5-A4AE-51D290B5ACD3}"/>
+              </a:ext>
+            </a:extLst>
+          </p:cNvPr>
+          <p:cNvSpPr>
+            <a:spLocks noGrp="1"/>
+          </p:cNvSpPr>
+          <p:nvPr>
+            <p:ph idx="1"/>
+          </p:nvPr>
+        </p:nvSpPr>
+        <p:spPr/>
+        <p:txBody>
+          <a:bodyPr>
+            <a:normAutofit/>
+          </a:bodyPr>
+          <a:lstStyle/>
+          <a:p>
+            <a:endParaRPr lang="en-US" b="1" dirty="0"/>
+          </a:p>
+          <a:p>
+            <a:endParaRPr lang="pt-BR" b="1" dirty="0"/>
+          </a:p>
+        </p:txBody>
+      </p:sp>
+      <p:sp>
+        <p:nvSpPr>
+          <p:cNvPr id="4" name="Espaço Reservado para Número de Slide 3">
+            <a:extLst>
+              <a:ext uri="{FF2B5EF4-FFF2-40B4-BE49-F238E27FC236}">
+                <a16:creationId xmlns:a16="http://schemas.microsoft.com/office/drawing/2014/main" id="{68F76967-C050-DB5C-D1D7-624B0C5F0BAA}"/>
+              </a:ext>
+            </a:extLst>
+          </p:cNvPr>
+          <p:cNvSpPr>
+            <a:spLocks noGrp="1"/>
+          </p:cNvSpPr>
+          <p:nvPr>
+            <p:ph type="sldNum" sz="quarter" idx="12"/>
+          </p:nvPr>
+        </p:nvSpPr>
+        <p:spPr/>
+        <p:txBody>
+          <a:bodyPr/>
+          <a:lstStyle/>
+          <a:p>
+            <a:fld id="{8E274F5D-21DC-40EF-8DBA-AB9BB119E939}" type="slidenum">
+              <a:rPr lang="en-US" smtClean="0"/>
+              <a:t>10</a:t>
+            </a:fld>
+            <a:endParaRPr lang="en-US"/>
+          </a:p>
+        </p:txBody>
+      </p:sp>
+      <p:pic>
+        <p:nvPicPr>
+          <p:cNvPr id="7" name="Imagem 6">
+            <a:extLst>
+              <a:ext uri="{FF2B5EF4-FFF2-40B4-BE49-F238E27FC236}">
+                <a16:creationId xmlns:a16="http://schemas.microsoft.com/office/drawing/2014/main" id="{CDF7E3F5-66E2-6B4A-DD5E-DE49576082E3}"/>
+              </a:ext>
+            </a:extLst>
+          </p:cNvPr>
+          <p:cNvPicPr>
+            <a:picLocks noChangeAspect="1"/>
+          </p:cNvPicPr>
+          <p:nvPr/>
+        </p:nvPicPr>
+        <p:blipFill>
+          <a:blip r:embed="rId2"/>
+          <a:stretch>
+            <a:fillRect/>
+          </a:stretch>
+        </p:blipFill>
+        <p:spPr>
+          <a:xfrm>
+            <a:off x="4991748" y="1370125"/>
+            <a:ext cx="7026853" cy="5351350"/>
+          </a:xfrm>
+          <a:prstGeom prst="rect">
+            <a:avLst/>
+          </a:prstGeom>
+        </p:spPr>
+      </p:pic>
+      <p:pic>
+        <p:nvPicPr>
+          <p:cNvPr id="9" name="Imagem 8">
+            <a:extLst>
+              <a:ext uri="{FF2B5EF4-FFF2-40B4-BE49-F238E27FC236}">
+                <a16:creationId xmlns:a16="http://schemas.microsoft.com/office/drawing/2014/main" id="{40FE9EC6-7D0F-0715-46B1-C1A1DC0F2D32}"/>
+              </a:ext>
+            </a:extLst>
+          </p:cNvPr>
+          <p:cNvPicPr>
+            <a:picLocks noChangeAspect="1"/>
+          </p:cNvPicPr>
+          <p:nvPr/>
+        </p:nvPicPr>
+        <p:blipFill>
+          <a:blip r:embed="rId3"/>
+          <a:stretch>
+            <a:fillRect/>
+          </a:stretch>
+        </p:blipFill>
+        <p:spPr>
+          <a:xfrm>
+            <a:off x="635515" y="1645803"/>
+            <a:ext cx="4918852" cy="3177395"/>
+          </a:xfrm>
+          <a:prstGeom prst="rect">
+            <a:avLst/>
+          </a:prstGeom>
+        </p:spPr>
+      </p:pic>
+      <p:sp>
+        <p:nvSpPr>
+          <p:cNvPr id="10" name="Elipse 9">
+            <a:extLst>
+              <a:ext uri="{FF2B5EF4-FFF2-40B4-BE49-F238E27FC236}">
+                <a16:creationId xmlns:a16="http://schemas.microsoft.com/office/drawing/2014/main" id="{3828B902-EC4D-FF07-D4C4-B5E26DECA2BF}"/>
+              </a:ext>
+            </a:extLst>
+          </p:cNvPr>
+          <p:cNvSpPr/>
+          <p:nvPr/>
+        </p:nvSpPr>
+        <p:spPr>
+          <a:xfrm>
+            <a:off x="7118555" y="3775587"/>
+            <a:ext cx="3028335" cy="393290"/>
+          </a:xfrm>
+          <a:prstGeom prst="ellipse">
+            <a:avLst/>
+          </a:prstGeom>
+          <a:noFill/>
+          <a:ln>
+            <a:solidFill>
+              <a:srgbClr val="FF0000"/>
+            </a:solidFill>
+          </a:ln>
+        </p:spPr>
+        <p:style>
+          <a:lnRef idx="2">
+            <a:schemeClr val="accent1">
+              <a:shade val="15000"/>
+            </a:schemeClr>
+          </a:lnRef>
+          <a:fillRef idx="1">
+            <a:schemeClr val="accent1"/>
+          </a:fillRef>
+          <a:effectRef idx="0">
+            <a:schemeClr val="accent1"/>
+          </a:effectRef>
+          <a:fontRef idx="minor">
+            <a:schemeClr val="lt1"/>
+          </a:fontRef>
+        </p:style>
+        <p:txBody>
+          <a:bodyPr rtlCol="0" anchor="ctr"/>
+          <a:lstStyle/>
+          <a:p>
+            <a:pPr algn="ctr"/>
+            <a:endParaRPr lang="pt-BR"/>
+          </a:p>
+        </p:txBody>
+      </p:sp>
+      <p:sp>
+        <p:nvSpPr>
+          <p:cNvPr id="12" name="Retângulo 11">
+            <a:extLst>
+              <a:ext uri="{FF2B5EF4-FFF2-40B4-BE49-F238E27FC236}">
+                <a16:creationId xmlns:a16="http://schemas.microsoft.com/office/drawing/2014/main" id="{CC32D044-4DFB-D040-589C-CCAF0BE53C69}"/>
+              </a:ext>
+            </a:extLst>
+          </p:cNvPr>
+          <p:cNvSpPr/>
+          <p:nvPr/>
+        </p:nvSpPr>
+        <p:spPr>
+          <a:xfrm>
+            <a:off x="1219200" y="3696929"/>
+            <a:ext cx="3687097" cy="196645"/>
+          </a:xfrm>
+          <a:prstGeom prst="rect">
+            <a:avLst/>
+          </a:prstGeom>
+          <a:noFill/>
+          <a:ln>
+            <a:solidFill>
+              <a:srgbClr val="FF0000"/>
+            </a:solidFill>
+          </a:ln>
+        </p:spPr>
+        <p:style>
+          <a:lnRef idx="2">
+            <a:schemeClr val="accent1">
+              <a:shade val="15000"/>
+            </a:schemeClr>
+          </a:lnRef>
+          <a:fillRef idx="1">
+            <a:schemeClr val="accent1"/>
+          </a:fillRef>
+          <a:effectRef idx="0">
+            <a:schemeClr val="accent1"/>
+          </a:effectRef>
+          <a:fontRef idx="minor">
+            <a:schemeClr val="lt1"/>
+          </a:fontRef>
+        </p:style>
+        <p:txBody>
+          <a:bodyPr rtlCol="0" anchor="ctr"/>
+          <a:lstStyle/>
+          <a:p>
+            <a:pPr algn="ctr"/>
+            <a:endParaRPr lang="pt-BR"/>
+          </a:p>
+        </p:txBody>
+      </p:sp>
+    </p:spTree>
+    <p:extLst>
+      <p:ext uri="{BB962C8B-B14F-4D97-AF65-F5344CB8AC3E}">
+        <p14:creationId xmlns:p14="http://schemas.microsoft.com/office/powerpoint/2010/main" val="1170554390"/>
+      </p:ext>
+    </p:extLst>
+  </p:cSld>
+  <p:clrMapOvr>
+    <a:masterClrMapping/>
+  </p:clrMapOvr>
+</p:sld>
+</file>
+
+<file path=ppt/slides/slide11.xml><?xml version="1.0" encoding="utf-8"?>
+<p:sld xmlns:a="http://schemas.openxmlformats.org/drawingml/2006/main" xmlns:r="http://schemas.openxmlformats.org/officeDocument/2006/relationships" xmlns:p="http://schemas.openxmlformats.org/presentationml/2006/main">
+  <p:cSld>
+    <p:spTree>
+      <p:nvGrpSpPr>
+        <p:cNvPr id="1" name="">
+          <a:extLst>
+            <a:ext uri="{FF2B5EF4-FFF2-40B4-BE49-F238E27FC236}">
               <a16:creationId xmlns:a16="http://schemas.microsoft.com/office/drawing/2014/main" id="{2D5E8B4D-A32B-19F3-42C6-910A1E9C6B37}"/>
             </a:ext>
           </a:extLst>
@@ -20657,7 +21474,7 @@
           <a:p>
             <a:fld id="{8E274F5D-21DC-40EF-8DBA-AB9BB119E939}" type="slidenum">
               <a:rPr lang="en-US" smtClean="0"/>
-              <a:t>10</a:t>
+              <a:t>11</a:t>
             </a:fld>
             <a:endParaRPr lang="en-US"/>
           </a:p>
@@ -20703,293 +21520,6 @@
     <p:extLst>
       <p:ext uri="{BB962C8B-B14F-4D97-AF65-F5344CB8AC3E}">
         <p14:creationId xmlns:p14="http://schemas.microsoft.com/office/powerpoint/2010/main" val="1433434"/>
-      </p:ext>
-    </p:extLst>
-  </p:cSld>
-  <p:clrMapOvr>
-    <a:masterClrMapping/>
-  </p:clrMapOvr>
-</p:sld>
-</file>
-
-<file path=ppt/slides/slide11.xml><?xml version="1.0" encoding="utf-8"?>
-<p:sld xmlns:a="http://schemas.openxmlformats.org/drawingml/2006/main" xmlns:r="http://schemas.openxmlformats.org/officeDocument/2006/relationships" xmlns:p="http://schemas.openxmlformats.org/presentationml/2006/main">
-  <p:cSld>
-    <p:spTree>
-      <p:nvGrpSpPr>
-        <p:cNvPr id="1" name=""/>
-        <p:cNvGrpSpPr/>
-        <p:nvPr/>
-      </p:nvGrpSpPr>
-      <p:grpSpPr>
-        <a:xfrm>
-          <a:off x="0" y="0"/>
-          <a:ext cx="0" cy="0"/>
-          <a:chOff x="0" y="0"/>
-          <a:chExt cx="0" cy="0"/>
-        </a:xfrm>
-      </p:grpSpPr>
-      <p:sp>
-        <p:nvSpPr>
-          <p:cNvPr id="2" name="Título 1">
-            <a:extLst>
-              <a:ext uri="{FF2B5EF4-FFF2-40B4-BE49-F238E27FC236}">
-                <a16:creationId xmlns:a16="http://schemas.microsoft.com/office/drawing/2014/main" id="{EE9BC3AE-C10A-E0B8-883E-2DDAEFE7CE83}"/>
-              </a:ext>
-            </a:extLst>
-          </p:cNvPr>
-          <p:cNvSpPr>
-            <a:spLocks noGrp="1"/>
-          </p:cNvSpPr>
-          <p:nvPr>
-            <p:ph type="title"/>
-          </p:nvPr>
-        </p:nvSpPr>
-        <p:spPr/>
-        <p:txBody>
-          <a:bodyPr/>
-          <a:lstStyle/>
-          <a:p>
-            <a:r>
-              <a:rPr lang="en-US" dirty="0"/>
-              <a:t>Hardware: </a:t>
-            </a:r>
-            <a:r>
-              <a:rPr lang="en-US" dirty="0" err="1"/>
-              <a:t>Limitações</a:t>
-            </a:r>
-            <a:endParaRPr lang="pt-BR" dirty="0"/>
-          </a:p>
-        </p:txBody>
-      </p:sp>
-      <p:pic>
-        <p:nvPicPr>
-          <p:cNvPr id="11" name="Imagem 10">
-            <a:extLst>
-              <a:ext uri="{FF2B5EF4-FFF2-40B4-BE49-F238E27FC236}">
-                <a16:creationId xmlns:a16="http://schemas.microsoft.com/office/drawing/2014/main" id="{C0FC9812-F6D1-CF35-E1AC-4717A4441B8E}"/>
-              </a:ext>
-            </a:extLst>
-          </p:cNvPr>
-          <p:cNvPicPr>
-            <a:picLocks noChangeAspect="1"/>
-          </p:cNvPicPr>
-          <p:nvPr/>
-        </p:nvPicPr>
-        <p:blipFill>
-          <a:blip r:embed="rId2"/>
-          <a:srcRect b="11488"/>
-          <a:stretch>
-            <a:fillRect/>
-          </a:stretch>
-        </p:blipFill>
-        <p:spPr>
-          <a:xfrm>
-            <a:off x="597770" y="1530267"/>
-            <a:ext cx="4755157" cy="3699459"/>
-          </a:xfrm>
-          <a:prstGeom prst="rect">
-            <a:avLst/>
-          </a:prstGeom>
-        </p:spPr>
-      </p:pic>
-      <p:sp>
-        <p:nvSpPr>
-          <p:cNvPr id="12" name="Espaço Reservado para Número de Slide 11">
-            <a:extLst>
-              <a:ext uri="{FF2B5EF4-FFF2-40B4-BE49-F238E27FC236}">
-                <a16:creationId xmlns:a16="http://schemas.microsoft.com/office/drawing/2014/main" id="{DFFC5F0F-206E-664D-33EB-242CA8106F60}"/>
-              </a:ext>
-            </a:extLst>
-          </p:cNvPr>
-          <p:cNvSpPr>
-            <a:spLocks noGrp="1"/>
-          </p:cNvSpPr>
-          <p:nvPr>
-            <p:ph type="sldNum" sz="quarter" idx="12"/>
-          </p:nvPr>
-        </p:nvSpPr>
-        <p:spPr/>
-        <p:txBody>
-          <a:bodyPr/>
-          <a:lstStyle/>
-          <a:p>
-            <a:fld id="{8E274F5D-21DC-40EF-8DBA-AB9BB119E939}" type="slidenum">
-              <a:rPr lang="en-US" smtClean="0"/>
-              <a:t>11</a:t>
-            </a:fld>
-            <a:endParaRPr lang="en-US"/>
-          </a:p>
-        </p:txBody>
-      </p:sp>
-      <p:sp>
-        <p:nvSpPr>
-          <p:cNvPr id="3" name="CaixaDeTexto 2">
-            <a:extLst>
-              <a:ext uri="{FF2B5EF4-FFF2-40B4-BE49-F238E27FC236}">
-                <a16:creationId xmlns:a16="http://schemas.microsoft.com/office/drawing/2014/main" id="{7937894A-A613-F031-1DE3-835300EFC7E3}"/>
-              </a:ext>
-            </a:extLst>
-          </p:cNvPr>
-          <p:cNvSpPr txBox="1"/>
-          <p:nvPr/>
-        </p:nvSpPr>
-        <p:spPr>
-          <a:xfrm>
-            <a:off x="7631830" y="1960979"/>
-            <a:ext cx="3962400" cy="4524315"/>
-          </a:xfrm>
-          <a:prstGeom prst="rect">
-            <a:avLst/>
-          </a:prstGeom>
-          <a:noFill/>
-        </p:spPr>
-        <p:txBody>
-          <a:bodyPr wrap="square" rtlCol="0">
-            <a:spAutoFit/>
-          </a:bodyPr>
-          <a:lstStyle/>
-          <a:p>
-            <a:r>
-              <a:rPr lang="pt-BR" b="1" dirty="0"/>
-              <a:t>Intel® Turbo </a:t>
-            </a:r>
-            <a:r>
-              <a:rPr lang="pt-BR" b="1" dirty="0" err="1"/>
-              <a:t>Boost</a:t>
-            </a:r>
-            <a:r>
-              <a:rPr lang="pt-BR" b="1" dirty="0"/>
-              <a:t> 2.0: </a:t>
-            </a:r>
-            <a:r>
-              <a:rPr lang="en-US" dirty="0"/>
-              <a:t>Boosts all-core frequency </a:t>
-            </a:r>
-            <a:r>
-              <a:rPr lang="en-US" b="1" dirty="0"/>
-              <a:t>above base clock speed</a:t>
-            </a:r>
-            <a:r>
-              <a:rPr lang="en-US" dirty="0"/>
-              <a:t> up to specified maximum frequency during more intensive workloads; available if the CPU’s running under its power, current, and temperature limits.</a:t>
-            </a:r>
-          </a:p>
-          <a:p>
-            <a:endParaRPr lang="en-US" dirty="0"/>
-          </a:p>
-          <a:p>
-            <a:r>
-              <a:rPr lang="en-US" dirty="0"/>
-              <a:t>Logo, se Turbo Boost </a:t>
-            </a:r>
-            <a:r>
-              <a:rPr lang="en-US" dirty="0" err="1"/>
-              <a:t>está</a:t>
-            </a:r>
-            <a:r>
-              <a:rPr lang="en-US" dirty="0"/>
-              <a:t> </a:t>
-            </a:r>
-            <a:r>
-              <a:rPr lang="en-US" dirty="0" err="1"/>
-              <a:t>desabilitado</a:t>
-            </a:r>
-            <a:r>
-              <a:rPr lang="en-US" dirty="0"/>
-              <a:t>, </a:t>
-            </a:r>
-            <a:r>
-              <a:rPr lang="en-US" dirty="0" err="1"/>
-              <a:t>não</a:t>
-            </a:r>
-            <a:r>
-              <a:rPr lang="en-US" dirty="0"/>
-              <a:t> </a:t>
-            </a:r>
-            <a:r>
-              <a:rPr lang="en-US" dirty="0" err="1"/>
-              <a:t>passa</a:t>
-            </a:r>
-            <a:r>
-              <a:rPr lang="en-US" dirty="0"/>
-              <a:t> a </a:t>
-            </a:r>
-            <a:r>
-              <a:rPr lang="en-US" dirty="0" err="1"/>
-              <a:t>frequência</a:t>
-            </a:r>
-            <a:r>
-              <a:rPr lang="en-US" dirty="0"/>
-              <a:t> base. (É o que se </a:t>
-            </a:r>
-            <a:r>
-              <a:rPr lang="en-US" dirty="0" err="1"/>
-              <a:t>conclui</a:t>
-            </a:r>
-            <a:r>
-              <a:rPr lang="en-US" dirty="0"/>
-              <a:t> do </a:t>
-            </a:r>
-            <a:r>
-              <a:rPr lang="en-US" dirty="0" err="1"/>
-              <a:t>texto</a:t>
-            </a:r>
-            <a:r>
-              <a:rPr lang="en-US" dirty="0"/>
-              <a:t>)</a:t>
-            </a:r>
-          </a:p>
-          <a:p>
-            <a:endParaRPr lang="en-US" dirty="0"/>
-          </a:p>
-          <a:p>
-            <a:r>
-              <a:rPr lang="pt-BR" dirty="0"/>
-              <a:t>https://www.intel.com/content/www/us/en/gaming/resources/how-intel-technologies-boost-cpu-performance.html</a:t>
-            </a:r>
-          </a:p>
-        </p:txBody>
-      </p:sp>
-      <p:sp>
-        <p:nvSpPr>
-          <p:cNvPr id="6" name="CaixaDeTexto 5">
-            <a:extLst>
-              <a:ext uri="{FF2B5EF4-FFF2-40B4-BE49-F238E27FC236}">
-                <a16:creationId xmlns:a16="http://schemas.microsoft.com/office/drawing/2014/main" id="{7F1B9887-A9C3-D1BA-2628-CE4BD007EC0D}"/>
-              </a:ext>
-            </a:extLst>
-          </p:cNvPr>
-          <p:cNvSpPr txBox="1"/>
-          <p:nvPr/>
-        </p:nvSpPr>
-        <p:spPr>
-          <a:xfrm>
-            <a:off x="1046445" y="5883079"/>
-            <a:ext cx="6096000" cy="646331"/>
-          </a:xfrm>
-          <a:prstGeom prst="rect">
-            <a:avLst/>
-          </a:prstGeom>
-          <a:noFill/>
-        </p:spPr>
-        <p:txBody>
-          <a:bodyPr wrap="square">
-            <a:spAutoFit/>
-          </a:bodyPr>
-          <a:lstStyle/>
-          <a:p>
-            <a:r>
-              <a:rPr lang="pt-BR" dirty="0"/>
-              <a:t>https://chatgpt.com/share/68dda84e-a414-8001-a47a-7a82cbb285c7</a:t>
-            </a:r>
-          </a:p>
-        </p:txBody>
-      </p:sp>
-    </p:spTree>
-    <p:extLst>
-      <p:ext uri="{BB962C8B-B14F-4D97-AF65-F5344CB8AC3E}">
-        <p14:creationId xmlns:p14="http://schemas.microsoft.com/office/powerpoint/2010/main" val="203766769"/>
       </p:ext>
     </p:extLst>
   </p:cSld>
@@ -21004,7 +21534,13 @@
   <p:cSld>
     <p:spTree>
       <p:nvGrpSpPr>
-        <p:cNvPr id="1" name=""/>
+        <p:cNvPr id="1" name="">
+          <a:extLst>
+            <a:ext uri="{FF2B5EF4-FFF2-40B4-BE49-F238E27FC236}">
+              <a16:creationId xmlns:a16="http://schemas.microsoft.com/office/drawing/2014/main" id="{9C17F24A-AC4E-1386-AEB1-E0C5C49F17C9}"/>
+            </a:ext>
+          </a:extLst>
+        </p:cNvPr>
         <p:cNvGrpSpPr/>
         <p:nvPr/>
       </p:nvGrpSpPr>
@@ -21021,7 +21557,7 @@
           <p:cNvPr id="2" name="Título 1">
             <a:extLst>
               <a:ext uri="{FF2B5EF4-FFF2-40B4-BE49-F238E27FC236}">
-                <a16:creationId xmlns:a16="http://schemas.microsoft.com/office/drawing/2014/main" id="{164A5A54-B22E-BAE2-EBD5-CA8BDF60173A}"/>
+                <a16:creationId xmlns:a16="http://schemas.microsoft.com/office/drawing/2014/main" id="{A88C3032-6FB4-76E8-31B8-4FA0191B3DC1}"/>
               </a:ext>
             </a:extLst>
           </p:cNvPr>
@@ -21039,7 +21575,11 @@
           <a:p>
             <a:r>
               <a:rPr lang="en-US" dirty="0" err="1"/>
-              <a:t>Introdução</a:t>
+              <a:t>Ambiente</a:t>
+            </a:r>
+            <a:r>
+              <a:rPr lang="en-US" dirty="0"/>
+              <a:t> de Teste</a:t>
             </a:r>
             <a:endParaRPr lang="pt-BR" dirty="0"/>
           </a:p>
@@ -21050,7 +21590,7 @@
           <p:cNvPr id="3" name="Espaço Reservado para Conteúdo 2">
             <a:extLst>
               <a:ext uri="{FF2B5EF4-FFF2-40B4-BE49-F238E27FC236}">
-                <a16:creationId xmlns:a16="http://schemas.microsoft.com/office/drawing/2014/main" id="{E3CB3356-A408-78BD-432D-C9EAFEA17778}"/>
+                <a16:creationId xmlns:a16="http://schemas.microsoft.com/office/drawing/2014/main" id="{1C980AE3-41E4-E840-731F-50FBC6A78096}"/>
               </a:ext>
             </a:extLst>
           </p:cNvPr>
@@ -21064,404 +21604,69 @@
         <p:spPr/>
         <p:txBody>
           <a:bodyPr>
-            <a:normAutofit fontScale="32500" lnSpcReduction="20000"/>
+            <a:normAutofit/>
           </a:bodyPr>
           <a:lstStyle/>
           <a:p>
             <a:r>
-              <a:rPr lang="pt-BR" dirty="0"/>
-              <a:t>Processador utilizado Intel i7-14700T</a:t>
+              <a:rPr lang="en-US" dirty="0"/>
+              <a:t>SO Ubuntu 24.04</a:t>
+            </a:r>
+          </a:p>
+          <a:p>
+            <a:r>
+              <a:rPr lang="en-US" dirty="0" err="1"/>
+              <a:t>Jupyter</a:t>
+            </a:r>
+            <a:r>
+              <a:rPr lang="en-US" dirty="0"/>
+              <a:t> Notebook</a:t>
             </a:r>
           </a:p>
           <a:p>
             <a:pPr lvl="1"/>
             <a:r>
-              <a:rPr lang="pt-BR" b="1" dirty="0"/>
-              <a:t>Característica</a:t>
-            </a:r>
-            <a:r>
-              <a:rPr lang="pt-BR" dirty="0"/>
-              <a:t>: A série T é uma </a:t>
-            </a:r>
+              <a:rPr lang="en-US" dirty="0"/>
+              <a:t>Notebooks: </a:t>
+            </a:r>
+            <a:r>
+              <a:rPr lang="en-US" dirty="0">
+                <a:hlinkClick r:id="rId2"/>
+              </a:rPr>
+              <a:t>https://github.com/jlggross/TF-cmp223/tree/main/02-Parcial</a:t>
+            </a:r>
+            <a:endParaRPr lang="en-US" dirty="0"/>
+          </a:p>
+          <a:p>
             <a:r>
               <a:rPr lang="en-US" dirty="0" err="1"/>
-              <a:t>variação</a:t>
-            </a:r>
-            <a:r>
-              <a:rPr lang="en-US" dirty="0"/>
-              <a:t> de </a:t>
-            </a:r>
+              <a:t>Aplicação</a:t>
+            </a:r>
+            <a:endParaRPr lang="en-US" dirty="0"/>
+          </a:p>
+          <a:p>
+            <a:pPr lvl="1"/>
+            <a:r>
+              <a:rPr lang="en-US" dirty="0"/>
+              <a:t>Scripts Python</a:t>
+            </a:r>
+          </a:p>
+          <a:p>
+            <a:pPr lvl="1"/>
             <a:r>
               <a:rPr lang="en-US" dirty="0" err="1"/>
-              <a:t>baixa</a:t>
-            </a:r>
-            <a:r>
-              <a:rPr lang="en-US" dirty="0"/>
-              <a:t> </a:t>
-            </a:r>
-            <a:r>
-              <a:rPr lang="en-US" dirty="0" err="1"/>
-              <a:t>potência</a:t>
-            </a:r>
-            <a:r>
-              <a:rPr lang="en-US" dirty="0"/>
-              <a:t>, </a:t>
-            </a:r>
-            <a:r>
-              <a:rPr lang="en-US" dirty="0" err="1"/>
-              <a:t>otimizada</a:t>
-            </a:r>
-            <a:r>
-              <a:rPr lang="en-US" dirty="0"/>
-              <a:t> para </a:t>
-            </a:r>
-            <a:r>
-              <a:rPr lang="en-US" dirty="0" err="1"/>
-              <a:t>eficiência</a:t>
-            </a:r>
-            <a:r>
-              <a:rPr lang="en-US" dirty="0"/>
-              <a:t> </a:t>
-            </a:r>
-            <a:r>
-              <a:rPr lang="en-US" dirty="0" err="1"/>
-              <a:t>energética</a:t>
-            </a:r>
-            <a:r>
-              <a:rPr lang="en-US" dirty="0"/>
-              <a:t>.</a:t>
-            </a:r>
-          </a:p>
-          <a:p>
-            <a:pPr lvl="1"/>
-            <a:r>
-              <a:rPr lang="en-US" b="1" dirty="0" err="1"/>
-              <a:t>Problema</a:t>
-            </a:r>
-            <a:r>
-              <a:rPr lang="en-US" dirty="0"/>
-              <a:t>: </a:t>
-            </a:r>
-            <a:r>
-              <a:rPr lang="en-US" dirty="0">
-                <a:highlight>
-                  <a:srgbClr val="FFFF00"/>
-                </a:highlight>
-              </a:rPr>
-              <a:t>When Turbo Boost is disabled, and the CPU is in a low-power mode (like “idle” or certain drivers), the Linux kernel may report the base frequency of the E-cores only, not the P-cores.</a:t>
-            </a:r>
-            <a:endParaRPr lang="pt-BR" dirty="0">
-              <a:highlight>
-                <a:srgbClr val="FFFF00"/>
-              </a:highlight>
-            </a:endParaRPr>
-          </a:p>
-          <a:p>
-            <a:r>
-              <a:rPr lang="pt-BR" strike="sngStrike" dirty="0">
-                <a:solidFill>
-                  <a:srgbClr val="FF0000"/>
-                </a:solidFill>
-              </a:rPr>
-              <a:t>Turbo </a:t>
-            </a:r>
-            <a:r>
-              <a:rPr lang="pt-BR" strike="sngStrike" dirty="0" err="1">
-                <a:solidFill>
-                  <a:srgbClr val="FF0000"/>
-                </a:solidFill>
-              </a:rPr>
-              <a:t>Boost</a:t>
-            </a:r>
-            <a:r>
-              <a:rPr lang="pt-BR" dirty="0"/>
-              <a:t> : Infelizmente, com Turbo </a:t>
-            </a:r>
-            <a:r>
-              <a:rPr lang="pt-BR" dirty="0" err="1"/>
-              <a:t>Boost</a:t>
-            </a:r>
-            <a:r>
-              <a:rPr lang="pt-BR" dirty="0"/>
-              <a:t> desativado, </a:t>
-            </a:r>
-          </a:p>
-          <a:p>
-            <a:endParaRPr lang="pt-BR" dirty="0"/>
-          </a:p>
-          <a:p>
-            <a:r>
-              <a:rPr lang="en-US" b="1" dirty="0"/>
-              <a:t>🔹 2. Why </a:t>
-            </a:r>
-            <a:r>
-              <a:rPr lang="en-US" b="1" dirty="0" err="1"/>
-              <a:t>scaling_max_freq</a:t>
-            </a:r>
-            <a:r>
-              <a:rPr lang="en-US" b="1" dirty="0"/>
-              <a:t> = 1.3 GHz</a:t>
-            </a:r>
-          </a:p>
-          <a:p>
-            <a:r>
-              <a:rPr lang="en-US" dirty="0"/>
-              <a:t>Several reasons:</a:t>
-            </a:r>
-          </a:p>
-          <a:p>
-            <a:r>
-              <a:rPr lang="en-US" b="1" dirty="0"/>
-              <a:t>Driver interaction (</a:t>
-            </a:r>
-            <a:r>
-              <a:rPr lang="en-US" b="1" dirty="0" err="1"/>
-              <a:t>intel_pstate</a:t>
-            </a:r>
-            <a:r>
-              <a:rPr lang="en-US" b="1" dirty="0"/>
-              <a:t>)</a:t>
-            </a:r>
-            <a:endParaRPr lang="en-US" dirty="0"/>
-          </a:p>
-          <a:p>
-            <a:pPr lvl="1"/>
-            <a:r>
-              <a:rPr lang="en-US" dirty="0"/>
-              <a:t>On hybrid CPUs, Linux sometimes exposes </a:t>
-            </a:r>
-            <a:r>
-              <a:rPr lang="en-US" b="1" dirty="0"/>
-              <a:t>only the E-core cluster frequencies</a:t>
-            </a:r>
-            <a:r>
-              <a:rPr lang="en-US" dirty="0"/>
-              <a:t> via /sys/devices/system/</a:t>
-            </a:r>
-            <a:r>
-              <a:rPr lang="en-US" dirty="0" err="1"/>
-              <a:t>cpu</a:t>
-            </a:r>
-            <a:r>
-              <a:rPr lang="en-US" dirty="0"/>
-              <a:t>/</a:t>
-            </a:r>
-            <a:r>
-              <a:rPr lang="en-US" dirty="0" err="1"/>
-              <a:t>cpu</a:t>
-            </a:r>
-            <a:r>
-              <a:rPr lang="en-US" dirty="0"/>
-              <a:t>*/</a:t>
-            </a:r>
-            <a:r>
-              <a:rPr lang="en-US" dirty="0" err="1"/>
-              <a:t>cpufreq</a:t>
-            </a:r>
-            <a:r>
-              <a:rPr lang="en-US" dirty="0"/>
-              <a:t>/</a:t>
-            </a:r>
-            <a:r>
-              <a:rPr lang="en-US" dirty="0" err="1"/>
-              <a:t>scaling_max_freq</a:t>
-            </a:r>
-            <a:r>
-              <a:rPr lang="en-US" dirty="0"/>
-              <a:t>.</a:t>
-            </a:r>
-          </a:p>
-          <a:p>
-            <a:pPr lvl="1"/>
-            <a:r>
-              <a:rPr lang="en-US" dirty="0"/>
-              <a:t>The P-cores may be handled differently and not appear in </a:t>
-            </a:r>
-            <a:r>
-              <a:rPr lang="en-US" dirty="0" err="1"/>
-              <a:t>cpufreq</a:t>
-            </a:r>
-            <a:r>
-              <a:rPr lang="en-US" dirty="0"/>
-              <a:t> the same way, especially if Turbo is disabled.</a:t>
-            </a:r>
-          </a:p>
-          <a:p>
-            <a:r>
-              <a:rPr lang="en-US" b="1" dirty="0"/>
-              <a:t>Low-power T-series CPU</a:t>
-            </a:r>
-            <a:endParaRPr lang="en-US" dirty="0"/>
-          </a:p>
-          <a:p>
-            <a:pPr lvl="1"/>
-            <a:r>
-              <a:rPr lang="en-US" dirty="0"/>
-              <a:t>i7-14700T base clocks are ~1.3 GHz (E-cores) and ~3.2 GHz (P-cores).</a:t>
-            </a:r>
-          </a:p>
-          <a:p>
-            <a:pPr lvl="1"/>
-            <a:r>
-              <a:rPr lang="en-US" dirty="0"/>
-              <a:t>Because Turbo is off and the performance governor is applied, </a:t>
-            </a:r>
-            <a:r>
-              <a:rPr lang="en-US" dirty="0" err="1"/>
-              <a:t>intel_pstate</a:t>
-            </a:r>
-            <a:r>
-              <a:rPr lang="en-US" dirty="0"/>
-              <a:t> might </a:t>
-            </a:r>
-            <a:r>
-              <a:rPr lang="en-US" b="1" dirty="0"/>
-              <a:t>limit visible frequency to E-cores</a:t>
-            </a:r>
-            <a:r>
-              <a:rPr lang="en-US" dirty="0"/>
-              <a:t> to respect power limits.</a:t>
-            </a:r>
-          </a:p>
-          <a:p>
-            <a:r>
-              <a:rPr lang="en-US" b="1" dirty="0" err="1"/>
-              <a:t>base_frequency</a:t>
-            </a:r>
-            <a:r>
-              <a:rPr lang="en-US" b="1" dirty="0"/>
-              <a:t> reflects the guaranteed minimum</a:t>
-            </a:r>
-            <a:endParaRPr lang="en-US" dirty="0"/>
-          </a:p>
-          <a:p>
-            <a:pPr lvl="1"/>
-            <a:r>
-              <a:rPr lang="en-US" dirty="0"/>
-              <a:t>Intel’s “base frequency” in </a:t>
-            </a:r>
-            <a:r>
-              <a:rPr lang="en-US" dirty="0" err="1"/>
-              <a:t>sysfs</a:t>
-            </a:r>
-            <a:r>
-              <a:rPr lang="en-US" dirty="0"/>
-              <a:t> often corresponds to </a:t>
-            </a:r>
-            <a:r>
-              <a:rPr lang="en-US" b="1" dirty="0"/>
-              <a:t>the lowest cluster frequency that can be reliably reported</a:t>
-            </a:r>
-            <a:r>
-              <a:rPr lang="en-US" dirty="0"/>
-              <a:t>.</a:t>
-            </a:r>
-          </a:p>
-          <a:p>
-            <a:br>
-              <a:rPr lang="en-US" dirty="0"/>
-            </a:br>
-            <a:endParaRPr lang="en-US" dirty="0"/>
-          </a:p>
-          <a:p>
-            <a:r>
-              <a:rPr lang="en-US" b="1" dirty="0"/>
-              <a:t>🔹 3. What really happens under load</a:t>
-            </a:r>
-          </a:p>
-          <a:p>
-            <a:r>
-              <a:rPr lang="en-US" dirty="0"/>
-              <a:t>Even if </a:t>
-            </a:r>
-            <a:r>
-              <a:rPr lang="en-US" dirty="0" err="1"/>
-              <a:t>scaling_max_freq</a:t>
-            </a:r>
-            <a:r>
-              <a:rPr lang="en-US" dirty="0"/>
-              <a:t> = 1.3 GHz shows in </a:t>
-            </a:r>
-            <a:r>
-              <a:rPr lang="en-US" dirty="0" err="1"/>
-              <a:t>sysfs</a:t>
-            </a:r>
-            <a:r>
-              <a:rPr lang="en-US" dirty="0"/>
-              <a:t>:</a:t>
-            </a:r>
-          </a:p>
-          <a:p>
-            <a:r>
-              <a:rPr lang="en-US" dirty="0"/>
-              <a:t>P-cores may </a:t>
-            </a:r>
-            <a:r>
-              <a:rPr lang="en-US" b="1" dirty="0"/>
-              <a:t>still boost up</a:t>
-            </a:r>
-            <a:r>
-              <a:rPr lang="en-US" dirty="0"/>
-              <a:t> internally if Turbo were enabled.</a:t>
-            </a:r>
-          </a:p>
-          <a:p>
-            <a:r>
-              <a:rPr lang="en-US" dirty="0"/>
-              <a:t>With Turbo disabled, your CPU </a:t>
-            </a:r>
-            <a:r>
-              <a:rPr lang="en-US" b="1" dirty="0"/>
-              <a:t>is effectively capped</a:t>
-            </a:r>
-            <a:r>
-              <a:rPr lang="en-US" dirty="0"/>
-              <a:t>.</a:t>
-            </a:r>
-          </a:p>
-          <a:p>
-            <a:r>
-              <a:rPr lang="en-US" dirty="0"/>
-              <a:t>Linux’s </a:t>
-            </a:r>
-            <a:r>
-              <a:rPr lang="en-US" dirty="0" err="1"/>
-              <a:t>cpupower</a:t>
-            </a:r>
-            <a:r>
-              <a:rPr lang="en-US" dirty="0"/>
-              <a:t> or </a:t>
-            </a:r>
-            <a:r>
-              <a:rPr lang="en-US" dirty="0" err="1"/>
-              <a:t>lscpu</a:t>
-            </a:r>
-            <a:r>
-              <a:rPr lang="en-US" dirty="0"/>
-              <a:t> may report higher “max MHz” (like 3.2 GHz for P-cores) because it reads the CPU’s </a:t>
-            </a:r>
-            <a:r>
-              <a:rPr lang="en-US" b="1" dirty="0"/>
-              <a:t>raw hardware registers</a:t>
-            </a:r>
-            <a:r>
-              <a:rPr lang="en-US" dirty="0"/>
-              <a:t>, not the driver-exposed </a:t>
-            </a:r>
-            <a:r>
-              <a:rPr lang="en-US" dirty="0" err="1"/>
-              <a:t>cpufreq</a:t>
-            </a:r>
-            <a:r>
-              <a:rPr lang="en-US" dirty="0"/>
-              <a:t> limits.</a:t>
-            </a:r>
-          </a:p>
-          <a:p>
-            <a:endParaRPr lang="pt-BR" dirty="0"/>
-          </a:p>
-          <a:p>
-            <a:endParaRPr lang="pt-BR" dirty="0"/>
+              <a:t>Comandos</a:t>
+            </a:r>
+            <a:r>
+              <a:rPr lang="en-US" dirty="0"/>
+              <a:t> de Bash Linux</a:t>
+            </a:r>
+          </a:p>
+          <a:p>
+            <a:endParaRPr lang="en-US" b="1" dirty="0"/>
+          </a:p>
+          <a:p>
+            <a:endParaRPr lang="pt-BR" b="1" dirty="0"/>
           </a:p>
         </p:txBody>
       </p:sp>
@@ -21470,7 +21675,7 @@
           <p:cNvPr id="4" name="Espaço Reservado para Número de Slide 3">
             <a:extLst>
               <a:ext uri="{FF2B5EF4-FFF2-40B4-BE49-F238E27FC236}">
-                <a16:creationId xmlns:a16="http://schemas.microsoft.com/office/drawing/2014/main" id="{40BFDCD6-A8E7-0731-F6F3-1BF7E277C084}"/>
+                <a16:creationId xmlns:a16="http://schemas.microsoft.com/office/drawing/2014/main" id="{C0CB5A51-A502-A1EC-220F-F4C813FAD161}"/>
               </a:ext>
             </a:extLst>
           </p:cNvPr>
@@ -21497,7 +21702,7 @@
     </p:spTree>
     <p:extLst>
       <p:ext uri="{BB962C8B-B14F-4D97-AF65-F5344CB8AC3E}">
-        <p14:creationId xmlns:p14="http://schemas.microsoft.com/office/powerpoint/2010/main" val="2496614450"/>
+        <p14:creationId xmlns:p14="http://schemas.microsoft.com/office/powerpoint/2010/main" val="4184877138"/>
       </p:ext>
     </p:extLst>
   </p:cSld>
@@ -21515,7 +21720,7 @@
         <p:cNvPr id="1" name="">
           <a:extLst>
             <a:ext uri="{FF2B5EF4-FFF2-40B4-BE49-F238E27FC236}">
-              <a16:creationId xmlns:a16="http://schemas.microsoft.com/office/drawing/2014/main" id="{DB11668E-0075-013A-16DE-8AC4320CA69E}"/>
+              <a16:creationId xmlns:a16="http://schemas.microsoft.com/office/drawing/2014/main" id="{13D6DC89-5BE0-4C3B-A30A-2E716850BFE3}"/>
             </a:ext>
           </a:extLst>
         </p:cNvPr>
@@ -21535,7 +21740,7 @@
           <p:cNvPr id="2" name="Título 1">
             <a:extLst>
               <a:ext uri="{FF2B5EF4-FFF2-40B4-BE49-F238E27FC236}">
-                <a16:creationId xmlns:a16="http://schemas.microsoft.com/office/drawing/2014/main" id="{67550447-B55F-B687-0291-F4DAA1DB708E}"/>
+                <a16:creationId xmlns:a16="http://schemas.microsoft.com/office/drawing/2014/main" id="{BD3CB7E4-95D0-9D5A-4804-FB8B31E44499}"/>
               </a:ext>
             </a:extLst>
           </p:cNvPr>
@@ -21552,8 +21757,20 @@
           <a:lstStyle/>
           <a:p>
             <a:r>
-              <a:rPr lang="en-US" dirty="0"/>
-              <a:t>Turbo Boost</a:t>
+              <a:rPr lang="en-US" dirty="0" err="1"/>
+              <a:t>Execução</a:t>
+            </a:r>
+            <a:r>
+              <a:rPr lang="en-US" dirty="0"/>
+              <a:t> de Testes e </a:t>
+            </a:r>
+            <a:r>
+              <a:rPr lang="en-US" dirty="0" err="1"/>
+              <a:t>Geração</a:t>
+            </a:r>
+            <a:r>
+              <a:rPr lang="en-US" dirty="0"/>
+              <a:t> de Dados</a:t>
             </a:r>
             <a:endParaRPr lang="pt-BR" dirty="0"/>
           </a:p>
@@ -21564,7 +21781,7 @@
           <p:cNvPr id="3" name="Espaço Reservado para Conteúdo 2">
             <a:extLst>
               <a:ext uri="{FF2B5EF4-FFF2-40B4-BE49-F238E27FC236}">
-                <a16:creationId xmlns:a16="http://schemas.microsoft.com/office/drawing/2014/main" id="{4AAF4232-2E11-F2F3-791D-DA4834D46694}"/>
+                <a16:creationId xmlns:a16="http://schemas.microsoft.com/office/drawing/2014/main" id="{AE568FDB-26A3-830A-6EA8-6A40013C11E5}"/>
               </a:ext>
             </a:extLst>
           </p:cNvPr>
@@ -21583,83 +21800,25 @@
           <a:lstStyle/>
           <a:p>
             <a:r>
+              <a:rPr lang="en-US" dirty="0"/>
+              <a:t>Etapa 1:  </a:t>
+            </a:r>
+            <a:r>
               <a:rPr lang="en-US" dirty="0" err="1"/>
-              <a:t>Observou</a:t>
-            </a:r>
-            <a:r>
-              <a:rPr lang="en-US" dirty="0"/>
-              <a:t>-se que com Turbo Boost </a:t>
-            </a:r>
-            <a:r>
-              <a:rPr lang="en-US" b="1" dirty="0" err="1"/>
-              <a:t>desabilitado</a:t>
-            </a:r>
-            <a:r>
-              <a:rPr lang="en-US" dirty="0"/>
-              <a:t> a </a:t>
+              <a:t>Definição</a:t>
+            </a:r>
+            <a:r>
+              <a:rPr lang="en-US" dirty="0"/>
+              <a:t> dos </a:t>
             </a:r>
             <a:r>
               <a:rPr lang="en-US" dirty="0" err="1"/>
-              <a:t>frequência</a:t>
-            </a:r>
-            <a:r>
-              <a:rPr lang="en-US" dirty="0"/>
-              <a:t> </a:t>
-            </a:r>
-            <a:r>
-              <a:rPr lang="en-US" dirty="0" err="1"/>
-              <a:t>máxima</a:t>
-            </a:r>
-            <a:r>
-              <a:rPr lang="en-US" dirty="0"/>
-              <a:t> de </a:t>
-            </a:r>
-            <a:r>
-              <a:rPr lang="en-US" dirty="0" err="1"/>
-              <a:t>operação</a:t>
-            </a:r>
-            <a:r>
-              <a:rPr lang="en-US" dirty="0"/>
-              <a:t> de </a:t>
-            </a:r>
-            <a:r>
-              <a:rPr lang="en-US" dirty="0" err="1"/>
-              <a:t>núcleos</a:t>
-            </a:r>
-            <a:r>
-              <a:rPr lang="en-US" dirty="0"/>
-              <a:t> p-cores e e-cores </a:t>
-            </a:r>
-            <a:r>
-              <a:rPr lang="en-US" dirty="0" err="1"/>
-              <a:t>fica</a:t>
-            </a:r>
-            <a:r>
-              <a:rPr lang="en-US" dirty="0"/>
-              <a:t> </a:t>
-            </a:r>
-            <a:r>
-              <a:rPr lang="en-US" dirty="0" err="1"/>
-              <a:t>limitada</a:t>
-            </a:r>
-            <a:r>
-              <a:rPr lang="en-US" dirty="0"/>
-              <a:t> à </a:t>
-            </a:r>
-            <a:r>
-              <a:rPr lang="en-US" b="1" dirty="0" err="1"/>
-              <a:t>frequência</a:t>
-            </a:r>
-            <a:r>
-              <a:rPr lang="en-US" b="1" dirty="0"/>
-              <a:t> base</a:t>
-            </a:r>
-          </a:p>
-          <a:p>
-            <a:endParaRPr lang="en-US" b="1" dirty="0"/>
-          </a:p>
-          <a:p>
-            <a:endParaRPr lang="pt-BR" b="1" dirty="0"/>
+              <a:t>experimentos</a:t>
+            </a:r>
+            <a:endParaRPr lang="en-US" dirty="0"/>
+          </a:p>
+          <a:p>
+            <a:endParaRPr lang="pt-BR" dirty="0"/>
           </a:p>
         </p:txBody>
       </p:sp>
@@ -21668,7 +21827,7 @@
           <p:cNvPr id="4" name="Espaço Reservado para Número de Slide 3">
             <a:extLst>
               <a:ext uri="{FF2B5EF4-FFF2-40B4-BE49-F238E27FC236}">
-                <a16:creationId xmlns:a16="http://schemas.microsoft.com/office/drawing/2014/main" id="{6B413FFD-B1A9-257B-7C4D-C8ACC2B23E6C}"/>
+                <a16:creationId xmlns:a16="http://schemas.microsoft.com/office/drawing/2014/main" id="{D6C51AB5-30A3-153E-4A96-208C489326B9}"/>
               </a:ext>
             </a:extLst>
           </p:cNvPr>
@@ -21697,7 +21856,7 @@
           <p:cNvPr id="6" name="Imagem 5">
             <a:extLst>
               <a:ext uri="{FF2B5EF4-FFF2-40B4-BE49-F238E27FC236}">
-                <a16:creationId xmlns:a16="http://schemas.microsoft.com/office/drawing/2014/main" id="{BA3D6B9A-3600-017A-0732-7A7B6ACB3555}"/>
+                <a16:creationId xmlns:a16="http://schemas.microsoft.com/office/drawing/2014/main" id="{C00DAAED-7FD5-A15F-FF31-A70B50056F1B}"/>
               </a:ext>
             </a:extLst>
           </p:cNvPr>
@@ -21714,53 +21873,18 @@
         </p:blipFill>
         <p:spPr>
           <a:xfrm>
-            <a:off x="838201" y="3429001"/>
-            <a:ext cx="5835316" cy="2295652"/>
+            <a:off x="838200" y="2699614"/>
+            <a:ext cx="11086748" cy="3358286"/>
           </a:xfrm>
           <a:prstGeom prst="rect">
             <a:avLst/>
           </a:prstGeom>
         </p:spPr>
       </p:pic>
-      <p:sp>
-        <p:nvSpPr>
-          <p:cNvPr id="9" name="CaixaDeTexto 8">
-            <a:extLst>
-              <a:ext uri="{FF2B5EF4-FFF2-40B4-BE49-F238E27FC236}">
-                <a16:creationId xmlns:a16="http://schemas.microsoft.com/office/drawing/2014/main" id="{0DA22ACA-E9F2-8A62-4773-51A865F3B5F0}"/>
-              </a:ext>
-            </a:extLst>
-          </p:cNvPr>
-          <p:cNvSpPr txBox="1"/>
-          <p:nvPr/>
-        </p:nvSpPr>
-        <p:spPr>
-          <a:xfrm>
-            <a:off x="838199" y="5904040"/>
-            <a:ext cx="9930063" cy="646331"/>
-          </a:xfrm>
-          <a:prstGeom prst="rect">
-            <a:avLst/>
-          </a:prstGeom>
-          <a:noFill/>
-        </p:spPr>
-        <p:txBody>
-          <a:bodyPr wrap="square">
-            <a:spAutoFit/>
-          </a:bodyPr>
-          <a:lstStyle/>
-          <a:p>
-            <a:r>
-              <a:rPr lang="pt-BR" dirty="0"/>
-              <a:t>https://www.intel.com.br/content/www/br/pt/products/sku/236794/intel-core-i7-processor-14700t-33m-cache-up-to-5-20-ghz/specifications.html</a:t>
-            </a:r>
-          </a:p>
-        </p:txBody>
-      </p:sp>
     </p:spTree>
     <p:extLst>
       <p:ext uri="{BB962C8B-B14F-4D97-AF65-F5344CB8AC3E}">
-        <p14:creationId xmlns:p14="http://schemas.microsoft.com/office/powerpoint/2010/main" val="3072866178"/>
+        <p14:creationId xmlns:p14="http://schemas.microsoft.com/office/powerpoint/2010/main" val="2181929786"/>
       </p:ext>
     </p:extLst>
   </p:cSld>
@@ -21775,7 +21899,13 @@
   <p:cSld>
     <p:spTree>
       <p:nvGrpSpPr>
-        <p:cNvPr id="1" name=""/>
+        <p:cNvPr id="1" name="">
+          <a:extLst>
+            <a:ext uri="{FF2B5EF4-FFF2-40B4-BE49-F238E27FC236}">
+              <a16:creationId xmlns:a16="http://schemas.microsoft.com/office/drawing/2014/main" id="{998C17D2-B322-20B6-F368-B701B8D91457}"/>
+            </a:ext>
+          </a:extLst>
+        </p:cNvPr>
         <p:cNvGrpSpPr/>
         <p:nvPr/>
       </p:nvGrpSpPr>
@@ -21792,7 +21922,7 @@
           <p:cNvPr id="2" name="Título 1">
             <a:extLst>
               <a:ext uri="{FF2B5EF4-FFF2-40B4-BE49-F238E27FC236}">
-                <a16:creationId xmlns:a16="http://schemas.microsoft.com/office/drawing/2014/main" id="{5C9FA4FB-089C-FD1B-6CC8-5E0BE55FD535}"/>
+                <a16:creationId xmlns:a16="http://schemas.microsoft.com/office/drawing/2014/main" id="{30D94508-DC6D-4195-6114-F3C4E3C2D9E0}"/>
               </a:ext>
             </a:extLst>
           </p:cNvPr>
@@ -21810,7 +21940,19 @@
           <a:p>
             <a:r>
               <a:rPr lang="en-US" dirty="0" err="1"/>
-              <a:t>Ferramental</a:t>
+              <a:t>Execução</a:t>
+            </a:r>
+            <a:r>
+              <a:rPr lang="en-US" dirty="0"/>
+              <a:t> de Testes e </a:t>
+            </a:r>
+            <a:r>
+              <a:rPr lang="en-US" dirty="0" err="1"/>
+              <a:t>Geração</a:t>
+            </a:r>
+            <a:r>
+              <a:rPr lang="en-US" dirty="0"/>
+              <a:t> de Dados</a:t>
             </a:r>
             <a:endParaRPr lang="pt-BR" dirty="0"/>
           </a:p>
@@ -21821,7 +21963,7 @@
           <p:cNvPr id="3" name="Espaço Reservado para Conteúdo 2">
             <a:extLst>
               <a:ext uri="{FF2B5EF4-FFF2-40B4-BE49-F238E27FC236}">
-                <a16:creationId xmlns:a16="http://schemas.microsoft.com/office/drawing/2014/main" id="{E9F06CCF-58A9-BED0-4929-ABCD164D3126}"/>
+                <a16:creationId xmlns:a16="http://schemas.microsoft.com/office/drawing/2014/main" id="{9ECA5A31-9553-43DA-0723-6BCAC709BA10}"/>
               </a:ext>
             </a:extLst>
           </p:cNvPr>
@@ -21835,99 +21977,75 @@
         <p:spPr/>
         <p:txBody>
           <a:bodyPr>
-            <a:normAutofit fontScale="92500" lnSpcReduction="20000"/>
+            <a:normAutofit/>
           </a:bodyPr>
           <a:lstStyle/>
           <a:p>
             <a:r>
               <a:rPr lang="en-US" dirty="0"/>
-              <a:t>GIT</a:t>
-            </a:r>
-          </a:p>
-          <a:p>
-            <a:r>
-              <a:rPr lang="en-US" dirty="0"/>
-              <a:t>Python 3.13.7</a:t>
-            </a:r>
+              <a:t>Etapa 2:  </a:t>
+            </a:r>
+            <a:r>
+              <a:rPr lang="en-US" dirty="0" err="1"/>
+              <a:t>Execução</a:t>
+            </a:r>
+            <a:r>
+              <a:rPr lang="en-US" dirty="0"/>
+              <a:t> </a:t>
+            </a:r>
+            <a:r>
+              <a:rPr lang="en-US" dirty="0" err="1"/>
+              <a:t>alternada</a:t>
+            </a:r>
+            <a:endParaRPr lang="en-US" dirty="0"/>
           </a:p>
           <a:p>
             <a:pPr lvl="1"/>
             <a:r>
               <a:rPr lang="en-US" dirty="0"/>
-              <a:t>https://www.python.org/downloads/</a:t>
-            </a:r>
-          </a:p>
-          <a:p>
+              <a:t>Para </a:t>
+            </a:r>
             <a:r>
               <a:rPr lang="en-US" dirty="0" err="1"/>
-              <a:t>Jupyter</a:t>
-            </a:r>
-            <a:r>
-              <a:rPr lang="en-US" dirty="0"/>
-              <a:t> Lab</a:t>
-            </a:r>
-          </a:p>
-          <a:p>
-            <a:pPr lvl="1"/>
-            <a:r>
-              <a:rPr lang="pt-BR" dirty="0">
-                <a:hlinkClick r:id="rId2"/>
-              </a:rPr>
-              <a:t>https://jupyter.org/install</a:t>
-            </a:r>
+              <a:t>cada</a:t>
+            </a:r>
+            <a:r>
+              <a:rPr lang="en-US" dirty="0"/>
+              <a:t> CPU_SET </a:t>
+            </a:r>
+            <a:r>
+              <a:rPr lang="en-US" dirty="0" err="1"/>
+              <a:t>uma</a:t>
+            </a:r>
+            <a:r>
+              <a:rPr lang="en-US" dirty="0"/>
+              <a:t> </a:t>
+            </a:r>
+            <a:r>
+              <a:rPr lang="en-US" dirty="0" err="1"/>
+              <a:t>execução</a:t>
+            </a:r>
+            <a:r>
+              <a:rPr lang="en-US" dirty="0"/>
+              <a:t> </a:t>
+            </a:r>
+            <a:r>
+              <a:rPr lang="en-US" dirty="0" err="1"/>
+              <a:t>por</a:t>
+            </a:r>
+            <a:r>
+              <a:rPr lang="en-US" dirty="0"/>
+              <a:t> </a:t>
+            </a:r>
+            <a:r>
+              <a:rPr lang="en-US" dirty="0" err="1"/>
+              <a:t>vez</a:t>
+            </a:r>
+            <a:endParaRPr lang="en-US" dirty="0"/>
+          </a:p>
+          <a:p>
             <a:endParaRPr lang="pt-BR" dirty="0"/>
           </a:p>
-          <a:p>
-            <a:r>
-              <a:rPr lang="pt-BR" dirty="0"/>
-              <a:t>Bibliotecas Python</a:t>
-            </a:r>
-          </a:p>
-          <a:p>
-            <a:pPr lvl="1"/>
-            <a:r>
-              <a:rPr lang="pt-BR" dirty="0" err="1"/>
-              <a:t>Dask</a:t>
-            </a:r>
-            <a:endParaRPr lang="pt-BR" dirty="0"/>
-          </a:p>
-          <a:p>
-            <a:pPr lvl="1"/>
-            <a:r>
-              <a:rPr lang="pt-BR" dirty="0" err="1"/>
-              <a:t>Numpy</a:t>
-            </a:r>
-            <a:endParaRPr lang="pt-BR" dirty="0"/>
-          </a:p>
-          <a:p>
-            <a:pPr lvl="1"/>
-            <a:r>
-              <a:rPr lang="pt-BR" dirty="0" err="1"/>
-              <a:t>PyCryptodome</a:t>
-            </a:r>
-            <a:endParaRPr lang="pt-BR" dirty="0"/>
-          </a:p>
-          <a:p>
-            <a:pPr lvl="1"/>
-            <a:r>
-              <a:rPr lang="pt-BR" dirty="0" err="1"/>
-              <a:t>Statistics</a:t>
-            </a:r>
-            <a:endParaRPr lang="pt-BR" dirty="0"/>
-          </a:p>
-          <a:p>
-            <a:r>
-              <a:rPr lang="pt-BR" dirty="0"/>
-              <a:t>Outros (possíveis / em análise)</a:t>
-            </a:r>
-          </a:p>
-          <a:p>
-            <a:pPr lvl="1"/>
-            <a:r>
-              <a:rPr lang="pt-BR" dirty="0"/>
-              <a:t>Docker</a:t>
-            </a:r>
-          </a:p>
         </p:txBody>
       </p:sp>
       <p:sp>
@@ -21935,7 +22053,7 @@
           <p:cNvPr id="4" name="Espaço Reservado para Número de Slide 3">
             <a:extLst>
               <a:ext uri="{FF2B5EF4-FFF2-40B4-BE49-F238E27FC236}">
-                <a16:creationId xmlns:a16="http://schemas.microsoft.com/office/drawing/2014/main" id="{194175EB-C15A-C39D-9A1F-F1B14E3517F6}"/>
+                <a16:creationId xmlns:a16="http://schemas.microsoft.com/office/drawing/2014/main" id="{7ADC1B30-13C7-0090-1527-F78367DA0DBF}"/>
               </a:ext>
             </a:extLst>
           </p:cNvPr>
@@ -21959,10 +22077,40 @@
           </a:p>
         </p:txBody>
       </p:sp>
+      <p:pic>
+        <p:nvPicPr>
+          <p:cNvPr id="7" name="Imagem 6">
+            <a:extLst>
+              <a:ext uri="{FF2B5EF4-FFF2-40B4-BE49-F238E27FC236}">
+                <a16:creationId xmlns:a16="http://schemas.microsoft.com/office/drawing/2014/main" id="{3747247B-11E4-A2F1-96D9-758E149EE98C}"/>
+              </a:ext>
+            </a:extLst>
+          </p:cNvPr>
+          <p:cNvPicPr>
+            <a:picLocks noChangeAspect="1"/>
+          </p:cNvPicPr>
+          <p:nvPr/>
+        </p:nvPicPr>
+        <p:blipFill>
+          <a:blip r:embed="rId2"/>
+          <a:stretch>
+            <a:fillRect/>
+          </a:stretch>
+        </p:blipFill>
+        <p:spPr>
+          <a:xfrm>
+            <a:off x="838200" y="3106817"/>
+            <a:ext cx="9409766" cy="2199968"/>
+          </a:xfrm>
+          <a:prstGeom prst="rect">
+            <a:avLst/>
+          </a:prstGeom>
+        </p:spPr>
+      </p:pic>
     </p:spTree>
     <p:extLst>
       <p:ext uri="{BB962C8B-B14F-4D97-AF65-F5344CB8AC3E}">
-        <p14:creationId xmlns:p14="http://schemas.microsoft.com/office/powerpoint/2010/main" val="374058148"/>
+        <p14:creationId xmlns:p14="http://schemas.microsoft.com/office/powerpoint/2010/main" val="2547759613"/>
       </p:ext>
     </p:extLst>
   </p:cSld>
@@ -21977,7 +22125,13 @@
   <p:cSld>
     <p:spTree>
       <p:nvGrpSpPr>
-        <p:cNvPr id="1" name=""/>
+        <p:cNvPr id="1" name="">
+          <a:extLst>
+            <a:ext uri="{FF2B5EF4-FFF2-40B4-BE49-F238E27FC236}">
+              <a16:creationId xmlns:a16="http://schemas.microsoft.com/office/drawing/2014/main" id="{85CD78D7-6DC6-CE7B-5E4D-EC6048497302}"/>
+            </a:ext>
+          </a:extLst>
+        </p:cNvPr>
         <p:cNvGrpSpPr/>
         <p:nvPr/>
       </p:nvGrpSpPr>
@@ -21994,7 +22148,7 @@
           <p:cNvPr id="2" name="Título 1">
             <a:extLst>
               <a:ext uri="{FF2B5EF4-FFF2-40B4-BE49-F238E27FC236}">
-                <a16:creationId xmlns:a16="http://schemas.microsoft.com/office/drawing/2014/main" id="{49D571F9-6704-88BA-44FC-145B09B5EEFD}"/>
+                <a16:creationId xmlns:a16="http://schemas.microsoft.com/office/drawing/2014/main" id="{58E32416-BC4C-B85D-910B-06FA22D9D832}"/>
               </a:ext>
             </a:extLst>
           </p:cNvPr>
@@ -22012,15 +22166,19 @@
           <a:p>
             <a:r>
               <a:rPr lang="en-US" dirty="0" err="1"/>
-              <a:t>Método</a:t>
-            </a:r>
-            <a:r>
-              <a:rPr lang="en-US" dirty="0"/>
-              <a:t> de </a:t>
+              <a:t>Execução</a:t>
+            </a:r>
+            <a:r>
+              <a:rPr lang="en-US" dirty="0"/>
+              <a:t> de Testes e </a:t>
             </a:r>
             <a:r>
               <a:rPr lang="en-US" dirty="0" err="1"/>
-              <a:t>análise</a:t>
+              <a:t>Geração</a:t>
+            </a:r>
+            <a:r>
+              <a:rPr lang="en-US" dirty="0"/>
+              <a:t> de Dados</a:t>
             </a:r>
             <a:endParaRPr lang="pt-BR" dirty="0"/>
           </a:p>
@@ -22031,7 +22189,7 @@
           <p:cNvPr id="3" name="Espaço Reservado para Conteúdo 2">
             <a:extLst>
               <a:ext uri="{FF2B5EF4-FFF2-40B4-BE49-F238E27FC236}">
-                <a16:creationId xmlns:a16="http://schemas.microsoft.com/office/drawing/2014/main" id="{50BF2030-B9AC-2259-71B3-AD3153350D86}"/>
+                <a16:creationId xmlns:a16="http://schemas.microsoft.com/office/drawing/2014/main" id="{E4CFD4E7-509E-D031-9A82-CF231F722678}"/>
               </a:ext>
             </a:extLst>
           </p:cNvPr>
@@ -22050,71 +22208,37 @@
           <a:lstStyle/>
           <a:p>
             <a:r>
-              <a:rPr lang="pt-BR" dirty="0"/>
-              <a:t>Método de </a:t>
-            </a:r>
-            <a:r>
-              <a:rPr lang="pt-BR" b="1" dirty="0"/>
-              <a:t>medição</a:t>
-            </a:r>
-          </a:p>
-          <a:p>
-            <a:r>
-              <a:rPr lang="pt-BR" dirty="0"/>
-              <a:t>Medição de tempo de execução da </a:t>
-            </a:r>
-            <a:r>
-              <a:rPr lang="pt-BR" b="1" dirty="0"/>
-              <a:t>rotina de computação</a:t>
-            </a:r>
-          </a:p>
-          <a:p>
-            <a:r>
-              <a:rPr lang="pt-BR" dirty="0"/>
-              <a:t>Exclusões de medição de tempo</a:t>
-            </a:r>
-          </a:p>
-          <a:p>
-            <a:pPr lvl="1"/>
-            <a:r>
-              <a:rPr lang="pt-BR" dirty="0"/>
-              <a:t>Criação do </a:t>
-            </a:r>
-            <a:r>
-              <a:rPr lang="pt-BR" dirty="0" err="1"/>
-              <a:t>dataset</a:t>
-            </a:r>
+              <a:rPr lang="en-US" dirty="0"/>
+              <a:t>Etapa 3:  Coleta de </a:t>
+            </a:r>
+            <a:r>
+              <a:rPr lang="en-US" dirty="0" err="1"/>
+              <a:t>resultados</a:t>
+            </a:r>
+            <a:r>
+              <a:rPr lang="en-US" dirty="0"/>
+              <a:t>. </a:t>
+            </a:r>
+            <a:r>
+              <a:rPr lang="en-US" dirty="0" err="1"/>
+              <a:t>Armazenamento</a:t>
+            </a:r>
+            <a:r>
+              <a:rPr lang="en-US" dirty="0"/>
+              <a:t> de </a:t>
+            </a:r>
+            <a:r>
+              <a:rPr lang="en-US" dirty="0" err="1"/>
+              <a:t>resultados</a:t>
+            </a:r>
+            <a:r>
+              <a:rPr lang="en-US" dirty="0"/>
+              <a:t>.</a:t>
+            </a:r>
+          </a:p>
+          <a:p>
             <a:endParaRPr lang="pt-BR" dirty="0"/>
           </a:p>
-          <a:p>
-            <a:pPr lvl="1"/>
-            <a:r>
-              <a:rPr lang="pt-BR" dirty="0"/>
-              <a:t>Leitura e carregamento do </a:t>
-            </a:r>
-            <a:r>
-              <a:rPr lang="pt-BR" dirty="0" err="1"/>
-              <a:t>dataset</a:t>
-            </a:r>
-            <a:endParaRPr lang="pt-BR" dirty="0"/>
-          </a:p>
-          <a:p>
-            <a:pPr lvl="1"/>
-            <a:r>
-              <a:rPr lang="pt-BR" dirty="0"/>
-              <a:t>Impressão do resultado e estatísticas</a:t>
-            </a:r>
-          </a:p>
-          <a:p>
-            <a:pPr lvl="1"/>
-            <a:r>
-              <a:rPr lang="pt-BR" dirty="0"/>
-              <a:t>Gravação dos resultados em arquivo</a:t>
-            </a:r>
-          </a:p>
-          <a:p>
-            <a:endParaRPr lang="pt-BR" dirty="0"/>
-          </a:p>
         </p:txBody>
       </p:sp>
       <p:sp>
@@ -22122,7 +22246,7 @@
           <p:cNvPr id="4" name="Espaço Reservado para Número de Slide 3">
             <a:extLst>
               <a:ext uri="{FF2B5EF4-FFF2-40B4-BE49-F238E27FC236}">
-                <a16:creationId xmlns:a16="http://schemas.microsoft.com/office/drawing/2014/main" id="{170C9E90-043B-5B7C-76D7-344E8404D9F8}"/>
+                <a16:creationId xmlns:a16="http://schemas.microsoft.com/office/drawing/2014/main" id="{44ECEE1D-C926-90FE-6792-0A2B05F6160A}"/>
               </a:ext>
             </a:extLst>
           </p:cNvPr>
@@ -22146,10 +22270,100 @@
           </a:p>
         </p:txBody>
       </p:sp>
+      <p:pic>
+        <p:nvPicPr>
+          <p:cNvPr id="13" name="Imagem 12">
+            <a:extLst>
+              <a:ext uri="{FF2B5EF4-FFF2-40B4-BE49-F238E27FC236}">
+                <a16:creationId xmlns:a16="http://schemas.microsoft.com/office/drawing/2014/main" id="{58196CD1-6E67-476D-B028-260AB30C8BF8}"/>
+              </a:ext>
+            </a:extLst>
+          </p:cNvPr>
+          <p:cNvPicPr>
+            <a:picLocks noChangeAspect="1"/>
+          </p:cNvPicPr>
+          <p:nvPr/>
+        </p:nvPicPr>
+        <p:blipFill>
+          <a:blip r:embed="rId2"/>
+          <a:stretch>
+            <a:fillRect/>
+          </a:stretch>
+        </p:blipFill>
+        <p:spPr>
+          <a:xfrm>
+            <a:off x="495300" y="2436431"/>
+            <a:ext cx="4706472" cy="3213254"/>
+          </a:xfrm>
+          <a:prstGeom prst="rect">
+            <a:avLst/>
+          </a:prstGeom>
+        </p:spPr>
+      </p:pic>
+      <p:pic>
+        <p:nvPicPr>
+          <p:cNvPr id="17" name="Imagem 16">
+            <a:extLst>
+              <a:ext uri="{FF2B5EF4-FFF2-40B4-BE49-F238E27FC236}">
+                <a16:creationId xmlns:a16="http://schemas.microsoft.com/office/drawing/2014/main" id="{93F0B778-4014-B1A0-AE38-72EEAE7286EB}"/>
+              </a:ext>
+            </a:extLst>
+          </p:cNvPr>
+          <p:cNvPicPr>
+            <a:picLocks noChangeAspect="1"/>
+          </p:cNvPicPr>
+          <p:nvPr/>
+        </p:nvPicPr>
+        <p:blipFill>
+          <a:blip r:embed="rId3"/>
+          <a:stretch>
+            <a:fillRect/>
+          </a:stretch>
+        </p:blipFill>
+        <p:spPr>
+          <a:xfrm>
+            <a:off x="5136706" y="2301494"/>
+            <a:ext cx="6766302" cy="3005292"/>
+          </a:xfrm>
+          <a:prstGeom prst="rect">
+            <a:avLst/>
+          </a:prstGeom>
+        </p:spPr>
+      </p:pic>
+      <p:pic>
+        <p:nvPicPr>
+          <p:cNvPr id="19" name="Imagem 18">
+            <a:extLst>
+              <a:ext uri="{FF2B5EF4-FFF2-40B4-BE49-F238E27FC236}">
+                <a16:creationId xmlns:a16="http://schemas.microsoft.com/office/drawing/2014/main" id="{419FC841-708D-D58C-7692-53617E707CAC}"/>
+              </a:ext>
+            </a:extLst>
+          </p:cNvPr>
+          <p:cNvPicPr>
+            <a:picLocks noChangeAspect="1"/>
+          </p:cNvPicPr>
+          <p:nvPr/>
+        </p:nvPicPr>
+        <p:blipFill>
+          <a:blip r:embed="rId4"/>
+          <a:stretch>
+            <a:fillRect/>
+          </a:stretch>
+        </p:blipFill>
+        <p:spPr>
+          <a:xfrm>
+            <a:off x="2080476" y="5342889"/>
+            <a:ext cx="8031048" cy="1419280"/>
+          </a:xfrm>
+          <a:prstGeom prst="rect">
+            <a:avLst/>
+          </a:prstGeom>
+        </p:spPr>
+      </p:pic>
     </p:spTree>
     <p:extLst>
       <p:ext uri="{BB962C8B-B14F-4D97-AF65-F5344CB8AC3E}">
-        <p14:creationId xmlns:p14="http://schemas.microsoft.com/office/powerpoint/2010/main" val="288332579"/>
+        <p14:creationId xmlns:p14="http://schemas.microsoft.com/office/powerpoint/2010/main" val="357584813"/>
       </p:ext>
     </p:extLst>
   </p:cSld>
@@ -22164,7 +22378,13 @@
   <p:cSld>
     <p:spTree>
       <p:nvGrpSpPr>
-        <p:cNvPr id="1" name=""/>
+        <p:cNvPr id="1" name="">
+          <a:extLst>
+            <a:ext uri="{FF2B5EF4-FFF2-40B4-BE49-F238E27FC236}">
+              <a16:creationId xmlns:a16="http://schemas.microsoft.com/office/drawing/2014/main" id="{6F27A752-C366-89BF-34CC-DCC1AE76BAAA}"/>
+            </a:ext>
+          </a:extLst>
+        </p:cNvPr>
         <p:cNvGrpSpPr/>
         <p:nvPr/>
       </p:nvGrpSpPr>
@@ -22181,7 +22401,7 @@
           <p:cNvPr id="2" name="Título 1">
             <a:extLst>
               <a:ext uri="{FF2B5EF4-FFF2-40B4-BE49-F238E27FC236}">
-                <a16:creationId xmlns:a16="http://schemas.microsoft.com/office/drawing/2014/main" id="{9C60400C-CDC4-82DD-D700-ECB48A0EF539}"/>
+                <a16:creationId xmlns:a16="http://schemas.microsoft.com/office/drawing/2014/main" id="{7791FA51-3474-709F-4811-EBCB4CA5CA2B}"/>
               </a:ext>
             </a:extLst>
           </p:cNvPr>
@@ -22199,15 +22419,19 @@
           <a:p>
             <a:r>
               <a:rPr lang="en-US" dirty="0" err="1"/>
-              <a:t>Definição</a:t>
-            </a:r>
-            <a:r>
-              <a:rPr lang="en-US" dirty="0"/>
-              <a:t> das </a:t>
+              <a:t>Execução</a:t>
+            </a:r>
+            <a:r>
+              <a:rPr lang="en-US" dirty="0"/>
+              <a:t> de Testes e </a:t>
             </a:r>
             <a:r>
               <a:rPr lang="en-US" dirty="0" err="1"/>
-              <a:t>métricas</a:t>
+              <a:t>Geração</a:t>
+            </a:r>
+            <a:r>
+              <a:rPr lang="en-US" dirty="0"/>
+              <a:t> de Dados</a:t>
             </a:r>
             <a:endParaRPr lang="pt-BR" dirty="0"/>
           </a:p>
@@ -22218,7 +22442,7 @@
           <p:cNvPr id="3" name="Espaço Reservado para Conteúdo 2">
             <a:extLst>
               <a:ext uri="{FF2B5EF4-FFF2-40B4-BE49-F238E27FC236}">
-                <a16:creationId xmlns:a16="http://schemas.microsoft.com/office/drawing/2014/main" id="{32B7976D-7A0B-673B-D81E-4C22B489FD31}"/>
+                <a16:creationId xmlns:a16="http://schemas.microsoft.com/office/drawing/2014/main" id="{09675329-5578-6712-1D7D-A10C3925E2D5}"/>
               </a:ext>
             </a:extLst>
           </p:cNvPr>
@@ -22231,41 +22455,44 @@
         </p:nvSpPr>
         <p:spPr/>
         <p:txBody>
-          <a:bodyPr/>
-          <a:lstStyle/>
-          <a:p>
-            <a:r>
-              <a:rPr lang="pt-BR" dirty="0"/>
-              <a:t>Métricas (derivadas do tempo de execução)</a:t>
-            </a:r>
-          </a:p>
-          <a:p>
-            <a:pPr lvl="1"/>
-            <a:r>
-              <a:rPr lang="pt-BR" dirty="0"/>
-              <a:t>Média, Mediana</a:t>
-            </a:r>
-          </a:p>
-          <a:p>
-            <a:pPr lvl="1"/>
-            <a:r>
-              <a:rPr lang="pt-BR" dirty="0"/>
-              <a:t>Desvio Padrão e Variância</a:t>
-            </a:r>
-          </a:p>
-          <a:p>
-            <a:pPr lvl="1"/>
-            <a:r>
-              <a:rPr lang="pt-BR" dirty="0"/>
-              <a:t>Mínimo e Máximo</a:t>
-            </a:r>
-          </a:p>
-          <a:p>
-            <a:pPr lvl="1"/>
-            <a:r>
-              <a:rPr lang="pt-BR" dirty="0"/>
-              <a:t>Outras? (Em análise)</a:t>
-            </a:r>
+          <a:bodyPr>
+            <a:normAutofit/>
+          </a:bodyPr>
+          <a:lstStyle/>
+          <a:p>
+            <a:r>
+              <a:rPr lang="en-US" dirty="0"/>
+              <a:t>Etapa 4:  </a:t>
+            </a:r>
+            <a:r>
+              <a:rPr lang="en-US" dirty="0" err="1"/>
+              <a:t>Leitura</a:t>
+            </a:r>
+            <a:r>
+              <a:rPr lang="en-US" dirty="0"/>
+              <a:t> dos </a:t>
+            </a:r>
+            <a:r>
+              <a:rPr lang="en-US" dirty="0" err="1"/>
+              <a:t>resultados</a:t>
+            </a:r>
+            <a:r>
+              <a:rPr lang="en-US" dirty="0"/>
+              <a:t> a </a:t>
+            </a:r>
+            <a:r>
+              <a:rPr lang="en-US" dirty="0" err="1"/>
+              <a:t>partir</a:t>
+            </a:r>
+            <a:r>
+              <a:rPr lang="en-US" dirty="0"/>
+              <a:t> de </a:t>
+            </a:r>
+            <a:r>
+              <a:rPr lang="en-US" dirty="0" err="1"/>
+              <a:t>arquivo</a:t>
+            </a:r>
+            <a:endParaRPr lang="en-US" dirty="0"/>
           </a:p>
           <a:p>
             <a:endParaRPr lang="pt-BR" dirty="0"/>
@@ -22277,7 +22504,7 @@
           <p:cNvPr id="4" name="Espaço Reservado para Número de Slide 3">
             <a:extLst>
               <a:ext uri="{FF2B5EF4-FFF2-40B4-BE49-F238E27FC236}">
-                <a16:creationId xmlns:a16="http://schemas.microsoft.com/office/drawing/2014/main" id="{38488746-F000-6773-12EF-4106DD2C4B64}"/>
+                <a16:creationId xmlns:a16="http://schemas.microsoft.com/office/drawing/2014/main" id="{0E435A63-AB6E-46F3-796C-5500AEA1ACF9}"/>
               </a:ext>
             </a:extLst>
           </p:cNvPr>
@@ -22301,10 +22528,40 @@
           </a:p>
         </p:txBody>
       </p:sp>
+      <p:pic>
+        <p:nvPicPr>
+          <p:cNvPr id="6" name="Imagem 5">
+            <a:extLst>
+              <a:ext uri="{FF2B5EF4-FFF2-40B4-BE49-F238E27FC236}">
+                <a16:creationId xmlns:a16="http://schemas.microsoft.com/office/drawing/2014/main" id="{06C3ED27-ECB9-687E-DC03-7D9466099F43}"/>
+              </a:ext>
+            </a:extLst>
+          </p:cNvPr>
+          <p:cNvPicPr>
+            <a:picLocks noChangeAspect="1"/>
+          </p:cNvPicPr>
+          <p:nvPr/>
+        </p:nvPicPr>
+        <p:blipFill>
+          <a:blip r:embed="rId2"/>
+          <a:stretch>
+            <a:fillRect/>
+          </a:stretch>
+        </p:blipFill>
+        <p:spPr>
+          <a:xfrm>
+            <a:off x="1092767" y="2284678"/>
+            <a:ext cx="8889433" cy="4270563"/>
+          </a:xfrm>
+          <a:prstGeom prst="rect">
+            <a:avLst/>
+          </a:prstGeom>
+        </p:spPr>
+      </p:pic>
     </p:spTree>
     <p:extLst>
       <p:ext uri="{BB962C8B-B14F-4D97-AF65-F5344CB8AC3E}">
-        <p14:creationId xmlns:p14="http://schemas.microsoft.com/office/powerpoint/2010/main" val="1293801074"/>
+        <p14:creationId xmlns:p14="http://schemas.microsoft.com/office/powerpoint/2010/main" val="1132930727"/>
       </p:ext>
     </p:extLst>
   </p:cSld>
@@ -22336,7 +22593,7 @@
           <p:cNvPr id="2" name="Título 1">
             <a:extLst>
               <a:ext uri="{FF2B5EF4-FFF2-40B4-BE49-F238E27FC236}">
-                <a16:creationId xmlns:a16="http://schemas.microsoft.com/office/drawing/2014/main" id="{087C22EE-688D-EE67-702B-BEDCFB759202}"/>
+                <a16:creationId xmlns:a16="http://schemas.microsoft.com/office/drawing/2014/main" id="{164A5A54-B22E-BAE2-EBD5-CA8BDF60173A}"/>
               </a:ext>
             </a:extLst>
           </p:cNvPr>
@@ -22354,11 +22611,15 @@
           <a:p>
             <a:r>
               <a:rPr lang="en-US" dirty="0" err="1"/>
-              <a:t>Cenários</a:t>
-            </a:r>
-            <a:r>
-              <a:rPr lang="en-US" dirty="0"/>
-              <a:t> de teste</a:t>
+              <a:t>Resultados</a:t>
+            </a:r>
+            <a:r>
+              <a:rPr lang="en-US" dirty="0"/>
+              <a:t> </a:t>
+            </a:r>
+            <a:r>
+              <a:rPr lang="en-US" dirty="0" err="1"/>
+              <a:t>preliminares</a:t>
             </a:r>
             <a:endParaRPr lang="pt-BR" dirty="0"/>
           </a:p>
@@ -22366,190 +22627,10 @@
       </p:sp>
       <p:sp>
         <p:nvSpPr>
-          <p:cNvPr id="3" name="Espaço Reservado para Conteúdo 2">
-            <a:extLst>
-              <a:ext uri="{FF2B5EF4-FFF2-40B4-BE49-F238E27FC236}">
-                <a16:creationId xmlns:a16="http://schemas.microsoft.com/office/drawing/2014/main" id="{D3AEABCF-1372-179C-2C9E-978C3050CBBE}"/>
-              </a:ext>
-            </a:extLst>
-          </p:cNvPr>
-          <p:cNvSpPr>
-            <a:spLocks noGrp="1"/>
-          </p:cNvSpPr>
-          <p:nvPr>
-            <p:ph idx="1"/>
-          </p:nvPr>
-        </p:nvSpPr>
-        <p:spPr/>
-        <p:txBody>
-          <a:bodyPr>
-            <a:normAutofit fontScale="92500" lnSpcReduction="10000"/>
-          </a:bodyPr>
-          <a:lstStyle/>
-          <a:p>
-            <a:r>
-              <a:rPr lang="en-US" dirty="0"/>
-              <a:t>Cenário 1</a:t>
-            </a:r>
-          </a:p>
-          <a:p>
-            <a:pPr lvl="1"/>
-            <a:r>
-              <a:rPr lang="en-US" dirty="0"/>
-              <a:t>P-cores </a:t>
-            </a:r>
-            <a:r>
-              <a:rPr lang="en-US" dirty="0" err="1"/>
-              <a:t>ativos</a:t>
-            </a:r>
-            <a:endParaRPr lang="en-US" dirty="0"/>
-          </a:p>
-          <a:p>
-            <a:pPr lvl="1"/>
-            <a:r>
-              <a:rPr lang="en-US" dirty="0"/>
-              <a:t>E-cores </a:t>
-            </a:r>
-            <a:r>
-              <a:rPr lang="en-US" dirty="0" err="1"/>
-              <a:t>ativos</a:t>
-            </a:r>
-            <a:endParaRPr lang="en-US" dirty="0"/>
-          </a:p>
-          <a:p>
-            <a:pPr lvl="1"/>
-            <a:r>
-              <a:rPr lang="en-US" dirty="0"/>
-              <a:t>Hyper-Threading </a:t>
-            </a:r>
-            <a:r>
-              <a:rPr lang="en-US" dirty="0" err="1"/>
-              <a:t>ativo</a:t>
-            </a:r>
-            <a:endParaRPr lang="en-US" dirty="0"/>
-          </a:p>
-          <a:p>
-            <a:r>
-              <a:rPr lang="en-US" dirty="0"/>
-              <a:t>Cenário 2</a:t>
-            </a:r>
-          </a:p>
-          <a:p>
-            <a:pPr lvl="1"/>
-            <a:r>
-              <a:rPr lang="en-US" dirty="0"/>
-              <a:t>P-cores </a:t>
-            </a:r>
-            <a:r>
-              <a:rPr lang="en-US" dirty="0" err="1"/>
-              <a:t>ativos</a:t>
-            </a:r>
-            <a:endParaRPr lang="en-US" dirty="0"/>
-          </a:p>
-          <a:p>
-            <a:pPr lvl="1"/>
-            <a:r>
-              <a:rPr lang="en-US" dirty="0"/>
-              <a:t>E-cores </a:t>
-            </a:r>
-            <a:r>
-              <a:rPr lang="en-US" dirty="0" err="1">
-                <a:highlight>
-                  <a:srgbClr val="FF0000"/>
-                </a:highlight>
-              </a:rPr>
-              <a:t>inativos</a:t>
-            </a:r>
-            <a:endParaRPr lang="en-US" dirty="0">
-              <a:highlight>
-                <a:srgbClr val="FF0000"/>
-              </a:highlight>
-            </a:endParaRPr>
-          </a:p>
-          <a:p>
-            <a:pPr lvl="1"/>
-            <a:r>
-              <a:rPr lang="en-US" dirty="0"/>
-              <a:t>Hyper-Threading </a:t>
-            </a:r>
-            <a:r>
-              <a:rPr lang="en-US" dirty="0" err="1"/>
-              <a:t>ativo</a:t>
-            </a:r>
-            <a:endParaRPr lang="en-US" dirty="0"/>
-          </a:p>
-          <a:p>
-            <a:r>
-              <a:rPr lang="en-US" dirty="0"/>
-              <a:t>Cenário 3</a:t>
-            </a:r>
-          </a:p>
-          <a:p>
-            <a:pPr lvl="1"/>
-            <a:r>
-              <a:rPr lang="en-US" dirty="0"/>
-              <a:t>P-cores </a:t>
-            </a:r>
-            <a:r>
-              <a:rPr lang="en-US" dirty="0" err="1"/>
-              <a:t>ativos</a:t>
-            </a:r>
-            <a:endParaRPr lang="en-US" dirty="0"/>
-          </a:p>
-          <a:p>
-            <a:pPr lvl="1"/>
-            <a:r>
-              <a:rPr lang="en-US" dirty="0"/>
-              <a:t>E-cores </a:t>
-            </a:r>
-            <a:r>
-              <a:rPr lang="en-US" dirty="0" err="1">
-                <a:highlight>
-                  <a:srgbClr val="FF0000"/>
-                </a:highlight>
-              </a:rPr>
-              <a:t>inativos</a:t>
-            </a:r>
-            <a:endParaRPr lang="en-US" dirty="0">
-              <a:highlight>
-                <a:srgbClr val="FF0000"/>
-              </a:highlight>
-            </a:endParaRPr>
-          </a:p>
-          <a:p>
-            <a:pPr lvl="1"/>
-            <a:r>
-              <a:rPr lang="en-US" dirty="0"/>
-              <a:t>Hyper-Threading </a:t>
-            </a:r>
-            <a:r>
-              <a:rPr lang="en-US" dirty="0" err="1">
-                <a:highlight>
-                  <a:srgbClr val="FF0000"/>
-                </a:highlight>
-              </a:rPr>
-              <a:t>inativo</a:t>
-            </a:r>
-            <a:endParaRPr lang="en-US" dirty="0">
-              <a:highlight>
-                <a:srgbClr val="FF0000"/>
-              </a:highlight>
-            </a:endParaRPr>
-          </a:p>
-          <a:p>
-            <a:endParaRPr lang="en-US" dirty="0"/>
-          </a:p>
-          <a:p>
-            <a:endParaRPr lang="pt-BR" dirty="0"/>
-          </a:p>
-        </p:txBody>
-      </p:sp>
-      <p:sp>
-        <p:nvSpPr>
           <p:cNvPr id="4" name="Espaço Reservado para Número de Slide 3">
             <a:extLst>
               <a:ext uri="{FF2B5EF4-FFF2-40B4-BE49-F238E27FC236}">
-                <a16:creationId xmlns:a16="http://schemas.microsoft.com/office/drawing/2014/main" id="{F0246EAD-246E-37B1-4782-6241F6DC1251}"/>
+                <a16:creationId xmlns:a16="http://schemas.microsoft.com/office/drawing/2014/main" id="{40BFDCD6-A8E7-0731-F6F3-1BF7E277C084}"/>
               </a:ext>
             </a:extLst>
           </p:cNvPr>
@@ -22573,10 +22654,500 @@
           </a:p>
         </p:txBody>
       </p:sp>
+      <p:sp>
+        <p:nvSpPr>
+          <p:cNvPr id="12" name="Espaço Reservado para Conteúdo 11">
+            <a:extLst>
+              <a:ext uri="{FF2B5EF4-FFF2-40B4-BE49-F238E27FC236}">
+                <a16:creationId xmlns:a16="http://schemas.microsoft.com/office/drawing/2014/main" id="{74363B1E-0213-D155-F20E-AE64B04D7BE3}"/>
+              </a:ext>
+            </a:extLst>
+          </p:cNvPr>
+          <p:cNvSpPr>
+            <a:spLocks noGrp="1"/>
+          </p:cNvSpPr>
+          <p:nvPr>
+            <p:ph idx="1"/>
+          </p:nvPr>
+        </p:nvSpPr>
+        <p:spPr>
+          <a:xfrm>
+            <a:off x="838200" y="1825625"/>
+            <a:ext cx="5497286" cy="4351338"/>
+          </a:xfrm>
+        </p:spPr>
+        <p:txBody>
+          <a:bodyPr>
+            <a:normAutofit lnSpcReduction="10000"/>
+          </a:bodyPr>
+          <a:lstStyle/>
+          <a:p>
+            <a:r>
+              <a:rPr lang="en-US" dirty="0"/>
+              <a:t>8 threads no total; Turbo Boost </a:t>
+            </a:r>
+            <a:r>
+              <a:rPr lang="en-US" dirty="0" err="1"/>
+              <a:t>Ativo</a:t>
+            </a:r>
+            <a:endParaRPr lang="en-US" dirty="0"/>
+          </a:p>
+          <a:p>
+            <a:r>
+              <a:rPr lang="en-US" b="1" dirty="0"/>
+              <a:t>Cenário 1</a:t>
+            </a:r>
+          </a:p>
+          <a:p>
+            <a:pPr lvl="1"/>
+            <a:r>
+              <a:rPr lang="en-US" dirty="0" err="1"/>
+              <a:t>Apenas</a:t>
+            </a:r>
+            <a:r>
+              <a:rPr lang="en-US" dirty="0"/>
+              <a:t> P-cores</a:t>
+            </a:r>
+          </a:p>
+          <a:p>
+            <a:pPr lvl="1"/>
+            <a:r>
+              <a:rPr lang="en-US" dirty="0"/>
+              <a:t>1 thread </a:t>
+            </a:r>
+            <a:r>
+              <a:rPr lang="en-US" dirty="0" err="1"/>
+              <a:t>por</a:t>
+            </a:r>
+            <a:r>
+              <a:rPr lang="en-US" dirty="0"/>
+              <a:t> </a:t>
+            </a:r>
+            <a:r>
+              <a:rPr lang="en-US" dirty="0" err="1"/>
+              <a:t>núcleo</a:t>
+            </a:r>
+            <a:r>
+              <a:rPr lang="en-US" dirty="0"/>
+              <a:t> </a:t>
+            </a:r>
+            <a:r>
+              <a:rPr lang="en-US" dirty="0" err="1"/>
+              <a:t>físico</a:t>
+            </a:r>
+            <a:r>
+              <a:rPr lang="en-US" dirty="0"/>
+              <a:t> (8 </a:t>
+            </a:r>
+            <a:r>
+              <a:rPr lang="en-US" dirty="0" err="1"/>
+              <a:t>núcleos</a:t>
+            </a:r>
+            <a:r>
+              <a:rPr lang="en-US" dirty="0"/>
+              <a:t> </a:t>
+            </a:r>
+            <a:r>
+              <a:rPr lang="en-US" dirty="0" err="1"/>
+              <a:t>físicos</a:t>
+            </a:r>
+            <a:r>
+              <a:rPr lang="en-US" dirty="0"/>
+              <a:t> </a:t>
+            </a:r>
+            <a:r>
+              <a:rPr lang="en-US" dirty="0" err="1"/>
+              <a:t>diferentes</a:t>
+            </a:r>
+            <a:r>
+              <a:rPr lang="en-US" dirty="0"/>
+              <a:t>)</a:t>
+            </a:r>
+          </a:p>
+          <a:p>
+            <a:r>
+              <a:rPr lang="en-US" b="1" dirty="0"/>
+              <a:t>Cenário 2</a:t>
+            </a:r>
+          </a:p>
+          <a:p>
+            <a:pPr lvl="1"/>
+            <a:r>
+              <a:rPr lang="en-US" dirty="0" err="1"/>
+              <a:t>Apenas</a:t>
+            </a:r>
+            <a:r>
+              <a:rPr lang="en-US" dirty="0"/>
+              <a:t> P-cores</a:t>
+            </a:r>
+          </a:p>
+          <a:p>
+            <a:pPr lvl="1"/>
+            <a:r>
+              <a:rPr lang="en-US" dirty="0" err="1"/>
+              <a:t>Núcleos</a:t>
+            </a:r>
+            <a:r>
+              <a:rPr lang="en-US" dirty="0"/>
+              <a:t> </a:t>
+            </a:r>
+            <a:r>
+              <a:rPr lang="en-US" dirty="0" err="1"/>
+              <a:t>físicos</a:t>
+            </a:r>
+            <a:r>
+              <a:rPr lang="en-US" dirty="0"/>
+              <a:t> e </a:t>
+            </a:r>
+            <a:r>
+              <a:rPr lang="en-US" dirty="0" err="1"/>
+              <a:t>lógicos</a:t>
+            </a:r>
+            <a:endParaRPr lang="en-US" dirty="0"/>
+          </a:p>
+          <a:p>
+            <a:pPr lvl="1"/>
+            <a:r>
+              <a:rPr lang="en-US" dirty="0"/>
+              <a:t>2 threads </a:t>
+            </a:r>
+            <a:r>
+              <a:rPr lang="en-US" dirty="0" err="1"/>
+              <a:t>por</a:t>
+            </a:r>
+            <a:r>
+              <a:rPr lang="en-US" dirty="0"/>
+              <a:t> </a:t>
+            </a:r>
+            <a:r>
+              <a:rPr lang="en-US" dirty="0" err="1"/>
+              <a:t>núcleo</a:t>
+            </a:r>
+            <a:r>
+              <a:rPr lang="en-US" dirty="0"/>
+              <a:t> </a:t>
+            </a:r>
+            <a:r>
+              <a:rPr lang="en-US" dirty="0" err="1"/>
+              <a:t>físico</a:t>
+            </a:r>
+            <a:r>
+              <a:rPr lang="en-US" dirty="0"/>
+              <a:t> (4 </a:t>
+            </a:r>
+            <a:r>
+              <a:rPr lang="en-US" dirty="0" err="1"/>
+              <a:t>núcleos</a:t>
+            </a:r>
+            <a:r>
+              <a:rPr lang="en-US" dirty="0"/>
+              <a:t> </a:t>
+            </a:r>
+            <a:r>
+              <a:rPr lang="en-US" dirty="0" err="1"/>
+              <a:t>físicos</a:t>
+            </a:r>
+            <a:r>
+              <a:rPr lang="en-US" dirty="0"/>
+              <a:t> </a:t>
+            </a:r>
+            <a:r>
+              <a:rPr lang="en-US" dirty="0" err="1"/>
+              <a:t>diferentes</a:t>
+            </a:r>
+            <a:r>
+              <a:rPr lang="en-US" dirty="0"/>
+              <a:t>)</a:t>
+            </a:r>
+          </a:p>
+        </p:txBody>
+      </p:sp>
+      <p:sp>
+        <p:nvSpPr>
+          <p:cNvPr id="13" name="Espaço Reservado para Conteúdo 11">
+            <a:extLst>
+              <a:ext uri="{FF2B5EF4-FFF2-40B4-BE49-F238E27FC236}">
+                <a16:creationId xmlns:a16="http://schemas.microsoft.com/office/drawing/2014/main" id="{796C9C2B-FC1A-F433-6439-DC6659589AA5}"/>
+              </a:ext>
+            </a:extLst>
+          </p:cNvPr>
+          <p:cNvSpPr txBox="1">
+            <a:spLocks/>
+          </p:cNvSpPr>
+          <p:nvPr/>
+        </p:nvSpPr>
+        <p:spPr>
+          <a:xfrm>
+            <a:off x="6335486" y="2563587"/>
+            <a:ext cx="5497286" cy="3613376"/>
+          </a:xfrm>
+          <a:prstGeom prst="rect">
+            <a:avLst/>
+          </a:prstGeom>
+        </p:spPr>
+        <p:txBody>
+          <a:bodyPr vert="horz" lIns="91440" tIns="45720" rIns="91440" bIns="45720" rtlCol="0">
+            <a:normAutofit/>
+          </a:bodyPr>
+          <a:lstStyle>
+            <a:lvl1pPr marL="228600" indent="-228600" algn="l" defTabSz="914400" rtl="0" eaLnBrk="1" latinLnBrk="0" hangingPunct="1">
+              <a:lnSpc>
+                <a:spcPct val="90000"/>
+              </a:lnSpc>
+              <a:spcBef>
+                <a:spcPts val="1000"/>
+              </a:spcBef>
+              <a:buFont typeface="Arial" panose="020B0604020202020204" pitchFamily="34" charset="0"/>
+              <a:buChar char="•"/>
+              <a:defRPr sz="2800" kern="1200">
+                <a:solidFill>
+                  <a:schemeClr val="tx1"/>
+                </a:solidFill>
+                <a:latin typeface="+mn-lt"/>
+                <a:ea typeface="+mn-ea"/>
+                <a:cs typeface="+mn-cs"/>
+              </a:defRPr>
+            </a:lvl1pPr>
+            <a:lvl2pPr marL="685800" indent="-228600" algn="l" defTabSz="914400" rtl="0" eaLnBrk="1" latinLnBrk="0" hangingPunct="1">
+              <a:lnSpc>
+                <a:spcPct val="90000"/>
+              </a:lnSpc>
+              <a:spcBef>
+                <a:spcPts val="500"/>
+              </a:spcBef>
+              <a:buFont typeface="Arial" panose="020B0604020202020204" pitchFamily="34" charset="0"/>
+              <a:buChar char="•"/>
+              <a:defRPr sz="2400" kern="1200">
+                <a:solidFill>
+                  <a:schemeClr val="tx1"/>
+                </a:solidFill>
+                <a:latin typeface="+mn-lt"/>
+                <a:ea typeface="+mn-ea"/>
+                <a:cs typeface="+mn-cs"/>
+              </a:defRPr>
+            </a:lvl2pPr>
+            <a:lvl3pPr marL="1143000" indent="-228600" algn="l" defTabSz="914400" rtl="0" eaLnBrk="1" latinLnBrk="0" hangingPunct="1">
+              <a:lnSpc>
+                <a:spcPct val="90000"/>
+              </a:lnSpc>
+              <a:spcBef>
+                <a:spcPts val="500"/>
+              </a:spcBef>
+              <a:buFont typeface="Arial" panose="020B0604020202020204" pitchFamily="34" charset="0"/>
+              <a:buChar char="•"/>
+              <a:defRPr sz="2000" kern="1200">
+                <a:solidFill>
+                  <a:schemeClr val="tx1"/>
+                </a:solidFill>
+                <a:latin typeface="+mn-lt"/>
+                <a:ea typeface="+mn-ea"/>
+                <a:cs typeface="+mn-cs"/>
+              </a:defRPr>
+            </a:lvl3pPr>
+            <a:lvl4pPr marL="1600200" indent="-228600" algn="l" defTabSz="914400" rtl="0" eaLnBrk="1" latinLnBrk="0" hangingPunct="1">
+              <a:lnSpc>
+                <a:spcPct val="90000"/>
+              </a:lnSpc>
+              <a:spcBef>
+                <a:spcPts val="500"/>
+              </a:spcBef>
+              <a:buFont typeface="Arial" panose="020B0604020202020204" pitchFamily="34" charset="0"/>
+              <a:buChar char="•"/>
+              <a:defRPr sz="1800" kern="1200">
+                <a:solidFill>
+                  <a:schemeClr val="tx1"/>
+                </a:solidFill>
+                <a:latin typeface="+mn-lt"/>
+                <a:ea typeface="+mn-ea"/>
+                <a:cs typeface="+mn-cs"/>
+              </a:defRPr>
+            </a:lvl4pPr>
+            <a:lvl5pPr marL="2057400" indent="-228600" algn="l" defTabSz="914400" rtl="0" eaLnBrk="1" latinLnBrk="0" hangingPunct="1">
+              <a:lnSpc>
+                <a:spcPct val="90000"/>
+              </a:lnSpc>
+              <a:spcBef>
+                <a:spcPts val="500"/>
+              </a:spcBef>
+              <a:buFont typeface="Arial" panose="020B0604020202020204" pitchFamily="34" charset="0"/>
+              <a:buChar char="•"/>
+              <a:defRPr sz="1800" kern="1200">
+                <a:solidFill>
+                  <a:schemeClr val="tx1"/>
+                </a:solidFill>
+                <a:latin typeface="+mn-lt"/>
+                <a:ea typeface="+mn-ea"/>
+                <a:cs typeface="+mn-cs"/>
+              </a:defRPr>
+            </a:lvl5pPr>
+            <a:lvl6pPr marL="2514600" indent="-228600" algn="l" defTabSz="914400" rtl="0" eaLnBrk="1" latinLnBrk="0" hangingPunct="1">
+              <a:lnSpc>
+                <a:spcPct val="90000"/>
+              </a:lnSpc>
+              <a:spcBef>
+                <a:spcPts val="500"/>
+              </a:spcBef>
+              <a:buFont typeface="Arial" panose="020B0604020202020204" pitchFamily="34" charset="0"/>
+              <a:buChar char="•"/>
+              <a:defRPr sz="1800" kern="1200">
+                <a:solidFill>
+                  <a:schemeClr val="tx1"/>
+                </a:solidFill>
+                <a:latin typeface="+mn-lt"/>
+                <a:ea typeface="+mn-ea"/>
+                <a:cs typeface="+mn-cs"/>
+              </a:defRPr>
+            </a:lvl6pPr>
+            <a:lvl7pPr marL="2971800" indent="-228600" algn="l" defTabSz="914400" rtl="0" eaLnBrk="1" latinLnBrk="0" hangingPunct="1">
+              <a:lnSpc>
+                <a:spcPct val="90000"/>
+              </a:lnSpc>
+              <a:spcBef>
+                <a:spcPts val="500"/>
+              </a:spcBef>
+              <a:buFont typeface="Arial" panose="020B0604020202020204" pitchFamily="34" charset="0"/>
+              <a:buChar char="•"/>
+              <a:defRPr sz="1800" kern="1200">
+                <a:solidFill>
+                  <a:schemeClr val="tx1"/>
+                </a:solidFill>
+                <a:latin typeface="+mn-lt"/>
+                <a:ea typeface="+mn-ea"/>
+                <a:cs typeface="+mn-cs"/>
+              </a:defRPr>
+            </a:lvl7pPr>
+            <a:lvl8pPr marL="3429000" indent="-228600" algn="l" defTabSz="914400" rtl="0" eaLnBrk="1" latinLnBrk="0" hangingPunct="1">
+              <a:lnSpc>
+                <a:spcPct val="90000"/>
+              </a:lnSpc>
+              <a:spcBef>
+                <a:spcPts val="500"/>
+              </a:spcBef>
+              <a:buFont typeface="Arial" panose="020B0604020202020204" pitchFamily="34" charset="0"/>
+              <a:buChar char="•"/>
+              <a:defRPr sz="1800" kern="1200">
+                <a:solidFill>
+                  <a:schemeClr val="tx1"/>
+                </a:solidFill>
+                <a:latin typeface="+mn-lt"/>
+                <a:ea typeface="+mn-ea"/>
+                <a:cs typeface="+mn-cs"/>
+              </a:defRPr>
+            </a:lvl8pPr>
+            <a:lvl9pPr marL="3886200" indent="-228600" algn="l" defTabSz="914400" rtl="0" eaLnBrk="1" latinLnBrk="0" hangingPunct="1">
+              <a:lnSpc>
+                <a:spcPct val="90000"/>
+              </a:lnSpc>
+              <a:spcBef>
+                <a:spcPts val="500"/>
+              </a:spcBef>
+              <a:buFont typeface="Arial" panose="020B0604020202020204" pitchFamily="34" charset="0"/>
+              <a:buChar char="•"/>
+              <a:defRPr sz="1800" kern="1200">
+                <a:solidFill>
+                  <a:schemeClr val="tx1"/>
+                </a:solidFill>
+                <a:latin typeface="+mn-lt"/>
+                <a:ea typeface="+mn-ea"/>
+                <a:cs typeface="+mn-cs"/>
+              </a:defRPr>
+            </a:lvl9pPr>
+          </a:lstStyle>
+          <a:p>
+            <a:r>
+              <a:rPr lang="en-US" b="1" dirty="0"/>
+              <a:t>Cenário 3</a:t>
+            </a:r>
+          </a:p>
+          <a:p>
+            <a:pPr lvl="1"/>
+            <a:r>
+              <a:rPr lang="en-US" dirty="0"/>
+              <a:t>P-cores e e-cores</a:t>
+            </a:r>
+          </a:p>
+          <a:p>
+            <a:pPr lvl="1"/>
+            <a:r>
+              <a:rPr lang="en-US" dirty="0"/>
+              <a:t>4 threads em 4 p-cores físicos,4 threads em 4 e-cores</a:t>
+            </a:r>
+          </a:p>
+          <a:p>
+            <a:r>
+              <a:rPr lang="en-US" b="1" dirty="0"/>
+              <a:t>Cenário 4</a:t>
+            </a:r>
+          </a:p>
+          <a:p>
+            <a:pPr lvl="1"/>
+            <a:r>
+              <a:rPr lang="en-US" dirty="0" err="1"/>
+              <a:t>Apenas</a:t>
+            </a:r>
+            <a:r>
+              <a:rPr lang="en-US" dirty="0"/>
+              <a:t> e-cores</a:t>
+            </a:r>
+          </a:p>
+          <a:p>
+            <a:pPr lvl="1"/>
+            <a:r>
+              <a:rPr lang="en-US" dirty="0"/>
+              <a:t>1 thread </a:t>
+            </a:r>
+            <a:r>
+              <a:rPr lang="en-US" dirty="0" err="1"/>
+              <a:t>por</a:t>
+            </a:r>
+            <a:r>
+              <a:rPr lang="en-US" dirty="0"/>
+              <a:t> </a:t>
+            </a:r>
+            <a:r>
+              <a:rPr lang="en-US" dirty="0" err="1"/>
+              <a:t>núcleo</a:t>
+            </a:r>
+            <a:r>
+              <a:rPr lang="en-US" dirty="0"/>
+              <a:t> </a:t>
+            </a:r>
+            <a:r>
+              <a:rPr lang="en-US" dirty="0" err="1"/>
+              <a:t>físico</a:t>
+            </a:r>
+            <a:r>
+              <a:rPr lang="en-US" dirty="0"/>
+              <a:t> (8 </a:t>
+            </a:r>
+            <a:r>
+              <a:rPr lang="en-US" dirty="0" err="1"/>
+              <a:t>núcleos</a:t>
+            </a:r>
+            <a:r>
+              <a:rPr lang="en-US" dirty="0"/>
+              <a:t> </a:t>
+            </a:r>
+            <a:r>
+              <a:rPr lang="en-US" dirty="0" err="1"/>
+              <a:t>físicos</a:t>
+            </a:r>
+            <a:r>
+              <a:rPr lang="en-US" dirty="0"/>
+              <a:t> </a:t>
+            </a:r>
+            <a:r>
+              <a:rPr lang="en-US" dirty="0" err="1"/>
+              <a:t>diferentes</a:t>
+            </a:r>
+            <a:endParaRPr lang="en-US" dirty="0"/>
+          </a:p>
+        </p:txBody>
+      </p:sp>
     </p:spTree>
     <p:extLst>
       <p:ext uri="{BB962C8B-B14F-4D97-AF65-F5344CB8AC3E}">
-        <p14:creationId xmlns:p14="http://schemas.microsoft.com/office/powerpoint/2010/main" val="3944873945"/>
+        <p14:creationId xmlns:p14="http://schemas.microsoft.com/office/powerpoint/2010/main" val="2496614450"/>
       </p:ext>
     </p:extLst>
   </p:cSld>
@@ -22591,7 +23162,13 @@
   <p:cSld>
     <p:spTree>
       <p:nvGrpSpPr>
-        <p:cNvPr id="1" name=""/>
+        <p:cNvPr id="1" name="">
+          <a:extLst>
+            <a:ext uri="{FF2B5EF4-FFF2-40B4-BE49-F238E27FC236}">
+              <a16:creationId xmlns:a16="http://schemas.microsoft.com/office/drawing/2014/main" id="{A9175C7B-450D-E415-CCDE-A05A5285C76D}"/>
+            </a:ext>
+          </a:extLst>
+        </p:cNvPr>
         <p:cNvGrpSpPr/>
         <p:nvPr/>
       </p:nvGrpSpPr>
@@ -22605,101 +23182,10 @@
       </p:grpSpPr>
       <p:sp>
         <p:nvSpPr>
-          <p:cNvPr id="2" name="Título 1">
-            <a:extLst>
-              <a:ext uri="{FF2B5EF4-FFF2-40B4-BE49-F238E27FC236}">
-                <a16:creationId xmlns:a16="http://schemas.microsoft.com/office/drawing/2014/main" id="{D638E47E-4525-5948-9638-224C05F4D96E}"/>
-              </a:ext>
-            </a:extLst>
-          </p:cNvPr>
-          <p:cNvSpPr>
-            <a:spLocks noGrp="1"/>
-          </p:cNvSpPr>
-          <p:nvPr>
-            <p:ph type="title"/>
-          </p:nvPr>
-        </p:nvSpPr>
-        <p:spPr/>
-        <p:txBody>
-          <a:bodyPr/>
-          <a:lstStyle/>
-          <a:p>
-            <a:r>
-              <a:rPr lang="en-US" dirty="0" err="1"/>
-              <a:t>Justificativa</a:t>
-            </a:r>
-            <a:r>
-              <a:rPr lang="en-US" dirty="0"/>
-              <a:t> das </a:t>
-            </a:r>
-            <a:r>
-              <a:rPr lang="en-US" dirty="0" err="1"/>
-              <a:t>escolhas</a:t>
-            </a:r>
-            <a:endParaRPr lang="pt-BR" dirty="0"/>
-          </a:p>
-        </p:txBody>
-      </p:sp>
-      <p:sp>
-        <p:nvSpPr>
-          <p:cNvPr id="3" name="Espaço Reservado para Conteúdo 2">
-            <a:extLst>
-              <a:ext uri="{FF2B5EF4-FFF2-40B4-BE49-F238E27FC236}">
-                <a16:creationId xmlns:a16="http://schemas.microsoft.com/office/drawing/2014/main" id="{8FC21D6B-2336-E263-BDBC-703F4DCAC887}"/>
-              </a:ext>
-            </a:extLst>
-          </p:cNvPr>
-          <p:cNvSpPr>
-            <a:spLocks noGrp="1"/>
-          </p:cNvSpPr>
-          <p:nvPr>
-            <p:ph idx="1"/>
-          </p:nvPr>
-        </p:nvSpPr>
-        <p:spPr/>
-        <p:txBody>
-          <a:bodyPr/>
-          <a:lstStyle/>
-          <a:p>
-            <a:r>
-              <a:rPr lang="pt-BR" dirty="0"/>
-              <a:t>Objeto computacional</a:t>
-            </a:r>
-          </a:p>
-          <a:p>
-            <a:pPr lvl="1"/>
-            <a:r>
-              <a:rPr lang="pt-BR" dirty="0"/>
-              <a:t>A escolha das duas cargas computacionais ocorreu, pois possuem implementações paralelas que permitirão sua análise em ambiente de multiprocessamento.</a:t>
-            </a:r>
-          </a:p>
-          <a:p>
-            <a:endParaRPr lang="pt-BR" dirty="0"/>
-          </a:p>
-          <a:p>
-            <a:r>
-              <a:rPr lang="pt-BR" dirty="0"/>
-              <a:t>Método</a:t>
-            </a:r>
-          </a:p>
-          <a:p>
-            <a:pPr lvl="1"/>
-            <a:r>
-              <a:rPr lang="pt-BR" dirty="0"/>
-              <a:t>Escolha do método de medição, visto que há acesso a um hardware que permita a execução de scripts para análise.</a:t>
-            </a:r>
-          </a:p>
-          <a:p>
-            <a:endParaRPr lang="pt-BR" dirty="0"/>
-          </a:p>
-        </p:txBody>
-      </p:sp>
-      <p:sp>
-        <p:nvSpPr>
           <p:cNvPr id="4" name="Espaço Reservado para Número de Slide 3">
             <a:extLst>
               <a:ext uri="{FF2B5EF4-FFF2-40B4-BE49-F238E27FC236}">
-                <a16:creationId xmlns:a16="http://schemas.microsoft.com/office/drawing/2014/main" id="{890B1DEA-6926-6415-EAB6-7D74B8855D39}"/>
+                <a16:creationId xmlns:a16="http://schemas.microsoft.com/office/drawing/2014/main" id="{C228148B-6DCE-57B8-0387-984DAC63CCB5}"/>
               </a:ext>
             </a:extLst>
           </p:cNvPr>
@@ -22723,10 +23209,95 @@
           </a:p>
         </p:txBody>
       </p:sp>
+      <p:pic>
+        <p:nvPicPr>
+          <p:cNvPr id="8" name="Espaço Reservado para Conteúdo 7" descr="Gráfico, Gráfico de barras&#10;&#10;O conteúdo gerado por IA pode estar incorreto.">
+            <a:extLst>
+              <a:ext uri="{FF2B5EF4-FFF2-40B4-BE49-F238E27FC236}">
+                <a16:creationId xmlns:a16="http://schemas.microsoft.com/office/drawing/2014/main" id="{36F05054-8A86-D834-351B-2C9DCBE3C7FD}"/>
+              </a:ext>
+            </a:extLst>
+          </p:cNvPr>
+          <p:cNvPicPr>
+            <a:picLocks noGrp="1" noChangeAspect="1"/>
+          </p:cNvPicPr>
+          <p:nvPr>
+            <p:ph idx="1"/>
+          </p:nvPr>
+        </p:nvPicPr>
+        <p:blipFill>
+          <a:blip r:embed="rId2">
+            <a:extLst>
+              <a:ext uri="{28A0092B-C50C-407E-A947-70E740481C1C}">
+                <a14:useLocalDpi xmlns:a14="http://schemas.microsoft.com/office/drawing/2010/main" val="0"/>
+              </a:ext>
+            </a:extLst>
+          </a:blip>
+          <a:stretch>
+            <a:fillRect/>
+          </a:stretch>
+        </p:blipFill>
+        <p:spPr>
+          <a:xfrm>
+            <a:off x="478971" y="349259"/>
+            <a:ext cx="9827078" cy="6372216"/>
+          </a:xfrm>
+        </p:spPr>
+      </p:pic>
+      <p:sp>
+        <p:nvSpPr>
+          <p:cNvPr id="6" name="CaixaDeTexto 5">
+            <a:extLst>
+              <a:ext uri="{FF2B5EF4-FFF2-40B4-BE49-F238E27FC236}">
+                <a16:creationId xmlns:a16="http://schemas.microsoft.com/office/drawing/2014/main" id="{952F2D54-3EB1-C81D-9007-7A7DC94C1C92}"/>
+              </a:ext>
+            </a:extLst>
+          </p:cNvPr>
+          <p:cNvSpPr txBox="1"/>
+          <p:nvPr/>
+        </p:nvSpPr>
+        <p:spPr>
+          <a:xfrm>
+            <a:off x="10306050" y="2891140"/>
+            <a:ext cx="1823186" cy="923330"/>
+          </a:xfrm>
+          <a:prstGeom prst="rect">
+            <a:avLst/>
+          </a:prstGeom>
+          <a:noFill/>
+        </p:spPr>
+        <p:txBody>
+          <a:bodyPr wrap="square" rtlCol="0">
+            <a:spAutoFit/>
+          </a:bodyPr>
+          <a:lstStyle/>
+          <a:p>
+            <a:pPr marL="285750" indent="-285750">
+              <a:buFont typeface="Arial" panose="020B0604020202020204" pitchFamily="34" charset="0"/>
+              <a:buChar char="•"/>
+            </a:pPr>
+            <a:r>
+              <a:rPr lang="en-US" dirty="0"/>
+              <a:t>8 threads</a:t>
+            </a:r>
+          </a:p>
+          <a:p>
+            <a:pPr marL="285750" indent="-285750">
+              <a:buFont typeface="Arial" panose="020B0604020202020204" pitchFamily="34" charset="0"/>
+              <a:buChar char="•"/>
+            </a:pPr>
+            <a:r>
+              <a:rPr lang="en-US" dirty="0"/>
+              <a:t>Matrix size: (4000,4000)</a:t>
+            </a:r>
+            <a:endParaRPr lang="pt-BR" dirty="0"/>
+          </a:p>
+        </p:txBody>
+      </p:sp>
     </p:spTree>
     <p:extLst>
       <p:ext uri="{BB962C8B-B14F-4D97-AF65-F5344CB8AC3E}">
-        <p14:creationId xmlns:p14="http://schemas.microsoft.com/office/powerpoint/2010/main" val="939074047"/>
+        <p14:creationId xmlns:p14="http://schemas.microsoft.com/office/powerpoint/2010/main" val="3745213728"/>
       </p:ext>
     </p:extLst>
   </p:cSld>
@@ -22741,7 +23312,13 @@
   <p:cSld>
     <p:spTree>
       <p:nvGrpSpPr>
-        <p:cNvPr id="1" name=""/>
+        <p:cNvPr id="1" name="">
+          <a:extLst>
+            <a:ext uri="{FF2B5EF4-FFF2-40B4-BE49-F238E27FC236}">
+              <a16:creationId xmlns:a16="http://schemas.microsoft.com/office/drawing/2014/main" id="{DB11668E-0075-013A-16DE-8AC4320CA69E}"/>
+            </a:ext>
+          </a:extLst>
+        </p:cNvPr>
         <p:cNvGrpSpPr/>
         <p:nvPr/>
       </p:nvGrpSpPr>
@@ -22758,7 +23335,7 @@
           <p:cNvPr id="2" name="Título 1">
             <a:extLst>
               <a:ext uri="{FF2B5EF4-FFF2-40B4-BE49-F238E27FC236}">
-                <a16:creationId xmlns:a16="http://schemas.microsoft.com/office/drawing/2014/main" id="{A66112D4-7AEF-8961-9586-ABE3196D77CD}"/>
+                <a16:creationId xmlns:a16="http://schemas.microsoft.com/office/drawing/2014/main" id="{67550447-B55F-B687-0291-F4DAA1DB708E}"/>
               </a:ext>
             </a:extLst>
           </p:cNvPr>
@@ -22776,7 +23353,7 @@
           <a:p>
             <a:r>
               <a:rPr lang="en-US" dirty="0" err="1"/>
-              <a:t>Cronograma</a:t>
+              <a:t>Dificuldades</a:t>
             </a:r>
             <a:r>
               <a:rPr lang="en-US" dirty="0"/>
@@ -22784,48 +23361,207 @@
             </a:r>
             <a:r>
               <a:rPr lang="en-US" dirty="0" err="1"/>
-              <a:t>preliminar</a:t>
+              <a:t>encontradas</a:t>
             </a:r>
             <a:endParaRPr lang="pt-BR" dirty="0"/>
           </a:p>
         </p:txBody>
       </p:sp>
-      <p:pic>
-        <p:nvPicPr>
-          <p:cNvPr id="9" name="Imagem 8">
-            <a:extLst>
-              <a:ext uri="{FF2B5EF4-FFF2-40B4-BE49-F238E27FC236}">
-                <a16:creationId xmlns:a16="http://schemas.microsoft.com/office/drawing/2014/main" id="{6EFCAF29-4DCD-E7C0-2352-0522D143317F}"/>
-              </a:ext>
-            </a:extLst>
-          </p:cNvPr>
-          <p:cNvPicPr>
-            <a:picLocks noChangeAspect="1"/>
-          </p:cNvPicPr>
-          <p:nvPr/>
-        </p:nvPicPr>
-        <p:blipFill>
-          <a:blip r:embed="rId2"/>
-          <a:stretch>
-            <a:fillRect/>
-          </a:stretch>
-        </p:blipFill>
-        <p:spPr>
-          <a:xfrm>
-            <a:off x="406175" y="1863408"/>
-            <a:ext cx="11379650" cy="4263072"/>
-          </a:xfrm>
-          <a:prstGeom prst="rect">
-            <a:avLst/>
-          </a:prstGeom>
-        </p:spPr>
-      </p:pic>
-      <p:sp>
-        <p:nvSpPr>
-          <p:cNvPr id="10" name="Espaço Reservado para Número de Slide 9">
-            <a:extLst>
-              <a:ext uri="{FF2B5EF4-FFF2-40B4-BE49-F238E27FC236}">
-                <a16:creationId xmlns:a16="http://schemas.microsoft.com/office/drawing/2014/main" id="{B80C17B3-F507-5C11-B4B7-9D827CD9B26D}"/>
+      <p:sp>
+        <p:nvSpPr>
+          <p:cNvPr id="3" name="Espaço Reservado para Conteúdo 2">
+            <a:extLst>
+              <a:ext uri="{FF2B5EF4-FFF2-40B4-BE49-F238E27FC236}">
+                <a16:creationId xmlns:a16="http://schemas.microsoft.com/office/drawing/2014/main" id="{4AAF4232-2E11-F2F3-791D-DA4834D46694}"/>
+              </a:ext>
+            </a:extLst>
+          </p:cNvPr>
+          <p:cNvSpPr>
+            <a:spLocks noGrp="1"/>
+          </p:cNvSpPr>
+          <p:nvPr>
+            <p:ph idx="1"/>
+          </p:nvPr>
+        </p:nvSpPr>
+        <p:spPr/>
+        <p:txBody>
+          <a:bodyPr>
+            <a:normAutofit/>
+          </a:bodyPr>
+          <a:lstStyle/>
+          <a:p>
+            <a:r>
+              <a:rPr lang="en-US" dirty="0"/>
+              <a:t>Turbo Boost </a:t>
+            </a:r>
+            <a:r>
+              <a:rPr lang="en-US" dirty="0" err="1"/>
+              <a:t>desabilitado</a:t>
+            </a:r>
+            <a:r>
+              <a:rPr lang="en-US" dirty="0"/>
+              <a:t> </a:t>
+            </a:r>
+            <a:r>
+              <a:rPr lang="en-US" dirty="0" err="1"/>
+              <a:t>apresentou</a:t>
+            </a:r>
+            <a:r>
+              <a:rPr lang="en-US" dirty="0"/>
+              <a:t> </a:t>
+            </a:r>
+            <a:r>
+              <a:rPr lang="en-US" dirty="0" err="1"/>
+              <a:t>limitação</a:t>
+            </a:r>
+            <a:r>
+              <a:rPr lang="en-US" dirty="0"/>
+              <a:t> de </a:t>
+            </a:r>
+            <a:r>
+              <a:rPr lang="en-US" dirty="0" err="1"/>
+              <a:t>frequência</a:t>
+            </a:r>
+            <a:r>
+              <a:rPr lang="en-US" dirty="0"/>
+              <a:t> </a:t>
+            </a:r>
+            <a:r>
+              <a:rPr lang="en-US" dirty="0" err="1"/>
+              <a:t>máxima</a:t>
+            </a:r>
+            <a:endParaRPr lang="en-US" dirty="0"/>
+          </a:p>
+          <a:p>
+            <a:pPr lvl="1"/>
+            <a:r>
+              <a:rPr lang="en-US" dirty="0"/>
+              <a:t>Gera </a:t>
+            </a:r>
+            <a:r>
+              <a:rPr lang="en-US" dirty="0" err="1"/>
+              <a:t>impacto</a:t>
+            </a:r>
+            <a:r>
+              <a:rPr lang="en-US" dirty="0"/>
+              <a:t> </a:t>
+            </a:r>
+            <a:r>
+              <a:rPr lang="en-US" b="1" dirty="0" err="1"/>
+              <a:t>relevante</a:t>
+            </a:r>
+            <a:r>
+              <a:rPr lang="en-US" dirty="0"/>
+              <a:t> </a:t>
+            </a:r>
+            <a:r>
+              <a:rPr lang="en-US" dirty="0" err="1"/>
+              <a:t>nas</a:t>
+            </a:r>
+            <a:r>
+              <a:rPr lang="en-US" dirty="0"/>
+              <a:t> </a:t>
+            </a:r>
+            <a:r>
+              <a:rPr lang="en-US" dirty="0" err="1"/>
+              <a:t>observações</a:t>
+            </a:r>
+            <a:endParaRPr lang="en-US" dirty="0"/>
+          </a:p>
+          <a:p>
+            <a:pPr lvl="1"/>
+            <a:endParaRPr lang="en-US" dirty="0"/>
+          </a:p>
+          <a:p>
+            <a:r>
+              <a:rPr lang="en-US" dirty="0" err="1"/>
+              <a:t>Fixar</a:t>
+            </a:r>
+            <a:r>
+              <a:rPr lang="en-US" dirty="0"/>
+              <a:t> </a:t>
+            </a:r>
+            <a:r>
+              <a:rPr lang="en-US" dirty="0" err="1"/>
+              <a:t>frequência</a:t>
+            </a:r>
+            <a:r>
+              <a:rPr lang="en-US" dirty="0"/>
+              <a:t> </a:t>
+            </a:r>
+            <a:r>
+              <a:rPr lang="en-US" dirty="0" err="1"/>
+              <a:t>acima</a:t>
+            </a:r>
+            <a:r>
+              <a:rPr lang="en-US" dirty="0"/>
+              <a:t> da </a:t>
+            </a:r>
+            <a:r>
+              <a:rPr lang="en-US" dirty="0" err="1"/>
+              <a:t>frequência</a:t>
+            </a:r>
+            <a:r>
+              <a:rPr lang="en-US" dirty="0"/>
+              <a:t> base com Turbo Boost </a:t>
+            </a:r>
+            <a:r>
+              <a:rPr lang="en-US" dirty="0" err="1"/>
+              <a:t>desativado</a:t>
+            </a:r>
+            <a:endParaRPr lang="en-US" dirty="0"/>
+          </a:p>
+          <a:p>
+            <a:pPr lvl="1"/>
+            <a:r>
+              <a:rPr lang="en-US" dirty="0">
+                <a:highlight>
+                  <a:srgbClr val="FFFF00"/>
+                </a:highlight>
+              </a:rPr>
+              <a:t>Pendente</a:t>
+            </a:r>
+          </a:p>
+          <a:p>
+            <a:pPr lvl="1"/>
+            <a:endParaRPr lang="en-US" dirty="0">
+              <a:highlight>
+                <a:srgbClr val="FFFF00"/>
+              </a:highlight>
+            </a:endParaRPr>
+          </a:p>
+          <a:p>
+            <a:r>
+              <a:rPr lang="en-US" dirty="0" err="1"/>
+              <a:t>Utilização</a:t>
+            </a:r>
+            <a:r>
+              <a:rPr lang="en-US" dirty="0"/>
+              <a:t> do GUIX</a:t>
+            </a:r>
+          </a:p>
+          <a:p>
+            <a:pPr lvl="1"/>
+            <a:r>
+              <a:rPr lang="en-US" dirty="0">
+                <a:highlight>
+                  <a:srgbClr val="FFFF00"/>
+                </a:highlight>
+              </a:rPr>
+              <a:t>Pendente</a:t>
+            </a:r>
+          </a:p>
+          <a:p>
+            <a:endParaRPr lang="pt-BR" b="1" dirty="0"/>
+          </a:p>
+        </p:txBody>
+      </p:sp>
+      <p:sp>
+        <p:nvSpPr>
+          <p:cNvPr id="4" name="Espaço Reservado para Número de Slide 3">
+            <a:extLst>
+              <a:ext uri="{FF2B5EF4-FFF2-40B4-BE49-F238E27FC236}">
+                <a16:creationId xmlns:a16="http://schemas.microsoft.com/office/drawing/2014/main" id="{6B413FFD-B1A9-257B-7C4D-C8ACC2B23E6C}"/>
               </a:ext>
             </a:extLst>
           </p:cNvPr>
@@ -22852,7 +23588,7 @@
     </p:spTree>
     <p:extLst>
       <p:ext uri="{BB962C8B-B14F-4D97-AF65-F5344CB8AC3E}">
-        <p14:creationId xmlns:p14="http://schemas.microsoft.com/office/powerpoint/2010/main" val="1117785298"/>
+        <p14:creationId xmlns:p14="http://schemas.microsoft.com/office/powerpoint/2010/main" val="3072866178"/>
       </p:ext>
     </p:extLst>
   </p:cSld>
@@ -22927,7 +23663,7 @@
         <p:spPr/>
         <p:txBody>
           <a:bodyPr>
-            <a:normAutofit/>
+            <a:normAutofit fontScale="77500" lnSpcReduction="20000"/>
           </a:bodyPr>
           <a:lstStyle/>
           <a:p>
@@ -22965,7 +23701,22 @@
           <a:p>
             <a:r>
               <a:rPr lang="en-US" dirty="0"/>
-              <a:t>Teste de </a:t>
+              <a:t>Hardware: </a:t>
+            </a:r>
+            <a:r>
+              <a:rPr lang="en-US" dirty="0" err="1"/>
+              <a:t>Limitações</a:t>
+            </a:r>
+            <a:endParaRPr lang="en-US" dirty="0"/>
+          </a:p>
+          <a:p>
+            <a:r>
+              <a:rPr lang="en-US" dirty="0" err="1"/>
+              <a:t>Limites</a:t>
+            </a:r>
+            <a:r>
+              <a:rPr lang="en-US" dirty="0"/>
+              <a:t> de </a:t>
             </a:r>
             <a:r>
               <a:rPr lang="en-US" dirty="0" err="1"/>
@@ -22975,6 +23726,92 @@
               <a:rPr lang="en-US" dirty="0"/>
               <a:t> de CPU</a:t>
             </a:r>
+          </a:p>
+          <a:p>
+            <a:r>
+              <a:rPr lang="en-US" dirty="0"/>
+              <a:t>Teste de </a:t>
+            </a:r>
+            <a:r>
+              <a:rPr lang="en-US" dirty="0" err="1"/>
+              <a:t>Frequência</a:t>
+            </a:r>
+            <a:r>
+              <a:rPr lang="en-US" dirty="0"/>
+              <a:t> de CPU</a:t>
+            </a:r>
+          </a:p>
+          <a:p>
+            <a:r>
+              <a:rPr lang="en-US" dirty="0" err="1"/>
+              <a:t>Ambiente</a:t>
+            </a:r>
+            <a:r>
+              <a:rPr lang="en-US" dirty="0"/>
+              <a:t> de Testes</a:t>
+            </a:r>
+          </a:p>
+          <a:p>
+            <a:r>
+              <a:rPr lang="en-US" dirty="0" err="1"/>
+              <a:t>Execução</a:t>
+            </a:r>
+            <a:r>
+              <a:rPr lang="en-US" dirty="0"/>
+              <a:t> de Testes e </a:t>
+            </a:r>
+            <a:r>
+              <a:rPr lang="en-US" dirty="0" err="1"/>
+              <a:t>Geração</a:t>
+            </a:r>
+            <a:r>
+              <a:rPr lang="en-US" dirty="0"/>
+              <a:t> de Dados</a:t>
+            </a:r>
+          </a:p>
+          <a:p>
+            <a:r>
+              <a:rPr lang="en-US" dirty="0" err="1"/>
+              <a:t>Resultados</a:t>
+            </a:r>
+            <a:r>
+              <a:rPr lang="en-US" dirty="0"/>
+              <a:t> </a:t>
+            </a:r>
+            <a:r>
+              <a:rPr lang="en-US" dirty="0" err="1"/>
+              <a:t>Preliminares</a:t>
+            </a:r>
+            <a:endParaRPr lang="en-US" dirty="0"/>
+          </a:p>
+          <a:p>
+            <a:r>
+              <a:rPr lang="en-US" dirty="0" err="1"/>
+              <a:t>Dificuldades</a:t>
+            </a:r>
+            <a:r>
+              <a:rPr lang="en-US" dirty="0"/>
+              <a:t> </a:t>
+            </a:r>
+            <a:r>
+              <a:rPr lang="en-US" dirty="0" err="1"/>
+              <a:t>Encontradas</a:t>
+            </a:r>
+            <a:endParaRPr lang="en-US" dirty="0"/>
+          </a:p>
+          <a:p>
+            <a:r>
+              <a:rPr lang="en-US" dirty="0" err="1"/>
+              <a:t>Cronograma</a:t>
+            </a:r>
+            <a:endParaRPr lang="en-US" dirty="0"/>
+          </a:p>
+          <a:p>
+            <a:r>
+              <a:rPr lang="en-US" dirty="0" err="1"/>
+              <a:t>Referências</a:t>
+            </a:r>
+            <a:endParaRPr lang="en-US" dirty="0"/>
           </a:p>
           <a:p>
             <a:endParaRPr lang="pt-BR" dirty="0"/>
@@ -23045,7 +23882,7 @@
           <p:cNvPr id="2" name="Título 1">
             <a:extLst>
               <a:ext uri="{FF2B5EF4-FFF2-40B4-BE49-F238E27FC236}">
-                <a16:creationId xmlns:a16="http://schemas.microsoft.com/office/drawing/2014/main" id="{D4077F69-9DD3-B8A0-3252-7B6141DB285B}"/>
+                <a16:creationId xmlns:a16="http://schemas.microsoft.com/office/drawing/2014/main" id="{A66112D4-7AEF-8961-9586-ABE3196D77CD}"/>
               </a:ext>
             </a:extLst>
           </p:cNvPr>
@@ -23063,195 +23900,48 @@
           <a:p>
             <a:r>
               <a:rPr lang="en-US" dirty="0" err="1"/>
-              <a:t>Referências</a:t>
+              <a:t>Cronograma</a:t>
             </a:r>
             <a:endParaRPr lang="pt-BR" dirty="0"/>
           </a:p>
         </p:txBody>
       </p:sp>
-      <p:sp>
-        <p:nvSpPr>
-          <p:cNvPr id="3" name="Espaço Reservado para Conteúdo 2">
-            <a:extLst>
-              <a:ext uri="{FF2B5EF4-FFF2-40B4-BE49-F238E27FC236}">
-                <a16:creationId xmlns:a16="http://schemas.microsoft.com/office/drawing/2014/main" id="{06E409B8-D47B-AAF7-986E-43C23519D4D4}"/>
-              </a:ext>
-            </a:extLst>
-          </p:cNvPr>
-          <p:cNvSpPr>
-            <a:spLocks noGrp="1"/>
-          </p:cNvSpPr>
-          <p:nvPr>
-            <p:ph idx="1"/>
-          </p:nvPr>
-        </p:nvSpPr>
-        <p:spPr/>
-        <p:txBody>
-          <a:bodyPr>
-            <a:normAutofit/>
-          </a:bodyPr>
-          <a:lstStyle/>
-          <a:p>
-            <a:pPr marL="342900" indent="-342900">
-              <a:buAutoNum type="arabicPeriod"/>
-            </a:pPr>
-            <a:r>
-              <a:rPr lang="pt-BR" sz="1800" dirty="0"/>
-              <a:t>Como os Processadores Intel® Core™ Funcionam. </a:t>
-            </a:r>
-            <a:r>
-              <a:rPr lang="en-US" sz="1800" dirty="0"/>
-              <a:t> </a:t>
-            </a:r>
-            <a:r>
-              <a:rPr lang="en-US" sz="1800" dirty="0">
-                <a:hlinkClick r:id="rId2"/>
-              </a:rPr>
-              <a:t>https://www.intel.com.br/content/www/br/pt/gaming/resources/how-hybrid-design-works.html</a:t>
-            </a:r>
-            <a:endParaRPr lang="en-US" sz="1800" dirty="0"/>
-          </a:p>
-          <a:p>
-            <a:pPr marL="342900" indent="-342900">
-              <a:buAutoNum type="arabicPeriod"/>
-            </a:pPr>
-            <a:r>
-              <a:rPr lang="pt-BR" sz="1800" dirty="0"/>
-              <a:t>Produtos com denominação anterior Raptor Lake. </a:t>
-            </a:r>
-            <a:r>
-              <a:rPr lang="en-US" sz="1800" dirty="0">
-                <a:hlinkClick r:id="rId3"/>
-              </a:rPr>
-              <a:t>https://www.intel.com.br/content/www/br/pt/ark/products/codename/215599/products-formerly-raptor-lake.html#@Desktop</a:t>
-            </a:r>
-            <a:endParaRPr lang="en-US" sz="1800" dirty="0"/>
-          </a:p>
-          <a:p>
-            <a:pPr marL="342900" indent="-342900">
-              <a:buFont typeface="Arial" panose="020B0604020202020204" pitchFamily="34" charset="0"/>
-              <a:buAutoNum type="arabicPeriod"/>
-            </a:pPr>
-            <a:r>
-              <a:rPr lang="en-US" sz="1800" dirty="0"/>
-              <a:t>What Is Hyper-Threading? </a:t>
-            </a:r>
-            <a:r>
-              <a:rPr lang="en-US" sz="1800" dirty="0">
-                <a:hlinkClick r:id="rId4"/>
-              </a:rPr>
-              <a:t>https://www.intel.com/content/www/us/en/gaming/resources/hyper-threading.html</a:t>
-            </a:r>
-            <a:endParaRPr lang="en-US" sz="1800" dirty="0"/>
-          </a:p>
-          <a:p>
-            <a:pPr marL="342900" indent="-342900">
-              <a:buAutoNum type="arabicPeriod"/>
-            </a:pPr>
-            <a:r>
-              <a:rPr lang="pt-BR" sz="1800" dirty="0"/>
-              <a:t>O que é e como funciona o Thread </a:t>
-            </a:r>
-            <a:r>
-              <a:rPr lang="pt-BR" sz="1800" dirty="0" err="1"/>
-              <a:t>Director</a:t>
-            </a:r>
-            <a:r>
-              <a:rPr lang="pt-BR" sz="1800" dirty="0"/>
-              <a:t> da Intel? </a:t>
-            </a:r>
-            <a:r>
-              <a:rPr lang="en-US" sz="1800" dirty="0">
-                <a:hlinkClick r:id="rId5"/>
-              </a:rPr>
-              <a:t>https://canaltech.com.br/hardware/o-que-e-e-como-funciona-o-thread-director-da-intel/</a:t>
-            </a:r>
-            <a:endParaRPr lang="en-US" sz="1800" dirty="0"/>
-          </a:p>
-          <a:p>
-            <a:pPr marL="342900" indent="-342900">
-              <a:buAutoNum type="arabicPeriod"/>
-            </a:pPr>
-            <a:r>
-              <a:rPr lang="pt-BR" sz="1800" dirty="0"/>
-              <a:t>Compreendendo os modos de criptografia AES: AES-GCM, AES-CBC, AES-CTR. </a:t>
-            </a:r>
-            <a:r>
-              <a:rPr lang="en-US" sz="1800" dirty="0">
-                <a:hlinkClick r:id="rId6"/>
-              </a:rPr>
-              <a:t>https://www.haikel-fazzani.eu.org/blog/post/aes-encryption-modes-gcm-cbc-ctr</a:t>
-            </a:r>
-            <a:endParaRPr lang="en-US" sz="1800" dirty="0"/>
-          </a:p>
-          <a:p>
-            <a:pPr marL="342900" indent="-342900">
-              <a:buAutoNum type="arabicPeriod"/>
-            </a:pPr>
-            <a:r>
-              <a:rPr lang="en-US" sz="1800" dirty="0" err="1"/>
-              <a:t>PyCryptodome’s</a:t>
-            </a:r>
-            <a:r>
-              <a:rPr lang="en-US" sz="1800" dirty="0"/>
-              <a:t> documentation. </a:t>
-            </a:r>
-            <a:r>
-              <a:rPr lang="en-US" sz="1800" dirty="0">
-                <a:hlinkClick r:id="rId7"/>
-              </a:rPr>
-              <a:t>https://www.pycryptodome.org/</a:t>
-            </a:r>
-            <a:endParaRPr lang="en-US" sz="1800" dirty="0"/>
-          </a:p>
-          <a:p>
-            <a:pPr marL="342900" indent="-342900">
-              <a:buAutoNum type="arabicPeriod"/>
-            </a:pPr>
-            <a:r>
-              <a:rPr lang="pt-BR" sz="1800" dirty="0"/>
-              <a:t>Algoritmo de multiplicação de matrizes. </a:t>
-            </a:r>
-            <a:r>
-              <a:rPr lang="en-US" sz="1800" dirty="0">
-                <a:hlinkClick r:id="rId8"/>
-              </a:rPr>
-              <a:t>https://en.wikipedia.org/wiki/Matrix_multiplication_algorithm</a:t>
-            </a:r>
-            <a:endParaRPr lang="en-US" sz="1800" dirty="0"/>
-          </a:p>
-          <a:p>
-            <a:pPr marL="342900" indent="-342900">
-              <a:buAutoNum type="arabicPeriod"/>
-            </a:pPr>
-            <a:endParaRPr lang="en-US" sz="1800" dirty="0"/>
-          </a:p>
-          <a:p>
-            <a:pPr marL="342900" indent="-342900">
-              <a:buAutoNum type="arabicPeriod"/>
-            </a:pPr>
-            <a:endParaRPr lang="en-US" sz="1800" dirty="0"/>
-          </a:p>
-          <a:p>
-            <a:pPr marL="342900" indent="-342900">
-              <a:buAutoNum type="arabicPeriod"/>
-            </a:pPr>
-            <a:endParaRPr lang="en-US" sz="1800" dirty="0"/>
-          </a:p>
-          <a:p>
-            <a:pPr marL="342900" indent="-342900">
-              <a:buAutoNum type="arabicPeriod"/>
-            </a:pPr>
-            <a:endParaRPr lang="pt-BR" sz="1800" dirty="0"/>
-          </a:p>
-        </p:txBody>
-      </p:sp>
-      <p:sp>
-        <p:nvSpPr>
-          <p:cNvPr id="4" name="Espaço Reservado para Número de Slide 3">
-            <a:extLst>
-              <a:ext uri="{FF2B5EF4-FFF2-40B4-BE49-F238E27FC236}">
-                <a16:creationId xmlns:a16="http://schemas.microsoft.com/office/drawing/2014/main" id="{B6363A04-88A9-FC99-A07C-58A6BA917481}"/>
+      <p:pic>
+        <p:nvPicPr>
+          <p:cNvPr id="9" name="Imagem 8">
+            <a:extLst>
+              <a:ext uri="{FF2B5EF4-FFF2-40B4-BE49-F238E27FC236}">
+                <a16:creationId xmlns:a16="http://schemas.microsoft.com/office/drawing/2014/main" id="{6EFCAF29-4DCD-E7C0-2352-0522D143317F}"/>
+              </a:ext>
+            </a:extLst>
+          </p:cNvPr>
+          <p:cNvPicPr>
+            <a:picLocks noChangeAspect="1"/>
+          </p:cNvPicPr>
+          <p:nvPr/>
+        </p:nvPicPr>
+        <p:blipFill>
+          <a:blip r:embed="rId2"/>
+          <a:stretch>
+            <a:fillRect/>
+          </a:stretch>
+        </p:blipFill>
+        <p:spPr>
+          <a:xfrm>
+            <a:off x="406175" y="1863408"/>
+            <a:ext cx="11379650" cy="4263072"/>
+          </a:xfrm>
+          <a:prstGeom prst="rect">
+            <a:avLst/>
+          </a:prstGeom>
+        </p:spPr>
+      </p:pic>
+      <p:sp>
+        <p:nvSpPr>
+          <p:cNvPr id="10" name="Espaço Reservado para Número de Slide 9">
+            <a:extLst>
+              <a:ext uri="{FF2B5EF4-FFF2-40B4-BE49-F238E27FC236}">
+                <a16:creationId xmlns:a16="http://schemas.microsoft.com/office/drawing/2014/main" id="{B80C17B3-F507-5C11-B4B7-9D827CD9B26D}"/>
               </a:ext>
             </a:extLst>
           </p:cNvPr>
@@ -23278,7 +23968,7 @@
     </p:spTree>
     <p:extLst>
       <p:ext uri="{BB962C8B-B14F-4D97-AF65-F5344CB8AC3E}">
-        <p14:creationId xmlns:p14="http://schemas.microsoft.com/office/powerpoint/2010/main" val="676808302"/>
+        <p14:creationId xmlns:p14="http://schemas.microsoft.com/office/powerpoint/2010/main" val="1117785298"/>
       </p:ext>
     </p:extLst>
   </p:cSld>
@@ -23293,13 +23983,7 @@
   <p:cSld>
     <p:spTree>
       <p:nvGrpSpPr>
-        <p:cNvPr id="1" name="">
-          <a:extLst>
-            <a:ext uri="{FF2B5EF4-FFF2-40B4-BE49-F238E27FC236}">
-              <a16:creationId xmlns:a16="http://schemas.microsoft.com/office/drawing/2014/main" id="{18B882B3-D24E-9133-EA18-32641288DD2B}"/>
-            </a:ext>
-          </a:extLst>
-        </p:cNvPr>
+        <p:cNvPr id="1" name=""/>
         <p:cNvGrpSpPr/>
         <p:nvPr/>
       </p:nvGrpSpPr>
@@ -23316,7 +24000,7 @@
           <p:cNvPr id="2" name="Título 1">
             <a:extLst>
               <a:ext uri="{FF2B5EF4-FFF2-40B4-BE49-F238E27FC236}">
-                <a16:creationId xmlns:a16="http://schemas.microsoft.com/office/drawing/2014/main" id="{09CC42A0-416B-A2AF-136A-5D1309826582}"/>
+                <a16:creationId xmlns:a16="http://schemas.microsoft.com/office/drawing/2014/main" id="{D4077F69-9DD3-B8A0-3252-7B6141DB285B}"/>
               </a:ext>
             </a:extLst>
           </p:cNvPr>
@@ -23345,7 +24029,7 @@
           <p:cNvPr id="3" name="Espaço Reservado para Conteúdo 2">
             <a:extLst>
               <a:ext uri="{FF2B5EF4-FFF2-40B4-BE49-F238E27FC236}">
-                <a16:creationId xmlns:a16="http://schemas.microsoft.com/office/drawing/2014/main" id="{9FDB5994-0076-8712-9A3A-F8EB5823C68A}"/>
+                <a16:creationId xmlns:a16="http://schemas.microsoft.com/office/drawing/2014/main" id="{06E409B8-D47B-AAF7-986E-43C23519D4D4}"/>
               </a:ext>
             </a:extLst>
           </p:cNvPr>
@@ -23365,150 +24049,72 @@
           <a:p>
             <a:pPr marL="342900" indent="-342900">
               <a:buFont typeface="+mj-lt"/>
-              <a:buAutoNum type="arabicPeriod" startAt="8"/>
+              <a:buAutoNum type="arabicPeriod"/>
             </a:pPr>
             <a:r>
-              <a:rPr lang="en-US" sz="1800" dirty="0" err="1"/>
-              <a:t>Dask</a:t>
-            </a:r>
-            <a:r>
-              <a:rPr lang="en-US" sz="1800" dirty="0"/>
-              <a:t>. </a:t>
-            </a:r>
-            <a:r>
-              <a:rPr lang="en-US" sz="1800" dirty="0">
+              <a:rPr lang="en-US" sz="1800" b="1" dirty="0"/>
+              <a:t>How Intel Technologies Boost Your CPU’s Performance: </a:t>
+            </a:r>
+            <a:r>
+              <a:rPr lang="pt-BR" sz="1800" dirty="0">
                 <a:hlinkClick r:id="rId2"/>
               </a:rPr>
-              <a:t>https://www.dask.org/</a:t>
-            </a:r>
-            <a:endParaRPr lang="en-US" sz="1800" dirty="0"/>
+              <a:t>https://www.intel.com/content/www/us/en/gaming/resources/how-intel-technologies-boost-cpu-performance.html</a:t>
+            </a:r>
+            <a:endParaRPr lang="pt-BR" sz="1800" dirty="0"/>
           </a:p>
           <a:p>
             <a:pPr marL="342900" indent="-342900">
               <a:buFont typeface="+mj-lt"/>
-              <a:buAutoNum type="arabicPeriod" startAt="8"/>
+              <a:buAutoNum type="arabicPeriod"/>
             </a:pPr>
             <a:r>
-              <a:rPr lang="en-US" sz="1800" dirty="0"/>
-              <a:t>Basic Linear Algebra Subprograms. </a:t>
+              <a:rPr lang="pt-BR" sz="1800" b="1" dirty="0"/>
+              <a:t>Processador Intel® Core™ i7 14700T - 33 M de cache, até 5,20 GHz: </a:t>
             </a:r>
             <a:r>
               <a:rPr lang="en-US" sz="1800" dirty="0">
                 <a:hlinkClick r:id="rId3"/>
               </a:rPr>
-              <a:t>https://en.wikipedia.org/wiki/Basic_Linear_Algebra_Subprograms</a:t>
+              <a:t>https://www.intel.com.br/content/www/br/pt/products/sku/236794/intel-core-i7-processor-14700t-33m-cache-up-to-5-20-ghz/specifications.html</a:t>
             </a:r>
             <a:endParaRPr lang="en-US" sz="1800" dirty="0"/>
           </a:p>
           <a:p>
             <a:pPr marL="342900" indent="-342900">
               <a:buFont typeface="+mj-lt"/>
-              <a:buAutoNum type="arabicPeriod" startAt="8"/>
+              <a:buAutoNum type="arabicPeriod"/>
             </a:pPr>
             <a:r>
-              <a:rPr lang="en-US" sz="1800" dirty="0"/>
-              <a:t>CPU </a:t>
-            </a:r>
-            <a:r>
-              <a:rPr lang="en-US" sz="1800" dirty="0" err="1"/>
-              <a:t>Benchmakrs</a:t>
-            </a:r>
-            <a:r>
-              <a:rPr lang="en-US" sz="1800" dirty="0"/>
-              <a:t>. Intel Core i7-14700T. </a:t>
-            </a:r>
-            <a:r>
-              <a:rPr lang="en-US" sz="1800" dirty="0">
+              <a:rPr lang="pt-BR" sz="1800" b="1" dirty="0"/>
+              <a:t>Processador Intel® Core™ i7 14700K  -33 M de cache, até 5,60 GHz: </a:t>
+            </a:r>
+            <a:r>
+              <a:rPr lang="pt-BR" sz="1800" dirty="0">
                 <a:hlinkClick r:id="rId4"/>
               </a:rPr>
-              <a:t>https://www.cpubenchmark.net/cpu.php?cpu=Intel+Core+i7-14700T&amp;id=6112</a:t>
-            </a:r>
-            <a:endParaRPr lang="en-US" sz="1800" dirty="0"/>
+              <a:t>https://www.intel.com.br/content/www/br/pt/products/sku/236783/intel-core-i7-processor-14700k-33m-cache-up-to-5-60-ghz/specifications.html</a:t>
+            </a:r>
+            <a:endParaRPr lang="pt-BR" sz="1800" dirty="0"/>
           </a:p>
           <a:p>
             <a:pPr marL="342900" indent="-342900">
               <a:buFont typeface="+mj-lt"/>
-              <a:buAutoNum type="arabicPeriod" startAt="8"/>
+              <a:buAutoNum type="arabicPeriod"/>
             </a:pPr>
-            <a:r>
-              <a:rPr lang="en-US" sz="1800" dirty="0"/>
-              <a:t>Ubuntu 24.04.3 LTS. </a:t>
-            </a:r>
-            <a:r>
-              <a:rPr lang="en-US" sz="1800" dirty="0">
-                <a:hlinkClick r:id="rId5"/>
-              </a:rPr>
-              <a:t>https://ubuntu.com/download/desktop</a:t>
-            </a:r>
-            <a:endParaRPr lang="en-US" sz="1800" dirty="0"/>
+            <a:endParaRPr lang="pt-BR" sz="1800" dirty="0"/>
           </a:p>
           <a:p>
             <a:pPr marL="342900" indent="-342900">
               <a:buFont typeface="+mj-lt"/>
-              <a:buAutoNum type="arabicPeriod" startAt="8"/>
+              <a:buAutoNum type="arabicPeriod"/>
             </a:pPr>
-            <a:r>
-              <a:rPr lang="en-US" sz="1800" dirty="0"/>
-              <a:t>Dell OptiPlex Micro </a:t>
-            </a:r>
-            <a:r>
-              <a:rPr lang="en-US" sz="1800" dirty="0" err="1"/>
-              <a:t>Modelo</a:t>
-            </a:r>
-            <a:r>
-              <a:rPr lang="en-US" sz="1800" dirty="0"/>
-              <a:t> 7020. </a:t>
-            </a:r>
-            <a:r>
-              <a:rPr lang="en-US" sz="1800" dirty="0">
-                <a:hlinkClick r:id="rId6"/>
-              </a:rPr>
-              <a:t>https://www.dell.com/pt-br/shop/computadores-all-in-ones-e-workstations/desktop-optiplex-micro/spd/optiplex-7020-micro/cto03o7020mffbcc_p21?redirectTo=SOC</a:t>
-            </a:r>
-            <a:endParaRPr lang="en-US" sz="1800" dirty="0"/>
+            <a:endParaRPr lang="en-US" sz="1800" b="1" dirty="0"/>
           </a:p>
           <a:p>
             <a:pPr marL="342900" indent="-342900">
               <a:buFont typeface="+mj-lt"/>
-              <a:buAutoNum type="arabicPeriod" startAt="8"/>
-            </a:pPr>
-            <a:endParaRPr lang="en-US" sz="1800" dirty="0"/>
-          </a:p>
-          <a:p>
-            <a:pPr marL="342900" indent="-342900">
-              <a:buFont typeface="+mj-lt"/>
-              <a:buAutoNum type="arabicPeriod" startAt="8"/>
-            </a:pPr>
-            <a:endParaRPr lang="en-US" sz="1800" dirty="0"/>
-          </a:p>
-          <a:p>
-            <a:pPr marL="342900" indent="-342900">
-              <a:buFont typeface="+mj-lt"/>
-              <a:buAutoNum type="arabicPeriod" startAt="8"/>
-            </a:pPr>
-            <a:endParaRPr lang="en-US" sz="1800" dirty="0"/>
-          </a:p>
-          <a:p>
-            <a:pPr marL="342900" indent="-342900">
-              <a:buAutoNum type="arabicPeriod" startAt="8"/>
-            </a:pPr>
-            <a:endParaRPr lang="en-US" sz="1800" dirty="0"/>
-          </a:p>
-          <a:p>
-            <a:pPr marL="342900" indent="-342900">
-              <a:buAutoNum type="arabicPeriod" startAt="8"/>
-            </a:pPr>
-            <a:endParaRPr lang="en-US" sz="1800" dirty="0"/>
-          </a:p>
-          <a:p>
-            <a:pPr marL="342900" indent="-342900">
-              <a:buAutoNum type="arabicPeriod" startAt="8"/>
-            </a:pPr>
-            <a:endParaRPr lang="en-US" sz="1800" dirty="0"/>
-          </a:p>
-          <a:p>
-            <a:pPr marL="342900" indent="-342900">
-              <a:buAutoNum type="arabicPeriod" startAt="8"/>
+              <a:buAutoNum type="arabicPeriod"/>
             </a:pPr>
             <a:endParaRPr lang="pt-BR" sz="1800" dirty="0"/>
           </a:p>
@@ -23519,7 +24125,7 @@
           <p:cNvPr id="4" name="Espaço Reservado para Número de Slide 3">
             <a:extLst>
               <a:ext uri="{FF2B5EF4-FFF2-40B4-BE49-F238E27FC236}">
-                <a16:creationId xmlns:a16="http://schemas.microsoft.com/office/drawing/2014/main" id="{D43AE5B7-E744-4E9E-EED2-4D60BEF5A743}"/>
+                <a16:creationId xmlns:a16="http://schemas.microsoft.com/office/drawing/2014/main" id="{B6363A04-88A9-FC99-A07C-58A6BA917481}"/>
               </a:ext>
             </a:extLst>
           </p:cNvPr>
@@ -23546,7 +24152,7 @@
     </p:spTree>
     <p:extLst>
       <p:ext uri="{BB962C8B-B14F-4D97-AF65-F5344CB8AC3E}">
-        <p14:creationId xmlns:p14="http://schemas.microsoft.com/office/powerpoint/2010/main" val="3028708895"/>
+        <p14:creationId xmlns:p14="http://schemas.microsoft.com/office/powerpoint/2010/main" val="676808302"/>
       </p:ext>
     </p:extLst>
   </p:cSld>
@@ -23679,7 +24285,7 @@
             </a:r>
             <a:r>
               <a:rPr lang="pt-BR" dirty="0"/>
-              <a:t>com CPU de 14ª geração</a:t>
+              <a:t>com CPU de 14ª geração.</a:t>
             </a:r>
           </a:p>
           <a:p>
@@ -23706,6 +24312,10 @@
             <a:r>
               <a:rPr lang="pt-BR" b="1" dirty="0" err="1"/>
               <a:t>hyper-threading</a:t>
+            </a:r>
+            <a:r>
+              <a:rPr lang="pt-BR" b="1" dirty="0"/>
+              <a:t>.</a:t>
             </a:r>
             <a:endParaRPr lang="pt-BR" baseline="30000" dirty="0"/>
           </a:p>
@@ -23854,11 +24464,11 @@
             </a:r>
             <a:r>
               <a:rPr lang="en-US" dirty="0"/>
-              <a:t>: Agora </a:t>
+              <a:t>: </a:t>
             </a:r>
             <a:r>
               <a:rPr lang="en-US" dirty="0" err="1"/>
-              <a:t>restrito</a:t>
+              <a:t>Restrição</a:t>
             </a:r>
             <a:r>
               <a:rPr lang="en-US" dirty="0"/>
@@ -23884,7 +24494,10 @@
               <a:rPr lang="en-US" dirty="0" err="1"/>
               <a:t>Matrizes</a:t>
             </a:r>
-            <a:endParaRPr lang="en-US" dirty="0"/>
+            <a:r>
+              <a:rPr lang="en-US" dirty="0"/>
+              <a:t>.</a:t>
+            </a:r>
           </a:p>
           <a:p>
             <a:pPr lvl="1"/>
@@ -23910,11 +24523,11 @@
                   <a:srgbClr val="FFFF00"/>
                 </a:highlight>
               </a:rPr>
-              <a:t> núcleos de CPU em 100% </a:t>
+              <a:t> núcleos de CPU em 100%</a:t>
             </a:r>
             <a:r>
               <a:rPr lang="pt-BR" dirty="0"/>
-              <a:t>de uso</a:t>
+              <a:t> de uso.</a:t>
             </a:r>
           </a:p>
           <a:p>
@@ -23933,7 +24546,7 @@
             </a:r>
             <a:r>
               <a:rPr lang="pt-BR" dirty="0"/>
-              <a:t>na etapa de agregação de blocos de criptografia</a:t>
+              <a:t>na etapa de agregação de blocos de criptografia.</a:t>
             </a:r>
             <a:endParaRPr lang="pt-BR" b="1" dirty="0"/>
           </a:p>
@@ -23965,7 +24578,10 @@
               <a:rPr lang="pt-BR" dirty="0" err="1"/>
               <a:t>multiprocessing</a:t>
             </a:r>
-            <a:endParaRPr lang="pt-BR" dirty="0"/>
+            <a:r>
+              <a:rPr lang="pt-BR" dirty="0"/>
+              <a:t>.</a:t>
+            </a:r>
           </a:p>
           <a:p>
             <a:pPr lvl="1"/>
@@ -23975,7 +24591,7 @@
             </a:r>
             <a:r>
               <a:rPr lang="pt-BR" dirty="0"/>
-              <a:t>: Processos paralelos em Python. Sintaxe simples, multiplataforma</a:t>
+              <a:t>: Processos paralelos em Python. Sintaxe simples, multiplataforma.</a:t>
             </a:r>
           </a:p>
           <a:p>
@@ -24137,27 +24753,30 @@
               <a:t> </a:t>
             </a:r>
             <a:r>
-              <a:rPr lang="en-US" dirty="0" err="1"/>
-              <a:t>psutil</a:t>
-            </a:r>
-            <a:r>
-              <a:rPr lang="en-US" dirty="0"/>
-              <a:t> e </a:t>
-            </a:r>
-            <a:r>
-              <a:rPr lang="en-US" dirty="0" err="1"/>
-              <a:t>os</a:t>
-            </a:r>
-            <a:endParaRPr lang="en-US" dirty="0"/>
-          </a:p>
-          <a:p>
-            <a:pPr lvl="1"/>
-            <a:r>
               <a:rPr lang="en-US" b="1" dirty="0" err="1"/>
               <a:t>psutil</a:t>
             </a:r>
             <a:r>
               <a:rPr lang="en-US" dirty="0"/>
+              <a:t> e </a:t>
+            </a:r>
+            <a:r>
+              <a:rPr lang="en-US" b="1" dirty="0" err="1"/>
+              <a:t>os</a:t>
+            </a:r>
+            <a:r>
+              <a:rPr lang="en-US" b="1" dirty="0"/>
+              <a:t>.</a:t>
+            </a:r>
+          </a:p>
+          <a:p>
+            <a:pPr lvl="1"/>
+            <a:r>
+              <a:rPr lang="en-US" b="1" dirty="0" err="1"/>
+              <a:t>psutil</a:t>
+            </a:r>
+            <a:r>
+              <a:rPr lang="en-US" dirty="0"/>
               <a:t>: </a:t>
             </a:r>
             <a:r>
@@ -24253,7 +24872,10 @@
               <a:rPr lang="en-US" dirty="0" err="1"/>
               <a:t>habilitado</a:t>
             </a:r>
-            <a:endParaRPr lang="en-US" dirty="0"/>
+            <a:r>
+              <a:rPr lang="en-US" dirty="0"/>
+              <a:t>.</a:t>
+            </a:r>
           </a:p>
           <a:p>
             <a:pPr lvl="1"/>
@@ -24399,7 +25021,7 @@
         <p:spPr/>
         <p:txBody>
           <a:bodyPr>
-            <a:normAutofit/>
+            <a:normAutofit lnSpcReduction="10000"/>
           </a:bodyPr>
           <a:lstStyle/>
           <a:p>
@@ -24475,6 +25097,116 @@
               <a:rPr lang="en-US" b="1" dirty="0"/>
               <a:t> base</a:t>
             </a:r>
+          </a:p>
+          <a:p>
+            <a:endParaRPr lang="en-US" b="1" dirty="0"/>
+          </a:p>
+          <a:p>
+            <a:r>
+              <a:rPr lang="pt-BR" b="1" dirty="0"/>
+              <a:t>O que a Intel diz:</a:t>
+            </a:r>
+          </a:p>
+          <a:p>
+            <a:pPr lvl="1"/>
+            <a:r>
+              <a:rPr lang="pt-BR" b="1" dirty="0"/>
+              <a:t>Intel® Turbo </a:t>
+            </a:r>
+            <a:r>
+              <a:rPr lang="pt-BR" b="1" dirty="0" err="1"/>
+              <a:t>Boost</a:t>
+            </a:r>
+            <a:r>
+              <a:rPr lang="pt-BR" b="1" dirty="0"/>
+              <a:t> 2.0: </a:t>
+            </a:r>
+            <a:r>
+              <a:rPr lang="en-US" dirty="0"/>
+              <a:t>Boosts all-core frequency </a:t>
+            </a:r>
+            <a:r>
+              <a:rPr lang="en-US" b="1" dirty="0"/>
+              <a:t>above base clock speed</a:t>
+            </a:r>
+            <a:r>
+              <a:rPr lang="en-US" dirty="0"/>
+              <a:t> up to specified maximum frequency during more intensive workloads; available if the CPU’s running under its power, current, and temperature limits.</a:t>
+            </a:r>
+            <a:r>
+              <a:rPr lang="en-US" baseline="30000" dirty="0"/>
+              <a:t>1</a:t>
+            </a:r>
+          </a:p>
+          <a:p>
+            <a:pPr lvl="1"/>
+            <a:endParaRPr lang="en-US" dirty="0"/>
+          </a:p>
+          <a:p>
+            <a:pPr lvl="1"/>
+            <a:r>
+              <a:rPr lang="en-US" dirty="0"/>
+              <a:t>Logo, se Turbo Boost </a:t>
+            </a:r>
+            <a:r>
+              <a:rPr lang="en-US" dirty="0" err="1"/>
+              <a:t>está</a:t>
+            </a:r>
+            <a:r>
+              <a:rPr lang="en-US" dirty="0"/>
+              <a:t> </a:t>
+            </a:r>
+            <a:r>
+              <a:rPr lang="en-US" dirty="0" err="1"/>
+              <a:t>desabilitado</a:t>
+            </a:r>
+            <a:r>
+              <a:rPr lang="en-US" dirty="0"/>
+              <a:t>, </a:t>
+            </a:r>
+            <a:r>
+              <a:rPr lang="en-US" dirty="0" err="1"/>
+              <a:t>não</a:t>
+            </a:r>
+            <a:r>
+              <a:rPr lang="en-US" dirty="0"/>
+              <a:t> </a:t>
+            </a:r>
+            <a:r>
+              <a:rPr lang="en-US" dirty="0" err="1"/>
+              <a:t>passa</a:t>
+            </a:r>
+            <a:r>
+              <a:rPr lang="en-US" dirty="0"/>
+              <a:t> a </a:t>
+            </a:r>
+            <a:r>
+              <a:rPr lang="en-US" dirty="0" err="1"/>
+              <a:t>frequência</a:t>
+            </a:r>
+            <a:r>
+              <a:rPr lang="en-US" dirty="0"/>
+              <a:t> base. (É o que se </a:t>
+            </a:r>
+            <a:r>
+              <a:rPr lang="en-US" dirty="0" err="1"/>
+              <a:t>conclui</a:t>
+            </a:r>
+            <a:r>
+              <a:rPr lang="en-US" dirty="0"/>
+              <a:t> do </a:t>
+            </a:r>
+            <a:r>
+              <a:rPr lang="en-US" dirty="0" err="1"/>
+              <a:t>texto</a:t>
+            </a:r>
+            <a:r>
+              <a:rPr lang="en-US" dirty="0"/>
+              <a:t>)</a:t>
+            </a:r>
+          </a:p>
+          <a:p>
+            <a:endParaRPr lang="en-US" b="1" dirty="0"/>
           </a:p>
           <a:p>
             <a:endParaRPr lang="en-US" b="1" dirty="0"/>
@@ -24513,36 +25245,6 @@
           </a:p>
         </p:txBody>
       </p:sp>
-      <p:pic>
-        <p:nvPicPr>
-          <p:cNvPr id="6" name="Imagem 5">
-            <a:extLst>
-              <a:ext uri="{FF2B5EF4-FFF2-40B4-BE49-F238E27FC236}">
-                <a16:creationId xmlns:a16="http://schemas.microsoft.com/office/drawing/2014/main" id="{1D436A86-3CB4-E809-CC4D-546D3CACE632}"/>
-              </a:ext>
-            </a:extLst>
-          </p:cNvPr>
-          <p:cNvPicPr>
-            <a:picLocks noChangeAspect="1"/>
-          </p:cNvPicPr>
-          <p:nvPr/>
-        </p:nvPicPr>
-        <p:blipFill>
-          <a:blip r:embed="rId2"/>
-          <a:stretch>
-            <a:fillRect/>
-          </a:stretch>
-        </p:blipFill>
-        <p:spPr>
-          <a:xfrm>
-            <a:off x="838200" y="3429000"/>
-            <a:ext cx="6662951" cy="2621249"/>
-          </a:xfrm>
-          <a:prstGeom prst="rect">
-            <a:avLst/>
-          </a:prstGeom>
-        </p:spPr>
-      </p:pic>
     </p:spTree>
     <p:extLst>
       <p:ext uri="{BB962C8B-B14F-4D97-AF65-F5344CB8AC3E}">
@@ -24557,6 +25259,432 @@
 </file>
 
 <file path=ppt/slides/slide7.xml><?xml version="1.0" encoding="utf-8"?>
+<p:sld xmlns:a="http://schemas.openxmlformats.org/drawingml/2006/main" xmlns:r="http://schemas.openxmlformats.org/officeDocument/2006/relationships" xmlns:p="http://schemas.openxmlformats.org/presentationml/2006/main">
+  <p:cSld>
+    <p:spTree>
+      <p:nvGrpSpPr>
+        <p:cNvPr id="1" name=""/>
+        <p:cNvGrpSpPr/>
+        <p:nvPr/>
+      </p:nvGrpSpPr>
+      <p:grpSpPr>
+        <a:xfrm>
+          <a:off x="0" y="0"/>
+          <a:ext cx="0" cy="0"/>
+          <a:chOff x="0" y="0"/>
+          <a:chExt cx="0" cy="0"/>
+        </a:xfrm>
+      </p:grpSpPr>
+      <p:sp>
+        <p:nvSpPr>
+          <p:cNvPr id="2" name="Título 1">
+            <a:extLst>
+              <a:ext uri="{FF2B5EF4-FFF2-40B4-BE49-F238E27FC236}">
+                <a16:creationId xmlns:a16="http://schemas.microsoft.com/office/drawing/2014/main" id="{EE9BC3AE-C10A-E0B8-883E-2DDAEFE7CE83}"/>
+              </a:ext>
+            </a:extLst>
+          </p:cNvPr>
+          <p:cNvSpPr>
+            <a:spLocks noGrp="1"/>
+          </p:cNvSpPr>
+          <p:nvPr>
+            <p:ph type="title"/>
+          </p:nvPr>
+        </p:nvSpPr>
+        <p:spPr/>
+        <p:txBody>
+          <a:bodyPr/>
+          <a:lstStyle/>
+          <a:p>
+            <a:r>
+              <a:rPr lang="en-US" dirty="0"/>
+              <a:t>Hardware: </a:t>
+            </a:r>
+            <a:r>
+              <a:rPr lang="en-US" dirty="0" err="1"/>
+              <a:t>Limitações</a:t>
+            </a:r>
+            <a:endParaRPr lang="pt-BR" dirty="0"/>
+          </a:p>
+        </p:txBody>
+      </p:sp>
+      <p:pic>
+        <p:nvPicPr>
+          <p:cNvPr id="11" name="Imagem 10">
+            <a:extLst>
+              <a:ext uri="{FF2B5EF4-FFF2-40B4-BE49-F238E27FC236}">
+                <a16:creationId xmlns:a16="http://schemas.microsoft.com/office/drawing/2014/main" id="{C0FC9812-F6D1-CF35-E1AC-4717A4441B8E}"/>
+              </a:ext>
+            </a:extLst>
+          </p:cNvPr>
+          <p:cNvPicPr>
+            <a:picLocks noChangeAspect="1"/>
+          </p:cNvPicPr>
+          <p:nvPr/>
+        </p:nvPicPr>
+        <p:blipFill>
+          <a:blip r:embed="rId2"/>
+          <a:srcRect b="11488"/>
+          <a:stretch>
+            <a:fillRect/>
+          </a:stretch>
+        </p:blipFill>
+        <p:spPr>
+          <a:xfrm>
+            <a:off x="708096" y="2338199"/>
+            <a:ext cx="4755157" cy="3699459"/>
+          </a:xfrm>
+          <a:prstGeom prst="rect">
+            <a:avLst/>
+          </a:prstGeom>
+        </p:spPr>
+      </p:pic>
+      <p:sp>
+        <p:nvSpPr>
+          <p:cNvPr id="12" name="Espaço Reservado para Número de Slide 11">
+            <a:extLst>
+              <a:ext uri="{FF2B5EF4-FFF2-40B4-BE49-F238E27FC236}">
+                <a16:creationId xmlns:a16="http://schemas.microsoft.com/office/drawing/2014/main" id="{DFFC5F0F-206E-664D-33EB-242CA8106F60}"/>
+              </a:ext>
+            </a:extLst>
+          </p:cNvPr>
+          <p:cNvSpPr>
+            <a:spLocks noGrp="1"/>
+          </p:cNvSpPr>
+          <p:nvPr>
+            <p:ph type="sldNum" sz="quarter" idx="12"/>
+          </p:nvPr>
+        </p:nvSpPr>
+        <p:spPr/>
+        <p:txBody>
+          <a:bodyPr/>
+          <a:lstStyle/>
+          <a:p>
+            <a:fld id="{8E274F5D-21DC-40EF-8DBA-AB9BB119E939}" type="slidenum">
+              <a:rPr lang="en-US" smtClean="0"/>
+              <a:t>7</a:t>
+            </a:fld>
+            <a:endParaRPr lang="en-US"/>
+          </a:p>
+        </p:txBody>
+      </p:sp>
+      <p:sp>
+        <p:nvSpPr>
+          <p:cNvPr id="3" name="CaixaDeTexto 2">
+            <a:extLst>
+              <a:ext uri="{FF2B5EF4-FFF2-40B4-BE49-F238E27FC236}">
+                <a16:creationId xmlns:a16="http://schemas.microsoft.com/office/drawing/2014/main" id="{7937894A-A613-F031-1DE3-835300EFC7E3}"/>
+              </a:ext>
+            </a:extLst>
+          </p:cNvPr>
+          <p:cNvSpPr txBox="1"/>
+          <p:nvPr/>
+        </p:nvSpPr>
+        <p:spPr>
+          <a:xfrm>
+            <a:off x="6598645" y="1607036"/>
+            <a:ext cx="5183598" cy="1231106"/>
+          </a:xfrm>
+          <a:prstGeom prst="rect">
+            <a:avLst/>
+          </a:prstGeom>
+          <a:noFill/>
+        </p:spPr>
+        <p:txBody>
+          <a:bodyPr wrap="square" rtlCol="0">
+            <a:spAutoFit/>
+          </a:bodyPr>
+          <a:lstStyle/>
+          <a:p>
+            <a:pPr marL="285750" indent="-285750">
+              <a:buFont typeface="Arial" panose="020B0604020202020204" pitchFamily="34" charset="0"/>
+              <a:buChar char="•"/>
+            </a:pPr>
+            <a:r>
+              <a:rPr lang="en-US" sz="2800" b="1" dirty="0" err="1"/>
+              <a:t>Comparação</a:t>
+            </a:r>
+            <a:r>
+              <a:rPr lang="en-US" sz="2800" b="1" dirty="0"/>
+              <a:t>:</a:t>
+            </a:r>
+          </a:p>
+          <a:p>
+            <a:pPr marL="742950" lvl="1" indent="-285750">
+              <a:buFont typeface="Arial" panose="020B0604020202020204" pitchFamily="34" charset="0"/>
+              <a:buChar char="•"/>
+            </a:pPr>
+            <a:r>
+              <a:rPr lang="en-US" sz="2800" dirty="0"/>
+              <a:t>x i7-14700</a:t>
+            </a:r>
+            <a:r>
+              <a:rPr lang="en-US" sz="2800" b="1" dirty="0"/>
+              <a:t>K</a:t>
+            </a:r>
+          </a:p>
+          <a:p>
+            <a:endParaRPr lang="en-US" dirty="0"/>
+          </a:p>
+        </p:txBody>
+      </p:sp>
+      <p:sp>
+        <p:nvSpPr>
+          <p:cNvPr id="4" name="CaixaDeTexto 3">
+            <a:extLst>
+              <a:ext uri="{FF2B5EF4-FFF2-40B4-BE49-F238E27FC236}">
+                <a16:creationId xmlns:a16="http://schemas.microsoft.com/office/drawing/2014/main" id="{2994BD9E-6C91-9B71-C3A4-AF66A54B1B54}"/>
+              </a:ext>
+            </a:extLst>
+          </p:cNvPr>
+          <p:cNvSpPr txBox="1"/>
+          <p:nvPr/>
+        </p:nvSpPr>
+        <p:spPr>
+          <a:xfrm>
+            <a:off x="838199" y="1960979"/>
+            <a:ext cx="4943170" cy="523220"/>
+          </a:xfrm>
+          <a:prstGeom prst="rect">
+            <a:avLst/>
+          </a:prstGeom>
+          <a:noFill/>
+        </p:spPr>
+        <p:txBody>
+          <a:bodyPr wrap="square" rtlCol="0">
+            <a:spAutoFit/>
+          </a:bodyPr>
+          <a:lstStyle/>
+          <a:p>
+            <a:pPr marL="285750" indent="-285750">
+              <a:buFont typeface="Arial" panose="020B0604020202020204" pitchFamily="34" charset="0"/>
+              <a:buChar char="•"/>
+            </a:pPr>
+            <a:r>
+              <a:rPr lang="en-US" sz="2800" b="1" dirty="0"/>
+              <a:t>Minha CPU:</a:t>
+            </a:r>
+            <a:r>
+              <a:rPr lang="en-US" sz="2800" dirty="0"/>
+              <a:t> Intel i7-14700T</a:t>
+            </a:r>
+            <a:endParaRPr lang="pt-BR" sz="2800" dirty="0"/>
+          </a:p>
+        </p:txBody>
+      </p:sp>
+      <p:pic>
+        <p:nvPicPr>
+          <p:cNvPr id="5" name="Imagem 4">
+            <a:extLst>
+              <a:ext uri="{FF2B5EF4-FFF2-40B4-BE49-F238E27FC236}">
+                <a16:creationId xmlns:a16="http://schemas.microsoft.com/office/drawing/2014/main" id="{0D97885D-0D7E-3BE2-2190-BC18B3CF77FE}"/>
+              </a:ext>
+            </a:extLst>
+          </p:cNvPr>
+          <p:cNvPicPr>
+            <a:picLocks noChangeAspect="1"/>
+          </p:cNvPicPr>
+          <p:nvPr/>
+        </p:nvPicPr>
+        <p:blipFill>
+          <a:blip r:embed="rId3"/>
+          <a:stretch>
+            <a:fillRect/>
+          </a:stretch>
+        </p:blipFill>
+        <p:spPr>
+          <a:xfrm>
+            <a:off x="6410633" y="2470532"/>
+            <a:ext cx="4703939" cy="1850561"/>
+          </a:xfrm>
+          <a:prstGeom prst="rect">
+            <a:avLst/>
+          </a:prstGeom>
+        </p:spPr>
+      </p:pic>
+      <p:pic>
+        <p:nvPicPr>
+          <p:cNvPr id="8" name="Imagem 7">
+            <a:extLst>
+              <a:ext uri="{FF2B5EF4-FFF2-40B4-BE49-F238E27FC236}">
+                <a16:creationId xmlns:a16="http://schemas.microsoft.com/office/drawing/2014/main" id="{BEC204D4-52F2-A0C0-B4C0-651965C8FB3D}"/>
+              </a:ext>
+            </a:extLst>
+          </p:cNvPr>
+          <p:cNvPicPr>
+            <a:picLocks noChangeAspect="1"/>
+          </p:cNvPicPr>
+          <p:nvPr/>
+        </p:nvPicPr>
+        <p:blipFill>
+          <a:blip r:embed="rId4"/>
+          <a:stretch>
+            <a:fillRect/>
+          </a:stretch>
+        </p:blipFill>
+        <p:spPr>
+          <a:xfrm>
+            <a:off x="6472119" y="4357886"/>
+            <a:ext cx="4580965" cy="1786156"/>
+          </a:xfrm>
+          <a:prstGeom prst="rect">
+            <a:avLst/>
+          </a:prstGeom>
+        </p:spPr>
+      </p:pic>
+      <p:sp>
+        <p:nvSpPr>
+          <p:cNvPr id="13" name="CaixaDeTexto 12">
+            <a:extLst>
+              <a:ext uri="{FF2B5EF4-FFF2-40B4-BE49-F238E27FC236}">
+                <a16:creationId xmlns:a16="http://schemas.microsoft.com/office/drawing/2014/main" id="{9981C08A-4EB5-1C60-A822-040BE1542427}"/>
+              </a:ext>
+            </a:extLst>
+          </p:cNvPr>
+          <p:cNvSpPr txBox="1"/>
+          <p:nvPr/>
+        </p:nvSpPr>
+        <p:spPr>
+          <a:xfrm rot="5400000">
+            <a:off x="10720265" y="3316414"/>
+            <a:ext cx="1157946" cy="369332"/>
+          </a:xfrm>
+          <a:prstGeom prst="rect">
+            <a:avLst/>
+          </a:prstGeom>
+          <a:noFill/>
+        </p:spPr>
+        <p:txBody>
+          <a:bodyPr wrap="none" rtlCol="0">
+            <a:spAutoFit/>
+          </a:bodyPr>
+          <a:lstStyle/>
+          <a:p>
+            <a:r>
+              <a:rPr lang="en-US" dirty="0"/>
+              <a:t>i7-14700</a:t>
+            </a:r>
+            <a:r>
+              <a:rPr lang="en-US" b="1" dirty="0"/>
+              <a:t>T</a:t>
+            </a:r>
+            <a:endParaRPr lang="pt-BR" dirty="0"/>
+          </a:p>
+        </p:txBody>
+      </p:sp>
+      <p:sp>
+        <p:nvSpPr>
+          <p:cNvPr id="14" name="CaixaDeTexto 13">
+            <a:extLst>
+              <a:ext uri="{FF2B5EF4-FFF2-40B4-BE49-F238E27FC236}">
+                <a16:creationId xmlns:a16="http://schemas.microsoft.com/office/drawing/2014/main" id="{9831B8E5-FD1B-72EF-275D-B659CA536DF9}"/>
+              </a:ext>
+            </a:extLst>
+          </p:cNvPr>
+          <p:cNvSpPr txBox="1"/>
+          <p:nvPr/>
+        </p:nvSpPr>
+        <p:spPr>
+          <a:xfrm rot="5400000">
+            <a:off x="10706640" y="5098956"/>
+            <a:ext cx="1185196" cy="369332"/>
+          </a:xfrm>
+          <a:prstGeom prst="rect">
+            <a:avLst/>
+          </a:prstGeom>
+          <a:noFill/>
+        </p:spPr>
+        <p:txBody>
+          <a:bodyPr wrap="none" rtlCol="0">
+            <a:spAutoFit/>
+          </a:bodyPr>
+          <a:lstStyle/>
+          <a:p>
+            <a:r>
+              <a:rPr lang="en-US" dirty="0"/>
+              <a:t>i7-14700</a:t>
+            </a:r>
+            <a:r>
+              <a:rPr lang="en-US" b="1" dirty="0"/>
+              <a:t>K</a:t>
+            </a:r>
+            <a:endParaRPr lang="pt-BR" dirty="0"/>
+          </a:p>
+        </p:txBody>
+      </p:sp>
+      <p:sp>
+        <p:nvSpPr>
+          <p:cNvPr id="15" name="CaixaDeTexto 14">
+            <a:extLst>
+              <a:ext uri="{FF2B5EF4-FFF2-40B4-BE49-F238E27FC236}">
+                <a16:creationId xmlns:a16="http://schemas.microsoft.com/office/drawing/2014/main" id="{F07C56CD-31C7-C390-9315-8E0E49093067}"/>
+              </a:ext>
+            </a:extLst>
+          </p:cNvPr>
+          <p:cNvSpPr txBox="1"/>
+          <p:nvPr/>
+        </p:nvSpPr>
+        <p:spPr>
+          <a:xfrm>
+            <a:off x="2601685" y="4691024"/>
+            <a:ext cx="3494315" cy="1938992"/>
+          </a:xfrm>
+          <a:prstGeom prst="rect">
+            <a:avLst/>
+          </a:prstGeom>
+          <a:noFill/>
+        </p:spPr>
+        <p:txBody>
+          <a:bodyPr wrap="square" rtlCol="0">
+            <a:spAutoFit/>
+          </a:bodyPr>
+          <a:lstStyle/>
+          <a:p>
+            <a:r>
+              <a:rPr lang="pt-BR" sz="2400" b="1" dirty="0"/>
+              <a:t>Série T</a:t>
+            </a:r>
+          </a:p>
+          <a:p>
+            <a:pPr marL="285750" indent="-285750">
+              <a:buFont typeface="Arial" panose="020B0604020202020204" pitchFamily="34" charset="0"/>
+              <a:buChar char="•"/>
+            </a:pPr>
+            <a:r>
+              <a:rPr lang="pt-BR" sz="2400" dirty="0"/>
+              <a:t>Otimizada para </a:t>
+            </a:r>
+            <a:r>
+              <a:rPr lang="pt-BR" sz="2400" b="1" dirty="0"/>
+              <a:t>baixo consumo</a:t>
+            </a:r>
+          </a:p>
+          <a:p>
+            <a:pPr marL="285750" indent="-285750">
+              <a:buFont typeface="Arial" panose="020B0604020202020204" pitchFamily="34" charset="0"/>
+              <a:buChar char="•"/>
+            </a:pPr>
+            <a:r>
+              <a:rPr lang="pt-BR" sz="2400" dirty="0"/>
+              <a:t>Menor TDP e menor frequência base</a:t>
+            </a:r>
+          </a:p>
+        </p:txBody>
+      </p:sp>
+    </p:spTree>
+    <p:extLst>
+      <p:ext uri="{BB962C8B-B14F-4D97-AF65-F5344CB8AC3E}">
+        <p14:creationId xmlns:p14="http://schemas.microsoft.com/office/powerpoint/2010/main" val="203766769"/>
+      </p:ext>
+    </p:extLst>
+  </p:cSld>
+  <p:clrMapOvr>
+    <a:masterClrMapping/>
+  </p:clrMapOvr>
+</p:sld>
+</file>
+
+<file path=ppt/slides/slide8.xml><?xml version="1.0" encoding="utf-8"?>
 <p:sld xmlns:a="http://schemas.openxmlformats.org/drawingml/2006/main" xmlns:r="http://schemas.openxmlformats.org/officeDocument/2006/relationships" xmlns:p="http://schemas.openxmlformats.org/presentationml/2006/main">
   <p:cSld>
     <p:spTree>
@@ -24602,7 +25730,7 @@
           <a:p>
             <a:fld id="{8E274F5D-21DC-40EF-8DBA-AB9BB119E939}" type="slidenum">
               <a:rPr lang="en-US" smtClean="0"/>
-              <a:t>7</a:t>
+              <a:t>8</a:t>
             </a:fld>
             <a:endParaRPr lang="en-US"/>
           </a:p>
@@ -24631,8 +25759,8 @@
         </p:blipFill>
         <p:spPr>
           <a:xfrm>
-            <a:off x="288757" y="968649"/>
-            <a:ext cx="7691726" cy="2749109"/>
+            <a:off x="288757" y="1082952"/>
+            <a:ext cx="7523410" cy="2688951"/>
           </a:xfrm>
           <a:prstGeom prst="rect">
             <a:avLst/>
@@ -24684,8 +25812,8 @@
         </p:nvSpPr>
         <p:spPr>
           <a:xfrm>
-            <a:off x="288756" y="319088"/>
-            <a:ext cx="7403339" cy="461665"/>
+            <a:off x="7787376" y="1852332"/>
+            <a:ext cx="4389647" cy="830997"/>
           </a:xfrm>
           <a:prstGeom prst="rect">
             <a:avLst/>
@@ -24704,8 +25832,10 @@
             </a:r>
             <a:r>
               <a:rPr lang="en-US" sz="2400" dirty="0"/>
-              <a:t>: </a:t>
-            </a:r>
+              <a:t>:</a:t>
+            </a:r>
+          </a:p>
+          <a:p>
             <a:r>
               <a:rPr lang="en-US" sz="2400" b="1" dirty="0" err="1"/>
               <a:t>cpupower</a:t>
@@ -24740,7 +25870,7 @@
         </p:blipFill>
         <p:spPr>
           <a:xfrm>
-            <a:off x="7980483" y="2636105"/>
+            <a:off x="7980483" y="3419879"/>
             <a:ext cx="4030915" cy="1585789"/>
           </a:xfrm>
           <a:prstGeom prst="rect">
@@ -24748,6 +25878,92 @@
           </a:prstGeom>
         </p:spPr>
       </p:pic>
+      <p:sp>
+        <p:nvSpPr>
+          <p:cNvPr id="5" name="CaixaDeTexto 4">
+            <a:extLst>
+              <a:ext uri="{FF2B5EF4-FFF2-40B4-BE49-F238E27FC236}">
+                <a16:creationId xmlns:a16="http://schemas.microsoft.com/office/drawing/2014/main" id="{3B468E3C-B771-02CC-0FD9-D7AF2B002593}"/>
+              </a:ext>
+            </a:extLst>
+          </p:cNvPr>
+          <p:cNvSpPr txBox="1"/>
+          <p:nvPr/>
+        </p:nvSpPr>
+        <p:spPr>
+          <a:xfrm>
+            <a:off x="11226962" y="5005668"/>
+            <a:ext cx="946798" cy="369332"/>
+          </a:xfrm>
+          <a:prstGeom prst="rect">
+            <a:avLst/>
+          </a:prstGeom>
+          <a:noFill/>
+        </p:spPr>
+        <p:txBody>
+          <a:bodyPr wrap="none" rtlCol="0">
+            <a:spAutoFit/>
+          </a:bodyPr>
+          <a:lstStyle/>
+          <a:p>
+            <a:r>
+              <a:rPr lang="en-US" dirty="0"/>
+              <a:t>Fonte: </a:t>
+            </a:r>
+            <a:r>
+              <a:rPr lang="en-US" baseline="30000" dirty="0"/>
+              <a:t>2</a:t>
+            </a:r>
+            <a:endParaRPr lang="pt-BR" baseline="30000" dirty="0"/>
+          </a:p>
+        </p:txBody>
+      </p:sp>
+      <p:sp>
+        <p:nvSpPr>
+          <p:cNvPr id="2" name="Título 1">
+            <a:extLst>
+              <a:ext uri="{FF2B5EF4-FFF2-40B4-BE49-F238E27FC236}">
+                <a16:creationId xmlns:a16="http://schemas.microsoft.com/office/drawing/2014/main" id="{DFC06BAD-CB83-57BE-1375-D0852D7C7D4D}"/>
+              </a:ext>
+            </a:extLst>
+          </p:cNvPr>
+          <p:cNvSpPr>
+            <a:spLocks noGrp="1"/>
+          </p:cNvSpPr>
+          <p:nvPr>
+            <p:ph type="title"/>
+          </p:nvPr>
+        </p:nvSpPr>
+        <p:spPr>
+          <a:xfrm>
+            <a:off x="288757" y="84927"/>
+            <a:ext cx="10515600" cy="1325563"/>
+          </a:xfrm>
+        </p:spPr>
+        <p:txBody>
+          <a:bodyPr/>
+          <a:lstStyle/>
+          <a:p>
+            <a:r>
+              <a:rPr lang="en-US" dirty="0" err="1"/>
+              <a:t>Limites</a:t>
+            </a:r>
+            <a:r>
+              <a:rPr lang="en-US" dirty="0"/>
+              <a:t> de </a:t>
+            </a:r>
+            <a:r>
+              <a:rPr lang="en-US" dirty="0" err="1"/>
+              <a:t>Frequência</a:t>
+            </a:r>
+            <a:r>
+              <a:rPr lang="en-US" dirty="0"/>
+              <a:t> de CPU</a:t>
+            </a:r>
+            <a:endParaRPr lang="pt-BR" dirty="0"/>
+          </a:p>
+        </p:txBody>
+      </p:sp>
     </p:spTree>
     <p:extLst>
       <p:ext uri="{BB962C8B-B14F-4D97-AF65-F5344CB8AC3E}">
@@ -24761,7 +25977,7 @@
 </p:sld>
 </file>
 
-<file path=ppt/slides/slide8.xml><?xml version="1.0" encoding="utf-8"?>
+<file path=ppt/slides/slide9.xml><?xml version="1.0" encoding="utf-8"?>
 <p:sld xmlns:a="http://schemas.openxmlformats.org/drawingml/2006/main" xmlns:r="http://schemas.openxmlformats.org/officeDocument/2006/relationships" xmlns:p="http://schemas.openxmlformats.org/presentationml/2006/main">
   <p:cSld>
     <p:spTree>
@@ -24807,57 +26023,9 @@
           <a:p>
             <a:fld id="{8E274F5D-21DC-40EF-8DBA-AB9BB119E939}" type="slidenum">
               <a:rPr lang="en-US" smtClean="0"/>
-              <a:t>8</a:t>
+              <a:t>9</a:t>
             </a:fld>
             <a:endParaRPr lang="en-US"/>
-          </a:p>
-        </p:txBody>
-      </p:sp>
-      <p:sp>
-        <p:nvSpPr>
-          <p:cNvPr id="14" name="CaixaDeTexto 13">
-            <a:extLst>
-              <a:ext uri="{FF2B5EF4-FFF2-40B4-BE49-F238E27FC236}">
-                <a16:creationId xmlns:a16="http://schemas.microsoft.com/office/drawing/2014/main" id="{A718B5EB-2838-0E15-607B-72C57F009126}"/>
-              </a:ext>
-            </a:extLst>
-          </p:cNvPr>
-          <p:cNvSpPr txBox="1"/>
-          <p:nvPr/>
-        </p:nvSpPr>
-        <p:spPr>
-          <a:xfrm>
-            <a:off x="288756" y="319088"/>
-            <a:ext cx="7403339" cy="461665"/>
-          </a:xfrm>
-          <a:prstGeom prst="rect">
-            <a:avLst/>
-          </a:prstGeom>
-          <a:noFill/>
-        </p:spPr>
-        <p:txBody>
-          <a:bodyPr wrap="square" rtlCol="0">
-            <a:spAutoFit/>
-          </a:bodyPr>
-          <a:lstStyle/>
-          <a:p>
-            <a:r>
-              <a:rPr lang="en-US" sz="2400" dirty="0" err="1"/>
-              <a:t>Comando</a:t>
-            </a:r>
-            <a:r>
-              <a:rPr lang="en-US" sz="2400" dirty="0"/>
-              <a:t>: </a:t>
-            </a:r>
-            <a:r>
-              <a:rPr lang="en-US" sz="2400" b="1" dirty="0" err="1"/>
-              <a:t>cpupower</a:t>
-            </a:r>
-            <a:r>
-              <a:rPr lang="en-US" sz="2400" b="1" dirty="0"/>
-              <a:t> -c 16 frequency-info</a:t>
-            </a:r>
-            <a:endParaRPr lang="pt-BR" sz="2400" b="1" dirty="0"/>
           </a:p>
         </p:txBody>
       </p:sp>
@@ -24884,8 +26052,8 @@
         </p:blipFill>
         <p:spPr>
           <a:xfrm>
-            <a:off x="288756" y="888906"/>
-            <a:ext cx="7691727" cy="2706974"/>
+            <a:off x="288757" y="1068525"/>
+            <a:ext cx="7542324" cy="2654394"/>
           </a:xfrm>
           <a:prstGeom prst="rect">
             <a:avLst/>
@@ -24915,8 +26083,8 @@
         </p:blipFill>
         <p:spPr>
           <a:xfrm>
-            <a:off x="288756" y="3794448"/>
-            <a:ext cx="7691727" cy="2799733"/>
+            <a:off x="288756" y="3794449"/>
+            <a:ext cx="7565287" cy="2753710"/>
           </a:xfrm>
           <a:prstGeom prst="rect">
             <a:avLst/>
@@ -24945,7 +26113,7 @@
         </p:blipFill>
         <p:spPr>
           <a:xfrm>
-            <a:off x="7980483" y="2636105"/>
+            <a:off x="7980483" y="3158625"/>
             <a:ext cx="4030915" cy="1585789"/>
           </a:xfrm>
           <a:prstGeom prst="rect">
@@ -24953,306 +26121,146 @@
           </a:prstGeom>
         </p:spPr>
       </p:pic>
-    </p:spTree>
-    <p:extLst>
-      <p:ext uri="{BB962C8B-B14F-4D97-AF65-F5344CB8AC3E}">
-        <p14:creationId xmlns:p14="http://schemas.microsoft.com/office/powerpoint/2010/main" val="3775376469"/>
-      </p:ext>
-    </p:extLst>
-  </p:cSld>
-  <p:clrMapOvr>
-    <a:masterClrMapping/>
-  </p:clrMapOvr>
-</p:sld>
-</file>
-
-<file path=ppt/slides/slide9.xml><?xml version="1.0" encoding="utf-8"?>
-<p:sld xmlns:a="http://schemas.openxmlformats.org/drawingml/2006/main" xmlns:r="http://schemas.openxmlformats.org/officeDocument/2006/relationships" xmlns:p="http://schemas.openxmlformats.org/presentationml/2006/main">
-  <p:cSld>
-    <p:spTree>
-      <p:nvGrpSpPr>
-        <p:cNvPr id="1" name="">
-          <a:extLst>
-            <a:ext uri="{FF2B5EF4-FFF2-40B4-BE49-F238E27FC236}">
-              <a16:creationId xmlns:a16="http://schemas.microsoft.com/office/drawing/2014/main" id="{FCA57A0A-6019-09A9-9BC2-9FCE50535229}"/>
-            </a:ext>
-          </a:extLst>
-        </p:cNvPr>
-        <p:cNvGrpSpPr/>
-        <p:nvPr/>
-      </p:nvGrpSpPr>
-      <p:grpSpPr>
-        <a:xfrm>
-          <a:off x="0" y="0"/>
-          <a:ext cx="0" cy="0"/>
-          <a:chOff x="0" y="0"/>
-          <a:chExt cx="0" cy="0"/>
-        </a:xfrm>
-      </p:grpSpPr>
-      <p:sp>
-        <p:nvSpPr>
-          <p:cNvPr id="2" name="Título 1">
-            <a:extLst>
-              <a:ext uri="{FF2B5EF4-FFF2-40B4-BE49-F238E27FC236}">
-                <a16:creationId xmlns:a16="http://schemas.microsoft.com/office/drawing/2014/main" id="{39713913-BE32-BC8E-EACD-25E0EE829A37}"/>
-              </a:ext>
-            </a:extLst>
-          </p:cNvPr>
-          <p:cNvSpPr>
-            <a:spLocks noGrp="1"/>
-          </p:cNvSpPr>
-          <p:nvPr>
-            <p:ph type="title"/>
-          </p:nvPr>
-        </p:nvSpPr>
-        <p:spPr/>
-        <p:txBody>
-          <a:bodyPr/>
-          <a:lstStyle/>
-          <a:p>
-            <a:r>
-              <a:rPr lang="en-US" dirty="0"/>
-              <a:t>Teste de </a:t>
-            </a:r>
-            <a:r>
-              <a:rPr lang="en-US" dirty="0" err="1"/>
-              <a:t>Frequência</a:t>
-            </a:r>
-            <a:r>
-              <a:rPr lang="en-US" dirty="0"/>
-              <a:t> de CPU</a:t>
-            </a:r>
-            <a:endParaRPr lang="pt-BR" dirty="0"/>
-          </a:p>
-        </p:txBody>
-      </p:sp>
-      <p:sp>
-        <p:nvSpPr>
-          <p:cNvPr id="3" name="Espaço Reservado para Conteúdo 2">
-            <a:extLst>
-              <a:ext uri="{FF2B5EF4-FFF2-40B4-BE49-F238E27FC236}">
-                <a16:creationId xmlns:a16="http://schemas.microsoft.com/office/drawing/2014/main" id="{B588263A-584E-F8D5-A4AE-51D290B5ACD3}"/>
-              </a:ext>
-            </a:extLst>
-          </p:cNvPr>
-          <p:cNvSpPr>
-            <a:spLocks noGrp="1"/>
-          </p:cNvSpPr>
-          <p:nvPr>
-            <p:ph idx="1"/>
-          </p:nvPr>
-        </p:nvSpPr>
-        <p:spPr/>
-        <p:txBody>
-          <a:bodyPr>
-            <a:normAutofit/>
-          </a:bodyPr>
-          <a:lstStyle/>
-          <a:p>
-            <a:endParaRPr lang="en-US" b="1" dirty="0"/>
-          </a:p>
-          <a:p>
-            <a:endParaRPr lang="pt-BR" b="1" dirty="0"/>
-          </a:p>
-        </p:txBody>
-      </p:sp>
-      <p:sp>
-        <p:nvSpPr>
-          <p:cNvPr id="4" name="Espaço Reservado para Número de Slide 3">
-            <a:extLst>
-              <a:ext uri="{FF2B5EF4-FFF2-40B4-BE49-F238E27FC236}">
-                <a16:creationId xmlns:a16="http://schemas.microsoft.com/office/drawing/2014/main" id="{68F76967-C050-DB5C-D1D7-624B0C5F0BAA}"/>
-              </a:ext>
-            </a:extLst>
-          </p:cNvPr>
-          <p:cNvSpPr>
-            <a:spLocks noGrp="1"/>
-          </p:cNvSpPr>
-          <p:nvPr>
-            <p:ph type="sldNum" sz="quarter" idx="12"/>
-          </p:nvPr>
-        </p:nvSpPr>
-        <p:spPr/>
-        <p:txBody>
-          <a:bodyPr/>
-          <a:lstStyle/>
-          <a:p>
-            <a:fld id="{8E274F5D-21DC-40EF-8DBA-AB9BB119E939}" type="slidenum">
-              <a:rPr lang="en-US" smtClean="0"/>
-              <a:t>9</a:t>
-            </a:fld>
-            <a:endParaRPr lang="en-US"/>
-          </a:p>
-        </p:txBody>
-      </p:sp>
-      <p:pic>
-        <p:nvPicPr>
-          <p:cNvPr id="7" name="Imagem 6">
-            <a:extLst>
-              <a:ext uri="{FF2B5EF4-FFF2-40B4-BE49-F238E27FC236}">
-                <a16:creationId xmlns:a16="http://schemas.microsoft.com/office/drawing/2014/main" id="{CDF7E3F5-66E2-6B4A-DD5E-DE49576082E3}"/>
-              </a:ext>
-            </a:extLst>
-          </p:cNvPr>
-          <p:cNvPicPr>
-            <a:picLocks noChangeAspect="1"/>
-          </p:cNvPicPr>
+      <p:sp>
+        <p:nvSpPr>
+          <p:cNvPr id="2" name="CaixaDeTexto 1">
+            <a:extLst>
+              <a:ext uri="{FF2B5EF4-FFF2-40B4-BE49-F238E27FC236}">
+                <a16:creationId xmlns:a16="http://schemas.microsoft.com/office/drawing/2014/main" id="{A86FBEB8-BE3B-9B4D-4DDB-818C5EE7F039}"/>
+              </a:ext>
+            </a:extLst>
+          </p:cNvPr>
+          <p:cNvSpPr txBox="1"/>
           <p:nvPr/>
-        </p:nvPicPr>
-        <p:blipFill>
-          <a:blip r:embed="rId2"/>
-          <a:stretch>
-            <a:fillRect/>
-          </a:stretch>
-        </p:blipFill>
+        </p:nvSpPr>
         <p:spPr>
           <a:xfrm>
-            <a:off x="4991748" y="1370125"/>
-            <a:ext cx="7026853" cy="5351350"/>
-          </a:xfrm>
-          <a:prstGeom prst="rect">
-            <a:avLst/>
-          </a:prstGeom>
-        </p:spPr>
-      </p:pic>
-      <p:pic>
-        <p:nvPicPr>
-          <p:cNvPr id="9" name="Imagem 8">
-            <a:extLst>
-              <a:ext uri="{FF2B5EF4-FFF2-40B4-BE49-F238E27FC236}">
-                <a16:creationId xmlns:a16="http://schemas.microsoft.com/office/drawing/2014/main" id="{40FE9EC6-7D0F-0715-46B1-C1A1DC0F2D32}"/>
-              </a:ext>
-            </a:extLst>
-          </p:cNvPr>
-          <p:cNvPicPr>
-            <a:picLocks noChangeAspect="1"/>
-          </p:cNvPicPr>
-          <p:nvPr/>
-        </p:nvPicPr>
-        <p:blipFill>
-          <a:blip r:embed="rId3"/>
-          <a:stretch>
-            <a:fillRect/>
-          </a:stretch>
-        </p:blipFill>
-        <p:spPr>
-          <a:xfrm>
-            <a:off x="635515" y="1645803"/>
-            <a:ext cx="4918852" cy="3177395"/>
-          </a:xfrm>
-          <a:prstGeom prst="rect">
-            <a:avLst/>
-          </a:prstGeom>
-        </p:spPr>
-      </p:pic>
-      <p:sp>
-        <p:nvSpPr>
-          <p:cNvPr id="10" name="Elipse 9">
-            <a:extLst>
-              <a:ext uri="{FF2B5EF4-FFF2-40B4-BE49-F238E27FC236}">
-                <a16:creationId xmlns:a16="http://schemas.microsoft.com/office/drawing/2014/main" id="{3828B902-EC4D-FF07-D4C4-B5E26DECA2BF}"/>
-              </a:ext>
-            </a:extLst>
-          </p:cNvPr>
-          <p:cNvSpPr/>
-          <p:nvPr/>
-        </p:nvSpPr>
-        <p:spPr>
-          <a:xfrm>
-            <a:off x="7118555" y="3775587"/>
-            <a:ext cx="3028335" cy="393290"/>
-          </a:xfrm>
-          <a:prstGeom prst="ellipse">
-            <a:avLst/>
-          </a:prstGeom>
-          <a:noFill/>
-          <a:ln>
-            <a:solidFill>
-              <a:srgbClr val="FF0000"/>
-            </a:solidFill>
-          </a:ln>
-        </p:spPr>
-        <p:style>
-          <a:lnRef idx="2">
-            <a:schemeClr val="accent1">
-              <a:shade val="15000"/>
-            </a:schemeClr>
-          </a:lnRef>
-          <a:fillRef idx="1">
-            <a:schemeClr val="accent1"/>
-          </a:fillRef>
-          <a:effectRef idx="0">
-            <a:schemeClr val="accent1"/>
-          </a:effectRef>
-          <a:fontRef idx="minor">
-            <a:schemeClr val="lt1"/>
-          </a:fontRef>
-        </p:style>
-        <p:txBody>
-          <a:bodyPr rtlCol="0" anchor="ctr"/>
-          <a:lstStyle/>
-          <a:p>
-            <a:pPr algn="ctr"/>
-            <a:endParaRPr lang="pt-BR"/>
-          </a:p>
-        </p:txBody>
-      </p:sp>
-      <p:sp>
-        <p:nvSpPr>
-          <p:cNvPr id="12" name="Retângulo 11">
-            <a:extLst>
-              <a:ext uri="{FF2B5EF4-FFF2-40B4-BE49-F238E27FC236}">
-                <a16:creationId xmlns:a16="http://schemas.microsoft.com/office/drawing/2014/main" id="{CC32D044-4DFB-D040-589C-CCAF0BE53C69}"/>
-              </a:ext>
-            </a:extLst>
-          </p:cNvPr>
-          <p:cNvSpPr/>
-          <p:nvPr/>
-        </p:nvSpPr>
-        <p:spPr>
-          <a:xfrm>
-            <a:off x="1219200" y="3696929"/>
-            <a:ext cx="3687097" cy="196645"/>
+            <a:off x="11245202" y="4744414"/>
+            <a:ext cx="946798" cy="369332"/>
           </a:xfrm>
           <a:prstGeom prst="rect">
             <a:avLst/>
           </a:prstGeom>
           <a:noFill/>
-          <a:ln>
-            <a:solidFill>
-              <a:srgbClr val="FF0000"/>
-            </a:solidFill>
-          </a:ln>
         </p:spPr>
-        <p:style>
-          <a:lnRef idx="2">
-            <a:schemeClr val="accent1">
-              <a:shade val="15000"/>
-            </a:schemeClr>
-          </a:lnRef>
-          <a:fillRef idx="1">
-            <a:schemeClr val="accent1"/>
-          </a:fillRef>
-          <a:effectRef idx="0">
-            <a:schemeClr val="accent1"/>
-          </a:effectRef>
-          <a:fontRef idx="minor">
-            <a:schemeClr val="lt1"/>
-          </a:fontRef>
-        </p:style>
-        <p:txBody>
-          <a:bodyPr rtlCol="0" anchor="ctr"/>
-          <a:lstStyle/>
-          <a:p>
-            <a:pPr algn="ctr"/>
-            <a:endParaRPr lang="pt-BR"/>
+        <p:txBody>
+          <a:bodyPr wrap="none" rtlCol="0">
+            <a:spAutoFit/>
+          </a:bodyPr>
+          <a:lstStyle/>
+          <a:p>
+            <a:r>
+              <a:rPr lang="en-US" dirty="0"/>
+              <a:t>Fonte: </a:t>
+            </a:r>
+            <a:r>
+              <a:rPr lang="en-US" baseline="30000" dirty="0"/>
+              <a:t>2</a:t>
+            </a:r>
+            <a:endParaRPr lang="pt-BR" baseline="30000" dirty="0"/>
+          </a:p>
+        </p:txBody>
+      </p:sp>
+      <p:sp>
+        <p:nvSpPr>
+          <p:cNvPr id="5" name="CaixaDeTexto 4">
+            <a:extLst>
+              <a:ext uri="{FF2B5EF4-FFF2-40B4-BE49-F238E27FC236}">
+                <a16:creationId xmlns:a16="http://schemas.microsoft.com/office/drawing/2014/main" id="{1199EBE9-9B2A-C8DF-E33D-D574F7E0D9F5}"/>
+              </a:ext>
+            </a:extLst>
+          </p:cNvPr>
+          <p:cNvSpPr txBox="1"/>
+          <p:nvPr/>
+        </p:nvSpPr>
+        <p:spPr>
+          <a:xfrm>
+            <a:off x="7787376" y="1852332"/>
+            <a:ext cx="4389647" cy="830997"/>
+          </a:xfrm>
+          <a:prstGeom prst="rect">
+            <a:avLst/>
+          </a:prstGeom>
+          <a:noFill/>
+        </p:spPr>
+        <p:txBody>
+          <a:bodyPr wrap="square" rtlCol="0">
+            <a:spAutoFit/>
+          </a:bodyPr>
+          <a:lstStyle/>
+          <a:p>
+            <a:r>
+              <a:rPr lang="en-US" sz="2400" dirty="0" err="1"/>
+              <a:t>Comando</a:t>
+            </a:r>
+            <a:r>
+              <a:rPr lang="en-US" sz="2400" dirty="0"/>
+              <a:t>:</a:t>
+            </a:r>
+          </a:p>
+          <a:p>
+            <a:r>
+              <a:rPr lang="en-US" sz="2400" b="1" dirty="0" err="1"/>
+              <a:t>cpupower</a:t>
+            </a:r>
+            <a:r>
+              <a:rPr lang="en-US" sz="2400" b="1" dirty="0"/>
+              <a:t> -c 0 frequency-info</a:t>
+            </a:r>
+            <a:endParaRPr lang="pt-BR" sz="2400" b="1" dirty="0"/>
+          </a:p>
+        </p:txBody>
+      </p:sp>
+      <p:sp>
+        <p:nvSpPr>
+          <p:cNvPr id="7" name="Título 1">
+            <a:extLst>
+              <a:ext uri="{FF2B5EF4-FFF2-40B4-BE49-F238E27FC236}">
+                <a16:creationId xmlns:a16="http://schemas.microsoft.com/office/drawing/2014/main" id="{92EEA7E1-7C7D-DF93-37F7-6A98B448DDBC}"/>
+              </a:ext>
+            </a:extLst>
+          </p:cNvPr>
+          <p:cNvSpPr>
+            <a:spLocks noGrp="1"/>
+          </p:cNvSpPr>
+          <p:nvPr>
+            <p:ph type="title"/>
+          </p:nvPr>
+        </p:nvSpPr>
+        <p:spPr>
+          <a:xfrm>
+            <a:off x="288757" y="84927"/>
+            <a:ext cx="10515600" cy="1325563"/>
+          </a:xfrm>
+        </p:spPr>
+        <p:txBody>
+          <a:bodyPr/>
+          <a:lstStyle/>
+          <a:p>
+            <a:r>
+              <a:rPr lang="en-US" dirty="0" err="1"/>
+              <a:t>Limites</a:t>
+            </a:r>
+            <a:r>
+              <a:rPr lang="en-US" dirty="0"/>
+              <a:t> de </a:t>
+            </a:r>
+            <a:r>
+              <a:rPr lang="en-US" dirty="0" err="1"/>
+              <a:t>Frequência</a:t>
+            </a:r>
+            <a:r>
+              <a:rPr lang="en-US" dirty="0"/>
+              <a:t> de CPU</a:t>
+            </a:r>
+            <a:endParaRPr lang="pt-BR" dirty="0"/>
           </a:p>
         </p:txBody>
       </p:sp>
     </p:spTree>
     <p:extLst>
       <p:ext uri="{BB962C8B-B14F-4D97-AF65-F5344CB8AC3E}">
-        <p14:creationId xmlns:p14="http://schemas.microsoft.com/office/powerpoint/2010/main" val="1170554390"/>
+        <p14:creationId xmlns:p14="http://schemas.microsoft.com/office/powerpoint/2010/main" val="3775376469"/>
       </p:ext>
     </p:extLst>
   </p:cSld>

--- a/02-Parcial/02-Parcial-Apresentacao.pptx
+++ b/02-Parcial/02-Parcial-Apresentacao.pptx
@@ -139,7 +139,7 @@
 <file path=ppt/revisionInfo.xml><?xml version="1.0" encoding="utf-8"?>
 <p1510:revInfo xmlns:a="http://schemas.openxmlformats.org/drawingml/2006/main" xmlns:r="http://schemas.openxmlformats.org/officeDocument/2006/relationships" xmlns:p1510="http://schemas.microsoft.com/office/powerpoint/2015/10/main">
   <p1510:revLst>
-    <p1510:client id="{9DA59AF8-04B2-48DB-8084-3B24E39CA914}" v="82" dt="2025-10-02T12:57:10.691"/>
+    <p1510:client id="{9DA59AF8-04B2-48DB-8084-3B24E39CA914}" v="89" dt="2025-10-02T18:32:49.804"/>
   </p1510:revLst>
 </p1510:revInfo>
 </file>
@@ -149,12 +149,12 @@
   <pc:docChgLst>
     <pc:chgData name="João Luiz Grave Gross" userId="70663aa8-58a3-482c-a5ab-33e75f2c9147" providerId="ADAL" clId="{1642D5D4-6F90-4729-B6C8-CF446D4D64F7}"/>
     <pc:docChg chg="undo redo custSel addSld delSld modSld sldOrd">
-      <pc:chgData name="João Luiz Grave Gross" userId="70663aa8-58a3-482c-a5ab-33e75f2c9147" providerId="ADAL" clId="{1642D5D4-6F90-4729-B6C8-CF446D4D64F7}" dt="2025-10-02T12:59:41.487" v="4499" actId="13926"/>
+      <pc:chgData name="João Luiz Grave Gross" userId="70663aa8-58a3-482c-a5ab-33e75f2c9147" providerId="ADAL" clId="{1642D5D4-6F90-4729-B6C8-CF446D4D64F7}" dt="2025-10-02T18:34:25.396" v="4827" actId="20577"/>
       <pc:docMkLst>
         <pc:docMk/>
       </pc:docMkLst>
       <pc:sldChg chg="modSp mod">
-        <pc:chgData name="João Luiz Grave Gross" userId="70663aa8-58a3-482c-a5ab-33e75f2c9147" providerId="ADAL" clId="{1642D5D4-6F90-4729-B6C8-CF446D4D64F7}" dt="2025-09-30T19:52:30.408" v="17" actId="20577"/>
+        <pc:chgData name="João Luiz Grave Gross" userId="70663aa8-58a3-482c-a5ab-33e75f2c9147" providerId="ADAL" clId="{1642D5D4-6F90-4729-B6C8-CF446D4D64F7}" dt="2025-10-02T18:22:32.692" v="4624" actId="404"/>
         <pc:sldMkLst>
           <pc:docMk/>
           <pc:sldMk cId="47810229" sldId="256"/>
@@ -168,7 +168,7 @@
           </ac:spMkLst>
         </pc:spChg>
         <pc:spChg chg="mod">
-          <ac:chgData name="João Luiz Grave Gross" userId="70663aa8-58a3-482c-a5ab-33e75f2c9147" providerId="ADAL" clId="{1642D5D4-6F90-4729-B6C8-CF446D4D64F7}" dt="2025-09-30T19:52:30.408" v="17" actId="20577"/>
+          <ac:chgData name="João Luiz Grave Gross" userId="70663aa8-58a3-482c-a5ab-33e75f2c9147" providerId="ADAL" clId="{1642D5D4-6F90-4729-B6C8-CF446D4D64F7}" dt="2025-10-02T18:22:32.692" v="4624" actId="404"/>
           <ac:spMkLst>
             <pc:docMk/>
             <pc:sldMk cId="47810229" sldId="256"/>
@@ -265,7 +265,7 @@
         </pc:spChg>
       </pc:sldChg>
       <pc:sldChg chg="addSp delSp modSp mod ord">
-        <pc:chgData name="João Luiz Grave Gross" userId="70663aa8-58a3-482c-a5ab-33e75f2c9147" providerId="ADAL" clId="{1642D5D4-6F90-4729-B6C8-CF446D4D64F7}" dt="2025-10-02T12:46:16.389" v="3577" actId="1076"/>
+        <pc:chgData name="João Luiz Grave Gross" userId="70663aa8-58a3-482c-a5ab-33e75f2c9147" providerId="ADAL" clId="{1642D5D4-6F90-4729-B6C8-CF446D4D64F7}" dt="2025-10-02T18:27:48.554" v="4720" actId="1076"/>
         <pc:sldMkLst>
           <pc:docMk/>
           <pc:sldMk cId="203766769" sldId="265"/>
@@ -295,11 +295,19 @@
           </ac:spMkLst>
         </pc:spChg>
         <pc:spChg chg="add mod">
-          <ac:chgData name="João Luiz Grave Gross" userId="70663aa8-58a3-482c-a5ab-33e75f2c9147" providerId="ADAL" clId="{1642D5D4-6F90-4729-B6C8-CF446D4D64F7}" dt="2025-10-02T12:25:15.523" v="2920" actId="14100"/>
+          <ac:chgData name="João Luiz Grave Gross" userId="70663aa8-58a3-482c-a5ab-33e75f2c9147" providerId="ADAL" clId="{1642D5D4-6F90-4729-B6C8-CF446D4D64F7}" dt="2025-10-02T18:26:13.284" v="4704" actId="1076"/>
           <ac:spMkLst>
             <pc:docMk/>
             <pc:sldMk cId="203766769" sldId="265"/>
             <ac:spMk id="4" creationId="{2994BD9E-6C91-9B71-C3A4-AF66A54B1B54}"/>
+          </ac:spMkLst>
+        </pc:spChg>
+        <pc:spChg chg="add del">
+          <ac:chgData name="João Luiz Grave Gross" userId="70663aa8-58a3-482c-a5ab-33e75f2c9147" providerId="ADAL" clId="{1642D5D4-6F90-4729-B6C8-CF446D4D64F7}" dt="2025-10-02T18:26:41.277" v="4706" actId="478"/>
+          <ac:spMkLst>
+            <pc:docMk/>
+            <pc:sldMk cId="203766769" sldId="265"/>
+            <ac:spMk id="6" creationId="{4522BE93-B745-196A-93B7-70C51983002D}"/>
           </ac:spMkLst>
         </pc:spChg>
         <pc:spChg chg="add del mod">
@@ -310,12 +318,28 @@
             <ac:spMk id="6" creationId="{7F1B9887-A9C3-D1BA-2628-CE4BD007EC0D}"/>
           </ac:spMkLst>
         </pc:spChg>
+        <pc:spChg chg="add mod">
+          <ac:chgData name="João Luiz Grave Gross" userId="70663aa8-58a3-482c-a5ab-33e75f2c9147" providerId="ADAL" clId="{1642D5D4-6F90-4729-B6C8-CF446D4D64F7}" dt="2025-10-02T18:27:20.590" v="4711" actId="1076"/>
+          <ac:spMkLst>
+            <pc:docMk/>
+            <pc:sldMk cId="203766769" sldId="265"/>
+            <ac:spMk id="7" creationId="{711C8A77-A2C9-702D-BC1E-801318698D32}"/>
+          </ac:spMkLst>
+        </pc:spChg>
         <pc:spChg chg="add del mod">
           <ac:chgData name="João Luiz Grave Gross" userId="70663aa8-58a3-482c-a5ab-33e75f2c9147" providerId="ADAL" clId="{1642D5D4-6F90-4729-B6C8-CF446D4D64F7}" dt="2025-10-02T12:27:50.711" v="3010"/>
           <ac:spMkLst>
             <pc:docMk/>
             <pc:sldMk cId="203766769" sldId="265"/>
             <ac:spMk id="9" creationId="{4B1CA18B-C121-24B0-8BC1-FE2D3779CC14}"/>
+          </ac:spMkLst>
+        </pc:spChg>
+        <pc:spChg chg="add mod">
+          <ac:chgData name="João Luiz Grave Gross" userId="70663aa8-58a3-482c-a5ab-33e75f2c9147" providerId="ADAL" clId="{1642D5D4-6F90-4729-B6C8-CF446D4D64F7}" dt="2025-10-02T18:27:40.459" v="4718" actId="20577"/>
+          <ac:spMkLst>
+            <pc:docMk/>
+            <pc:sldMk cId="203766769" sldId="265"/>
+            <ac:spMk id="9" creationId="{CE086E10-9D90-677D-737D-13C0E54CDC3B}"/>
           </ac:spMkLst>
         </pc:spChg>
         <pc:spChg chg="add del mod">
@@ -327,7 +351,7 @@
           </ac:spMkLst>
         </pc:spChg>
         <pc:spChg chg="add mod">
-          <ac:chgData name="João Luiz Grave Gross" userId="70663aa8-58a3-482c-a5ab-33e75f2c9147" providerId="ADAL" clId="{1642D5D4-6F90-4729-B6C8-CF446D4D64F7}" dt="2025-10-02T12:28:41.341" v="3023" actId="1076"/>
+          <ac:chgData name="João Luiz Grave Gross" userId="70663aa8-58a3-482c-a5ab-33e75f2c9147" providerId="ADAL" clId="{1642D5D4-6F90-4729-B6C8-CF446D4D64F7}" dt="2025-10-02T18:27:48.554" v="4720" actId="1076"/>
           <ac:spMkLst>
             <pc:docMk/>
             <pc:sldMk cId="203766769" sldId="265"/>
@@ -335,7 +359,7 @@
           </ac:spMkLst>
         </pc:spChg>
         <pc:spChg chg="add mod">
-          <ac:chgData name="João Luiz Grave Gross" userId="70663aa8-58a3-482c-a5ab-33e75f2c9147" providerId="ADAL" clId="{1642D5D4-6F90-4729-B6C8-CF446D4D64F7}" dt="2025-10-02T12:28:12.491" v="3019" actId="1076"/>
+          <ac:chgData name="João Luiz Grave Gross" userId="70663aa8-58a3-482c-a5ab-33e75f2c9147" providerId="ADAL" clId="{1642D5D4-6F90-4729-B6C8-CF446D4D64F7}" dt="2025-10-02T18:27:46.764" v="4719" actId="1076"/>
           <ac:spMkLst>
             <pc:docMk/>
             <pc:sldMk cId="203766769" sldId="265"/>
@@ -449,7 +473,7 @@
         </pc:sldMkLst>
       </pc:sldChg>
       <pc:sldChg chg="addSp delSp modSp add del mod">
-        <pc:chgData name="João Luiz Grave Gross" userId="70663aa8-58a3-482c-a5ab-33e75f2c9147" providerId="ADAL" clId="{1642D5D4-6F90-4729-B6C8-CF446D4D64F7}" dt="2025-10-02T12:23:58.922" v="2894" actId="20577"/>
+        <pc:chgData name="João Luiz Grave Gross" userId="70663aa8-58a3-482c-a5ab-33e75f2c9147" providerId="ADAL" clId="{1642D5D4-6F90-4729-B6C8-CF446D4D64F7}" dt="2025-10-02T18:26:03.877" v="4703" actId="5793"/>
         <pc:sldMkLst>
           <pc:docMk/>
           <pc:sldMk cId="3312667182" sldId="273"/>
@@ -463,7 +487,7 @@
           </ac:spMkLst>
         </pc:spChg>
         <pc:spChg chg="mod">
-          <ac:chgData name="João Luiz Grave Gross" userId="70663aa8-58a3-482c-a5ab-33e75f2c9147" providerId="ADAL" clId="{1642D5D4-6F90-4729-B6C8-CF446D4D64F7}" dt="2025-10-02T12:23:58.922" v="2894" actId="20577"/>
+          <ac:chgData name="João Luiz Grave Gross" userId="70663aa8-58a3-482c-a5ab-33e75f2c9147" providerId="ADAL" clId="{1642D5D4-6F90-4729-B6C8-CF446D4D64F7}" dt="2025-10-02T18:26:03.877" v="4703" actId="5793"/>
           <ac:spMkLst>
             <pc:docMk/>
             <pc:sldMk cId="3312667182" sldId="273"/>
@@ -510,7 +534,7 @@
         </pc:sldMkLst>
       </pc:sldChg>
       <pc:sldChg chg="addSp delSp modSp new mod ord">
-        <pc:chgData name="João Luiz Grave Gross" userId="70663aa8-58a3-482c-a5ab-33e75f2c9147" providerId="ADAL" clId="{1642D5D4-6F90-4729-B6C8-CF446D4D64F7}" dt="2025-10-02T12:56:13.602" v="4313" actId="27636"/>
+        <pc:chgData name="João Luiz Grave Gross" userId="70663aa8-58a3-482c-a5ab-33e75f2c9147" providerId="ADAL" clId="{1642D5D4-6F90-4729-B6C8-CF446D4D64F7}" dt="2025-10-02T18:34:02.860" v="4815" actId="20577"/>
         <pc:sldMkLst>
           <pc:docMk/>
           <pc:sldMk cId="2496614450" sldId="276"/>
@@ -521,6 +545,14 @@
             <pc:docMk/>
             <pc:sldMk cId="2496614450" sldId="276"/>
             <ac:spMk id="2" creationId="{164A5A54-B22E-BAE2-EBD5-CA8BDF60173A}"/>
+          </ac:spMkLst>
+        </pc:spChg>
+        <pc:spChg chg="add mod">
+          <ac:chgData name="João Luiz Grave Gross" userId="70663aa8-58a3-482c-a5ab-33e75f2c9147" providerId="ADAL" clId="{1642D5D4-6F90-4729-B6C8-CF446D4D64F7}" dt="2025-10-02T18:33:08.034" v="4777" actId="14100"/>
+          <ac:spMkLst>
+            <pc:docMk/>
+            <pc:sldMk cId="2496614450" sldId="276"/>
+            <ac:spMk id="3" creationId="{9ACEEE1B-1037-35C5-7D01-BFEE1710A5D1}"/>
           </ac:spMkLst>
         </pc:spChg>
         <pc:spChg chg="del mod">
@@ -540,7 +572,7 @@
           </ac:spMkLst>
         </pc:spChg>
         <pc:spChg chg="add mod">
-          <ac:chgData name="João Luiz Grave Gross" userId="70663aa8-58a3-482c-a5ab-33e75f2c9147" providerId="ADAL" clId="{1642D5D4-6F90-4729-B6C8-CF446D4D64F7}" dt="2025-10-02T12:56:13.602" v="4313" actId="27636"/>
+          <ac:chgData name="João Luiz Grave Gross" userId="70663aa8-58a3-482c-a5ab-33e75f2c9147" providerId="ADAL" clId="{1642D5D4-6F90-4729-B6C8-CF446D4D64F7}" dt="2025-10-02T18:34:02.860" v="4815" actId="20577"/>
           <ac:spMkLst>
             <pc:docMk/>
             <pc:sldMk cId="2496614450" sldId="276"/>
@@ -596,7 +628,7 @@
         </pc:spChg>
       </pc:sldChg>
       <pc:sldChg chg="modSp add mod">
-        <pc:chgData name="João Luiz Grave Gross" userId="70663aa8-58a3-482c-a5ab-33e75f2c9147" providerId="ADAL" clId="{1642D5D4-6F90-4729-B6C8-CF446D4D64F7}" dt="2025-10-02T12:19:19.560" v="2825" actId="20577"/>
+        <pc:chgData name="João Luiz Grave Gross" userId="70663aa8-58a3-482c-a5ab-33e75f2c9147" providerId="ADAL" clId="{1642D5D4-6F90-4729-B6C8-CF446D4D64F7}" dt="2025-10-02T18:24:02.363" v="4625" actId="113"/>
         <pc:sldMkLst>
           <pc:docMk/>
           <pc:sldMk cId="3585272815" sldId="278"/>
@@ -610,7 +642,7 @@
           </ac:spMkLst>
         </pc:spChg>
         <pc:spChg chg="mod">
-          <ac:chgData name="João Luiz Grave Gross" userId="70663aa8-58a3-482c-a5ab-33e75f2c9147" providerId="ADAL" clId="{1642D5D4-6F90-4729-B6C8-CF446D4D64F7}" dt="2025-10-02T12:19:19.560" v="2825" actId="20577"/>
+          <ac:chgData name="João Luiz Grave Gross" userId="70663aa8-58a3-482c-a5ab-33e75f2c9147" providerId="ADAL" clId="{1642D5D4-6F90-4729-B6C8-CF446D4D64F7}" dt="2025-10-02T18:24:02.363" v="4625" actId="113"/>
           <ac:spMkLst>
             <pc:docMk/>
             <pc:sldMk cId="3585272815" sldId="278"/>
@@ -619,7 +651,7 @@
         </pc:spChg>
       </pc:sldChg>
       <pc:sldChg chg="addSp delSp modSp add mod">
-        <pc:chgData name="João Luiz Grave Gross" userId="70663aa8-58a3-482c-a5ab-33e75f2c9147" providerId="ADAL" clId="{1642D5D4-6F90-4729-B6C8-CF446D4D64F7}" dt="2025-10-02T12:59:41.487" v="4499" actId="13926"/>
+        <pc:chgData name="João Luiz Grave Gross" userId="70663aa8-58a3-482c-a5ab-33e75f2c9147" providerId="ADAL" clId="{1642D5D4-6F90-4729-B6C8-CF446D4D64F7}" dt="2025-10-02T18:34:25.396" v="4827" actId="20577"/>
         <pc:sldMkLst>
           <pc:docMk/>
           <pc:sldMk cId="3072866178" sldId="279"/>
@@ -633,7 +665,7 @@
           </ac:spMkLst>
         </pc:spChg>
         <pc:spChg chg="mod">
-          <ac:chgData name="João Luiz Grave Gross" userId="70663aa8-58a3-482c-a5ab-33e75f2c9147" providerId="ADAL" clId="{1642D5D4-6F90-4729-B6C8-CF446D4D64F7}" dt="2025-10-02T12:59:41.487" v="4499" actId="13926"/>
+          <ac:chgData name="João Luiz Grave Gross" userId="70663aa8-58a3-482c-a5ab-33e75f2c9147" providerId="ADAL" clId="{1642D5D4-6F90-4729-B6C8-CF446D4D64F7}" dt="2025-10-02T18:34:25.396" v="4827" actId="20577"/>
           <ac:spMkLst>
             <pc:docMk/>
             <pc:sldMk cId="3072866178" sldId="279"/>
@@ -666,7 +698,7 @@
         </pc:picChg>
       </pc:sldChg>
       <pc:sldChg chg="addSp delSp modSp add mod">
-        <pc:chgData name="João Luiz Grave Gross" userId="70663aa8-58a3-482c-a5ab-33e75f2c9147" providerId="ADAL" clId="{1642D5D4-6F90-4729-B6C8-CF446D4D64F7}" dt="2025-10-02T12:30:27.590" v="3089" actId="1036"/>
+        <pc:chgData name="João Luiz Grave Gross" userId="70663aa8-58a3-482c-a5ab-33e75f2c9147" providerId="ADAL" clId="{1642D5D4-6F90-4729-B6C8-CF446D4D64F7}" dt="2025-10-02T18:28:22.486" v="4743" actId="20577"/>
         <pc:sldMkLst>
           <pc:docMk/>
           <pc:sldMk cId="2656067867" sldId="280"/>
@@ -720,7 +752,7 @@
           </ac:spMkLst>
         </pc:spChg>
         <pc:spChg chg="add mod">
-          <ac:chgData name="João Luiz Grave Gross" userId="70663aa8-58a3-482c-a5ab-33e75f2c9147" providerId="ADAL" clId="{1642D5D4-6F90-4729-B6C8-CF446D4D64F7}" dt="2025-10-02T12:29:41.074" v="3049" actId="1076"/>
+          <ac:chgData name="João Luiz Grave Gross" userId="70663aa8-58a3-482c-a5ab-33e75f2c9147" providerId="ADAL" clId="{1642D5D4-6F90-4729-B6C8-CF446D4D64F7}" dt="2025-10-02T18:28:22.486" v="4743" actId="20577"/>
           <ac:spMkLst>
             <pc:docMk/>
             <pc:sldMk cId="2656067867" sldId="280"/>
@@ -761,7 +793,7 @@
         </pc:picChg>
       </pc:sldChg>
       <pc:sldChg chg="addSp delSp modSp add mod">
-        <pc:chgData name="João Luiz Grave Gross" userId="70663aa8-58a3-482c-a5ab-33e75f2c9147" providerId="ADAL" clId="{1642D5D4-6F90-4729-B6C8-CF446D4D64F7}" dt="2025-10-02T12:31:30.307" v="3179"/>
+        <pc:chgData name="João Luiz Grave Gross" userId="70663aa8-58a3-482c-a5ab-33e75f2c9147" providerId="ADAL" clId="{1642D5D4-6F90-4729-B6C8-CF446D4D64F7}" dt="2025-10-02T18:28:30.936" v="4761" actId="20577"/>
         <pc:sldMkLst>
           <pc:docMk/>
           <pc:sldMk cId="3775376469" sldId="281"/>
@@ -775,7 +807,7 @@
           </ac:spMkLst>
         </pc:spChg>
         <pc:spChg chg="add mod">
-          <ac:chgData name="João Luiz Grave Gross" userId="70663aa8-58a3-482c-a5ab-33e75f2c9147" providerId="ADAL" clId="{1642D5D4-6F90-4729-B6C8-CF446D4D64F7}" dt="2025-10-02T12:31:08.858" v="3144"/>
+          <ac:chgData name="João Luiz Grave Gross" userId="70663aa8-58a3-482c-a5ab-33e75f2c9147" providerId="ADAL" clId="{1642D5D4-6F90-4729-B6C8-CF446D4D64F7}" dt="2025-10-02T18:28:30.936" v="4761" actId="20577"/>
           <ac:spMkLst>
             <pc:docMk/>
             <pc:sldMk cId="3775376469" sldId="281"/>
@@ -848,13 +880,13 @@
         </pc:picChg>
       </pc:sldChg>
       <pc:sldChg chg="addSp delSp modSp add mod">
-        <pc:chgData name="João Luiz Grave Gross" userId="70663aa8-58a3-482c-a5ab-33e75f2c9147" providerId="ADAL" clId="{1642D5D4-6F90-4729-B6C8-CF446D4D64F7}" dt="2025-10-01T21:56:29.931" v="2305" actId="20577"/>
+        <pc:chgData name="João Luiz Grave Gross" userId="70663aa8-58a3-482c-a5ab-33e75f2c9147" providerId="ADAL" clId="{1642D5D4-6F90-4729-B6C8-CF446D4D64F7}" dt="2025-10-02T18:18:26.707" v="4522" actId="20577"/>
         <pc:sldMkLst>
           <pc:docMk/>
           <pc:sldMk cId="1170554390" sldId="282"/>
         </pc:sldMkLst>
         <pc:spChg chg="mod">
-          <ac:chgData name="João Luiz Grave Gross" userId="70663aa8-58a3-482c-a5ab-33e75f2c9147" providerId="ADAL" clId="{1642D5D4-6F90-4729-B6C8-CF446D4D64F7}" dt="2025-10-01T21:56:29.931" v="2305" actId="20577"/>
+          <ac:chgData name="João Luiz Grave Gross" userId="70663aa8-58a3-482c-a5ab-33e75f2c9147" providerId="ADAL" clId="{1642D5D4-6F90-4729-B6C8-CF446D4D64F7}" dt="2025-10-02T18:18:26.707" v="4522" actId="20577"/>
           <ac:spMkLst>
             <pc:docMk/>
             <pc:sldMk cId="1170554390" sldId="282"/>
@@ -919,13 +951,21 @@
         </pc:picChg>
       </pc:sldChg>
       <pc:sldChg chg="addSp delSp modSp add mod">
-        <pc:chgData name="João Luiz Grave Gross" userId="70663aa8-58a3-482c-a5ab-33e75f2c9147" providerId="ADAL" clId="{1642D5D4-6F90-4729-B6C8-CF446D4D64F7}" dt="2025-10-01T21:57:20.994" v="2338" actId="1076"/>
+        <pc:chgData name="João Luiz Grave Gross" userId="70663aa8-58a3-482c-a5ab-33e75f2c9147" providerId="ADAL" clId="{1642D5D4-6F90-4729-B6C8-CF446D4D64F7}" dt="2025-10-02T18:19:34.725" v="4557" actId="14100"/>
         <pc:sldMkLst>
           <pc:docMk/>
           <pc:sldMk cId="1433434" sldId="283"/>
         </pc:sldMkLst>
-        <pc:spChg chg="add mod">
-          <ac:chgData name="João Luiz Grave Gross" userId="70663aa8-58a3-482c-a5ab-33e75f2c9147" providerId="ADAL" clId="{1642D5D4-6F90-4729-B6C8-CF446D4D64F7}" dt="2025-10-01T21:57:20.994" v="2338" actId="1076"/>
+        <pc:spChg chg="mod">
+          <ac:chgData name="João Luiz Grave Gross" userId="70663aa8-58a3-482c-a5ab-33e75f2c9147" providerId="ADAL" clId="{1642D5D4-6F90-4729-B6C8-CF446D4D64F7}" dt="2025-10-02T18:18:38.602" v="4547" actId="20577"/>
+          <ac:spMkLst>
+            <pc:docMk/>
+            <pc:sldMk cId="1433434" sldId="283"/>
+            <ac:spMk id="2" creationId="{871A5BE6-CB0D-4FE7-EEB7-971CF2550DDA}"/>
+          </ac:spMkLst>
+        </pc:spChg>
+        <pc:spChg chg="add del mod">
+          <ac:chgData name="João Luiz Grave Gross" userId="70663aa8-58a3-482c-a5ab-33e75f2c9147" providerId="ADAL" clId="{1642D5D4-6F90-4729-B6C8-CF446D4D64F7}" dt="2025-10-02T18:18:06.944" v="4501" actId="478"/>
           <ac:spMkLst>
             <pc:docMk/>
             <pc:sldMk cId="1433434" sldId="283"/>
@@ -940,6 +980,22 @@
             <ac:spMk id="10" creationId="{60B40AC9-9F37-18EE-9782-80C75BC264DB}"/>
           </ac:spMkLst>
         </pc:spChg>
+        <pc:spChg chg="add mod">
+          <ac:chgData name="João Luiz Grave Gross" userId="70663aa8-58a3-482c-a5ab-33e75f2c9147" providerId="ADAL" clId="{1642D5D4-6F90-4729-B6C8-CF446D4D64F7}" dt="2025-10-02T18:19:25.626" v="4554"/>
+          <ac:spMkLst>
+            <pc:docMk/>
+            <pc:sldMk cId="1433434" sldId="283"/>
+            <ac:spMk id="11" creationId="{8A7F4C3C-1B3B-4D6E-82C7-09CF8E10D25E}"/>
+          </ac:spMkLst>
+        </pc:spChg>
+        <pc:spChg chg="add mod">
+          <ac:chgData name="João Luiz Grave Gross" userId="70663aa8-58a3-482c-a5ab-33e75f2c9147" providerId="ADAL" clId="{1642D5D4-6F90-4729-B6C8-CF446D4D64F7}" dt="2025-10-02T18:19:34.725" v="4557" actId="14100"/>
+          <ac:spMkLst>
+            <pc:docMk/>
+            <pc:sldMk cId="1433434" sldId="283"/>
+            <ac:spMk id="12" creationId="{49BDCA3F-7A2C-5C5D-657A-F2CDC73FADAE}"/>
+          </ac:spMkLst>
+        </pc:spChg>
         <pc:spChg chg="del">
           <ac:chgData name="João Luiz Grave Gross" userId="70663aa8-58a3-482c-a5ab-33e75f2c9147" providerId="ADAL" clId="{1642D5D4-6F90-4729-B6C8-CF446D4D64F7}" dt="2025-10-01T21:56:49.039" v="2311" actId="478"/>
           <ac:spMkLst>
@@ -948,6 +1004,14 @@
             <ac:spMk id="12" creationId="{951FE40C-57FC-82F9-DA6F-32274FA1B44D}"/>
           </ac:spMkLst>
         </pc:spChg>
+        <pc:picChg chg="add del mod">
+          <ac:chgData name="João Luiz Grave Gross" userId="70663aa8-58a3-482c-a5ab-33e75f2c9147" providerId="ADAL" clId="{1642D5D4-6F90-4729-B6C8-CF446D4D64F7}" dt="2025-10-02T18:19:02.256" v="4548" actId="478"/>
+          <ac:picMkLst>
+            <pc:docMk/>
+            <pc:sldMk cId="1433434" sldId="283"/>
+            <ac:picMk id="7" creationId="{E00698AA-A3AA-A73A-33AF-CF1A21E62697}"/>
+          </ac:picMkLst>
+        </pc:picChg>
         <pc:picChg chg="del">
           <ac:chgData name="João Luiz Grave Gross" userId="70663aa8-58a3-482c-a5ab-33e75f2c9147" providerId="ADAL" clId="{1642D5D4-6F90-4729-B6C8-CF446D4D64F7}" dt="2025-10-01T21:56:48.311" v="2310" actId="478"/>
           <ac:picMkLst>
@@ -956,12 +1020,28 @@
             <ac:picMk id="7" creationId="{EE229B69-2CF7-E432-A429-E937665E9B7F}"/>
           </ac:picMkLst>
         </pc:picChg>
+        <pc:picChg chg="add mod">
+          <ac:chgData name="João Luiz Grave Gross" userId="70663aa8-58a3-482c-a5ab-33e75f2c9147" providerId="ADAL" clId="{1642D5D4-6F90-4729-B6C8-CF446D4D64F7}" dt="2025-10-02T18:19:12.181" v="4553" actId="14100"/>
+          <ac:picMkLst>
+            <pc:docMk/>
+            <pc:sldMk cId="1433434" sldId="283"/>
+            <ac:picMk id="9" creationId="{92D864AE-DD2F-2583-C74F-AA9F23B8B3F4}"/>
+          </ac:picMkLst>
+        </pc:picChg>
         <pc:picChg chg="del">
           <ac:chgData name="João Luiz Grave Gross" userId="70663aa8-58a3-482c-a5ab-33e75f2c9147" providerId="ADAL" clId="{1642D5D4-6F90-4729-B6C8-CF446D4D64F7}" dt="2025-10-01T21:56:47.271" v="2309" actId="478"/>
           <ac:picMkLst>
             <pc:docMk/>
             <pc:sldMk cId="1433434" sldId="283"/>
             <ac:picMk id="9" creationId="{C34EFB18-25E0-3A26-44D7-F902240A162C}"/>
+          </ac:picMkLst>
+        </pc:picChg>
+        <pc:picChg chg="add mod">
+          <ac:chgData name="João Luiz Grave Gross" userId="70663aa8-58a3-482c-a5ab-33e75f2c9147" providerId="ADAL" clId="{1642D5D4-6F90-4729-B6C8-CF446D4D64F7}" dt="2025-10-02T18:19:05.199" v="4550"/>
+          <ac:picMkLst>
+            <pc:docMk/>
+            <pc:sldMk cId="1433434" sldId="283"/>
+            <ac:picMk id="10" creationId="{98758D6B-6F90-0BCC-BDE5-68E0AF420C03}"/>
           </ac:picMkLst>
         </pc:picChg>
       </pc:sldChg>
@@ -1161,7 +1241,7 @@
         </pc:picChg>
       </pc:sldChg>
       <pc:sldChg chg="addSp delSp modSp add mod">
-        <pc:chgData name="João Luiz Grave Gross" userId="70663aa8-58a3-482c-a5ab-33e75f2c9147" providerId="ADAL" clId="{1642D5D4-6F90-4729-B6C8-CF446D4D64F7}" dt="2025-10-02T12:48:02.347" v="3680" actId="1036"/>
+        <pc:chgData name="João Luiz Grave Gross" userId="70663aa8-58a3-482c-a5ab-33e75f2c9147" providerId="ADAL" clId="{1642D5D4-6F90-4729-B6C8-CF446D4D64F7}" dt="2025-10-02T18:32:09.720" v="4767" actId="1076"/>
         <pc:sldMkLst>
           <pc:docMk/>
           <pc:sldMk cId="1132930727" sldId="288"/>
@@ -1174,12 +1254,20 @@
             <ac:spMk id="3" creationId="{09675329-5578-6712-1D7D-A10C3925E2D5}"/>
           </ac:spMkLst>
         </pc:spChg>
-        <pc:picChg chg="add mod">
-          <ac:chgData name="João Luiz Grave Gross" userId="70663aa8-58a3-482c-a5ab-33e75f2c9147" providerId="ADAL" clId="{1642D5D4-6F90-4729-B6C8-CF446D4D64F7}" dt="2025-10-02T12:48:02.347" v="3680" actId="1036"/>
+        <pc:picChg chg="add del mod">
+          <ac:chgData name="João Luiz Grave Gross" userId="70663aa8-58a3-482c-a5ab-33e75f2c9147" providerId="ADAL" clId="{1642D5D4-6F90-4729-B6C8-CF446D4D64F7}" dt="2025-10-02T18:31:52.411" v="4762" actId="478"/>
           <ac:picMkLst>
             <pc:docMk/>
             <pc:sldMk cId="1132930727" sldId="288"/>
             <ac:picMk id="6" creationId="{06C3ED27-ECB9-687E-DC03-7D9466099F43}"/>
+          </ac:picMkLst>
+        </pc:picChg>
+        <pc:picChg chg="add mod modCrop">
+          <ac:chgData name="João Luiz Grave Gross" userId="70663aa8-58a3-482c-a5ab-33e75f2c9147" providerId="ADAL" clId="{1642D5D4-6F90-4729-B6C8-CF446D4D64F7}" dt="2025-10-02T18:32:09.720" v="4767" actId="1076"/>
+          <ac:picMkLst>
+            <pc:docMk/>
+            <pc:sldMk cId="1132930727" sldId="288"/>
+            <ac:picMk id="7" creationId="{8EAE22CF-ADAF-6A61-BB2B-2DD26A736EE7}"/>
           </ac:picMkLst>
         </pc:picChg>
         <pc:picChg chg="del">
@@ -1768,6 +1856,90 @@
     </a:lvl9pPr>
   </p:notesStyle>
 </p:notesMaster>
+</file>
+
+<file path=ppt/notesSlides/notesSlide1.xml><?xml version="1.0" encoding="utf-8"?>
+<p:notes xmlns:a="http://schemas.openxmlformats.org/drawingml/2006/main" xmlns:r="http://schemas.openxmlformats.org/officeDocument/2006/relationships" xmlns:p="http://schemas.openxmlformats.org/presentationml/2006/main">
+  <p:cSld>
+    <p:spTree>
+      <p:nvGrpSpPr>
+        <p:cNvPr id="1" name=""/>
+        <p:cNvGrpSpPr/>
+        <p:nvPr/>
+      </p:nvGrpSpPr>
+      <p:grpSpPr>
+        <a:xfrm>
+          <a:off x="0" y="0"/>
+          <a:ext cx="0" cy="0"/>
+          <a:chOff x="0" y="0"/>
+          <a:chExt cx="0" cy="0"/>
+        </a:xfrm>
+      </p:grpSpPr>
+      <p:sp>
+        <p:nvSpPr>
+          <p:cNvPr id="2" name="Espaço Reservado para Imagem de Slide 1"/>
+          <p:cNvSpPr>
+            <a:spLocks noGrp="1" noRot="1" noChangeAspect="1"/>
+          </p:cNvSpPr>
+          <p:nvPr>
+            <p:ph type="sldImg"/>
+          </p:nvPr>
+        </p:nvSpPr>
+        <p:spPr/>
+      </p:sp>
+      <p:sp>
+        <p:nvSpPr>
+          <p:cNvPr id="3" name="Espaço Reservado para Anotações 2"/>
+          <p:cNvSpPr>
+            <a:spLocks noGrp="1"/>
+          </p:cNvSpPr>
+          <p:nvPr>
+            <p:ph type="body" idx="1"/>
+          </p:nvPr>
+        </p:nvSpPr>
+        <p:spPr/>
+        <p:txBody>
+          <a:bodyPr/>
+          <a:lstStyle/>
+          <a:p>
+            <a:endParaRPr lang="pt-BR" dirty="0"/>
+          </a:p>
+        </p:txBody>
+      </p:sp>
+      <p:sp>
+        <p:nvSpPr>
+          <p:cNvPr id="4" name="Espaço Reservado para Número de Slide 3"/>
+          <p:cNvSpPr>
+            <a:spLocks noGrp="1"/>
+          </p:cNvSpPr>
+          <p:nvPr>
+            <p:ph type="sldNum" sz="quarter" idx="5"/>
+          </p:nvPr>
+        </p:nvSpPr>
+        <p:spPr/>
+        <p:txBody>
+          <a:bodyPr/>
+          <a:lstStyle/>
+          <a:p>
+            <a:fld id="{B1047C67-598D-459E-BBF4-2A6A5D8B3D08}" type="slidenum">
+              <a:rPr lang="pt-BR" smtClean="0"/>
+              <a:t>17</a:t>
+            </a:fld>
+            <a:endParaRPr lang="pt-BR"/>
+          </a:p>
+        </p:txBody>
+      </p:sp>
+    </p:spTree>
+    <p:extLst>
+      <p:ext uri="{BB962C8B-B14F-4D97-AF65-F5344CB8AC3E}">
+        <p14:creationId xmlns:p14="http://schemas.microsoft.com/office/powerpoint/2010/main" val="300619376"/>
+      </p:ext>
+    </p:extLst>
+  </p:cSld>
+  <p:clrMapOvr>
+    <a:masterClrMapping/>
+  </p:clrMapOvr>
+</p:notes>
 </file>
 
 <file path=ppt/slideLayouts/slideLayout1.xml><?xml version="1.0" encoding="utf-8"?>
@@ -21016,37 +21188,42 @@
             <p:ph type="subTitle" idx="1"/>
           </p:nvPr>
         </p:nvSpPr>
-        <p:spPr/>
+        <p:spPr>
+          <a:xfrm>
+            <a:off x="1524000" y="3602037"/>
+            <a:ext cx="9144000" cy="2670943"/>
+          </a:xfrm>
+        </p:spPr>
         <p:txBody>
           <a:bodyPr anchor="t">
-            <a:normAutofit fontScale="77500" lnSpcReduction="20000"/>
+            <a:normAutofit/>
           </a:bodyPr>
           <a:lstStyle/>
           <a:p>
             <a:r>
-              <a:rPr lang="da-DK" dirty="0"/>
+              <a:rPr lang="da-DK" sz="2800" dirty="0"/>
               <a:t>CMP223 - Computer System Performance Analysis</a:t>
             </a:r>
           </a:p>
           <a:p>
             <a:r>
-              <a:rPr lang="da-DK" dirty="0"/>
+              <a:rPr lang="da-DK" sz="2800" dirty="0"/>
               <a:t>Prof. Dr. Lucas Mello Schnorr</a:t>
             </a:r>
-            <a:endParaRPr lang="pt-BR" dirty="0"/>
-          </a:p>
-          <a:p>
-            <a:endParaRPr lang="pt-BR" dirty="0"/>
-          </a:p>
-          <a:p>
-            <a:r>
-              <a:rPr lang="pt-BR" dirty="0"/>
+            <a:endParaRPr lang="pt-BR" sz="2800" dirty="0"/>
+          </a:p>
+          <a:p>
+            <a:endParaRPr lang="pt-BR" sz="2800" dirty="0"/>
+          </a:p>
+          <a:p>
+            <a:r>
+              <a:rPr lang="pt-BR" sz="2800" dirty="0"/>
               <a:t>João Luiz Grave Gross</a:t>
             </a:r>
           </a:p>
           <a:p>
             <a:r>
-              <a:rPr lang="pt-BR" dirty="0"/>
+              <a:rPr lang="pt-BR" sz="2000" dirty="0"/>
               <a:t>06 de outubro de 2025</a:t>
             </a:r>
           </a:p>
@@ -21111,15 +21288,7 @@
           <a:p>
             <a:r>
               <a:rPr lang="en-US" dirty="0"/>
-              <a:t>Teste de </a:t>
-            </a:r>
-            <a:r>
-              <a:rPr lang="en-US" dirty="0" err="1"/>
-              <a:t>Frequência</a:t>
-            </a:r>
-            <a:r>
-              <a:rPr lang="en-US" dirty="0"/>
-              <a:t> de CPU</a:t>
+              <a:t>Teste de Freq. de CPU: Turbo Boost OFF</a:t>
             </a:r>
             <a:endParaRPr lang="pt-BR" dirty="0"/>
           </a:p>
@@ -21407,15 +21576,7 @@
           <a:p>
             <a:r>
               <a:rPr lang="en-US" dirty="0"/>
-              <a:t>Teste de </a:t>
-            </a:r>
-            <a:r>
-              <a:rPr lang="en-US" dirty="0" err="1"/>
-              <a:t>Frequência</a:t>
-            </a:r>
-            <a:r>
-              <a:rPr lang="en-US" dirty="0"/>
-              <a:t> de CPU</a:t>
+              <a:t>Teste de Freq. de CPU: Turbo Boost ON</a:t>
             </a:r>
             <a:endParaRPr lang="pt-BR" dirty="0"/>
           </a:p>
@@ -21480,39 +21641,167 @@
           </a:p>
         </p:txBody>
       </p:sp>
-      <p:sp>
-        <p:nvSpPr>
-          <p:cNvPr id="5" name="CaixaDeTexto 4">
-            <a:extLst>
-              <a:ext uri="{FF2B5EF4-FFF2-40B4-BE49-F238E27FC236}">
-                <a16:creationId xmlns:a16="http://schemas.microsoft.com/office/drawing/2014/main" id="{633743FD-C574-F54E-D0E2-EAF730CB3E3C}"/>
-              </a:ext>
-            </a:extLst>
-          </p:cNvPr>
-          <p:cNvSpPr txBox="1"/>
+      <p:pic>
+        <p:nvPicPr>
+          <p:cNvPr id="9" name="Imagem 8">
+            <a:extLst>
+              <a:ext uri="{FF2B5EF4-FFF2-40B4-BE49-F238E27FC236}">
+                <a16:creationId xmlns:a16="http://schemas.microsoft.com/office/drawing/2014/main" id="{92D864AE-DD2F-2583-C74F-AA9F23B8B3F4}"/>
+              </a:ext>
+            </a:extLst>
+          </p:cNvPr>
+          <p:cNvPicPr>
+            <a:picLocks noChangeAspect="1"/>
+          </p:cNvPicPr>
           <p:nvPr/>
-        </p:nvSpPr>
+        </p:nvPicPr>
+        <p:blipFill>
+          <a:blip r:embed="rId2"/>
+          <a:stretch>
+            <a:fillRect/>
+          </a:stretch>
+        </p:blipFill>
         <p:spPr>
           <a:xfrm>
-            <a:off x="838200" y="2094271"/>
-            <a:ext cx="2811988" cy="369332"/>
+            <a:off x="5412828" y="1498491"/>
+            <a:ext cx="6541503" cy="4968230"/>
+          </a:xfrm>
+          <a:prstGeom prst="rect">
+            <a:avLst/>
+          </a:prstGeom>
+        </p:spPr>
+      </p:pic>
+      <p:pic>
+        <p:nvPicPr>
+          <p:cNvPr id="10" name="Imagem 9">
+            <a:extLst>
+              <a:ext uri="{FF2B5EF4-FFF2-40B4-BE49-F238E27FC236}">
+                <a16:creationId xmlns:a16="http://schemas.microsoft.com/office/drawing/2014/main" id="{98758D6B-6F90-0BCC-BDE5-68E0AF420C03}"/>
+              </a:ext>
+            </a:extLst>
+          </p:cNvPr>
+          <p:cNvPicPr>
+            <a:picLocks noChangeAspect="1"/>
+          </p:cNvPicPr>
+          <p:nvPr/>
+        </p:nvPicPr>
+        <p:blipFill>
+          <a:blip r:embed="rId3"/>
+          <a:stretch>
+            <a:fillRect/>
+          </a:stretch>
+        </p:blipFill>
+        <p:spPr>
+          <a:xfrm>
+            <a:off x="635515" y="1645803"/>
+            <a:ext cx="4918852" cy="3177395"/>
+          </a:xfrm>
+          <a:prstGeom prst="rect">
+            <a:avLst/>
+          </a:prstGeom>
+        </p:spPr>
+      </p:pic>
+      <p:sp>
+        <p:nvSpPr>
+          <p:cNvPr id="11" name="Retângulo 10">
+            <a:extLst>
+              <a:ext uri="{FF2B5EF4-FFF2-40B4-BE49-F238E27FC236}">
+                <a16:creationId xmlns:a16="http://schemas.microsoft.com/office/drawing/2014/main" id="{8A7F4C3C-1B3B-4D6E-82C7-09CF8E10D25E}"/>
+              </a:ext>
+            </a:extLst>
+          </p:cNvPr>
+          <p:cNvSpPr/>
+          <p:nvPr/>
+        </p:nvSpPr>
+        <p:spPr>
+          <a:xfrm>
+            <a:off x="1219200" y="3696929"/>
+            <a:ext cx="3687097" cy="196645"/>
           </a:xfrm>
           <a:prstGeom prst="rect">
             <a:avLst/>
           </a:prstGeom>
           <a:noFill/>
+          <a:ln>
+            <a:solidFill>
+              <a:srgbClr val="FF0000"/>
+            </a:solidFill>
+          </a:ln>
         </p:spPr>
-        <p:txBody>
-          <a:bodyPr wrap="none" rtlCol="0">
-            <a:spAutoFit/>
-          </a:bodyPr>
-          <a:lstStyle/>
-          <a:p>
-            <a:r>
-              <a:rPr lang="en-US" dirty="0"/>
-              <a:t>Teste com Turbo Boost ON</a:t>
-            </a:r>
-            <a:endParaRPr lang="pt-BR" dirty="0"/>
+        <p:style>
+          <a:lnRef idx="2">
+            <a:schemeClr val="accent1">
+              <a:shade val="15000"/>
+            </a:schemeClr>
+          </a:lnRef>
+          <a:fillRef idx="1">
+            <a:schemeClr val="accent1"/>
+          </a:fillRef>
+          <a:effectRef idx="0">
+            <a:schemeClr val="accent1"/>
+          </a:effectRef>
+          <a:fontRef idx="minor">
+            <a:schemeClr val="lt1"/>
+          </a:fontRef>
+        </p:style>
+        <p:txBody>
+          <a:bodyPr rtlCol="0" anchor="ctr"/>
+          <a:lstStyle/>
+          <a:p>
+            <a:pPr algn="ctr"/>
+            <a:endParaRPr lang="pt-BR"/>
+          </a:p>
+        </p:txBody>
+      </p:sp>
+      <p:sp>
+        <p:nvSpPr>
+          <p:cNvPr id="12" name="Elipse 11">
+            <a:extLst>
+              <a:ext uri="{FF2B5EF4-FFF2-40B4-BE49-F238E27FC236}">
+                <a16:creationId xmlns:a16="http://schemas.microsoft.com/office/drawing/2014/main" id="{49BDCA3F-7A2C-5C5D-657A-F2CDC73FADAE}"/>
+              </a:ext>
+            </a:extLst>
+          </p:cNvPr>
+          <p:cNvSpPr/>
+          <p:nvPr/>
+        </p:nvSpPr>
+        <p:spPr>
+          <a:xfrm>
+            <a:off x="7240181" y="3696928"/>
+            <a:ext cx="3028335" cy="304365"/>
+          </a:xfrm>
+          <a:prstGeom prst="ellipse">
+            <a:avLst/>
+          </a:prstGeom>
+          <a:noFill/>
+          <a:ln>
+            <a:solidFill>
+              <a:srgbClr val="FF0000"/>
+            </a:solidFill>
+          </a:ln>
+        </p:spPr>
+        <p:style>
+          <a:lnRef idx="2">
+            <a:schemeClr val="accent1">
+              <a:shade val="15000"/>
+            </a:schemeClr>
+          </a:lnRef>
+          <a:fillRef idx="1">
+            <a:schemeClr val="accent1"/>
+          </a:fillRef>
+          <a:effectRef idx="0">
+            <a:schemeClr val="accent1"/>
+          </a:effectRef>
+          <a:fontRef idx="minor">
+            <a:schemeClr val="lt1"/>
+          </a:fontRef>
+        </p:style>
+        <p:txBody>
+          <a:bodyPr rtlCol="0" anchor="ctr"/>
+          <a:lstStyle/>
+          <a:p>
+            <a:pPr algn="ctr"/>
+            <a:endParaRPr lang="pt-BR"/>
           </a:p>
         </p:txBody>
       </p:sp>
@@ -22530,10 +22819,10 @@
       </p:sp>
       <p:pic>
         <p:nvPicPr>
-          <p:cNvPr id="6" name="Imagem 5">
-            <a:extLst>
-              <a:ext uri="{FF2B5EF4-FFF2-40B4-BE49-F238E27FC236}">
-                <a16:creationId xmlns:a16="http://schemas.microsoft.com/office/drawing/2014/main" id="{06C3ED27-ECB9-687E-DC03-7D9466099F43}"/>
+          <p:cNvPr id="7" name="Imagem 6">
+            <a:extLst>
+              <a:ext uri="{FF2B5EF4-FFF2-40B4-BE49-F238E27FC236}">
+                <a16:creationId xmlns:a16="http://schemas.microsoft.com/office/drawing/2014/main" id="{8EAE22CF-ADAF-6A61-BB2B-2DD26A736EE7}"/>
               </a:ext>
             </a:extLst>
           </p:cNvPr>
@@ -22544,14 +22833,15 @@
         </p:nvPicPr>
         <p:blipFill>
           <a:blip r:embed="rId2"/>
+          <a:srcRect b="43973"/>
           <a:stretch>
             <a:fillRect/>
           </a:stretch>
         </p:blipFill>
         <p:spPr>
           <a:xfrm>
-            <a:off x="1092767" y="2284678"/>
-            <a:ext cx="8889433" cy="4270563"/>
+            <a:off x="1008757" y="2408429"/>
+            <a:ext cx="9654647" cy="3608911"/>
           </a:xfrm>
           <a:prstGeom prst="rect">
             <a:avLst/>
@@ -22672,192 +22962,19 @@
         </p:nvSpPr>
         <p:spPr>
           <a:xfrm>
-            <a:off x="838200" y="1825625"/>
-            <a:ext cx="5497286" cy="4351338"/>
+            <a:off x="990600" y="1723134"/>
+            <a:ext cx="8517194" cy="661066"/>
           </a:xfrm>
         </p:spPr>
         <p:txBody>
           <a:bodyPr>
-            <a:normAutofit lnSpcReduction="10000"/>
+            <a:normAutofit/>
           </a:bodyPr>
           <a:lstStyle/>
           <a:p>
             <a:r>
               <a:rPr lang="en-US" dirty="0"/>
-              <a:t>8 threads no total; Turbo Boost </a:t>
-            </a:r>
-            <a:r>
-              <a:rPr lang="en-US" dirty="0" err="1"/>
-              <a:t>Ativo</a:t>
-            </a:r>
-            <a:endParaRPr lang="en-US" dirty="0"/>
-          </a:p>
-          <a:p>
-            <a:r>
-              <a:rPr lang="en-US" b="1" dirty="0"/>
-              <a:t>Cenário 1</a:t>
-            </a:r>
-          </a:p>
-          <a:p>
-            <a:pPr lvl="1"/>
-            <a:r>
-              <a:rPr lang="en-US" dirty="0" err="1"/>
-              <a:t>Apenas</a:t>
-            </a:r>
-            <a:r>
-              <a:rPr lang="en-US" dirty="0"/>
-              <a:t> P-cores</a:t>
-            </a:r>
-          </a:p>
-          <a:p>
-            <a:pPr lvl="1"/>
-            <a:r>
-              <a:rPr lang="en-US" dirty="0"/>
-              <a:t>1 thread </a:t>
-            </a:r>
-            <a:r>
-              <a:rPr lang="en-US" dirty="0" err="1"/>
-              <a:t>por</a:t>
-            </a:r>
-            <a:r>
-              <a:rPr lang="en-US" dirty="0"/>
-              <a:t> </a:t>
-            </a:r>
-            <a:r>
-              <a:rPr lang="en-US" dirty="0" err="1"/>
-              <a:t>núcleo</a:t>
-            </a:r>
-            <a:r>
-              <a:rPr lang="en-US" dirty="0"/>
-              <a:t> </a:t>
-            </a:r>
-            <a:r>
-              <a:rPr lang="en-US" dirty="0" err="1"/>
-              <a:t>físico</a:t>
-            </a:r>
-            <a:r>
-              <a:rPr lang="en-US" dirty="0"/>
-              <a:t> (8 </a:t>
-            </a:r>
-            <a:r>
-              <a:rPr lang="en-US" dirty="0" err="1"/>
-              <a:t>núcleos</a:t>
-            </a:r>
-            <a:r>
-              <a:rPr lang="en-US" dirty="0"/>
-              <a:t> </a:t>
-            </a:r>
-            <a:r>
-              <a:rPr lang="en-US" dirty="0" err="1"/>
-              <a:t>físicos</a:t>
-            </a:r>
-            <a:r>
-              <a:rPr lang="en-US" dirty="0"/>
-              <a:t> </a:t>
-            </a:r>
-            <a:r>
-              <a:rPr lang="en-US" dirty="0" err="1"/>
-              <a:t>diferentes</a:t>
-            </a:r>
-            <a:r>
-              <a:rPr lang="en-US" dirty="0"/>
-              <a:t>)</a:t>
-            </a:r>
-          </a:p>
-          <a:p>
-            <a:r>
-              <a:rPr lang="en-US" b="1" dirty="0"/>
-              <a:t>Cenário 2</a:t>
-            </a:r>
-          </a:p>
-          <a:p>
-            <a:pPr lvl="1"/>
-            <a:r>
-              <a:rPr lang="en-US" dirty="0" err="1"/>
-              <a:t>Apenas</a:t>
-            </a:r>
-            <a:r>
-              <a:rPr lang="en-US" dirty="0"/>
-              <a:t> P-cores</a:t>
-            </a:r>
-          </a:p>
-          <a:p>
-            <a:pPr lvl="1"/>
-            <a:r>
-              <a:rPr lang="en-US" dirty="0" err="1"/>
-              <a:t>Núcleos</a:t>
-            </a:r>
-            <a:r>
-              <a:rPr lang="en-US" dirty="0"/>
-              <a:t> </a:t>
-            </a:r>
-            <a:r>
-              <a:rPr lang="en-US" dirty="0" err="1"/>
-              <a:t>físicos</a:t>
-            </a:r>
-            <a:r>
-              <a:rPr lang="en-US" dirty="0"/>
-              <a:t> e </a:t>
-            </a:r>
-            <a:r>
-              <a:rPr lang="en-US" dirty="0" err="1"/>
-              <a:t>lógicos</a:t>
-            </a:r>
-            <a:endParaRPr lang="en-US" dirty="0"/>
-          </a:p>
-          <a:p>
-            <a:pPr lvl="1"/>
-            <a:r>
-              <a:rPr lang="en-US" dirty="0"/>
-              <a:t>2 threads </a:t>
-            </a:r>
-            <a:r>
-              <a:rPr lang="en-US" dirty="0" err="1"/>
-              <a:t>por</a:t>
-            </a:r>
-            <a:r>
-              <a:rPr lang="en-US" dirty="0"/>
-              <a:t> </a:t>
-            </a:r>
-            <a:r>
-              <a:rPr lang="en-US" dirty="0" err="1"/>
-              <a:t>núcleo</a:t>
-            </a:r>
-            <a:r>
-              <a:rPr lang="en-US" dirty="0"/>
-              <a:t> </a:t>
-            </a:r>
-            <a:r>
-              <a:rPr lang="en-US" dirty="0" err="1"/>
-              <a:t>físico</a:t>
-            </a:r>
-            <a:r>
-              <a:rPr lang="en-US" dirty="0"/>
-              <a:t> (4 </a:t>
-            </a:r>
-            <a:r>
-              <a:rPr lang="en-US" dirty="0" err="1"/>
-              <a:t>núcleos</a:t>
-            </a:r>
-            <a:r>
-              <a:rPr lang="en-US" dirty="0"/>
-              <a:t> </a:t>
-            </a:r>
-            <a:r>
-              <a:rPr lang="en-US" dirty="0" err="1"/>
-              <a:t>físicos</a:t>
-            </a:r>
-            <a:r>
-              <a:rPr lang="en-US" dirty="0"/>
-              <a:t> </a:t>
-            </a:r>
-            <a:r>
-              <a:rPr lang="en-US" dirty="0" err="1"/>
-              <a:t>diferentes</a:t>
-            </a:r>
-            <a:r>
-              <a:rPr lang="en-US" dirty="0"/>
-              <a:t>)</a:t>
+              <a:t>8 threads no total; Turbo Boost Enabled &amp; Disabled</a:t>
             </a:r>
           </a:p>
         </p:txBody>
@@ -23144,6 +23261,367 @@
           </a:p>
         </p:txBody>
       </p:sp>
+      <p:sp>
+        <p:nvSpPr>
+          <p:cNvPr id="3" name="Espaço Reservado para Conteúdo 11">
+            <a:extLst>
+              <a:ext uri="{FF2B5EF4-FFF2-40B4-BE49-F238E27FC236}">
+                <a16:creationId xmlns:a16="http://schemas.microsoft.com/office/drawing/2014/main" id="{9ACEEE1B-1037-35C5-7D01-BFEE1710A5D1}"/>
+              </a:ext>
+            </a:extLst>
+          </p:cNvPr>
+          <p:cNvSpPr txBox="1">
+            <a:spLocks/>
+          </p:cNvSpPr>
+          <p:nvPr/>
+        </p:nvSpPr>
+        <p:spPr>
+          <a:xfrm>
+            <a:off x="990600" y="2563587"/>
+            <a:ext cx="5497286" cy="3765776"/>
+          </a:xfrm>
+          <a:prstGeom prst="rect">
+            <a:avLst/>
+          </a:prstGeom>
+        </p:spPr>
+        <p:txBody>
+          <a:bodyPr vert="horz" lIns="91440" tIns="45720" rIns="91440" bIns="45720" rtlCol="0">
+            <a:normAutofit/>
+          </a:bodyPr>
+          <a:lstStyle>
+            <a:lvl1pPr marL="228600" indent="-228600" algn="l" defTabSz="914400" rtl="0" eaLnBrk="1" latinLnBrk="0" hangingPunct="1">
+              <a:lnSpc>
+                <a:spcPct val="90000"/>
+              </a:lnSpc>
+              <a:spcBef>
+                <a:spcPts val="1000"/>
+              </a:spcBef>
+              <a:buFont typeface="Arial" panose="020B0604020202020204" pitchFamily="34" charset="0"/>
+              <a:buChar char="•"/>
+              <a:defRPr sz="2800" kern="1200">
+                <a:solidFill>
+                  <a:schemeClr val="tx1"/>
+                </a:solidFill>
+                <a:latin typeface="+mn-lt"/>
+                <a:ea typeface="+mn-ea"/>
+                <a:cs typeface="+mn-cs"/>
+              </a:defRPr>
+            </a:lvl1pPr>
+            <a:lvl2pPr marL="685800" indent="-228600" algn="l" defTabSz="914400" rtl="0" eaLnBrk="1" latinLnBrk="0" hangingPunct="1">
+              <a:lnSpc>
+                <a:spcPct val="90000"/>
+              </a:lnSpc>
+              <a:spcBef>
+                <a:spcPts val="500"/>
+              </a:spcBef>
+              <a:buFont typeface="Arial" panose="020B0604020202020204" pitchFamily="34" charset="0"/>
+              <a:buChar char="•"/>
+              <a:defRPr sz="2400" kern="1200">
+                <a:solidFill>
+                  <a:schemeClr val="tx1"/>
+                </a:solidFill>
+                <a:latin typeface="+mn-lt"/>
+                <a:ea typeface="+mn-ea"/>
+                <a:cs typeface="+mn-cs"/>
+              </a:defRPr>
+            </a:lvl2pPr>
+            <a:lvl3pPr marL="1143000" indent="-228600" algn="l" defTabSz="914400" rtl="0" eaLnBrk="1" latinLnBrk="0" hangingPunct="1">
+              <a:lnSpc>
+                <a:spcPct val="90000"/>
+              </a:lnSpc>
+              <a:spcBef>
+                <a:spcPts val="500"/>
+              </a:spcBef>
+              <a:buFont typeface="Arial" panose="020B0604020202020204" pitchFamily="34" charset="0"/>
+              <a:buChar char="•"/>
+              <a:defRPr sz="2000" kern="1200">
+                <a:solidFill>
+                  <a:schemeClr val="tx1"/>
+                </a:solidFill>
+                <a:latin typeface="+mn-lt"/>
+                <a:ea typeface="+mn-ea"/>
+                <a:cs typeface="+mn-cs"/>
+              </a:defRPr>
+            </a:lvl3pPr>
+            <a:lvl4pPr marL="1600200" indent="-228600" algn="l" defTabSz="914400" rtl="0" eaLnBrk="1" latinLnBrk="0" hangingPunct="1">
+              <a:lnSpc>
+                <a:spcPct val="90000"/>
+              </a:lnSpc>
+              <a:spcBef>
+                <a:spcPts val="500"/>
+              </a:spcBef>
+              <a:buFont typeface="Arial" panose="020B0604020202020204" pitchFamily="34" charset="0"/>
+              <a:buChar char="•"/>
+              <a:defRPr sz="1800" kern="1200">
+                <a:solidFill>
+                  <a:schemeClr val="tx1"/>
+                </a:solidFill>
+                <a:latin typeface="+mn-lt"/>
+                <a:ea typeface="+mn-ea"/>
+                <a:cs typeface="+mn-cs"/>
+              </a:defRPr>
+            </a:lvl4pPr>
+            <a:lvl5pPr marL="2057400" indent="-228600" algn="l" defTabSz="914400" rtl="0" eaLnBrk="1" latinLnBrk="0" hangingPunct="1">
+              <a:lnSpc>
+                <a:spcPct val="90000"/>
+              </a:lnSpc>
+              <a:spcBef>
+                <a:spcPts val="500"/>
+              </a:spcBef>
+              <a:buFont typeface="Arial" panose="020B0604020202020204" pitchFamily="34" charset="0"/>
+              <a:buChar char="•"/>
+              <a:defRPr sz="1800" kern="1200">
+                <a:solidFill>
+                  <a:schemeClr val="tx1"/>
+                </a:solidFill>
+                <a:latin typeface="+mn-lt"/>
+                <a:ea typeface="+mn-ea"/>
+                <a:cs typeface="+mn-cs"/>
+              </a:defRPr>
+            </a:lvl5pPr>
+            <a:lvl6pPr marL="2514600" indent="-228600" algn="l" defTabSz="914400" rtl="0" eaLnBrk="1" latinLnBrk="0" hangingPunct="1">
+              <a:lnSpc>
+                <a:spcPct val="90000"/>
+              </a:lnSpc>
+              <a:spcBef>
+                <a:spcPts val="500"/>
+              </a:spcBef>
+              <a:buFont typeface="Arial" panose="020B0604020202020204" pitchFamily="34" charset="0"/>
+              <a:buChar char="•"/>
+              <a:defRPr sz="1800" kern="1200">
+                <a:solidFill>
+                  <a:schemeClr val="tx1"/>
+                </a:solidFill>
+                <a:latin typeface="+mn-lt"/>
+                <a:ea typeface="+mn-ea"/>
+                <a:cs typeface="+mn-cs"/>
+              </a:defRPr>
+            </a:lvl6pPr>
+            <a:lvl7pPr marL="2971800" indent="-228600" algn="l" defTabSz="914400" rtl="0" eaLnBrk="1" latinLnBrk="0" hangingPunct="1">
+              <a:lnSpc>
+                <a:spcPct val="90000"/>
+              </a:lnSpc>
+              <a:spcBef>
+                <a:spcPts val="500"/>
+              </a:spcBef>
+              <a:buFont typeface="Arial" panose="020B0604020202020204" pitchFamily="34" charset="0"/>
+              <a:buChar char="•"/>
+              <a:defRPr sz="1800" kern="1200">
+                <a:solidFill>
+                  <a:schemeClr val="tx1"/>
+                </a:solidFill>
+                <a:latin typeface="+mn-lt"/>
+                <a:ea typeface="+mn-ea"/>
+                <a:cs typeface="+mn-cs"/>
+              </a:defRPr>
+            </a:lvl7pPr>
+            <a:lvl8pPr marL="3429000" indent="-228600" algn="l" defTabSz="914400" rtl="0" eaLnBrk="1" latinLnBrk="0" hangingPunct="1">
+              <a:lnSpc>
+                <a:spcPct val="90000"/>
+              </a:lnSpc>
+              <a:spcBef>
+                <a:spcPts val="500"/>
+              </a:spcBef>
+              <a:buFont typeface="Arial" panose="020B0604020202020204" pitchFamily="34" charset="0"/>
+              <a:buChar char="•"/>
+              <a:defRPr sz="1800" kern="1200">
+                <a:solidFill>
+                  <a:schemeClr val="tx1"/>
+                </a:solidFill>
+                <a:latin typeface="+mn-lt"/>
+                <a:ea typeface="+mn-ea"/>
+                <a:cs typeface="+mn-cs"/>
+              </a:defRPr>
+            </a:lvl8pPr>
+            <a:lvl9pPr marL="3886200" indent="-228600" algn="l" defTabSz="914400" rtl="0" eaLnBrk="1" latinLnBrk="0" hangingPunct="1">
+              <a:lnSpc>
+                <a:spcPct val="90000"/>
+              </a:lnSpc>
+              <a:spcBef>
+                <a:spcPts val="500"/>
+              </a:spcBef>
+              <a:buFont typeface="Arial" panose="020B0604020202020204" pitchFamily="34" charset="0"/>
+              <a:buChar char="•"/>
+              <a:defRPr sz="1800" kern="1200">
+                <a:solidFill>
+                  <a:schemeClr val="tx1"/>
+                </a:solidFill>
+                <a:latin typeface="+mn-lt"/>
+                <a:ea typeface="+mn-ea"/>
+                <a:cs typeface="+mn-cs"/>
+              </a:defRPr>
+            </a:lvl9pPr>
+          </a:lstStyle>
+          <a:p>
+            <a:r>
+              <a:rPr lang="en-US" b="1" dirty="0"/>
+              <a:t>Cenário 1</a:t>
+            </a:r>
+          </a:p>
+          <a:p>
+            <a:pPr lvl="1"/>
+            <a:r>
+              <a:rPr lang="en-US" dirty="0" err="1"/>
+              <a:t>Apenas</a:t>
+            </a:r>
+            <a:r>
+              <a:rPr lang="en-US" dirty="0"/>
+              <a:t> P-cores</a:t>
+            </a:r>
+          </a:p>
+          <a:p>
+            <a:pPr lvl="1"/>
+            <a:r>
+              <a:rPr lang="en-US" dirty="0"/>
+              <a:t>1 thread </a:t>
+            </a:r>
+            <a:r>
+              <a:rPr lang="en-US" dirty="0" err="1"/>
+              <a:t>por</a:t>
+            </a:r>
+            <a:r>
+              <a:rPr lang="en-US" dirty="0"/>
+              <a:t> </a:t>
+            </a:r>
+            <a:r>
+              <a:rPr lang="en-US" dirty="0" err="1"/>
+              <a:t>núcleo</a:t>
+            </a:r>
+            <a:r>
+              <a:rPr lang="en-US" dirty="0"/>
+              <a:t> </a:t>
+            </a:r>
+            <a:r>
+              <a:rPr lang="en-US" dirty="0" err="1"/>
+              <a:t>físico</a:t>
+            </a:r>
+            <a:r>
+              <a:rPr lang="en-US" dirty="0"/>
+              <a:t> (8 </a:t>
+            </a:r>
+            <a:r>
+              <a:rPr lang="en-US" dirty="0" err="1"/>
+              <a:t>núcleos</a:t>
+            </a:r>
+            <a:r>
+              <a:rPr lang="en-US" dirty="0"/>
+              <a:t> </a:t>
+            </a:r>
+            <a:r>
+              <a:rPr lang="en-US" dirty="0" err="1"/>
+              <a:t>físicos</a:t>
+            </a:r>
+            <a:r>
+              <a:rPr lang="en-US" dirty="0"/>
+              <a:t> </a:t>
+            </a:r>
+            <a:r>
+              <a:rPr lang="en-US" dirty="0" err="1"/>
+              <a:t>diferentes</a:t>
+            </a:r>
+            <a:r>
+              <a:rPr lang="en-US" dirty="0"/>
+              <a:t>)</a:t>
+            </a:r>
+          </a:p>
+          <a:p>
+            <a:r>
+              <a:rPr lang="en-US" b="1" dirty="0"/>
+              <a:t>Cenário 2</a:t>
+            </a:r>
+          </a:p>
+          <a:p>
+            <a:pPr lvl="1"/>
+            <a:r>
+              <a:rPr lang="en-US" dirty="0" err="1"/>
+              <a:t>Apenas</a:t>
+            </a:r>
+            <a:r>
+              <a:rPr lang="en-US" dirty="0"/>
+              <a:t> P-cores</a:t>
+            </a:r>
+          </a:p>
+          <a:p>
+            <a:pPr lvl="1"/>
+            <a:r>
+              <a:rPr lang="en-US" dirty="0" err="1"/>
+              <a:t>Núcleos</a:t>
+            </a:r>
+            <a:r>
+              <a:rPr lang="en-US" dirty="0"/>
+              <a:t> </a:t>
+            </a:r>
+            <a:r>
+              <a:rPr lang="en-US" dirty="0" err="1"/>
+              <a:t>físicos</a:t>
+            </a:r>
+            <a:r>
+              <a:rPr lang="en-US" dirty="0"/>
+              <a:t> e </a:t>
+            </a:r>
+            <a:r>
+              <a:rPr lang="en-US" dirty="0" err="1"/>
+              <a:t>lógicos</a:t>
+            </a:r>
+            <a:endParaRPr lang="en-US" dirty="0"/>
+          </a:p>
+          <a:p>
+            <a:pPr lvl="1"/>
+            <a:r>
+              <a:rPr lang="en-US" dirty="0"/>
+              <a:t>2 threads </a:t>
+            </a:r>
+            <a:r>
+              <a:rPr lang="en-US" dirty="0" err="1"/>
+              <a:t>por</a:t>
+            </a:r>
+            <a:r>
+              <a:rPr lang="en-US" dirty="0"/>
+              <a:t> </a:t>
+            </a:r>
+            <a:r>
+              <a:rPr lang="en-US" dirty="0" err="1"/>
+              <a:t>núcleo</a:t>
+            </a:r>
+            <a:r>
+              <a:rPr lang="en-US" dirty="0"/>
+              <a:t> </a:t>
+            </a:r>
+            <a:r>
+              <a:rPr lang="en-US" dirty="0" err="1"/>
+              <a:t>físico</a:t>
+            </a:r>
+            <a:r>
+              <a:rPr lang="en-US" dirty="0"/>
+              <a:t> (4 </a:t>
+            </a:r>
+            <a:r>
+              <a:rPr lang="en-US" dirty="0" err="1"/>
+              <a:t>núcleos</a:t>
+            </a:r>
+            <a:r>
+              <a:rPr lang="en-US" dirty="0"/>
+              <a:t> </a:t>
+            </a:r>
+            <a:r>
+              <a:rPr lang="en-US" dirty="0" err="1"/>
+              <a:t>físicos</a:t>
+            </a:r>
+            <a:r>
+              <a:rPr lang="en-US" dirty="0"/>
+              <a:t> </a:t>
+            </a:r>
+            <a:r>
+              <a:rPr lang="en-US" dirty="0" err="1"/>
+              <a:t>diferentes</a:t>
+            </a:r>
+            <a:r>
+              <a:rPr lang="en-US" dirty="0"/>
+              <a:t>)</a:t>
+            </a:r>
+          </a:p>
+        </p:txBody>
+      </p:sp>
     </p:spTree>
     <p:extLst>
       <p:ext uri="{BB962C8B-B14F-4D97-AF65-F5344CB8AC3E}">
@@ -23430,6 +23908,22 @@
               <a:rPr lang="en-US" dirty="0" err="1"/>
               <a:t>máxima</a:t>
             </a:r>
+            <a:r>
+              <a:rPr lang="en-US" dirty="0"/>
+              <a:t> </a:t>
+            </a:r>
+            <a:r>
+              <a:rPr lang="en-US" dirty="0" err="1"/>
+              <a:t>nos</a:t>
+            </a:r>
+            <a:r>
+              <a:rPr lang="en-US" dirty="0"/>
+              <a:t> </a:t>
+            </a:r>
+            <a:r>
+              <a:rPr lang="en-US" dirty="0" err="1"/>
+              <a:t>núcleos</a:t>
+            </a:r>
             <a:endParaRPr lang="en-US" dirty="0"/>
           </a:p>
           <a:p>
@@ -24732,7 +25226,7 @@
         <p:spPr/>
         <p:txBody>
           <a:bodyPr>
-            <a:normAutofit/>
+            <a:normAutofit lnSpcReduction="10000"/>
           </a:bodyPr>
           <a:lstStyle/>
           <a:p>
@@ -24856,6 +25350,59 @@
             </a:r>
           </a:p>
           <a:p>
+            <a:endParaRPr lang="en-US" b="1" dirty="0"/>
+          </a:p>
+          <a:p>
+            <a:r>
+              <a:rPr lang="en-US" b="1" dirty="0"/>
+              <a:t>Governor: </a:t>
+            </a:r>
+            <a:r>
+              <a:rPr lang="en-US" dirty="0" err="1"/>
+              <a:t>Setado</a:t>
+            </a:r>
+            <a:r>
+              <a:rPr lang="en-US" dirty="0"/>
+              <a:t> em </a:t>
+            </a:r>
+            <a:r>
+              <a:rPr lang="en-US" b="1" dirty="0"/>
+              <a:t>performance</a:t>
+            </a:r>
+          </a:p>
+          <a:p>
+            <a:pPr lvl="1"/>
+            <a:r>
+              <a:rPr lang="en-US" dirty="0"/>
+              <a:t>“</a:t>
+            </a:r>
+            <a:r>
+              <a:rPr lang="en-US" dirty="0" err="1"/>
+              <a:t>CPUfreq</a:t>
+            </a:r>
+            <a:r>
+              <a:rPr lang="en-US" dirty="0"/>
+              <a:t> governor "performance" sets the CPU statically to the highest frequency within the borders of </a:t>
+            </a:r>
+            <a:r>
+              <a:rPr lang="en-US" dirty="0" err="1"/>
+              <a:t>scaling_min_freq</a:t>
+            </a:r>
+            <a:r>
+              <a:rPr lang="en-US" dirty="0"/>
+              <a:t> and </a:t>
+            </a:r>
+            <a:r>
+              <a:rPr lang="en-US" dirty="0" err="1"/>
+              <a:t>scaling_max_freq</a:t>
+            </a:r>
+            <a:r>
+              <a:rPr lang="en-US" dirty="0"/>
+              <a:t>.”</a:t>
+            </a:r>
+            <a:endParaRPr lang="en-US" b="1" dirty="0"/>
+          </a:p>
+          <a:p>
             <a:pPr lvl="1"/>
             <a:endParaRPr lang="en-US" b="1" dirty="0"/>
           </a:p>
@@ -24869,7 +25416,7 @@
               <a:t>Manter Turbo Boost sempre </a:t>
             </a:r>
             <a:r>
-              <a:rPr lang="en-US" dirty="0" err="1"/>
+              <a:rPr lang="en-US" b="1" dirty="0" err="1"/>
               <a:t>habilitado</a:t>
             </a:r>
             <a:r>
@@ -25021,7 +25568,7 @@
         <p:spPr/>
         <p:txBody>
           <a:bodyPr>
-            <a:normAutofit lnSpcReduction="10000"/>
+            <a:normAutofit fontScale="92500" lnSpcReduction="10000"/>
           </a:bodyPr>
           <a:lstStyle/>
           <a:p>
@@ -25145,8 +25692,12 @@
           <a:p>
             <a:pPr lvl="1"/>
             <a:r>
-              <a:rPr lang="en-US" dirty="0"/>
-              <a:t>Logo, se Turbo Boost </a:t>
+              <a:rPr lang="en-US" dirty="0" err="1"/>
+              <a:t>Conclusão</a:t>
+            </a:r>
+            <a:r>
+              <a:rPr lang="en-US" dirty="0"/>
+              <a:t>: Se o Turbo Boost </a:t>
             </a:r>
             <a:r>
               <a:rPr lang="en-US" dirty="0" err="1"/>
@@ -25157,7 +25708,7 @@
               <a:t> </a:t>
             </a:r>
             <a:r>
-              <a:rPr lang="en-US" dirty="0" err="1"/>
+              <a:rPr lang="en-US" b="1" dirty="0" err="1"/>
               <a:t>desabilitado</a:t>
             </a:r>
             <a:r>
@@ -25170,11 +25721,19 @@
             </a:r>
             <a:r>
               <a:rPr lang="en-US" dirty="0"/>
+              <a:t> é </a:t>
+            </a:r>
+            <a:r>
+              <a:rPr lang="en-US" dirty="0" err="1"/>
+              <a:t>possível</a:t>
+            </a:r>
+            <a:r>
+              <a:rPr lang="en-US" dirty="0"/>
               <a:t> </a:t>
             </a:r>
             <a:r>
               <a:rPr lang="en-US" dirty="0" err="1"/>
-              <a:t>passa</a:t>
+              <a:t>exceder</a:t>
             </a:r>
             <a:r>
               <a:rPr lang="en-US" dirty="0"/>
@@ -25186,27 +25745,31 @@
             </a:r>
             <a:r>
               <a:rPr lang="en-US" dirty="0"/>
-              <a:t> base. (É o que se </a:t>
-            </a:r>
-            <a:r>
-              <a:rPr lang="en-US" dirty="0" err="1"/>
-              <a:t>conclui</a:t>
-            </a:r>
-            <a:r>
-              <a:rPr lang="en-US" dirty="0"/>
-              <a:t> do </a:t>
-            </a:r>
-            <a:r>
-              <a:rPr lang="en-US" dirty="0" err="1"/>
-              <a:t>texto</a:t>
-            </a:r>
-            <a:r>
-              <a:rPr lang="en-US" dirty="0"/>
-              <a:t>)</a:t>
-            </a:r>
-          </a:p>
-          <a:p>
-            <a:endParaRPr lang="en-US" b="1" dirty="0"/>
+              <a:t> base.</a:t>
+            </a:r>
+          </a:p>
+          <a:p>
+            <a:pPr lvl="2"/>
+            <a:r>
+              <a:rPr lang="en-US" b="1" dirty="0"/>
+              <a:t>E </a:t>
+            </a:r>
+            <a:r>
+              <a:rPr lang="en-US" b="1" dirty="0" err="1"/>
+              <a:t>na</a:t>
+            </a:r>
+            <a:r>
+              <a:rPr lang="en-US" b="1" dirty="0"/>
+              <a:t> </a:t>
+            </a:r>
+            <a:r>
+              <a:rPr lang="en-US" b="1" dirty="0" err="1"/>
+              <a:t>prática</a:t>
+            </a:r>
+            <a:r>
+              <a:rPr lang="en-US" b="1" dirty="0"/>
+              <a:t>? …</a:t>
+            </a:r>
           </a:p>
           <a:p>
             <a:endParaRPr lang="en-US" b="1" dirty="0"/>
@@ -25442,7 +26005,7 @@
         </p:nvSpPr>
         <p:spPr>
           <a:xfrm>
-            <a:off x="838199" y="1960979"/>
+            <a:off x="836457" y="1819000"/>
             <a:ext cx="4943170" cy="523220"/>
           </a:xfrm>
           <a:prstGeom prst="rect">
@@ -25546,7 +26109,7 @@
         </p:nvSpPr>
         <p:spPr>
           <a:xfrm rot="5400000">
-            <a:off x="10720265" y="3316414"/>
+            <a:off x="10722998" y="3454566"/>
             <a:ext cx="1157946" cy="369332"/>
           </a:xfrm>
           <a:prstGeom prst="rect">
@@ -25586,7 +26149,7 @@
         </p:nvSpPr>
         <p:spPr>
           <a:xfrm rot="5400000">
-            <a:off x="10706640" y="5098956"/>
+            <a:off x="10761202" y="5311264"/>
             <a:ext cx="1185196" cy="369332"/>
           </a:xfrm>
           <a:prstGeom prst="rect">
@@ -25668,6 +26231,86 @@
               <a:rPr lang="pt-BR" sz="2400" dirty="0"/>
               <a:t>Menor TDP e menor frequência base</a:t>
             </a:r>
+          </a:p>
+        </p:txBody>
+      </p:sp>
+      <p:sp>
+        <p:nvSpPr>
+          <p:cNvPr id="7" name="CaixaDeTexto 6">
+            <a:extLst>
+              <a:ext uri="{FF2B5EF4-FFF2-40B4-BE49-F238E27FC236}">
+                <a16:creationId xmlns:a16="http://schemas.microsoft.com/office/drawing/2014/main" id="{711C8A77-A2C9-702D-BC1E-801318698D32}"/>
+              </a:ext>
+            </a:extLst>
+          </p:cNvPr>
+          <p:cNvSpPr txBox="1"/>
+          <p:nvPr/>
+        </p:nvSpPr>
+        <p:spPr>
+          <a:xfrm>
+            <a:off x="10407002" y="6088528"/>
+            <a:ext cx="946798" cy="369332"/>
+          </a:xfrm>
+          <a:prstGeom prst="rect">
+            <a:avLst/>
+          </a:prstGeom>
+          <a:noFill/>
+        </p:spPr>
+        <p:txBody>
+          <a:bodyPr wrap="none" rtlCol="0">
+            <a:spAutoFit/>
+          </a:bodyPr>
+          <a:lstStyle/>
+          <a:p>
+            <a:r>
+              <a:rPr lang="en-US" dirty="0"/>
+              <a:t>Fonte: </a:t>
+            </a:r>
+            <a:r>
+              <a:rPr lang="en-US" baseline="30000" dirty="0"/>
+              <a:t>3</a:t>
+            </a:r>
+            <a:endParaRPr lang="pt-BR" baseline="30000" dirty="0"/>
+          </a:p>
+        </p:txBody>
+      </p:sp>
+      <p:sp>
+        <p:nvSpPr>
+          <p:cNvPr id="9" name="CaixaDeTexto 8">
+            <a:extLst>
+              <a:ext uri="{FF2B5EF4-FFF2-40B4-BE49-F238E27FC236}">
+                <a16:creationId xmlns:a16="http://schemas.microsoft.com/office/drawing/2014/main" id="{CE086E10-9D90-677D-737D-13C0E54CDC3B}"/>
+              </a:ext>
+            </a:extLst>
+          </p:cNvPr>
+          <p:cNvSpPr txBox="1"/>
+          <p:nvPr/>
+        </p:nvSpPr>
+        <p:spPr>
+          <a:xfrm>
+            <a:off x="10256644" y="4556140"/>
+            <a:ext cx="946798" cy="369332"/>
+          </a:xfrm>
+          <a:prstGeom prst="rect">
+            <a:avLst/>
+          </a:prstGeom>
+          <a:noFill/>
+        </p:spPr>
+        <p:txBody>
+          <a:bodyPr wrap="none" rtlCol="0">
+            <a:spAutoFit/>
+          </a:bodyPr>
+          <a:lstStyle/>
+          <a:p>
+            <a:r>
+              <a:rPr lang="en-US" dirty="0"/>
+              <a:t>Fonte: </a:t>
+            </a:r>
+            <a:r>
+              <a:rPr lang="en-US" baseline="30000" dirty="0"/>
+              <a:t>2</a:t>
+            </a:r>
+            <a:endParaRPr lang="pt-BR" baseline="30000" dirty="0"/>
           </a:p>
         </p:txBody>
       </p:sp>
@@ -25813,7 +26456,7 @@
         <p:spPr>
           <a:xfrm>
             <a:off x="7787376" y="1852332"/>
-            <a:ext cx="4389647" cy="830997"/>
+            <a:ext cx="4389647" cy="1200329"/>
           </a:xfrm>
           <a:prstGeom prst="rect">
             <a:avLst/>
@@ -25843,6 +26486,12 @@
             <a:r>
               <a:rPr lang="en-US" sz="2400" b="1" dirty="0"/>
               <a:t> -c 0 frequency-info</a:t>
+            </a:r>
+          </a:p>
+          <a:p>
+            <a:r>
+              <a:rPr lang="en-US" sz="2400" b="1" dirty="0"/>
+              <a:t>(CPU 0 : p-core)</a:t>
             </a:r>
             <a:endParaRPr lang="pt-BR" sz="2400" b="1" dirty="0"/>
           </a:p>
@@ -26176,7 +26825,7 @@
         <p:spPr>
           <a:xfrm>
             <a:off x="7787376" y="1852332"/>
-            <a:ext cx="4389647" cy="830997"/>
+            <a:ext cx="4389647" cy="1200329"/>
           </a:xfrm>
           <a:prstGeom prst="rect">
             <a:avLst/>
@@ -26205,7 +26854,13 @@
             </a:r>
             <a:r>
               <a:rPr lang="en-US" sz="2400" b="1" dirty="0"/>
-              <a:t> -c 0 frequency-info</a:t>
+              <a:t> -c 16 frequency-info</a:t>
+            </a:r>
+          </a:p>
+          <a:p>
+            <a:r>
+              <a:rPr lang="en-US" sz="2400" b="1" dirty="0"/>
+              <a:t>(CPU 16 : e-core)</a:t>
             </a:r>
             <a:endParaRPr lang="pt-BR" sz="2400" b="1" dirty="0"/>
           </a:p>
